--- a/Materials/Slides/draft_slides_w5.pptx
+++ b/Materials/Slides/draft_slides_w5.pptx
@@ -139,2090 +139,23 @@
 </p:presentation>
 </file>
 
-<file path=ppt/revisionInfo.xml><?xml version="1.0" encoding="utf-8"?>
-<p1510:revInfo xmlns:a="http://schemas.openxmlformats.org/drawingml/2006/main" xmlns:r="http://schemas.openxmlformats.org/officeDocument/2006/relationships" xmlns:p1510="http://schemas.microsoft.com/office/powerpoint/2015/10/main">
-  <p1510:revLst>
-    <p1510:client id="{1EFC5699-93E3-49C7-AE41-F6C8E20EB04E}" v="37" dt="2024-10-29T10:49:46.207"/>
-  </p1510:revLst>
-</p1510:revInfo>
-</file>
-
 <file path=ppt/changesInfos/changesInfo1.xml><?xml version="1.0" encoding="utf-8"?>
 <pc:chgInfo xmlns:a="http://schemas.openxmlformats.org/drawingml/2006/main" xmlns:r="http://schemas.openxmlformats.org/officeDocument/2006/relationships" xmlns:ac="http://schemas.microsoft.com/office/drawing/2013/main/command" xmlns:pc="http://schemas.microsoft.com/office/powerpoint/2013/main/command">
   <pc:docChgLst>
-    <pc:chgData name="Chris Moreh" userId="17b81281-9f29-44e0-9273-6dadbf6896a2" providerId="ADAL" clId="{D46324F9-60BE-4D8E-915B-0E63D65B4BC1}"/>
-    <pc:docChg chg="undo custSel addSld delSld modSld sldOrd modMainMaster">
-      <pc:chgData name="Chris Moreh" userId="17b81281-9f29-44e0-9273-6dadbf6896a2" providerId="ADAL" clId="{D46324F9-60BE-4D8E-915B-0E63D65B4BC1}" dt="2024-10-15T10:01:24.854" v="1540" actId="14100"/>
+    <pc:chgData name="Chris Moreh" userId="17b81281-9f29-44e0-9273-6dadbf6896a2" providerId="ADAL" clId="{BCF66164-2C9C-4B48-AFF3-6B0B0038345A}"/>
+    <pc:docChg chg="modSld">
+      <pc:chgData name="Chris Moreh" userId="17b81281-9f29-44e0-9273-6dadbf6896a2" providerId="ADAL" clId="{BCF66164-2C9C-4B48-AFF3-6B0B0038345A}" dt="2025-12-05T14:58:21.277" v="8" actId="6549"/>
       <pc:docMkLst>
         <pc:docMk/>
       </pc:docMkLst>
-      <pc:sldChg chg="delSp modAnim">
-        <pc:chgData name="Chris Moreh" userId="17b81281-9f29-44e0-9273-6dadbf6896a2" providerId="ADAL" clId="{D46324F9-60BE-4D8E-915B-0E63D65B4BC1}" dt="2024-10-15T02:28:29.051" v="18" actId="478"/>
-        <pc:sldMkLst>
-          <pc:docMk/>
-          <pc:sldMk cId="1670613332" sldId="256"/>
-        </pc:sldMkLst>
-        <pc:picChg chg="del">
-          <ac:chgData name="Chris Moreh" userId="17b81281-9f29-44e0-9273-6dadbf6896a2" providerId="ADAL" clId="{D46324F9-60BE-4D8E-915B-0E63D65B4BC1}" dt="2024-10-15T02:28:29.051" v="18" actId="478"/>
-          <ac:picMkLst>
-            <pc:docMk/>
-            <pc:sldMk cId="1670613332" sldId="256"/>
-            <ac:picMk id="5" creationId="{8280CFAB-64B1-8AAB-08BA-B417B972F997}"/>
-          </ac:picMkLst>
-        </pc:picChg>
-      </pc:sldChg>
-      <pc:sldChg chg="del">
-        <pc:chgData name="Chris Moreh" userId="17b81281-9f29-44e0-9273-6dadbf6896a2" providerId="ADAL" clId="{D46324F9-60BE-4D8E-915B-0E63D65B4BC1}" dt="2024-10-15T09:53:31.482" v="1484" actId="47"/>
-        <pc:sldMkLst>
-          <pc:docMk/>
-          <pc:sldMk cId="0" sldId="267"/>
-        </pc:sldMkLst>
-      </pc:sldChg>
-      <pc:sldChg chg="del">
-        <pc:chgData name="Chris Moreh" userId="17b81281-9f29-44e0-9273-6dadbf6896a2" providerId="ADAL" clId="{D46324F9-60BE-4D8E-915B-0E63D65B4BC1}" dt="2024-10-15T09:53:32.795" v="1485" actId="47"/>
-        <pc:sldMkLst>
-          <pc:docMk/>
-          <pc:sldMk cId="0" sldId="268"/>
-        </pc:sldMkLst>
-      </pc:sldChg>
-      <pc:sldChg chg="del">
-        <pc:chgData name="Chris Moreh" userId="17b81281-9f29-44e0-9273-6dadbf6896a2" providerId="ADAL" clId="{D46324F9-60BE-4D8E-915B-0E63D65B4BC1}" dt="2024-10-15T09:53:33.795" v="1486" actId="47"/>
-        <pc:sldMkLst>
-          <pc:docMk/>
-          <pc:sldMk cId="0" sldId="269"/>
-        </pc:sldMkLst>
-      </pc:sldChg>
-      <pc:sldChg chg="del">
-        <pc:chgData name="Chris Moreh" userId="17b81281-9f29-44e0-9273-6dadbf6896a2" providerId="ADAL" clId="{D46324F9-60BE-4D8E-915B-0E63D65B4BC1}" dt="2024-10-15T09:53:34.811" v="1487" actId="47"/>
-        <pc:sldMkLst>
-          <pc:docMk/>
-          <pc:sldMk cId="0" sldId="270"/>
-        </pc:sldMkLst>
-      </pc:sldChg>
-      <pc:sldChg chg="del">
-        <pc:chgData name="Chris Moreh" userId="17b81281-9f29-44e0-9273-6dadbf6896a2" providerId="ADAL" clId="{D46324F9-60BE-4D8E-915B-0E63D65B4BC1}" dt="2024-10-15T09:53:36.312" v="1488" actId="47"/>
-        <pc:sldMkLst>
-          <pc:docMk/>
-          <pc:sldMk cId="0" sldId="272"/>
-        </pc:sldMkLst>
-      </pc:sldChg>
-      <pc:sldChg chg="del">
-        <pc:chgData name="Chris Moreh" userId="17b81281-9f29-44e0-9273-6dadbf6896a2" providerId="ADAL" clId="{D46324F9-60BE-4D8E-915B-0E63D65B4BC1}" dt="2024-10-15T09:53:37.954" v="1489" actId="47"/>
-        <pc:sldMkLst>
-          <pc:docMk/>
-          <pc:sldMk cId="0" sldId="273"/>
-        </pc:sldMkLst>
-      </pc:sldChg>
-      <pc:sldChg chg="del">
-        <pc:chgData name="Chris Moreh" userId="17b81281-9f29-44e0-9273-6dadbf6896a2" providerId="ADAL" clId="{D46324F9-60BE-4D8E-915B-0E63D65B4BC1}" dt="2024-10-15T02:33:26.141" v="45" actId="47"/>
-        <pc:sldMkLst>
-          <pc:docMk/>
-          <pc:sldMk cId="1836731351" sldId="289"/>
-        </pc:sldMkLst>
-      </pc:sldChg>
-      <pc:sldChg chg="delSp del mod">
-        <pc:chgData name="Chris Moreh" userId="17b81281-9f29-44e0-9273-6dadbf6896a2" providerId="ADAL" clId="{D46324F9-60BE-4D8E-915B-0E63D65B4BC1}" dt="2024-10-15T02:35:13.259" v="66" actId="47"/>
-        <pc:sldMkLst>
-          <pc:docMk/>
-          <pc:sldMk cId="2510649881" sldId="290"/>
-        </pc:sldMkLst>
-        <pc:picChg chg="del">
-          <ac:chgData name="Chris Moreh" userId="17b81281-9f29-44e0-9273-6dadbf6896a2" providerId="ADAL" clId="{D46324F9-60BE-4D8E-915B-0E63D65B4BC1}" dt="2024-10-15T02:33:42.384" v="47" actId="21"/>
-          <ac:picMkLst>
-            <pc:docMk/>
-            <pc:sldMk cId="2510649881" sldId="290"/>
-            <ac:picMk id="4" creationId="{BBC67004-7023-2934-B9CC-E419109BD817}"/>
-          </ac:picMkLst>
-        </pc:picChg>
-      </pc:sldChg>
-      <pc:sldChg chg="add modTransition">
-        <pc:chgData name="Chris Moreh" userId="17b81281-9f29-44e0-9273-6dadbf6896a2" providerId="ADAL" clId="{D46324F9-60BE-4D8E-915B-0E63D65B4BC1}" dt="2024-10-15T09:55:25.393" v="1506"/>
-        <pc:sldMkLst>
-          <pc:docMk/>
-          <pc:sldMk cId="2550670278" sldId="295"/>
-        </pc:sldMkLst>
-      </pc:sldChg>
-      <pc:sldChg chg="add modTransition">
-        <pc:chgData name="Chris Moreh" userId="17b81281-9f29-44e0-9273-6dadbf6896a2" providerId="ADAL" clId="{D46324F9-60BE-4D8E-915B-0E63D65B4BC1}" dt="2024-10-15T09:55:25.393" v="1506"/>
-        <pc:sldMkLst>
-          <pc:docMk/>
-          <pc:sldMk cId="2397369031" sldId="296"/>
-        </pc:sldMkLst>
-      </pc:sldChg>
-      <pc:sldChg chg="add modTransition">
-        <pc:chgData name="Chris Moreh" userId="17b81281-9f29-44e0-9273-6dadbf6896a2" providerId="ADAL" clId="{D46324F9-60BE-4D8E-915B-0E63D65B4BC1}" dt="2024-10-15T09:55:25.393" v="1506"/>
-        <pc:sldMkLst>
-          <pc:docMk/>
-          <pc:sldMk cId="782263443" sldId="297"/>
-        </pc:sldMkLst>
-      </pc:sldChg>
       <pc:sldChg chg="modSp mod">
-        <pc:chgData name="Chris Moreh" userId="17b81281-9f29-44e0-9273-6dadbf6896a2" providerId="ADAL" clId="{D46324F9-60BE-4D8E-915B-0E63D65B4BC1}" dt="2024-10-15T02:27:02.640" v="17"/>
-        <pc:sldMkLst>
-          <pc:docMk/>
-          <pc:sldMk cId="3814459198" sldId="307"/>
-        </pc:sldMkLst>
-        <pc:spChg chg="mod">
-          <ac:chgData name="Chris Moreh" userId="17b81281-9f29-44e0-9273-6dadbf6896a2" providerId="ADAL" clId="{D46324F9-60BE-4D8E-915B-0E63D65B4BC1}" dt="2024-10-15T02:26:33.037" v="13" actId="20577"/>
-          <ac:spMkLst>
-            <pc:docMk/>
-            <pc:sldMk cId="3814459198" sldId="307"/>
-            <ac:spMk id="6" creationId="{24060982-6EE3-A8F1-75FE-C4BDB2FF3CBE}"/>
-          </ac:spMkLst>
-        </pc:spChg>
-        <pc:spChg chg="mod">
-          <ac:chgData name="Chris Moreh" userId="17b81281-9f29-44e0-9273-6dadbf6896a2" providerId="ADAL" clId="{D46324F9-60BE-4D8E-915B-0E63D65B4BC1}" dt="2024-10-15T02:27:02.640" v="17"/>
-          <ac:spMkLst>
-            <pc:docMk/>
-            <pc:sldMk cId="3814459198" sldId="307"/>
-            <ac:spMk id="7" creationId="{E112B5B6-7C9E-9DE5-8D2C-13D42F1FBB68}"/>
-          </ac:spMkLst>
-        </pc:spChg>
-      </pc:sldChg>
-      <pc:sldChg chg="add modTransition">
-        <pc:chgData name="Chris Moreh" userId="17b81281-9f29-44e0-9273-6dadbf6896a2" providerId="ADAL" clId="{D46324F9-60BE-4D8E-915B-0E63D65B4BC1}" dt="2024-10-15T09:56:19.417" v="1507"/>
-        <pc:sldMkLst>
-          <pc:docMk/>
-          <pc:sldMk cId="1180492818" sldId="308"/>
-        </pc:sldMkLst>
-      </pc:sldChg>
-      <pc:sldChg chg="add modTransition">
-        <pc:chgData name="Chris Moreh" userId="17b81281-9f29-44e0-9273-6dadbf6896a2" providerId="ADAL" clId="{D46324F9-60BE-4D8E-915B-0E63D65B4BC1}" dt="2024-10-15T09:56:19.417" v="1507"/>
-        <pc:sldMkLst>
-          <pc:docMk/>
-          <pc:sldMk cId="583205345" sldId="309"/>
-        </pc:sldMkLst>
-      </pc:sldChg>
-      <pc:sldChg chg="addSp delSp modSp add mod modTransition modClrScheme chgLayout">
-        <pc:chgData name="Chris Moreh" userId="17b81281-9f29-44e0-9273-6dadbf6896a2" providerId="ADAL" clId="{D46324F9-60BE-4D8E-915B-0E63D65B4BC1}" dt="2024-10-15T09:54:53.706" v="1505" actId="1076"/>
-        <pc:sldMkLst>
-          <pc:docMk/>
-          <pc:sldMk cId="404413708" sldId="357"/>
-        </pc:sldMkLst>
-        <pc:spChg chg="mod ord">
-          <ac:chgData name="Chris Moreh" userId="17b81281-9f29-44e0-9273-6dadbf6896a2" providerId="ADAL" clId="{D46324F9-60BE-4D8E-915B-0E63D65B4BC1}" dt="2024-10-15T09:54:23.566" v="1494" actId="700"/>
-          <ac:spMkLst>
-            <pc:docMk/>
-            <pc:sldMk cId="404413708" sldId="357"/>
-            <ac:spMk id="2" creationId="{87E31FDA-E474-477F-89E4-2BE343EEA2AD}"/>
-          </ac:spMkLst>
-        </pc:spChg>
-        <pc:spChg chg="add mod ord">
-          <ac:chgData name="Chris Moreh" userId="17b81281-9f29-44e0-9273-6dadbf6896a2" providerId="ADAL" clId="{D46324F9-60BE-4D8E-915B-0E63D65B4BC1}" dt="2024-10-15T09:54:28.101" v="1497"/>
-          <ac:spMkLst>
-            <pc:docMk/>
-            <pc:sldMk cId="404413708" sldId="357"/>
-            <ac:spMk id="3" creationId="{0290FC48-83AB-43CE-58FF-FF45B8C80E18}"/>
-          </ac:spMkLst>
-        </pc:spChg>
-        <pc:spChg chg="add del mod ord">
-          <ac:chgData name="Chris Moreh" userId="17b81281-9f29-44e0-9273-6dadbf6896a2" providerId="ADAL" clId="{D46324F9-60BE-4D8E-915B-0E63D65B4BC1}" dt="2024-10-15T09:54:37.809" v="1499" actId="478"/>
-          <ac:spMkLst>
-            <pc:docMk/>
-            <pc:sldMk cId="404413708" sldId="357"/>
-            <ac:spMk id="4" creationId="{E3CBD0BD-F7F1-9BD7-EF7D-F1E1C009EE48}"/>
-          </ac:spMkLst>
-        </pc:spChg>
-        <pc:spChg chg="del mod ord">
-          <ac:chgData name="Chris Moreh" userId="17b81281-9f29-44e0-9273-6dadbf6896a2" providerId="ADAL" clId="{D46324F9-60BE-4D8E-915B-0E63D65B4BC1}" dt="2024-10-15T09:54:20.426" v="1493" actId="478"/>
-          <ac:spMkLst>
-            <pc:docMk/>
-            <pc:sldMk cId="404413708" sldId="357"/>
-            <ac:spMk id="7" creationId="{898441BA-3F2F-4EB0-BF85-2BEE6D4EDBD8}"/>
-          </ac:spMkLst>
-        </pc:spChg>
-        <pc:spChg chg="mod">
-          <ac:chgData name="Chris Moreh" userId="17b81281-9f29-44e0-9273-6dadbf6896a2" providerId="ADAL" clId="{D46324F9-60BE-4D8E-915B-0E63D65B4BC1}" dt="2024-10-15T09:54:53.706" v="1505" actId="1076"/>
-          <ac:spMkLst>
-            <pc:docMk/>
-            <pc:sldMk cId="404413708" sldId="357"/>
-            <ac:spMk id="9" creationId="{275B775F-EBFA-4604-A384-C3EC4252B96A}"/>
-          </ac:spMkLst>
-        </pc:spChg>
-      </pc:sldChg>
-      <pc:sldChg chg="del">
-        <pc:chgData name="Chris Moreh" userId="17b81281-9f29-44e0-9273-6dadbf6896a2" providerId="ADAL" clId="{D46324F9-60BE-4D8E-915B-0E63D65B4BC1}" dt="2024-10-15T03:18:08.170" v="150" actId="47"/>
-        <pc:sldMkLst>
-          <pc:docMk/>
-          <pc:sldMk cId="1974505271" sldId="376"/>
-        </pc:sldMkLst>
-      </pc:sldChg>
-      <pc:sldChg chg="delSp del mod">
-        <pc:chgData name="Chris Moreh" userId="17b81281-9f29-44e0-9273-6dadbf6896a2" providerId="ADAL" clId="{D46324F9-60BE-4D8E-915B-0E63D65B4BC1}" dt="2024-10-15T03:20:03.683" v="165" actId="47"/>
-        <pc:sldMkLst>
-          <pc:docMk/>
-          <pc:sldMk cId="3296848859" sldId="517"/>
-        </pc:sldMkLst>
-        <pc:picChg chg="del">
-          <ac:chgData name="Chris Moreh" userId="17b81281-9f29-44e0-9273-6dadbf6896a2" providerId="ADAL" clId="{D46324F9-60BE-4D8E-915B-0E63D65B4BC1}" dt="2024-10-15T03:18:23.525" v="153" actId="21"/>
-          <ac:picMkLst>
-            <pc:docMk/>
-            <pc:sldMk cId="3296848859" sldId="517"/>
-            <ac:picMk id="3" creationId="{E9EDBBEA-F163-4B2F-BC6D-0A2F6D1E6CAC}"/>
-          </ac:picMkLst>
-        </pc:picChg>
-      </pc:sldChg>
-      <pc:sldChg chg="modSp mod">
-        <pc:chgData name="Chris Moreh" userId="17b81281-9f29-44e0-9273-6dadbf6896a2" providerId="ADAL" clId="{D46324F9-60BE-4D8E-915B-0E63D65B4BC1}" dt="2024-10-15T05:24:38.244" v="900" actId="20577"/>
-        <pc:sldMkLst>
-          <pc:docMk/>
-          <pc:sldMk cId="3523596212" sldId="518"/>
-        </pc:sldMkLst>
-        <pc:spChg chg="mod">
-          <ac:chgData name="Chris Moreh" userId="17b81281-9f29-44e0-9273-6dadbf6896a2" providerId="ADAL" clId="{D46324F9-60BE-4D8E-915B-0E63D65B4BC1}" dt="2024-10-15T05:24:38.244" v="900" actId="20577"/>
-          <ac:spMkLst>
-            <pc:docMk/>
-            <pc:sldMk cId="3523596212" sldId="518"/>
-            <ac:spMk id="13" creationId="{2C10D394-C9B2-B03C-4136-7B6EEA8FFA9D}"/>
-          </ac:spMkLst>
-        </pc:spChg>
-      </pc:sldChg>
-      <pc:sldChg chg="addSp delSp modSp mod modTransition modAnim">
-        <pc:chgData name="Chris Moreh" userId="17b81281-9f29-44e0-9273-6dadbf6896a2" providerId="ADAL" clId="{D46324F9-60BE-4D8E-915B-0E63D65B4BC1}" dt="2024-10-15T05:30:57.235" v="962" actId="1037"/>
-        <pc:sldMkLst>
-          <pc:docMk/>
-          <pc:sldMk cId="1759930319" sldId="519"/>
-        </pc:sldMkLst>
-        <pc:spChg chg="del mod">
-          <ac:chgData name="Chris Moreh" userId="17b81281-9f29-44e0-9273-6dadbf6896a2" providerId="ADAL" clId="{D46324F9-60BE-4D8E-915B-0E63D65B4BC1}" dt="2024-10-15T03:57:35.782" v="459" actId="478"/>
-          <ac:spMkLst>
-            <pc:docMk/>
-            <pc:sldMk cId="1759930319" sldId="519"/>
-            <ac:spMk id="2" creationId="{4F0CFF98-671A-ED95-2076-9810F4107B7D}"/>
-          </ac:spMkLst>
-        </pc:spChg>
-        <pc:spChg chg="mod">
-          <ac:chgData name="Chris Moreh" userId="17b81281-9f29-44e0-9273-6dadbf6896a2" providerId="ADAL" clId="{D46324F9-60BE-4D8E-915B-0E63D65B4BC1}" dt="2024-10-15T03:59:12.025" v="470" actId="1076"/>
-          <ac:spMkLst>
-            <pc:docMk/>
-            <pc:sldMk cId="1759930319" sldId="519"/>
-            <ac:spMk id="4" creationId="{F10DEB46-1089-4DB0-9D46-DB261134DE74}"/>
-          </ac:spMkLst>
-        </pc:spChg>
-        <pc:spChg chg="mod">
-          <ac:chgData name="Chris Moreh" userId="17b81281-9f29-44e0-9273-6dadbf6896a2" providerId="ADAL" clId="{D46324F9-60BE-4D8E-915B-0E63D65B4BC1}" dt="2024-10-15T03:59:23.538" v="501" actId="1038"/>
-          <ac:spMkLst>
-            <pc:docMk/>
-            <pc:sldMk cId="1759930319" sldId="519"/>
-            <ac:spMk id="6" creationId="{E0C07184-B427-4031-86AE-735CAAAD0845}"/>
-          </ac:spMkLst>
-        </pc:spChg>
-        <pc:spChg chg="mod">
-          <ac:chgData name="Chris Moreh" userId="17b81281-9f29-44e0-9273-6dadbf6896a2" providerId="ADAL" clId="{D46324F9-60BE-4D8E-915B-0E63D65B4BC1}" dt="2024-10-15T03:56:45.281" v="445"/>
-          <ac:spMkLst>
-            <pc:docMk/>
-            <pc:sldMk cId="1759930319" sldId="519"/>
-            <ac:spMk id="7" creationId="{F9A07CA7-119F-4413-B039-CF91724F6351}"/>
-          </ac:spMkLst>
-        </pc:spChg>
-        <pc:spChg chg="add mod">
-          <ac:chgData name="Chris Moreh" userId="17b81281-9f29-44e0-9273-6dadbf6896a2" providerId="ADAL" clId="{D46324F9-60BE-4D8E-915B-0E63D65B4BC1}" dt="2024-10-15T04:03:10.369" v="585" actId="207"/>
-          <ac:spMkLst>
-            <pc:docMk/>
-            <pc:sldMk cId="1759930319" sldId="519"/>
-            <ac:spMk id="9" creationId="{0DEEB09C-0E34-595F-2277-11204DF220A0}"/>
-          </ac:spMkLst>
-        </pc:spChg>
-        <pc:spChg chg="add mod">
-          <ac:chgData name="Chris Moreh" userId="17b81281-9f29-44e0-9273-6dadbf6896a2" providerId="ADAL" clId="{D46324F9-60BE-4D8E-915B-0E63D65B4BC1}" dt="2024-10-15T04:03:18.698" v="588" actId="14100"/>
-          <ac:spMkLst>
-            <pc:docMk/>
-            <pc:sldMk cId="1759930319" sldId="519"/>
-            <ac:spMk id="10" creationId="{194A56A2-9E81-BE7B-DD95-5B04101C699C}"/>
-          </ac:spMkLst>
-        </pc:spChg>
-        <pc:spChg chg="del mod">
-          <ac:chgData name="Chris Moreh" userId="17b81281-9f29-44e0-9273-6dadbf6896a2" providerId="ADAL" clId="{D46324F9-60BE-4D8E-915B-0E63D65B4BC1}" dt="2024-10-15T03:59:02.916" v="469" actId="478"/>
-          <ac:spMkLst>
-            <pc:docMk/>
-            <pc:sldMk cId="1759930319" sldId="519"/>
-            <ac:spMk id="11" creationId="{A79F868A-630C-4299-8043-194F7E28FF37}"/>
-          </ac:spMkLst>
-        </pc:spChg>
-        <pc:spChg chg="del mod">
-          <ac:chgData name="Chris Moreh" userId="17b81281-9f29-44e0-9273-6dadbf6896a2" providerId="ADAL" clId="{D46324F9-60BE-4D8E-915B-0E63D65B4BC1}" dt="2024-10-15T03:59:01.116" v="468" actId="478"/>
-          <ac:spMkLst>
-            <pc:docMk/>
-            <pc:sldMk cId="1759930319" sldId="519"/>
-            <ac:spMk id="12" creationId="{EEE649C4-951B-4A6E-A063-61E0AB812998}"/>
-          </ac:spMkLst>
-        </pc:spChg>
-        <pc:picChg chg="mod">
-          <ac:chgData name="Chris Moreh" userId="17b81281-9f29-44e0-9273-6dadbf6896a2" providerId="ADAL" clId="{D46324F9-60BE-4D8E-915B-0E63D65B4BC1}" dt="2024-10-15T05:30:57.235" v="962" actId="1037"/>
-          <ac:picMkLst>
-            <pc:docMk/>
-            <pc:sldMk cId="1759930319" sldId="519"/>
-            <ac:picMk id="13" creationId="{B6669D02-D0C3-4EC8-8F3C-A5294E2B460D}"/>
-          </ac:picMkLst>
-        </pc:picChg>
-      </pc:sldChg>
-      <pc:sldChg chg="del">
-        <pc:chgData name="Chris Moreh" userId="17b81281-9f29-44e0-9273-6dadbf6896a2" providerId="ADAL" clId="{D46324F9-60BE-4D8E-915B-0E63D65B4BC1}" dt="2024-10-15T03:20:59.815" v="169" actId="47"/>
-        <pc:sldMkLst>
-          <pc:docMk/>
-          <pc:sldMk cId="274966957" sldId="520"/>
-        </pc:sldMkLst>
-      </pc:sldChg>
-      <pc:sldChg chg="del">
-        <pc:chgData name="Chris Moreh" userId="17b81281-9f29-44e0-9273-6dadbf6896a2" providerId="ADAL" clId="{D46324F9-60BE-4D8E-915B-0E63D65B4BC1}" dt="2024-10-15T03:18:13.631" v="151" actId="47"/>
-        <pc:sldMkLst>
-          <pc:docMk/>
-          <pc:sldMk cId="3931397907" sldId="521"/>
-        </pc:sldMkLst>
-      </pc:sldChg>
-      <pc:sldChg chg="addSp delSp modSp mod">
-        <pc:chgData name="Chris Moreh" userId="17b81281-9f29-44e0-9273-6dadbf6896a2" providerId="ADAL" clId="{D46324F9-60BE-4D8E-915B-0E63D65B4BC1}" dt="2024-10-15T05:26:34.217" v="914" actId="1076"/>
-        <pc:sldMkLst>
-          <pc:docMk/>
-          <pc:sldMk cId="3672351687" sldId="522"/>
-        </pc:sldMkLst>
-        <pc:spChg chg="mod">
-          <ac:chgData name="Chris Moreh" userId="17b81281-9f29-44e0-9273-6dadbf6896a2" providerId="ADAL" clId="{D46324F9-60BE-4D8E-915B-0E63D65B4BC1}" dt="2024-10-15T03:25:29.924" v="239"/>
-          <ac:spMkLst>
-            <pc:docMk/>
-            <pc:sldMk cId="3672351687" sldId="522"/>
-            <ac:spMk id="2" creationId="{1F19201D-2A10-AAC3-1006-C86286DC0339}"/>
-          </ac:spMkLst>
-        </pc:spChg>
-        <pc:spChg chg="mod">
-          <ac:chgData name="Chris Moreh" userId="17b81281-9f29-44e0-9273-6dadbf6896a2" providerId="ADAL" clId="{D46324F9-60BE-4D8E-915B-0E63D65B4BC1}" dt="2024-10-15T03:53:52.383" v="424" actId="1037"/>
-          <ac:spMkLst>
-            <pc:docMk/>
-            <pc:sldMk cId="3672351687" sldId="522"/>
-            <ac:spMk id="9" creationId="{4CFE870A-DE02-462E-B98D-FCDDFE3CE2F9}"/>
-          </ac:spMkLst>
-        </pc:spChg>
-        <pc:spChg chg="mod">
-          <ac:chgData name="Chris Moreh" userId="17b81281-9f29-44e0-9273-6dadbf6896a2" providerId="ADAL" clId="{D46324F9-60BE-4D8E-915B-0E63D65B4BC1}" dt="2024-10-15T03:54:11.193" v="425" actId="1076"/>
-          <ac:spMkLst>
-            <pc:docMk/>
-            <pc:sldMk cId="3672351687" sldId="522"/>
-            <ac:spMk id="10" creationId="{60BA844F-925A-482F-AEA6-A1C19BC2B721}"/>
-          </ac:spMkLst>
-        </pc:spChg>
-        <pc:spChg chg="mod">
-          <ac:chgData name="Chris Moreh" userId="17b81281-9f29-44e0-9273-6dadbf6896a2" providerId="ADAL" clId="{D46324F9-60BE-4D8E-915B-0E63D65B4BC1}" dt="2024-10-15T03:54:27.872" v="426" actId="1076"/>
-          <ac:spMkLst>
-            <pc:docMk/>
-            <pc:sldMk cId="3672351687" sldId="522"/>
-            <ac:spMk id="11" creationId="{CD3B7E98-6E18-4358-B76C-CC893A991317}"/>
-          </ac:spMkLst>
-        </pc:spChg>
-        <pc:spChg chg="add mod">
-          <ac:chgData name="Chris Moreh" userId="17b81281-9f29-44e0-9273-6dadbf6896a2" providerId="ADAL" clId="{D46324F9-60BE-4D8E-915B-0E63D65B4BC1}" dt="2024-10-15T05:26:34.217" v="914" actId="1076"/>
-          <ac:spMkLst>
-            <pc:docMk/>
-            <pc:sldMk cId="3672351687" sldId="522"/>
-            <ac:spMk id="12" creationId="{7E2F84F0-2F32-EE01-4F3E-56D7F4AA9517}"/>
-          </ac:spMkLst>
-        </pc:spChg>
-        <pc:picChg chg="mod">
-          <ac:chgData name="Chris Moreh" userId="17b81281-9f29-44e0-9273-6dadbf6896a2" providerId="ADAL" clId="{D46324F9-60BE-4D8E-915B-0E63D65B4BC1}" dt="2024-10-15T03:55:07.401" v="434" actId="1076"/>
-          <ac:picMkLst>
-            <pc:docMk/>
-            <pc:sldMk cId="3672351687" sldId="522"/>
-            <ac:picMk id="6" creationId="{82FD8197-AD3F-4E46-8396-3CB8693B1FF9}"/>
-          </ac:picMkLst>
-        </pc:picChg>
-        <pc:picChg chg="del mod modCrop">
-          <ac:chgData name="Chris Moreh" userId="17b81281-9f29-44e0-9273-6dadbf6896a2" providerId="ADAL" clId="{D46324F9-60BE-4D8E-915B-0E63D65B4BC1}" dt="2024-10-15T03:43:54.466" v="354" actId="478"/>
-          <ac:picMkLst>
-            <pc:docMk/>
-            <pc:sldMk cId="3672351687" sldId="522"/>
-            <ac:picMk id="7" creationId="{35092435-6B9D-42CE-9942-D45DCDFEFA8E}"/>
-          </ac:picMkLst>
-        </pc:picChg>
-        <pc:picChg chg="mod">
-          <ac:chgData name="Chris Moreh" userId="17b81281-9f29-44e0-9273-6dadbf6896a2" providerId="ADAL" clId="{D46324F9-60BE-4D8E-915B-0E63D65B4BC1}" dt="2024-10-15T03:55:23.408" v="441" actId="1076"/>
-          <ac:picMkLst>
-            <pc:docMk/>
-            <pc:sldMk cId="3672351687" sldId="522"/>
-            <ac:picMk id="8" creationId="{7898E259-4F4F-4490-8628-7C470BE519BE}"/>
-          </ac:picMkLst>
-        </pc:picChg>
-        <pc:picChg chg="add mod">
-          <ac:chgData name="Chris Moreh" userId="17b81281-9f29-44e0-9273-6dadbf6896a2" providerId="ADAL" clId="{D46324F9-60BE-4D8E-915B-0E63D65B4BC1}" dt="2024-10-15T03:55:37.345" v="442" actId="1076"/>
-          <ac:picMkLst>
-            <pc:docMk/>
-            <pc:sldMk cId="3672351687" sldId="522"/>
-            <ac:picMk id="14" creationId="{4FEF8034-4035-F991-8D4D-C4D51217EEFA}"/>
-          </ac:picMkLst>
-        </pc:picChg>
-        <pc:picChg chg="add mod">
-          <ac:chgData name="Chris Moreh" userId="17b81281-9f29-44e0-9273-6dadbf6896a2" providerId="ADAL" clId="{D46324F9-60BE-4D8E-915B-0E63D65B4BC1}" dt="2024-10-15T03:55:39.570" v="443" actId="1076"/>
-          <ac:picMkLst>
-            <pc:docMk/>
-            <pc:sldMk cId="3672351687" sldId="522"/>
-            <ac:picMk id="2050" creationId="{C997E3A0-D222-5B2F-26C5-CFE3945CE3DF}"/>
-          </ac:picMkLst>
-        </pc:picChg>
-        <pc:picChg chg="add del mod">
-          <ac:chgData name="Chris Moreh" userId="17b81281-9f29-44e0-9273-6dadbf6896a2" providerId="ADAL" clId="{D46324F9-60BE-4D8E-915B-0E63D65B4BC1}" dt="2024-10-15T03:41:48.052" v="344" actId="478"/>
-          <ac:picMkLst>
-            <pc:docMk/>
-            <pc:sldMk cId="3672351687" sldId="522"/>
-            <ac:picMk id="2052" creationId="{41A9963F-C134-A3A8-9AC8-53D1927338A2}"/>
-          </ac:picMkLst>
-        </pc:picChg>
-        <pc:picChg chg="add del mod">
-          <ac:chgData name="Chris Moreh" userId="17b81281-9f29-44e0-9273-6dadbf6896a2" providerId="ADAL" clId="{D46324F9-60BE-4D8E-915B-0E63D65B4BC1}" dt="2024-10-15T03:47:16.682" v="371" actId="478"/>
-          <ac:picMkLst>
-            <pc:docMk/>
-            <pc:sldMk cId="3672351687" sldId="522"/>
-            <ac:picMk id="2054" creationId="{DB52E289-0D13-1DBD-A335-01518842A914}"/>
-          </ac:picMkLst>
-        </pc:picChg>
-        <pc:picChg chg="add del mod">
-          <ac:chgData name="Chris Moreh" userId="17b81281-9f29-44e0-9273-6dadbf6896a2" providerId="ADAL" clId="{D46324F9-60BE-4D8E-915B-0E63D65B4BC1}" dt="2024-10-15T03:49:49.554" v="374" actId="478"/>
-          <ac:picMkLst>
-            <pc:docMk/>
-            <pc:sldMk cId="3672351687" sldId="522"/>
-            <ac:picMk id="2056" creationId="{0587A8B1-13E5-F154-9B57-8F31F862C7AE}"/>
-          </ac:picMkLst>
-        </pc:picChg>
-        <pc:picChg chg="add del">
-          <ac:chgData name="Chris Moreh" userId="17b81281-9f29-44e0-9273-6dadbf6896a2" providerId="ADAL" clId="{D46324F9-60BE-4D8E-915B-0E63D65B4BC1}" dt="2024-10-15T03:52:15.110" v="376" actId="478"/>
-          <ac:picMkLst>
-            <pc:docMk/>
-            <pc:sldMk cId="3672351687" sldId="522"/>
-            <ac:picMk id="2058" creationId="{7283C37B-044B-4FA9-2199-2801E0E0F28A}"/>
-          </ac:picMkLst>
-        </pc:picChg>
-      </pc:sldChg>
-      <pc:sldChg chg="ord">
-        <pc:chgData name="Chris Moreh" userId="17b81281-9f29-44e0-9273-6dadbf6896a2" providerId="ADAL" clId="{D46324F9-60BE-4D8E-915B-0E63D65B4BC1}" dt="2024-10-15T09:49:26.343" v="1278"/>
-        <pc:sldMkLst>
-          <pc:docMk/>
-          <pc:sldMk cId="1301853266" sldId="523"/>
-        </pc:sldMkLst>
-      </pc:sldChg>
-      <pc:sldChg chg="del">
-        <pc:chgData name="Chris Moreh" userId="17b81281-9f29-44e0-9273-6dadbf6896a2" providerId="ADAL" clId="{D46324F9-60BE-4D8E-915B-0E63D65B4BC1}" dt="2024-10-15T03:20:05.969" v="166" actId="47"/>
-        <pc:sldMkLst>
-          <pc:docMk/>
-          <pc:sldMk cId="3520677906" sldId="525"/>
-        </pc:sldMkLst>
-      </pc:sldChg>
-      <pc:sldChg chg="delSp del mod">
-        <pc:chgData name="Chris Moreh" userId="17b81281-9f29-44e0-9273-6dadbf6896a2" providerId="ADAL" clId="{D46324F9-60BE-4D8E-915B-0E63D65B4BC1}" dt="2024-10-15T03:20:41.277" v="168" actId="47"/>
-        <pc:sldMkLst>
-          <pc:docMk/>
-          <pc:sldMk cId="625175555" sldId="527"/>
-        </pc:sldMkLst>
-        <pc:picChg chg="del">
-          <ac:chgData name="Chris Moreh" userId="17b81281-9f29-44e0-9273-6dadbf6896a2" providerId="ADAL" clId="{D46324F9-60BE-4D8E-915B-0E63D65B4BC1}" dt="2024-10-15T03:18:35.054" v="156" actId="21"/>
-          <ac:picMkLst>
-            <pc:docMk/>
-            <pc:sldMk cId="625175555" sldId="527"/>
-            <ac:picMk id="2" creationId="{8BD80079-BE6D-A064-0234-5B999E2D651E}"/>
-          </ac:picMkLst>
-        </pc:picChg>
-      </pc:sldChg>
-      <pc:sldChg chg="del">
-        <pc:chgData name="Chris Moreh" userId="17b81281-9f29-44e0-9273-6dadbf6896a2" providerId="ADAL" clId="{D46324F9-60BE-4D8E-915B-0E63D65B4BC1}" dt="2024-10-15T03:20:39.504" v="167" actId="47"/>
-        <pc:sldMkLst>
-          <pc:docMk/>
-          <pc:sldMk cId="2410549944" sldId="528"/>
-        </pc:sldMkLst>
-      </pc:sldChg>
-      <pc:sldChg chg="del">
-        <pc:chgData name="Chris Moreh" userId="17b81281-9f29-44e0-9273-6dadbf6896a2" providerId="ADAL" clId="{D46324F9-60BE-4D8E-915B-0E63D65B4BC1}" dt="2024-10-15T03:21:01.620" v="170" actId="47"/>
-        <pc:sldMkLst>
-          <pc:docMk/>
-          <pc:sldMk cId="3011893373" sldId="529"/>
-        </pc:sldMkLst>
-      </pc:sldChg>
-      <pc:sldChg chg="addSp delSp modSp mod delAnim">
-        <pc:chgData name="Chris Moreh" userId="17b81281-9f29-44e0-9273-6dadbf6896a2" providerId="ADAL" clId="{D46324F9-60BE-4D8E-915B-0E63D65B4BC1}" dt="2024-10-15T02:47:14.081" v="120" actId="1076"/>
-        <pc:sldMkLst>
-          <pc:docMk/>
-          <pc:sldMk cId="0" sldId="530"/>
-        </pc:sldMkLst>
-        <pc:spChg chg="mod">
-          <ac:chgData name="Chris Moreh" userId="17b81281-9f29-44e0-9273-6dadbf6896a2" providerId="ADAL" clId="{D46324F9-60BE-4D8E-915B-0E63D65B4BC1}" dt="2024-10-15T02:33:59.575" v="54" actId="114"/>
-          <ac:spMkLst>
-            <pc:docMk/>
-            <pc:sldMk cId="0" sldId="530"/>
-            <ac:spMk id="2" creationId="{00000000-0000-0000-0000-000000000000}"/>
-          </ac:spMkLst>
-        </pc:spChg>
-        <pc:picChg chg="del">
-          <ac:chgData name="Chris Moreh" userId="17b81281-9f29-44e0-9273-6dadbf6896a2" providerId="ADAL" clId="{D46324F9-60BE-4D8E-915B-0E63D65B4BC1}" dt="2024-10-15T02:33:37.723" v="46" actId="478"/>
-          <ac:picMkLst>
-            <pc:docMk/>
-            <pc:sldMk cId="0" sldId="530"/>
-            <ac:picMk id="4" creationId="{EBC206A0-F9E8-E772-3BA8-FFF14852643B}"/>
-          </ac:picMkLst>
-        </pc:picChg>
-        <pc:picChg chg="add mod">
-          <ac:chgData name="Chris Moreh" userId="17b81281-9f29-44e0-9273-6dadbf6896a2" providerId="ADAL" clId="{D46324F9-60BE-4D8E-915B-0E63D65B4BC1}" dt="2024-10-15T02:34:37.378" v="61" actId="1076"/>
-          <ac:picMkLst>
-            <pc:docMk/>
-            <pc:sldMk cId="0" sldId="530"/>
-            <ac:picMk id="7" creationId="{BBC67004-7023-2934-B9CC-E419109BD817}"/>
-          </ac:picMkLst>
-        </pc:picChg>
-        <pc:picChg chg="mod">
-          <ac:chgData name="Chris Moreh" userId="17b81281-9f29-44e0-9273-6dadbf6896a2" providerId="ADAL" clId="{D46324F9-60BE-4D8E-915B-0E63D65B4BC1}" dt="2024-10-15T02:47:14.081" v="120" actId="1076"/>
-          <ac:picMkLst>
-            <pc:docMk/>
-            <pc:sldMk cId="0" sldId="530"/>
-            <ac:picMk id="1026" creationId="{A76EC4F5-D491-B613-8EA8-7A7CE063F574}"/>
-          </ac:picMkLst>
-        </pc:picChg>
-      </pc:sldChg>
-      <pc:sldChg chg="del">
-        <pc:chgData name="Chris Moreh" userId="17b81281-9f29-44e0-9273-6dadbf6896a2" providerId="ADAL" clId="{D46324F9-60BE-4D8E-915B-0E63D65B4BC1}" dt="2024-10-15T02:35:34.144" v="67" actId="47"/>
-        <pc:sldMkLst>
-          <pc:docMk/>
-          <pc:sldMk cId="1632811419" sldId="532"/>
-        </pc:sldMkLst>
-      </pc:sldChg>
-      <pc:sldChg chg="modSp del">
-        <pc:chgData name="Chris Moreh" userId="17b81281-9f29-44e0-9273-6dadbf6896a2" providerId="ADAL" clId="{D46324F9-60BE-4D8E-915B-0E63D65B4BC1}" dt="2024-10-15T02:47:20.858" v="121" actId="47"/>
-        <pc:sldMkLst>
-          <pc:docMk/>
-          <pc:sldMk cId="4111163125" sldId="533"/>
-        </pc:sldMkLst>
-        <pc:picChg chg="mod">
-          <ac:chgData name="Chris Moreh" userId="17b81281-9f29-44e0-9273-6dadbf6896a2" providerId="ADAL" clId="{D46324F9-60BE-4D8E-915B-0E63D65B4BC1}" dt="2024-10-15T02:45:15.603" v="103" actId="14100"/>
-          <ac:picMkLst>
-            <pc:docMk/>
-            <pc:sldMk cId="4111163125" sldId="533"/>
-            <ac:picMk id="2053" creationId="{C1B84274-D26E-E237-668F-6891FDB12083}"/>
-          </ac:picMkLst>
-        </pc:picChg>
-      </pc:sldChg>
-      <pc:sldChg chg="addSp delSp modSp del mod">
-        <pc:chgData name="Chris Moreh" userId="17b81281-9f29-44e0-9273-6dadbf6896a2" providerId="ADAL" clId="{D46324F9-60BE-4D8E-915B-0E63D65B4BC1}" dt="2024-10-15T02:46:52.160" v="116" actId="47"/>
-        <pc:sldMkLst>
-          <pc:docMk/>
-          <pc:sldMk cId="2695840908" sldId="537"/>
-        </pc:sldMkLst>
-        <pc:spChg chg="mod">
-          <ac:chgData name="Chris Moreh" userId="17b81281-9f29-44e0-9273-6dadbf6896a2" providerId="ADAL" clId="{D46324F9-60BE-4D8E-915B-0E63D65B4BC1}" dt="2024-10-15T02:35:41.413" v="70" actId="114"/>
-          <ac:spMkLst>
-            <pc:docMk/>
-            <pc:sldMk cId="2695840908" sldId="537"/>
-            <ac:spMk id="2" creationId="{00000000-0000-0000-0000-000000000000}"/>
-          </ac:spMkLst>
-        </pc:spChg>
-        <pc:graphicFrameChg chg="mod modGraphic">
-          <ac:chgData name="Chris Moreh" userId="17b81281-9f29-44e0-9273-6dadbf6896a2" providerId="ADAL" clId="{D46324F9-60BE-4D8E-915B-0E63D65B4BC1}" dt="2024-10-15T02:43:47.881" v="100" actId="1076"/>
-          <ac:graphicFrameMkLst>
-            <pc:docMk/>
-            <pc:sldMk cId="2695840908" sldId="537"/>
-            <ac:graphicFrameMk id="3" creationId="{A0C14315-CCEC-5435-D7AF-9C6F17DEDE08}"/>
-          </ac:graphicFrameMkLst>
-        </pc:graphicFrameChg>
-        <pc:picChg chg="add del mod">
-          <ac:chgData name="Chris Moreh" userId="17b81281-9f29-44e0-9273-6dadbf6896a2" providerId="ADAL" clId="{D46324F9-60BE-4D8E-915B-0E63D65B4BC1}" dt="2024-10-15T02:42:18.125" v="95" actId="478"/>
-          <ac:picMkLst>
-            <pc:docMk/>
-            <pc:sldMk cId="2695840908" sldId="537"/>
-            <ac:picMk id="8" creationId="{88EB85F8-C9FF-5878-31E4-CC47BB84C7C1}"/>
-          </ac:picMkLst>
-        </pc:picChg>
-        <pc:picChg chg="add mod">
-          <ac:chgData name="Chris Moreh" userId="17b81281-9f29-44e0-9273-6dadbf6896a2" providerId="ADAL" clId="{D46324F9-60BE-4D8E-915B-0E63D65B4BC1}" dt="2024-10-15T02:43:41.409" v="99" actId="1076"/>
-          <ac:picMkLst>
-            <pc:docMk/>
-            <pc:sldMk cId="2695840908" sldId="537"/>
-            <ac:picMk id="10" creationId="{16BC037A-EC9D-638F-2B58-8BB1B7BEC405}"/>
-          </ac:picMkLst>
-        </pc:picChg>
-      </pc:sldChg>
-      <pc:sldChg chg="del">
-        <pc:chgData name="Chris Moreh" userId="17b81281-9f29-44e0-9273-6dadbf6896a2" providerId="ADAL" clId="{D46324F9-60BE-4D8E-915B-0E63D65B4BC1}" dt="2024-10-15T02:47:22.258" v="122" actId="47"/>
-        <pc:sldMkLst>
-          <pc:docMk/>
-          <pc:sldMk cId="1063760435" sldId="538"/>
-        </pc:sldMkLst>
-      </pc:sldChg>
-      <pc:sldChg chg="addSp delSp modSp new del mod">
-        <pc:chgData name="Chris Moreh" userId="17b81281-9f29-44e0-9273-6dadbf6896a2" providerId="ADAL" clId="{D46324F9-60BE-4D8E-915B-0E63D65B4BC1}" dt="2024-10-15T10:00:03.903" v="1535" actId="47"/>
-        <pc:sldMkLst>
-          <pc:docMk/>
-          <pc:sldMk cId="2858937236" sldId="539"/>
-        </pc:sldMkLst>
-        <pc:spChg chg="del">
-          <ac:chgData name="Chris Moreh" userId="17b81281-9f29-44e0-9273-6dadbf6896a2" providerId="ADAL" clId="{D46324F9-60BE-4D8E-915B-0E63D65B4BC1}" dt="2024-10-15T01:51:25.089" v="1" actId="478"/>
-          <ac:spMkLst>
-            <pc:docMk/>
-            <pc:sldMk cId="2858937236" sldId="539"/>
-            <ac:spMk id="3" creationId="{B7888E29-C84E-4FD0-579C-A28487A8170D}"/>
-          </ac:spMkLst>
-        </pc:spChg>
-        <pc:picChg chg="add del mod">
-          <ac:chgData name="Chris Moreh" userId="17b81281-9f29-44e0-9273-6dadbf6896a2" providerId="ADAL" clId="{D46324F9-60BE-4D8E-915B-0E63D65B4BC1}" dt="2024-10-15T01:51:40.607" v="7" actId="478"/>
-          <ac:picMkLst>
-            <pc:docMk/>
-            <pc:sldMk cId="2858937236" sldId="539"/>
-            <ac:picMk id="1026" creationId="{0ADB9798-BF8C-7ED0-844E-1CB4E1FAD019}"/>
-          </ac:picMkLst>
-        </pc:picChg>
-      </pc:sldChg>
-      <pc:sldChg chg="modSp new del mod">
-        <pc:chgData name="Chris Moreh" userId="17b81281-9f29-44e0-9273-6dadbf6896a2" providerId="ADAL" clId="{D46324F9-60BE-4D8E-915B-0E63D65B4BC1}" dt="2024-10-15T10:00:02.979" v="1534" actId="47"/>
-        <pc:sldMkLst>
-          <pc:docMk/>
-          <pc:sldMk cId="2742812163" sldId="540"/>
-        </pc:sldMkLst>
-        <pc:spChg chg="mod">
-          <ac:chgData name="Chris Moreh" userId="17b81281-9f29-44e0-9273-6dadbf6896a2" providerId="ADAL" clId="{D46324F9-60BE-4D8E-915B-0E63D65B4BC1}" dt="2024-10-15T02:26:15.369" v="11"/>
-          <ac:spMkLst>
-            <pc:docMk/>
-            <pc:sldMk cId="2742812163" sldId="540"/>
-            <ac:spMk id="3" creationId="{4E427075-3030-9252-FDBA-3653DE808E2D}"/>
-          </ac:spMkLst>
-        </pc:spChg>
-      </pc:sldChg>
-      <pc:sldChg chg="new del">
-        <pc:chgData name="Chris Moreh" userId="17b81281-9f29-44e0-9273-6dadbf6896a2" providerId="ADAL" clId="{D46324F9-60BE-4D8E-915B-0E63D65B4BC1}" dt="2024-10-15T09:49:38.347" v="1279" actId="47"/>
-        <pc:sldMkLst>
-          <pc:docMk/>
-          <pc:sldMk cId="2477813427" sldId="541"/>
-        </pc:sldMkLst>
-      </pc:sldChg>
-      <pc:sldChg chg="addSp delSp modSp add mod modTransition modAnim">
-        <pc:chgData name="Chris Moreh" userId="17b81281-9f29-44e0-9273-6dadbf6896a2" providerId="ADAL" clId="{D46324F9-60BE-4D8E-915B-0E63D65B4BC1}" dt="2024-10-15T06:28:03.930" v="1142"/>
-        <pc:sldMkLst>
-          <pc:docMk/>
-          <pc:sldMk cId="2121120123" sldId="542"/>
-        </pc:sldMkLst>
-        <pc:spChg chg="mod">
-          <ac:chgData name="Chris Moreh" userId="17b81281-9f29-44e0-9273-6dadbf6896a2" providerId="ADAL" clId="{D46324F9-60BE-4D8E-915B-0E63D65B4BC1}" dt="2024-10-15T04:43:53.418" v="787" actId="5793"/>
-          <ac:spMkLst>
-            <pc:docMk/>
-            <pc:sldMk cId="2121120123" sldId="542"/>
-            <ac:spMk id="2" creationId="{00000000-0000-0000-0000-000000000000}"/>
-          </ac:spMkLst>
-        </pc:spChg>
-        <pc:spChg chg="add del mod">
-          <ac:chgData name="Chris Moreh" userId="17b81281-9f29-44e0-9273-6dadbf6896a2" providerId="ADAL" clId="{D46324F9-60BE-4D8E-915B-0E63D65B4BC1}" dt="2024-10-15T04:13:08.818" v="605" actId="478"/>
-          <ac:spMkLst>
-            <pc:docMk/>
-            <pc:sldMk cId="2121120123" sldId="542"/>
-            <ac:spMk id="9" creationId="{0D16B72F-9C7B-101E-EFAC-35C6451D2542}"/>
-          </ac:spMkLst>
-        </pc:spChg>
-        <pc:spChg chg="add">
-          <ac:chgData name="Chris Moreh" userId="17b81281-9f29-44e0-9273-6dadbf6896a2" providerId="ADAL" clId="{D46324F9-60BE-4D8E-915B-0E63D65B4BC1}" dt="2024-10-15T04:14:15.470" v="606"/>
-          <ac:spMkLst>
-            <pc:docMk/>
-            <pc:sldMk cId="2121120123" sldId="542"/>
-            <ac:spMk id="11" creationId="{56835F23-2193-5741-1BF4-248416B0AAC5}"/>
-          </ac:spMkLst>
-        </pc:spChg>
-        <pc:spChg chg="add mod">
-          <ac:chgData name="Chris Moreh" userId="17b81281-9f29-44e0-9273-6dadbf6896a2" providerId="ADAL" clId="{D46324F9-60BE-4D8E-915B-0E63D65B4BC1}" dt="2024-10-15T06:11:29.542" v="969" actId="1036"/>
-          <ac:spMkLst>
-            <pc:docMk/>
-            <pc:sldMk cId="2121120123" sldId="542"/>
-            <ac:spMk id="15" creationId="{EF742F91-07C1-3C8E-EF82-ACF2171BC440}"/>
-          </ac:spMkLst>
-        </pc:spChg>
-        <pc:spChg chg="add mod">
-          <ac:chgData name="Chris Moreh" userId="17b81281-9f29-44e0-9273-6dadbf6896a2" providerId="ADAL" clId="{D46324F9-60BE-4D8E-915B-0E63D65B4BC1}" dt="2024-10-15T06:25:52.778" v="1137" actId="207"/>
-          <ac:spMkLst>
-            <pc:docMk/>
-            <pc:sldMk cId="2121120123" sldId="542"/>
-            <ac:spMk id="16" creationId="{F9FA8AC8-311E-BFF9-EC3C-D3E6077CA660}"/>
-          </ac:spMkLst>
-        </pc:spChg>
-        <pc:graphicFrameChg chg="mod modGraphic">
-          <ac:chgData name="Chris Moreh" userId="17b81281-9f29-44e0-9273-6dadbf6896a2" providerId="ADAL" clId="{D46324F9-60BE-4D8E-915B-0E63D65B4BC1}" dt="2024-10-15T04:06:29.291" v="598" actId="113"/>
-          <ac:graphicFrameMkLst>
-            <pc:docMk/>
-            <pc:sldMk cId="2121120123" sldId="542"/>
-            <ac:graphicFrameMk id="3" creationId="{A0C14315-CCEC-5435-D7AF-9C6F17DEDE08}"/>
-          </ac:graphicFrameMkLst>
-        </pc:graphicFrameChg>
-        <pc:picChg chg="add del mod">
-          <ac:chgData name="Chris Moreh" userId="17b81281-9f29-44e0-9273-6dadbf6896a2" providerId="ADAL" clId="{D46324F9-60BE-4D8E-915B-0E63D65B4BC1}" dt="2024-10-15T06:27:55.265" v="1139" actId="478"/>
-          <ac:picMkLst>
-            <pc:docMk/>
-            <pc:sldMk cId="2121120123" sldId="542"/>
-            <ac:picMk id="7" creationId="{4116D9C6-0FA6-1FC5-3BC7-81692DB33B51}"/>
-          </ac:picMkLst>
-        </pc:picChg>
-        <pc:picChg chg="add del mod">
-          <ac:chgData name="Chris Moreh" userId="17b81281-9f29-44e0-9273-6dadbf6896a2" providerId="ADAL" clId="{D46324F9-60BE-4D8E-915B-0E63D65B4BC1}" dt="2024-10-15T06:27:55.265" v="1139" actId="478"/>
-          <ac:picMkLst>
-            <pc:docMk/>
-            <pc:sldMk cId="2121120123" sldId="542"/>
-            <ac:picMk id="8" creationId="{6B12A47D-FB73-5123-18E4-CBD2675396F3}"/>
-          </ac:picMkLst>
-        </pc:picChg>
-        <pc:picChg chg="del">
-          <ac:chgData name="Chris Moreh" userId="17b81281-9f29-44e0-9273-6dadbf6896a2" providerId="ADAL" clId="{D46324F9-60BE-4D8E-915B-0E63D65B4BC1}" dt="2024-10-15T04:13:07.120" v="604" actId="478"/>
-          <ac:picMkLst>
-            <pc:docMk/>
-            <pc:sldMk cId="2121120123" sldId="542"/>
-            <ac:picMk id="10" creationId="{16BC037A-EC9D-638F-2B58-8BB1B7BEC405}"/>
-          </ac:picMkLst>
-        </pc:picChg>
-        <pc:picChg chg="add mod modCrop">
-          <ac:chgData name="Chris Moreh" userId="17b81281-9f29-44e0-9273-6dadbf6896a2" providerId="ADAL" clId="{D46324F9-60BE-4D8E-915B-0E63D65B4BC1}" dt="2024-10-15T06:23:51.536" v="1084" actId="14100"/>
-          <ac:picMkLst>
-            <pc:docMk/>
-            <pc:sldMk cId="2121120123" sldId="542"/>
-            <ac:picMk id="12" creationId="{20787F33-4CD8-DBAD-424F-53CB7F065CE4}"/>
-          </ac:picMkLst>
-        </pc:picChg>
-        <pc:picChg chg="add mod">
-          <ac:chgData name="Chris Moreh" userId="17b81281-9f29-44e0-9273-6dadbf6896a2" providerId="ADAL" clId="{D46324F9-60BE-4D8E-915B-0E63D65B4BC1}" dt="2024-10-15T06:27:55.999" v="1140"/>
-          <ac:picMkLst>
-            <pc:docMk/>
-            <pc:sldMk cId="2121120123" sldId="542"/>
-            <ac:picMk id="19" creationId="{763B8D0C-53B5-E4B9-CF7A-A51451BA2EF9}"/>
-          </ac:picMkLst>
-        </pc:picChg>
-        <pc:picChg chg="add mod">
-          <ac:chgData name="Chris Moreh" userId="17b81281-9f29-44e0-9273-6dadbf6896a2" providerId="ADAL" clId="{D46324F9-60BE-4D8E-915B-0E63D65B4BC1}" dt="2024-10-15T06:27:55.999" v="1140"/>
-          <ac:picMkLst>
-            <pc:docMk/>
-            <pc:sldMk cId="2121120123" sldId="542"/>
-            <ac:picMk id="20" creationId="{46F8452B-698B-338D-F9BE-8178D091992C}"/>
-          </ac:picMkLst>
-        </pc:picChg>
-        <pc:picChg chg="add">
-          <ac:chgData name="Chris Moreh" userId="17b81281-9f29-44e0-9273-6dadbf6896a2" providerId="ADAL" clId="{D46324F9-60BE-4D8E-915B-0E63D65B4BC1}" dt="2024-10-15T04:14:15.470" v="606"/>
-          <ac:picMkLst>
-            <pc:docMk/>
-            <pc:sldMk cId="2121120123" sldId="542"/>
-            <ac:picMk id="3074" creationId="{E24E2D25-B33F-E5D9-996F-8C51E3FCEB9B}"/>
-          </ac:picMkLst>
-        </pc:picChg>
-        <pc:cxnChg chg="add del">
-          <ac:chgData name="Chris Moreh" userId="17b81281-9f29-44e0-9273-6dadbf6896a2" providerId="ADAL" clId="{D46324F9-60BE-4D8E-915B-0E63D65B4BC1}" dt="2024-10-15T04:42:43.643" v="764" actId="11529"/>
-          <ac:cxnSpMkLst>
-            <pc:docMk/>
-            <pc:sldMk cId="2121120123" sldId="542"/>
-            <ac:cxnSpMk id="14" creationId="{84D3A7CF-108B-C43C-5583-7D35B015C468}"/>
-          </ac:cxnSpMkLst>
-        </pc:cxnChg>
-        <pc:cxnChg chg="add mod">
-          <ac:chgData name="Chris Moreh" userId="17b81281-9f29-44e0-9273-6dadbf6896a2" providerId="ADAL" clId="{D46324F9-60BE-4D8E-915B-0E63D65B4BC1}" dt="2024-10-15T06:25:36.166" v="1136" actId="1038"/>
-          <ac:cxnSpMkLst>
-            <pc:docMk/>
-            <pc:sldMk cId="2121120123" sldId="542"/>
-            <ac:cxnSpMk id="18" creationId="{74C87DD1-690F-F813-BED2-229702FDF317}"/>
-          </ac:cxnSpMkLst>
-        </pc:cxnChg>
-      </pc:sldChg>
-      <pc:sldChg chg="addSp delSp modSp new mod">
-        <pc:chgData name="Chris Moreh" userId="17b81281-9f29-44e0-9273-6dadbf6896a2" providerId="ADAL" clId="{D46324F9-60BE-4D8E-915B-0E63D65B4BC1}" dt="2024-10-15T09:53:26.918" v="1481" actId="1076"/>
-        <pc:sldMkLst>
-          <pc:docMk/>
-          <pc:sldMk cId="2171080681" sldId="543"/>
-        </pc:sldMkLst>
-        <pc:spChg chg="del">
-          <ac:chgData name="Chris Moreh" userId="17b81281-9f29-44e0-9273-6dadbf6896a2" providerId="ADAL" clId="{D46324F9-60BE-4D8E-915B-0E63D65B4BC1}" dt="2024-10-15T09:53:18.708" v="1478" actId="478"/>
-          <ac:spMkLst>
-            <pc:docMk/>
-            <pc:sldMk cId="2171080681" sldId="543"/>
-            <ac:spMk id="2" creationId="{E13C97F5-3A49-680A-BDCD-F2CCF30CAE1E}"/>
-          </ac:spMkLst>
-        </pc:spChg>
-        <pc:picChg chg="add mod">
-          <ac:chgData name="Chris Moreh" userId="17b81281-9f29-44e0-9273-6dadbf6896a2" providerId="ADAL" clId="{D46324F9-60BE-4D8E-915B-0E63D65B4BC1}" dt="2024-10-15T09:53:26.918" v="1481" actId="1076"/>
-          <ac:picMkLst>
-            <pc:docMk/>
-            <pc:sldMk cId="2171080681" sldId="543"/>
-            <ac:picMk id="6" creationId="{63C43DD6-23DF-6BE5-7A41-B43D3F6A18EE}"/>
-          </ac:picMkLst>
-        </pc:picChg>
-      </pc:sldChg>
-      <pc:sldChg chg="addSp delSp modSp new mod modClrScheme chgLayout">
-        <pc:chgData name="Chris Moreh" userId="17b81281-9f29-44e0-9273-6dadbf6896a2" providerId="ADAL" clId="{D46324F9-60BE-4D8E-915B-0E63D65B4BC1}" dt="2024-10-15T09:52:18.271" v="1477" actId="5793"/>
-        <pc:sldMkLst>
-          <pc:docMk/>
-          <pc:sldMk cId="558277556" sldId="544"/>
-        </pc:sldMkLst>
-        <pc:spChg chg="del mod ord">
-          <ac:chgData name="Chris Moreh" userId="17b81281-9f29-44e0-9273-6dadbf6896a2" providerId="ADAL" clId="{D46324F9-60BE-4D8E-915B-0E63D65B4BC1}" dt="2024-10-15T02:48:21.410" v="125" actId="700"/>
-          <ac:spMkLst>
-            <pc:docMk/>
-            <pc:sldMk cId="558277556" sldId="544"/>
-            <ac:spMk id="2" creationId="{67982586-01BC-DF56-BD30-1582FD5F73E8}"/>
-          </ac:spMkLst>
-        </pc:spChg>
-        <pc:spChg chg="del mod ord">
-          <ac:chgData name="Chris Moreh" userId="17b81281-9f29-44e0-9273-6dadbf6896a2" providerId="ADAL" clId="{D46324F9-60BE-4D8E-915B-0E63D65B4BC1}" dt="2024-10-15T02:48:21.410" v="125" actId="700"/>
-          <ac:spMkLst>
-            <pc:docMk/>
-            <pc:sldMk cId="558277556" sldId="544"/>
-            <ac:spMk id="3" creationId="{D99D9F53-3126-28B9-70B5-71AA14CFCC28}"/>
-          </ac:spMkLst>
-        </pc:spChg>
-        <pc:spChg chg="mod ord">
-          <ac:chgData name="Chris Moreh" userId="17b81281-9f29-44e0-9273-6dadbf6896a2" providerId="ADAL" clId="{D46324F9-60BE-4D8E-915B-0E63D65B4BC1}" dt="2024-10-15T02:48:21.410" v="125" actId="700"/>
-          <ac:spMkLst>
-            <pc:docMk/>
-            <pc:sldMk cId="558277556" sldId="544"/>
-            <ac:spMk id="4" creationId="{42EAA952-F4BF-DF38-94E0-073B86D37BCC}"/>
-          </ac:spMkLst>
-        </pc:spChg>
-        <pc:spChg chg="mod ord">
-          <ac:chgData name="Chris Moreh" userId="17b81281-9f29-44e0-9273-6dadbf6896a2" providerId="ADAL" clId="{D46324F9-60BE-4D8E-915B-0E63D65B4BC1}" dt="2024-10-15T02:48:21.410" v="125" actId="700"/>
-          <ac:spMkLst>
-            <pc:docMk/>
-            <pc:sldMk cId="558277556" sldId="544"/>
-            <ac:spMk id="5" creationId="{07B7E1DD-848E-88C2-F321-FB74DD9964FA}"/>
-          </ac:spMkLst>
-        </pc:spChg>
-        <pc:spChg chg="mod ord">
-          <ac:chgData name="Chris Moreh" userId="17b81281-9f29-44e0-9273-6dadbf6896a2" providerId="ADAL" clId="{D46324F9-60BE-4D8E-915B-0E63D65B4BC1}" dt="2024-10-15T02:48:21.410" v="125" actId="700"/>
-          <ac:spMkLst>
-            <pc:docMk/>
-            <pc:sldMk cId="558277556" sldId="544"/>
-            <ac:spMk id="6" creationId="{25616FB1-0E31-1374-5F8A-A89912406F5B}"/>
-          </ac:spMkLst>
-        </pc:spChg>
-        <pc:spChg chg="add mod ord">
-          <ac:chgData name="Chris Moreh" userId="17b81281-9f29-44e0-9273-6dadbf6896a2" providerId="ADAL" clId="{D46324F9-60BE-4D8E-915B-0E63D65B4BC1}" dt="2024-10-15T05:24:57.133" v="904" actId="114"/>
-          <ac:spMkLst>
-            <pc:docMk/>
-            <pc:sldMk cId="558277556" sldId="544"/>
-            <ac:spMk id="7" creationId="{0A37C0FA-10DA-0D35-01CC-20520F3B88E1}"/>
-          </ac:spMkLst>
-        </pc:spChg>
-        <pc:spChg chg="add mod ord">
-          <ac:chgData name="Chris Moreh" userId="17b81281-9f29-44e0-9273-6dadbf6896a2" providerId="ADAL" clId="{D46324F9-60BE-4D8E-915B-0E63D65B4BC1}" dt="2024-10-15T09:52:18.271" v="1477" actId="5793"/>
-          <ac:spMkLst>
-            <pc:docMk/>
-            <pc:sldMk cId="558277556" sldId="544"/>
-            <ac:spMk id="8" creationId="{D42E703C-944A-D7E7-F614-4BA84F3235B6}"/>
-          </ac:spMkLst>
-        </pc:spChg>
-      </pc:sldChg>
-      <pc:sldChg chg="addSp delSp modSp new del mod">
-        <pc:chgData name="Chris Moreh" userId="17b81281-9f29-44e0-9273-6dadbf6896a2" providerId="ADAL" clId="{D46324F9-60BE-4D8E-915B-0E63D65B4BC1}" dt="2024-10-15T03:59:58.146" v="507" actId="47"/>
-        <pc:sldMkLst>
-          <pc:docMk/>
-          <pc:sldMk cId="4050257076" sldId="545"/>
-        </pc:sldMkLst>
-        <pc:spChg chg="mod">
-          <ac:chgData name="Chris Moreh" userId="17b81281-9f29-44e0-9273-6dadbf6896a2" providerId="ADAL" clId="{D46324F9-60BE-4D8E-915B-0E63D65B4BC1}" dt="2024-10-15T03:25:15.534" v="238" actId="27636"/>
-          <ac:spMkLst>
-            <pc:docMk/>
-            <pc:sldMk cId="4050257076" sldId="545"/>
-            <ac:spMk id="2" creationId="{EC1D32FE-B763-BBCA-C638-8755729BDD3D}"/>
-          </ac:spMkLst>
-        </pc:spChg>
-        <pc:picChg chg="add del mod">
-          <ac:chgData name="Chris Moreh" userId="17b81281-9f29-44e0-9273-6dadbf6896a2" providerId="ADAL" clId="{D46324F9-60BE-4D8E-915B-0E63D65B4BC1}" dt="2024-10-15T03:59:38.253" v="504" actId="21"/>
-          <ac:picMkLst>
-            <pc:docMk/>
-            <pc:sldMk cId="4050257076" sldId="545"/>
-            <ac:picMk id="6" creationId="{E9EDBBEA-F163-4B2F-BC6D-0A2F6D1E6CAC}"/>
-          </ac:picMkLst>
-        </pc:picChg>
-        <pc:picChg chg="add mod">
-          <ac:chgData name="Chris Moreh" userId="17b81281-9f29-44e0-9273-6dadbf6896a2" providerId="ADAL" clId="{D46324F9-60BE-4D8E-915B-0E63D65B4BC1}" dt="2024-10-15T03:19:08.636" v="160" actId="1076"/>
-          <ac:picMkLst>
-            <pc:docMk/>
-            <pc:sldMk cId="4050257076" sldId="545"/>
-            <ac:picMk id="7" creationId="{8BD80079-BE6D-A064-0234-5B999E2D651E}"/>
-          </ac:picMkLst>
-        </pc:picChg>
-      </pc:sldChg>
-      <pc:sldChg chg="new del">
-        <pc:chgData name="Chris Moreh" userId="17b81281-9f29-44e0-9273-6dadbf6896a2" providerId="ADAL" clId="{D46324F9-60BE-4D8E-915B-0E63D65B4BC1}" dt="2024-10-15T09:49:50.058" v="1280" actId="47"/>
-        <pc:sldMkLst>
-          <pc:docMk/>
-          <pc:sldMk cId="3680838534" sldId="546"/>
-        </pc:sldMkLst>
-      </pc:sldChg>
-      <pc:sldChg chg="add del">
-        <pc:chgData name="Chris Moreh" userId="17b81281-9f29-44e0-9273-6dadbf6896a2" providerId="ADAL" clId="{D46324F9-60BE-4D8E-915B-0E63D65B4BC1}" dt="2024-10-15T03:59:34.666" v="503" actId="47"/>
-        <pc:sldMkLst>
-          <pc:docMk/>
-          <pc:sldMk cId="2149541171" sldId="547"/>
-        </pc:sldMkLst>
-      </pc:sldChg>
-      <pc:sldChg chg="addSp delSp modSp add del mod modTransition">
-        <pc:chgData name="Chris Moreh" userId="17b81281-9f29-44e0-9273-6dadbf6896a2" providerId="ADAL" clId="{D46324F9-60BE-4D8E-915B-0E63D65B4BC1}" dt="2024-10-15T05:31:16.005" v="963" actId="47"/>
-        <pc:sldMkLst>
-          <pc:docMk/>
-          <pc:sldMk cId="379658428" sldId="548"/>
-        </pc:sldMkLst>
-        <pc:picChg chg="add mod">
-          <ac:chgData name="Chris Moreh" userId="17b81281-9f29-44e0-9273-6dadbf6896a2" providerId="ADAL" clId="{D46324F9-60BE-4D8E-915B-0E63D65B4BC1}" dt="2024-10-15T03:59:41.284" v="505"/>
-          <ac:picMkLst>
-            <pc:docMk/>
-            <pc:sldMk cId="379658428" sldId="548"/>
-            <ac:picMk id="2" creationId="{E9EDBBEA-F163-4B2F-BC6D-0A2F6D1E6CAC}"/>
-          </ac:picMkLst>
-        </pc:picChg>
-        <pc:picChg chg="del mod">
-          <ac:chgData name="Chris Moreh" userId="17b81281-9f29-44e0-9273-6dadbf6896a2" providerId="ADAL" clId="{D46324F9-60BE-4D8E-915B-0E63D65B4BC1}" dt="2024-10-15T05:25:22.982" v="906" actId="21"/>
-          <ac:picMkLst>
-            <pc:docMk/>
-            <pc:sldMk cId="379658428" sldId="548"/>
-            <ac:picMk id="13" creationId="{B6669D02-D0C3-4EC8-8F3C-A5294E2B460D}"/>
-          </ac:picMkLst>
-        </pc:picChg>
-      </pc:sldChg>
-      <pc:sldChg chg="modSp add mod ord">
-        <pc:chgData name="Chris Moreh" userId="17b81281-9f29-44e0-9273-6dadbf6896a2" providerId="ADAL" clId="{D46324F9-60BE-4D8E-915B-0E63D65B4BC1}" dt="2024-10-15T04:41:25.476" v="731" actId="20577"/>
-        <pc:sldMkLst>
-          <pc:docMk/>
-          <pc:sldMk cId="2617544839" sldId="549"/>
-        </pc:sldMkLst>
-        <pc:spChg chg="mod">
-          <ac:chgData name="Chris Moreh" userId="17b81281-9f29-44e0-9273-6dadbf6896a2" providerId="ADAL" clId="{D46324F9-60BE-4D8E-915B-0E63D65B4BC1}" dt="2024-10-15T04:41:25.476" v="731" actId="20577"/>
-          <ac:spMkLst>
-            <pc:docMk/>
-            <pc:sldMk cId="2617544839" sldId="549"/>
-            <ac:spMk id="2" creationId="{00000000-0000-0000-0000-000000000000}"/>
-          </ac:spMkLst>
-        </pc:spChg>
-        <pc:picChg chg="mod">
-          <ac:chgData name="Chris Moreh" userId="17b81281-9f29-44e0-9273-6dadbf6896a2" providerId="ADAL" clId="{D46324F9-60BE-4D8E-915B-0E63D65B4BC1}" dt="2024-10-15T04:12:16.149" v="600" actId="14826"/>
-          <ac:picMkLst>
-            <pc:docMk/>
-            <pc:sldMk cId="2617544839" sldId="549"/>
-            <ac:picMk id="7" creationId="{4116D9C6-0FA6-1FC5-3BC7-81692DB33B51}"/>
-          </ac:picMkLst>
-        </pc:picChg>
-        <pc:picChg chg="mod">
-          <ac:chgData name="Chris Moreh" userId="17b81281-9f29-44e0-9273-6dadbf6896a2" providerId="ADAL" clId="{D46324F9-60BE-4D8E-915B-0E63D65B4BC1}" dt="2024-10-15T04:12:36.079" v="601" actId="14826"/>
-          <ac:picMkLst>
-            <pc:docMk/>
-            <pc:sldMk cId="2617544839" sldId="549"/>
-            <ac:picMk id="8" creationId="{6B12A47D-FB73-5123-18E4-CBD2675396F3}"/>
-          </ac:picMkLst>
-        </pc:picChg>
-      </pc:sldChg>
-      <pc:sldChg chg="modSp add del mod">
-        <pc:chgData name="Chris Moreh" userId="17b81281-9f29-44e0-9273-6dadbf6896a2" providerId="ADAL" clId="{D46324F9-60BE-4D8E-915B-0E63D65B4BC1}" dt="2024-10-15T04:19:13.848" v="625" actId="47"/>
-        <pc:sldMkLst>
-          <pc:docMk/>
-          <pc:sldMk cId="2089492829" sldId="550"/>
-        </pc:sldMkLst>
-        <pc:picChg chg="mod">
-          <ac:chgData name="Chris Moreh" userId="17b81281-9f29-44e0-9273-6dadbf6896a2" providerId="ADAL" clId="{D46324F9-60BE-4D8E-915B-0E63D65B4BC1}" dt="2024-10-15T04:18:56.615" v="623" actId="14826"/>
-          <ac:picMkLst>
-            <pc:docMk/>
-            <pc:sldMk cId="2089492829" sldId="550"/>
-            <ac:picMk id="12" creationId="{20787F33-4CD8-DBAD-424F-53CB7F065CE4}"/>
-          </ac:picMkLst>
-        </pc:picChg>
-      </pc:sldChg>
-      <pc:sldChg chg="addSp delSp modSp add mod modAnim">
-        <pc:chgData name="Chris Moreh" userId="17b81281-9f29-44e0-9273-6dadbf6896a2" providerId="ADAL" clId="{D46324F9-60BE-4D8E-915B-0E63D65B4BC1}" dt="2024-10-15T06:35:58.342" v="1253" actId="1037"/>
-        <pc:sldMkLst>
-          <pc:docMk/>
-          <pc:sldMk cId="1896707103" sldId="551"/>
-        </pc:sldMkLst>
-        <pc:spChg chg="mod">
-          <ac:chgData name="Chris Moreh" userId="17b81281-9f29-44e0-9273-6dadbf6896a2" providerId="ADAL" clId="{D46324F9-60BE-4D8E-915B-0E63D65B4BC1}" dt="2024-10-15T04:43:31.769" v="773"/>
-          <ac:spMkLst>
-            <pc:docMk/>
-            <pc:sldMk cId="1896707103" sldId="551"/>
-            <ac:spMk id="2" creationId="{00000000-0000-0000-0000-000000000000}"/>
-          </ac:spMkLst>
-        </pc:spChg>
-        <pc:spChg chg="add mod">
-          <ac:chgData name="Chris Moreh" userId="17b81281-9f29-44e0-9273-6dadbf6896a2" providerId="ADAL" clId="{D46324F9-60BE-4D8E-915B-0E63D65B4BC1}" dt="2024-10-15T06:35:52.180" v="1233" actId="14100"/>
-          <ac:spMkLst>
-            <pc:docMk/>
-            <pc:sldMk cId="1896707103" sldId="551"/>
-            <ac:spMk id="9" creationId="{9356373C-67F2-D533-5AF7-11FEB96B0E8C}"/>
-          </ac:spMkLst>
-        </pc:spChg>
-        <pc:spChg chg="add mod">
-          <ac:chgData name="Chris Moreh" userId="17b81281-9f29-44e0-9273-6dadbf6896a2" providerId="ADAL" clId="{D46324F9-60BE-4D8E-915B-0E63D65B4BC1}" dt="2024-10-15T06:35:58.342" v="1253" actId="1037"/>
-          <ac:spMkLst>
-            <pc:docMk/>
-            <pc:sldMk cId="1896707103" sldId="551"/>
-            <ac:spMk id="10" creationId="{AB1E6B82-5947-1025-85DF-5B3A3DA8B82B}"/>
-          </ac:spMkLst>
-        </pc:spChg>
-        <pc:picChg chg="del">
-          <ac:chgData name="Chris Moreh" userId="17b81281-9f29-44e0-9273-6dadbf6896a2" providerId="ADAL" clId="{D46324F9-60BE-4D8E-915B-0E63D65B4BC1}" dt="2024-10-15T06:28:17.584" v="1145" actId="478"/>
-          <ac:picMkLst>
-            <pc:docMk/>
-            <pc:sldMk cId="1896707103" sldId="551"/>
-            <ac:picMk id="7" creationId="{4116D9C6-0FA6-1FC5-3BC7-81692DB33B51}"/>
-          </ac:picMkLst>
-        </pc:picChg>
-        <pc:picChg chg="del">
-          <ac:chgData name="Chris Moreh" userId="17b81281-9f29-44e0-9273-6dadbf6896a2" providerId="ADAL" clId="{D46324F9-60BE-4D8E-915B-0E63D65B4BC1}" dt="2024-10-15T06:28:17.584" v="1145" actId="478"/>
-          <ac:picMkLst>
-            <pc:docMk/>
-            <pc:sldMk cId="1896707103" sldId="551"/>
-            <ac:picMk id="8" creationId="{6B12A47D-FB73-5123-18E4-CBD2675396F3}"/>
-          </ac:picMkLst>
-        </pc:picChg>
-        <pc:picChg chg="add mod">
-          <ac:chgData name="Chris Moreh" userId="17b81281-9f29-44e0-9273-6dadbf6896a2" providerId="ADAL" clId="{D46324F9-60BE-4D8E-915B-0E63D65B4BC1}" dt="2024-10-15T06:28:18.068" v="1146"/>
-          <ac:picMkLst>
-            <pc:docMk/>
-            <pc:sldMk cId="1896707103" sldId="551"/>
-            <ac:picMk id="11" creationId="{34F6DF44-11B1-9CBC-B177-D8FB8691EF6C}"/>
-          </ac:picMkLst>
-        </pc:picChg>
-        <pc:picChg chg="mod modCrop">
-          <ac:chgData name="Chris Moreh" userId="17b81281-9f29-44e0-9273-6dadbf6896a2" providerId="ADAL" clId="{D46324F9-60BE-4D8E-915B-0E63D65B4BC1}" dt="2024-10-15T06:35:33.652" v="1232" actId="14100"/>
-          <ac:picMkLst>
-            <pc:docMk/>
-            <pc:sldMk cId="1896707103" sldId="551"/>
-            <ac:picMk id="12" creationId="{20787F33-4CD8-DBAD-424F-53CB7F065CE4}"/>
-          </ac:picMkLst>
-        </pc:picChg>
-        <pc:picChg chg="add mod">
-          <ac:chgData name="Chris Moreh" userId="17b81281-9f29-44e0-9273-6dadbf6896a2" providerId="ADAL" clId="{D46324F9-60BE-4D8E-915B-0E63D65B4BC1}" dt="2024-10-15T06:28:18.068" v="1146"/>
-          <ac:picMkLst>
-            <pc:docMk/>
-            <pc:sldMk cId="1896707103" sldId="551"/>
-            <ac:picMk id="13" creationId="{59DB6339-EBC1-3E44-EE8C-F9CC0373A6DC}"/>
-          </ac:picMkLst>
-        </pc:picChg>
-      </pc:sldChg>
-      <pc:sldChg chg="modSp add del mod">
-        <pc:chgData name="Chris Moreh" userId="17b81281-9f29-44e0-9273-6dadbf6896a2" providerId="ADAL" clId="{D46324F9-60BE-4D8E-915B-0E63D65B4BC1}" dt="2024-10-15T04:46:46.248" v="799" actId="47"/>
-        <pc:sldMkLst>
-          <pc:docMk/>
-          <pc:sldMk cId="3834908213" sldId="552"/>
-        </pc:sldMkLst>
-        <pc:spChg chg="mod">
-          <ac:chgData name="Chris Moreh" userId="17b81281-9f29-44e0-9273-6dadbf6896a2" providerId="ADAL" clId="{D46324F9-60BE-4D8E-915B-0E63D65B4BC1}" dt="2024-10-15T04:45:11.632" v="790"/>
-          <ac:spMkLst>
-            <pc:docMk/>
-            <pc:sldMk cId="3834908213" sldId="552"/>
-            <ac:spMk id="2" creationId="{00000000-0000-0000-0000-000000000000}"/>
-          </ac:spMkLst>
-        </pc:spChg>
-        <pc:picChg chg="mod">
-          <ac:chgData name="Chris Moreh" userId="17b81281-9f29-44e0-9273-6dadbf6896a2" providerId="ADAL" clId="{D46324F9-60BE-4D8E-915B-0E63D65B4BC1}" dt="2024-10-15T04:21:53.767" v="640" actId="1035"/>
-          <ac:picMkLst>
-            <pc:docMk/>
-            <pc:sldMk cId="3834908213" sldId="552"/>
-            <ac:picMk id="12" creationId="{20787F33-4CD8-DBAD-424F-53CB7F065CE4}"/>
-          </ac:picMkLst>
-        </pc:picChg>
-      </pc:sldChg>
-      <pc:sldChg chg="addSp delSp modSp add mod modAnim">
-        <pc:chgData name="Chris Moreh" userId="17b81281-9f29-44e0-9273-6dadbf6896a2" providerId="ADAL" clId="{D46324F9-60BE-4D8E-915B-0E63D65B4BC1}" dt="2024-10-15T06:35:00.702" v="1230" actId="14100"/>
-        <pc:sldMkLst>
-          <pc:docMk/>
-          <pc:sldMk cId="3374055334" sldId="553"/>
-        </pc:sldMkLst>
-        <pc:spChg chg="mod">
-          <ac:chgData name="Chris Moreh" userId="17b81281-9f29-44e0-9273-6dadbf6896a2" providerId="ADAL" clId="{D46324F9-60BE-4D8E-915B-0E63D65B4BC1}" dt="2024-10-15T04:43:36.655" v="774"/>
-          <ac:spMkLst>
-            <pc:docMk/>
-            <pc:sldMk cId="3374055334" sldId="553"/>
-            <ac:spMk id="2" creationId="{00000000-0000-0000-0000-000000000000}"/>
-          </ac:spMkLst>
-        </pc:spChg>
-        <pc:spChg chg="add mod">
-          <ac:chgData name="Chris Moreh" userId="17b81281-9f29-44e0-9273-6dadbf6896a2" providerId="ADAL" clId="{D46324F9-60BE-4D8E-915B-0E63D65B4BC1}" dt="2024-10-15T04:28:47.616" v="646"/>
-          <ac:spMkLst>
-            <pc:docMk/>
-            <pc:sldMk cId="3374055334" sldId="553"/>
-            <ac:spMk id="13" creationId="{70FBDA12-3E7A-7B5D-DA4F-3ACAB57CA372}"/>
-          </ac:spMkLst>
-        </pc:spChg>
-        <pc:spChg chg="add mod">
-          <ac:chgData name="Chris Moreh" userId="17b81281-9f29-44e0-9273-6dadbf6896a2" providerId="ADAL" clId="{D46324F9-60BE-4D8E-915B-0E63D65B4BC1}" dt="2024-10-15T04:29:05.693" v="650"/>
-          <ac:spMkLst>
-            <pc:docMk/>
-            <pc:sldMk cId="3374055334" sldId="553"/>
-            <ac:spMk id="17" creationId="{8C72A4DF-98A5-D622-2530-92351DEBD290}"/>
-          </ac:spMkLst>
-        </pc:spChg>
-        <pc:spChg chg="add mod">
-          <ac:chgData name="Chris Moreh" userId="17b81281-9f29-44e0-9273-6dadbf6896a2" providerId="ADAL" clId="{D46324F9-60BE-4D8E-915B-0E63D65B4BC1}" dt="2024-10-15T05:00:02.368" v="893" actId="14100"/>
-          <ac:spMkLst>
-            <pc:docMk/>
-            <pc:sldMk cId="3374055334" sldId="553"/>
-            <ac:spMk id="20" creationId="{0D59F2B2-BAF1-26FC-FB99-4B5BB002077C}"/>
-          </ac:spMkLst>
-        </pc:spChg>
-        <pc:graphicFrameChg chg="del">
-          <ac:chgData name="Chris Moreh" userId="17b81281-9f29-44e0-9273-6dadbf6896a2" providerId="ADAL" clId="{D46324F9-60BE-4D8E-915B-0E63D65B4BC1}" dt="2024-10-15T04:28:41.115" v="642" actId="478"/>
-          <ac:graphicFrameMkLst>
-            <pc:docMk/>
-            <pc:sldMk cId="3374055334" sldId="553"/>
-            <ac:graphicFrameMk id="3" creationId="{A0C14315-CCEC-5435-D7AF-9C6F17DEDE08}"/>
-          </ac:graphicFrameMkLst>
-        </pc:graphicFrameChg>
-        <pc:graphicFrameChg chg="add mod">
-          <ac:chgData name="Chris Moreh" userId="17b81281-9f29-44e0-9273-6dadbf6896a2" providerId="ADAL" clId="{D46324F9-60BE-4D8E-915B-0E63D65B4BC1}" dt="2024-10-15T04:28:44.318" v="645"/>
-          <ac:graphicFrameMkLst>
-            <pc:docMk/>
-            <pc:sldMk cId="3374055334" sldId="553"/>
-            <ac:graphicFrameMk id="9" creationId="{45B96EE8-8F03-586F-1D8F-83C125CC5404}"/>
-          </ac:graphicFrameMkLst>
-        </pc:graphicFrameChg>
-        <pc:graphicFrameChg chg="add mod">
-          <ac:chgData name="Chris Moreh" userId="17b81281-9f29-44e0-9273-6dadbf6896a2" providerId="ADAL" clId="{D46324F9-60BE-4D8E-915B-0E63D65B4BC1}" dt="2024-10-15T04:28:44.318" v="645"/>
-          <ac:graphicFrameMkLst>
-            <pc:docMk/>
-            <pc:sldMk cId="3374055334" sldId="553"/>
-            <ac:graphicFrameMk id="10" creationId="{56742D04-6C86-DA68-B6DA-667889E2E01F}"/>
-          </ac:graphicFrameMkLst>
-        </pc:graphicFrameChg>
-        <pc:graphicFrameChg chg="add mod">
-          <ac:chgData name="Chris Moreh" userId="17b81281-9f29-44e0-9273-6dadbf6896a2" providerId="ADAL" clId="{D46324F9-60BE-4D8E-915B-0E63D65B4BC1}" dt="2024-10-15T04:28:44.318" v="645"/>
-          <ac:graphicFrameMkLst>
-            <pc:docMk/>
-            <pc:sldMk cId="3374055334" sldId="553"/>
-            <ac:graphicFrameMk id="11" creationId="{E043D7DA-D265-23A0-1F13-20B0C08298E6}"/>
-          </ac:graphicFrameMkLst>
-        </pc:graphicFrameChg>
-        <pc:graphicFrameChg chg="add mod">
-          <ac:chgData name="Chris Moreh" userId="17b81281-9f29-44e0-9273-6dadbf6896a2" providerId="ADAL" clId="{D46324F9-60BE-4D8E-915B-0E63D65B4BC1}" dt="2024-10-15T04:28:58.240" v="647"/>
-          <ac:graphicFrameMkLst>
-            <pc:docMk/>
-            <pc:sldMk cId="3374055334" sldId="553"/>
-            <ac:graphicFrameMk id="14" creationId="{BC5A1A4C-7139-4F08-D535-396C47D7C23F}"/>
-          </ac:graphicFrameMkLst>
-        </pc:graphicFrameChg>
-        <pc:graphicFrameChg chg="add mod">
-          <ac:chgData name="Chris Moreh" userId="17b81281-9f29-44e0-9273-6dadbf6896a2" providerId="ADAL" clId="{D46324F9-60BE-4D8E-915B-0E63D65B4BC1}" dt="2024-10-15T04:28:58.240" v="647"/>
-          <ac:graphicFrameMkLst>
-            <pc:docMk/>
-            <pc:sldMk cId="3374055334" sldId="553"/>
-            <ac:graphicFrameMk id="15" creationId="{70C2A672-3308-ED78-2D73-31FD2BFE05AE}"/>
-          </ac:graphicFrameMkLst>
-        </pc:graphicFrameChg>
-        <pc:graphicFrameChg chg="add mod">
-          <ac:chgData name="Chris Moreh" userId="17b81281-9f29-44e0-9273-6dadbf6896a2" providerId="ADAL" clId="{D46324F9-60BE-4D8E-915B-0E63D65B4BC1}" dt="2024-10-15T04:29:05.240" v="649" actId="1076"/>
-          <ac:graphicFrameMkLst>
-            <pc:docMk/>
-            <pc:sldMk cId="3374055334" sldId="553"/>
-            <ac:graphicFrameMk id="16" creationId="{CE6ECA12-3582-7BDF-73F5-8D16A0144C4D}"/>
-          </ac:graphicFrameMkLst>
-        </pc:graphicFrameChg>
-        <pc:picChg chg="del">
-          <ac:chgData name="Chris Moreh" userId="17b81281-9f29-44e0-9273-6dadbf6896a2" providerId="ADAL" clId="{D46324F9-60BE-4D8E-915B-0E63D65B4BC1}" dt="2024-10-15T04:28:42.225" v="643" actId="478"/>
-          <ac:picMkLst>
-            <pc:docMk/>
-            <pc:sldMk cId="3374055334" sldId="553"/>
-            <ac:picMk id="7" creationId="{4116D9C6-0FA6-1FC5-3BC7-81692DB33B51}"/>
-          </ac:picMkLst>
-        </pc:picChg>
-        <pc:picChg chg="del">
-          <ac:chgData name="Chris Moreh" userId="17b81281-9f29-44e0-9273-6dadbf6896a2" providerId="ADAL" clId="{D46324F9-60BE-4D8E-915B-0E63D65B4BC1}" dt="2024-10-15T04:28:42.743" v="644" actId="478"/>
-          <ac:picMkLst>
-            <pc:docMk/>
-            <pc:sldMk cId="3374055334" sldId="553"/>
-            <ac:picMk id="8" creationId="{6B12A47D-FB73-5123-18E4-CBD2675396F3}"/>
-          </ac:picMkLst>
-        </pc:picChg>
-        <pc:picChg chg="del mod">
-          <ac:chgData name="Chris Moreh" userId="17b81281-9f29-44e0-9273-6dadbf6896a2" providerId="ADAL" clId="{D46324F9-60BE-4D8E-915B-0E63D65B4BC1}" dt="2024-10-15T06:32:08.283" v="1209" actId="478"/>
-          <ac:picMkLst>
-            <pc:docMk/>
-            <pc:sldMk cId="3374055334" sldId="553"/>
-            <ac:picMk id="12" creationId="{20787F33-4CD8-DBAD-424F-53CB7F065CE4}"/>
-          </ac:picMkLst>
-        </pc:picChg>
-        <pc:picChg chg="add mod ord">
-          <ac:chgData name="Chris Moreh" userId="17b81281-9f29-44e0-9273-6dadbf6896a2" providerId="ADAL" clId="{D46324F9-60BE-4D8E-915B-0E63D65B4BC1}" dt="2024-10-15T06:34:54.221" v="1229" actId="170"/>
-          <ac:picMkLst>
-            <pc:docMk/>
-            <pc:sldMk cId="3374055334" sldId="553"/>
-            <ac:picMk id="19" creationId="{EA86AE07-9CAC-985C-B0F1-AA1EC47BEB87}"/>
-          </ac:picMkLst>
-        </pc:picChg>
-        <pc:picChg chg="add mod">
-          <ac:chgData name="Chris Moreh" userId="17b81281-9f29-44e0-9273-6dadbf6896a2" providerId="ADAL" clId="{D46324F9-60BE-4D8E-915B-0E63D65B4BC1}" dt="2024-10-15T06:35:00.702" v="1230" actId="14100"/>
-          <ac:picMkLst>
-            <pc:docMk/>
-            <pc:sldMk cId="3374055334" sldId="553"/>
-            <ac:picMk id="21" creationId="{407489F4-4847-6B11-F591-FE303D9E2E58}"/>
-          </ac:picMkLst>
-        </pc:picChg>
-      </pc:sldChg>
-      <pc:sldChg chg="addSp delSp modSp add mod modTransition addAnim delAnim modAnim">
-        <pc:chgData name="Chris Moreh" userId="17b81281-9f29-44e0-9273-6dadbf6896a2" providerId="ADAL" clId="{D46324F9-60BE-4D8E-915B-0E63D65B4BC1}" dt="2024-10-15T09:48:13.780" v="1276" actId="207"/>
-        <pc:sldMkLst>
-          <pc:docMk/>
-          <pc:sldMk cId="2124584835" sldId="554"/>
-        </pc:sldMkLst>
-        <pc:spChg chg="mod">
-          <ac:chgData name="Chris Moreh" userId="17b81281-9f29-44e0-9273-6dadbf6896a2" providerId="ADAL" clId="{D46324F9-60BE-4D8E-915B-0E63D65B4BC1}" dt="2024-10-15T04:44:40.163" v="788"/>
-          <ac:spMkLst>
-            <pc:docMk/>
-            <pc:sldMk cId="2124584835" sldId="554"/>
-            <ac:spMk id="2" creationId="{00000000-0000-0000-0000-000000000000}"/>
-          </ac:spMkLst>
-        </pc:spChg>
-        <pc:spChg chg="add del mod">
-          <ac:chgData name="Chris Moreh" userId="17b81281-9f29-44e0-9273-6dadbf6896a2" providerId="ADAL" clId="{D46324F9-60BE-4D8E-915B-0E63D65B4BC1}" dt="2024-10-15T09:46:25.753" v="1261" actId="478"/>
-          <ac:spMkLst>
-            <pc:docMk/>
-            <pc:sldMk cId="2124584835" sldId="554"/>
-            <ac:spMk id="10" creationId="{C3474970-9C10-DF35-1D64-AF235B8185D0}"/>
-          </ac:spMkLst>
-        </pc:spChg>
-        <pc:spChg chg="add mod">
-          <ac:chgData name="Chris Moreh" userId="17b81281-9f29-44e0-9273-6dadbf6896a2" providerId="ADAL" clId="{D46324F9-60BE-4D8E-915B-0E63D65B4BC1}" dt="2024-10-15T09:46:08.133" v="1259" actId="1076"/>
-          <ac:spMkLst>
-            <pc:docMk/>
-            <pc:sldMk cId="2124584835" sldId="554"/>
-            <ac:spMk id="11" creationId="{86BB58A9-F045-4B3C-C165-C5584CAD34B7}"/>
-          </ac:spMkLst>
-        </pc:spChg>
-        <pc:spChg chg="add del mod">
-          <ac:chgData name="Chris Moreh" userId="17b81281-9f29-44e0-9273-6dadbf6896a2" providerId="ADAL" clId="{D46324F9-60BE-4D8E-915B-0E63D65B4BC1}" dt="2024-10-15T09:48:13.780" v="1276" actId="207"/>
-          <ac:spMkLst>
-            <pc:docMk/>
-            <pc:sldMk cId="2124584835" sldId="554"/>
-            <ac:spMk id="13" creationId="{CB7EA6B8-64B6-6667-54EA-040EB411A0A2}"/>
-          </ac:spMkLst>
-        </pc:spChg>
-        <pc:spChg chg="add mod">
-          <ac:chgData name="Chris Moreh" userId="17b81281-9f29-44e0-9273-6dadbf6896a2" providerId="ADAL" clId="{D46324F9-60BE-4D8E-915B-0E63D65B4BC1}" dt="2024-10-15T04:58:18.208" v="886" actId="14100"/>
-          <ac:spMkLst>
-            <pc:docMk/>
-            <pc:sldMk cId="2124584835" sldId="554"/>
-            <ac:spMk id="14" creationId="{34E64A40-0F4E-9321-610F-9C5F150C54DD}"/>
-          </ac:spMkLst>
-        </pc:spChg>
-        <pc:spChg chg="add mod">
-          <ac:chgData name="Chris Moreh" userId="17b81281-9f29-44e0-9273-6dadbf6896a2" providerId="ADAL" clId="{D46324F9-60BE-4D8E-915B-0E63D65B4BC1}" dt="2024-10-15T04:57:58.570" v="882" actId="14100"/>
-          <ac:spMkLst>
-            <pc:docMk/>
-            <pc:sldMk cId="2124584835" sldId="554"/>
-            <ac:spMk id="15" creationId="{BE480465-698D-39CB-FC56-5508F9A3DE36}"/>
-          </ac:spMkLst>
-        </pc:spChg>
-        <pc:spChg chg="add mod">
-          <ac:chgData name="Chris Moreh" userId="17b81281-9f29-44e0-9273-6dadbf6896a2" providerId="ADAL" clId="{D46324F9-60BE-4D8E-915B-0E63D65B4BC1}" dt="2024-10-15T04:58:14.512" v="885" actId="14100"/>
-          <ac:spMkLst>
-            <pc:docMk/>
-            <pc:sldMk cId="2124584835" sldId="554"/>
-            <ac:spMk id="16" creationId="{A1D21993-70B6-1A19-FEC0-A9A75942B355}"/>
-          </ac:spMkLst>
-        </pc:spChg>
-        <pc:spChg chg="add mod">
-          <ac:chgData name="Chris Moreh" userId="17b81281-9f29-44e0-9273-6dadbf6896a2" providerId="ADAL" clId="{D46324F9-60BE-4D8E-915B-0E63D65B4BC1}" dt="2024-10-15T09:46:38.679" v="1263" actId="14100"/>
-          <ac:spMkLst>
-            <pc:docMk/>
-            <pc:sldMk cId="2124584835" sldId="554"/>
-            <ac:spMk id="17" creationId="{696D13C4-8407-E3C2-20FB-5F0F5E797A6D}"/>
-          </ac:spMkLst>
-        </pc:spChg>
-        <pc:spChg chg="add mod">
-          <ac:chgData name="Chris Moreh" userId="17b81281-9f29-44e0-9273-6dadbf6896a2" providerId="ADAL" clId="{D46324F9-60BE-4D8E-915B-0E63D65B4BC1}" dt="2024-10-15T09:47:00.630" v="1269" actId="1076"/>
-          <ac:spMkLst>
-            <pc:docMk/>
-            <pc:sldMk cId="2124584835" sldId="554"/>
-            <ac:spMk id="18" creationId="{8722A557-C701-4716-B290-8F15BFDB84FC}"/>
-          </ac:spMkLst>
-        </pc:spChg>
-        <pc:picChg chg="add del mod">
-          <ac:chgData name="Chris Moreh" userId="17b81281-9f29-44e0-9273-6dadbf6896a2" providerId="ADAL" clId="{D46324F9-60BE-4D8E-915B-0E63D65B4BC1}" dt="2024-10-15T04:33:21.370" v="662" actId="478"/>
-          <ac:picMkLst>
-            <pc:docMk/>
-            <pc:sldMk cId="2124584835" sldId="554"/>
-            <ac:picMk id="7" creationId="{A12633F4-C043-DDE2-2CC7-2886AB917B10}"/>
-          </ac:picMkLst>
-        </pc:picChg>
-        <pc:picChg chg="add mod">
-          <ac:chgData name="Chris Moreh" userId="17b81281-9f29-44e0-9273-6dadbf6896a2" providerId="ADAL" clId="{D46324F9-60BE-4D8E-915B-0E63D65B4BC1}" dt="2024-10-15T04:36:41.011" v="693" actId="1035"/>
-          <ac:picMkLst>
-            <pc:docMk/>
-            <pc:sldMk cId="2124584835" sldId="554"/>
-            <ac:picMk id="9" creationId="{D34DAB24-00D9-B6DD-D86C-03EB6F537EE2}"/>
-          </ac:picMkLst>
-        </pc:picChg>
-        <pc:picChg chg="mod">
-          <ac:chgData name="Chris Moreh" userId="17b81281-9f29-44e0-9273-6dadbf6896a2" providerId="ADAL" clId="{D46324F9-60BE-4D8E-915B-0E63D65B4BC1}" dt="2024-10-15T06:33:11.881" v="1216" actId="1076"/>
-          <ac:picMkLst>
-            <pc:docMk/>
-            <pc:sldMk cId="2124584835" sldId="554"/>
-            <ac:picMk id="12" creationId="{20787F33-4CD8-DBAD-424F-53CB7F065CE4}"/>
-          </ac:picMkLst>
-        </pc:picChg>
-        <pc:picChg chg="mod ord">
-          <ac:chgData name="Chris Moreh" userId="17b81281-9f29-44e0-9273-6dadbf6896a2" providerId="ADAL" clId="{D46324F9-60BE-4D8E-915B-0E63D65B4BC1}" dt="2024-10-15T09:48:03.011" v="1275" actId="171"/>
-          <ac:picMkLst>
-            <pc:docMk/>
-            <pc:sldMk cId="2124584835" sldId="554"/>
-            <ac:picMk id="19" creationId="{EA86AE07-9CAC-985C-B0F1-AA1EC47BEB87}"/>
-          </ac:picMkLst>
-        </pc:picChg>
-      </pc:sldChg>
-      <pc:sldChg chg="addSp delSp modSp add mod delAnim modAnim">
-        <pc:chgData name="Chris Moreh" userId="17b81281-9f29-44e0-9273-6dadbf6896a2" providerId="ADAL" clId="{D46324F9-60BE-4D8E-915B-0E63D65B4BC1}" dt="2024-10-15T09:47:52.686" v="1274" actId="14100"/>
-        <pc:sldMkLst>
-          <pc:docMk/>
-          <pc:sldMk cId="3804936684" sldId="555"/>
-        </pc:sldMkLst>
-        <pc:spChg chg="mod">
-          <ac:chgData name="Chris Moreh" userId="17b81281-9f29-44e0-9273-6dadbf6896a2" providerId="ADAL" clId="{D46324F9-60BE-4D8E-915B-0E63D65B4BC1}" dt="2024-10-15T04:46:51.029" v="800" actId="20577"/>
-          <ac:spMkLst>
-            <pc:docMk/>
-            <pc:sldMk cId="3804936684" sldId="555"/>
-            <ac:spMk id="2" creationId="{00000000-0000-0000-0000-000000000000}"/>
-          </ac:spMkLst>
-        </pc:spChg>
-        <pc:spChg chg="add mod">
-          <ac:chgData name="Chris Moreh" userId="17b81281-9f29-44e0-9273-6dadbf6896a2" providerId="ADAL" clId="{D46324F9-60BE-4D8E-915B-0E63D65B4BC1}" dt="2024-10-15T09:47:52.686" v="1274" actId="14100"/>
-          <ac:spMkLst>
-            <pc:docMk/>
-            <pc:sldMk cId="3804936684" sldId="555"/>
-            <ac:spMk id="3" creationId="{AE7E3ACF-D4C3-2502-17F0-03F90D66731A}"/>
-          </ac:spMkLst>
-        </pc:spChg>
-        <pc:spChg chg="add mod">
-          <ac:chgData name="Chris Moreh" userId="17b81281-9f29-44e0-9273-6dadbf6896a2" providerId="ADAL" clId="{D46324F9-60BE-4D8E-915B-0E63D65B4BC1}" dt="2024-10-15T04:53:41.104" v="819" actId="1076"/>
-          <ac:spMkLst>
-            <pc:docMk/>
-            <pc:sldMk cId="3804936684" sldId="555"/>
-            <ac:spMk id="7" creationId="{65BE9DCD-36A4-9D2A-DEFC-526CBB943120}"/>
-          </ac:spMkLst>
-        </pc:spChg>
-        <pc:spChg chg="add mod">
-          <ac:chgData name="Chris Moreh" userId="17b81281-9f29-44e0-9273-6dadbf6896a2" providerId="ADAL" clId="{D46324F9-60BE-4D8E-915B-0E63D65B4BC1}" dt="2024-10-15T04:53:55.625" v="822" actId="14100"/>
-          <ac:spMkLst>
-            <pc:docMk/>
-            <pc:sldMk cId="3804936684" sldId="555"/>
-            <ac:spMk id="8" creationId="{7709D734-C56C-74D2-BCF9-DEB651395DCD}"/>
-          </ac:spMkLst>
-        </pc:spChg>
-        <pc:spChg chg="add mod">
-          <ac:chgData name="Chris Moreh" userId="17b81281-9f29-44e0-9273-6dadbf6896a2" providerId="ADAL" clId="{D46324F9-60BE-4D8E-915B-0E63D65B4BC1}" dt="2024-10-15T04:54:45.475" v="849" actId="14100"/>
-          <ac:spMkLst>
-            <pc:docMk/>
-            <pc:sldMk cId="3804936684" sldId="555"/>
-            <ac:spMk id="10" creationId="{4347E80E-FE4B-EAB0-8C66-B491B6F5C12D}"/>
-          </ac:spMkLst>
-        </pc:spChg>
-        <pc:picChg chg="del">
-          <ac:chgData name="Chris Moreh" userId="17b81281-9f29-44e0-9273-6dadbf6896a2" providerId="ADAL" clId="{D46324F9-60BE-4D8E-915B-0E63D65B4BC1}" dt="2024-10-15T04:46:03.562" v="792" actId="478"/>
-          <ac:picMkLst>
-            <pc:docMk/>
-            <pc:sldMk cId="3804936684" sldId="555"/>
-            <ac:picMk id="9" creationId="{D34DAB24-00D9-B6DD-D86C-03EB6F537EE2}"/>
-          </ac:picMkLst>
-        </pc:picChg>
-        <pc:picChg chg="mod modCrop">
-          <ac:chgData name="Chris Moreh" userId="17b81281-9f29-44e0-9273-6dadbf6896a2" providerId="ADAL" clId="{D46324F9-60BE-4D8E-915B-0E63D65B4BC1}" dt="2024-10-15T04:48:49.199" v="809" actId="14100"/>
-          <ac:picMkLst>
-            <pc:docMk/>
-            <pc:sldMk cId="3804936684" sldId="555"/>
-            <ac:picMk id="12" creationId="{20787F33-4CD8-DBAD-424F-53CB7F065CE4}"/>
-          </ac:picMkLst>
-        </pc:picChg>
-        <pc:picChg chg="ord">
-          <ac:chgData name="Chris Moreh" userId="17b81281-9f29-44e0-9273-6dadbf6896a2" providerId="ADAL" clId="{D46324F9-60BE-4D8E-915B-0E63D65B4BC1}" dt="2024-10-15T09:47:32.500" v="1272" actId="171"/>
-          <ac:picMkLst>
-            <pc:docMk/>
-            <pc:sldMk cId="3804936684" sldId="555"/>
-            <ac:picMk id="19" creationId="{EA86AE07-9CAC-985C-B0F1-AA1EC47BEB87}"/>
-          </ac:picMkLst>
-        </pc:picChg>
-      </pc:sldChg>
-      <pc:sldChg chg="addSp delSp modSp add mod ord modTransition">
-        <pc:chgData name="Chris Moreh" userId="17b81281-9f29-44e0-9273-6dadbf6896a2" providerId="ADAL" clId="{D46324F9-60BE-4D8E-915B-0E63D65B4BC1}" dt="2024-10-15T06:34:31.646" v="1225" actId="170"/>
-        <pc:sldMkLst>
-          <pc:docMk/>
-          <pc:sldMk cId="4120332946" sldId="556"/>
-        </pc:sldMkLst>
-        <pc:picChg chg="add mod">
-          <ac:chgData name="Chris Moreh" userId="17b81281-9f29-44e0-9273-6dadbf6896a2" providerId="ADAL" clId="{D46324F9-60BE-4D8E-915B-0E63D65B4BC1}" dt="2024-10-15T06:33:25.472" v="1218"/>
-          <ac:picMkLst>
-            <pc:docMk/>
-            <pc:sldMk cId="4120332946" sldId="556"/>
-            <ac:picMk id="3" creationId="{69B15CB2-542B-A6B3-4671-B475B65F532B}"/>
-          </ac:picMkLst>
-        </pc:picChg>
-        <pc:picChg chg="del">
-          <ac:chgData name="Chris Moreh" userId="17b81281-9f29-44e0-9273-6dadbf6896a2" providerId="ADAL" clId="{D46324F9-60BE-4D8E-915B-0E63D65B4BC1}" dt="2024-10-15T06:33:24.643" v="1217" actId="478"/>
-          <ac:picMkLst>
-            <pc:docMk/>
-            <pc:sldMk cId="4120332946" sldId="556"/>
-            <ac:picMk id="12" creationId="{20787F33-4CD8-DBAD-424F-53CB7F065CE4}"/>
-          </ac:picMkLst>
-        </pc:picChg>
-        <pc:picChg chg="mod ord">
-          <ac:chgData name="Chris Moreh" userId="17b81281-9f29-44e0-9273-6dadbf6896a2" providerId="ADAL" clId="{D46324F9-60BE-4D8E-915B-0E63D65B4BC1}" dt="2024-10-15T06:34:31.646" v="1225" actId="170"/>
-          <ac:picMkLst>
-            <pc:docMk/>
-            <pc:sldMk cId="4120332946" sldId="556"/>
-            <ac:picMk id="19" creationId="{EA86AE07-9CAC-985C-B0F1-AA1EC47BEB87}"/>
-          </ac:picMkLst>
-        </pc:picChg>
-      </pc:sldChg>
-      <pc:sldChg chg="modSp add mod modTransition modAnim">
-        <pc:chgData name="Chris Moreh" userId="17b81281-9f29-44e0-9273-6dadbf6896a2" providerId="ADAL" clId="{D46324F9-60BE-4D8E-915B-0E63D65B4BC1}" dt="2024-10-15T05:25:56.215" v="913"/>
-        <pc:sldMkLst>
-          <pc:docMk/>
-          <pc:sldMk cId="3506495282" sldId="557"/>
-        </pc:sldMkLst>
-        <pc:picChg chg="mod">
-          <ac:chgData name="Chris Moreh" userId="17b81281-9f29-44e0-9273-6dadbf6896a2" providerId="ADAL" clId="{D46324F9-60BE-4D8E-915B-0E63D65B4BC1}" dt="2024-10-15T05:25:28.292" v="907" actId="14826"/>
-          <ac:picMkLst>
-            <pc:docMk/>
-            <pc:sldMk cId="3506495282" sldId="557"/>
-            <ac:picMk id="13" creationId="{B6669D02-D0C3-4EC8-8F3C-A5294E2B460D}"/>
-          </ac:picMkLst>
-        </pc:picChg>
-      </pc:sldChg>
-      <pc:sldChg chg="modSp add mod">
-        <pc:chgData name="Chris Moreh" userId="17b81281-9f29-44e0-9273-6dadbf6896a2" providerId="ADAL" clId="{D46324F9-60BE-4D8E-915B-0E63D65B4BC1}" dt="2024-10-15T05:30:27.217" v="922" actId="14100"/>
-        <pc:sldMkLst>
-          <pc:docMk/>
-          <pc:sldMk cId="897844589" sldId="558"/>
-        </pc:sldMkLst>
-        <pc:picChg chg="mod">
-          <ac:chgData name="Chris Moreh" userId="17b81281-9f29-44e0-9273-6dadbf6896a2" providerId="ADAL" clId="{D46324F9-60BE-4D8E-915B-0E63D65B4BC1}" dt="2024-10-15T05:30:27.217" v="922" actId="14100"/>
-          <ac:picMkLst>
-            <pc:docMk/>
-            <pc:sldMk cId="897844589" sldId="558"/>
-            <ac:picMk id="13" creationId="{B6669D02-D0C3-4EC8-8F3C-A5294E2B460D}"/>
-          </ac:picMkLst>
-        </pc:picChg>
-      </pc:sldChg>
-      <pc:sldChg chg="addSp delSp modSp add del mod">
-        <pc:chgData name="Chris Moreh" userId="17b81281-9f29-44e0-9273-6dadbf6896a2" providerId="ADAL" clId="{D46324F9-60BE-4D8E-915B-0E63D65B4BC1}" dt="2024-10-15T06:22:14.429" v="1045" actId="47"/>
-        <pc:sldMkLst>
-          <pc:docMk/>
-          <pc:sldMk cId="462091471" sldId="559"/>
-        </pc:sldMkLst>
-        <pc:picChg chg="add del mod modCrop">
-          <ac:chgData name="Chris Moreh" userId="17b81281-9f29-44e0-9273-6dadbf6896a2" providerId="ADAL" clId="{D46324F9-60BE-4D8E-915B-0E63D65B4BC1}" dt="2024-10-15T06:20:07.818" v="1041" actId="14100"/>
-          <ac:picMkLst>
-            <pc:docMk/>
-            <pc:sldMk cId="462091471" sldId="559"/>
-            <ac:picMk id="12" creationId="{20787F33-4CD8-DBAD-424F-53CB7F065CE4}"/>
-          </ac:picMkLst>
-        </pc:picChg>
-        <pc:cxnChg chg="add del">
-          <ac:chgData name="Chris Moreh" userId="17b81281-9f29-44e0-9273-6dadbf6896a2" providerId="ADAL" clId="{D46324F9-60BE-4D8E-915B-0E63D65B4BC1}" dt="2024-10-15T06:19:40.591" v="1028" actId="478"/>
-          <ac:cxnSpMkLst>
-            <pc:docMk/>
-            <pc:sldMk cId="462091471" sldId="559"/>
-            <ac:cxnSpMk id="18" creationId="{74C87DD1-690F-F813-BED2-229702FDF317}"/>
-          </ac:cxnSpMkLst>
-        </pc:cxnChg>
-      </pc:sldChg>
-      <pc:sldChg chg="addSp delSp modSp add mod modAnim">
-        <pc:chgData name="Chris Moreh" userId="17b81281-9f29-44e0-9273-6dadbf6896a2" providerId="ADAL" clId="{D46324F9-60BE-4D8E-915B-0E63D65B4BC1}" dt="2024-10-15T06:36:24.124" v="1255" actId="14100"/>
-        <pc:sldMkLst>
-          <pc:docMk/>
-          <pc:sldMk cId="324367232" sldId="560"/>
-        </pc:sldMkLst>
-        <pc:spChg chg="del mod">
-          <ac:chgData name="Chris Moreh" userId="17b81281-9f29-44e0-9273-6dadbf6896a2" providerId="ADAL" clId="{D46324F9-60BE-4D8E-915B-0E63D65B4BC1}" dt="2024-10-15T06:29:00.318" v="1151" actId="478"/>
-          <ac:spMkLst>
-            <pc:docMk/>
-            <pc:sldMk cId="324367232" sldId="560"/>
-            <ac:spMk id="16" creationId="{F9FA8AC8-311E-BFF9-EC3C-D3E6077CA660}"/>
-          </ac:spMkLst>
-        </pc:spChg>
-        <pc:picChg chg="del">
-          <ac:chgData name="Chris Moreh" userId="17b81281-9f29-44e0-9273-6dadbf6896a2" providerId="ADAL" clId="{D46324F9-60BE-4D8E-915B-0E63D65B4BC1}" dt="2024-10-15T06:28:13.032" v="1143" actId="478"/>
-          <ac:picMkLst>
-            <pc:docMk/>
-            <pc:sldMk cId="324367232" sldId="560"/>
-            <ac:picMk id="7" creationId="{4116D9C6-0FA6-1FC5-3BC7-81692DB33B51}"/>
-          </ac:picMkLst>
-        </pc:picChg>
-        <pc:picChg chg="del">
-          <ac:chgData name="Chris Moreh" userId="17b81281-9f29-44e0-9273-6dadbf6896a2" providerId="ADAL" clId="{D46324F9-60BE-4D8E-915B-0E63D65B4BC1}" dt="2024-10-15T06:28:13.032" v="1143" actId="478"/>
-          <ac:picMkLst>
-            <pc:docMk/>
-            <pc:sldMk cId="324367232" sldId="560"/>
-            <ac:picMk id="8" creationId="{6B12A47D-FB73-5123-18E4-CBD2675396F3}"/>
-          </ac:picMkLst>
-        </pc:picChg>
-        <pc:picChg chg="add mod">
-          <ac:chgData name="Chris Moreh" userId="17b81281-9f29-44e0-9273-6dadbf6896a2" providerId="ADAL" clId="{D46324F9-60BE-4D8E-915B-0E63D65B4BC1}" dt="2024-10-15T06:28:13.500" v="1144"/>
-          <ac:picMkLst>
-            <pc:docMk/>
-            <pc:sldMk cId="324367232" sldId="560"/>
-            <ac:picMk id="9" creationId="{23E084BF-11A8-CDEB-9F9C-680E39C3774C}"/>
-          </ac:picMkLst>
-        </pc:picChg>
-        <pc:picChg chg="add mod">
-          <ac:chgData name="Chris Moreh" userId="17b81281-9f29-44e0-9273-6dadbf6896a2" providerId="ADAL" clId="{D46324F9-60BE-4D8E-915B-0E63D65B4BC1}" dt="2024-10-15T06:28:13.500" v="1144"/>
-          <ac:picMkLst>
-            <pc:docMk/>
-            <pc:sldMk cId="324367232" sldId="560"/>
-            <ac:picMk id="10" creationId="{B6B4F7A0-14AA-2271-EA60-1AB044A1B6FD}"/>
-          </ac:picMkLst>
-        </pc:picChg>
-        <pc:picChg chg="mod modCrop">
-          <ac:chgData name="Chris Moreh" userId="17b81281-9f29-44e0-9273-6dadbf6896a2" providerId="ADAL" clId="{D46324F9-60BE-4D8E-915B-0E63D65B4BC1}" dt="2024-10-15T06:36:24.124" v="1255" actId="14100"/>
-          <ac:picMkLst>
-            <pc:docMk/>
-            <pc:sldMk cId="324367232" sldId="560"/>
-            <ac:picMk id="12" creationId="{20787F33-4CD8-DBAD-424F-53CB7F065CE4}"/>
-          </ac:picMkLst>
-        </pc:picChg>
-        <pc:cxnChg chg="del">
-          <ac:chgData name="Chris Moreh" userId="17b81281-9f29-44e0-9273-6dadbf6896a2" providerId="ADAL" clId="{D46324F9-60BE-4D8E-915B-0E63D65B4BC1}" dt="2024-10-15T06:25:24.654" v="1126" actId="478"/>
-          <ac:cxnSpMkLst>
-            <pc:docMk/>
-            <pc:sldMk cId="324367232" sldId="560"/>
-            <ac:cxnSpMk id="18" creationId="{74C87DD1-690F-F813-BED2-229702FDF317}"/>
-          </ac:cxnSpMkLst>
-        </pc:cxnChg>
-      </pc:sldChg>
-      <pc:sldChg chg="new del">
-        <pc:chgData name="Chris Moreh" userId="17b81281-9f29-44e0-9273-6dadbf6896a2" providerId="ADAL" clId="{D46324F9-60BE-4D8E-915B-0E63D65B4BC1}" dt="2024-10-15T10:00:01.023" v="1532" actId="47"/>
-        <pc:sldMkLst>
-          <pc:docMk/>
-          <pc:sldMk cId="3031371648" sldId="561"/>
-        </pc:sldMkLst>
-      </pc:sldChg>
-      <pc:sldChg chg="new del">
-        <pc:chgData name="Chris Moreh" userId="17b81281-9f29-44e0-9273-6dadbf6896a2" providerId="ADAL" clId="{D46324F9-60BE-4D8E-915B-0E63D65B4BC1}" dt="2024-10-15T10:00:01.774" v="1533" actId="47"/>
-        <pc:sldMkLst>
-          <pc:docMk/>
-          <pc:sldMk cId="755267779" sldId="562"/>
-        </pc:sldMkLst>
-      </pc:sldChg>
-      <pc:sldChg chg="addSp delSp modSp add mod">
-        <pc:chgData name="Chris Moreh" userId="17b81281-9f29-44e0-9273-6dadbf6896a2" providerId="ADAL" clId="{D46324F9-60BE-4D8E-915B-0E63D65B4BC1}" dt="2024-10-15T09:58:57.060" v="1525" actId="1076"/>
-        <pc:sldMkLst>
-          <pc:docMk/>
-          <pc:sldMk cId="3329067806" sldId="563"/>
-        </pc:sldMkLst>
-        <pc:spChg chg="mod">
-          <ac:chgData name="Chris Moreh" userId="17b81281-9f29-44e0-9273-6dadbf6896a2" providerId="ADAL" clId="{D46324F9-60BE-4D8E-915B-0E63D65B4BC1}" dt="2024-10-15T09:57:57.965" v="1517" actId="20577"/>
-          <ac:spMkLst>
-            <pc:docMk/>
-            <pc:sldMk cId="3329067806" sldId="563"/>
-            <ac:spMk id="2" creationId="{00000000-0000-0000-0000-000000000000}"/>
-          </ac:spMkLst>
-        </pc:spChg>
-        <pc:picChg chg="del mod">
-          <ac:chgData name="Chris Moreh" userId="17b81281-9f29-44e0-9273-6dadbf6896a2" providerId="ADAL" clId="{D46324F9-60BE-4D8E-915B-0E63D65B4BC1}" dt="2024-10-15T09:58:42.135" v="1521" actId="478"/>
-          <ac:picMkLst>
-            <pc:docMk/>
-            <pc:sldMk cId="3329067806" sldId="563"/>
-            <ac:picMk id="3" creationId="{69B15CB2-542B-A6B3-4671-B475B65F532B}"/>
-          </ac:picMkLst>
-        </pc:picChg>
-        <pc:picChg chg="add mod">
-          <ac:chgData name="Chris Moreh" userId="17b81281-9f29-44e0-9273-6dadbf6896a2" providerId="ADAL" clId="{D46324F9-60BE-4D8E-915B-0E63D65B4BC1}" dt="2024-10-15T09:58:57.060" v="1525" actId="1076"/>
-          <ac:picMkLst>
-            <pc:docMk/>
-            <pc:sldMk cId="3329067806" sldId="563"/>
-            <ac:picMk id="7" creationId="{388F4460-24C3-240C-539A-6A4798396CB9}"/>
-          </ac:picMkLst>
-        </pc:picChg>
-        <pc:picChg chg="del">
-          <ac:chgData name="Chris Moreh" userId="17b81281-9f29-44e0-9273-6dadbf6896a2" providerId="ADAL" clId="{D46324F9-60BE-4D8E-915B-0E63D65B4BC1}" dt="2024-10-15T09:58:01.515" v="1518" actId="478"/>
-          <ac:picMkLst>
-            <pc:docMk/>
-            <pc:sldMk cId="3329067806" sldId="563"/>
-            <ac:picMk id="19" creationId="{EA86AE07-9CAC-985C-B0F1-AA1EC47BEB87}"/>
-          </ac:picMkLst>
-        </pc:picChg>
-      </pc:sldChg>
-      <pc:sldChg chg="addSp delSp modSp add mod modAnim">
-        <pc:chgData name="Chris Moreh" userId="17b81281-9f29-44e0-9273-6dadbf6896a2" providerId="ADAL" clId="{D46324F9-60BE-4D8E-915B-0E63D65B4BC1}" dt="2024-10-15T10:01:24.854" v="1540" actId="14100"/>
-        <pc:sldMkLst>
-          <pc:docMk/>
-          <pc:sldMk cId="275254640" sldId="564"/>
-        </pc:sldMkLst>
-        <pc:spChg chg="add mod">
-          <ac:chgData name="Chris Moreh" userId="17b81281-9f29-44e0-9273-6dadbf6896a2" providerId="ADAL" clId="{D46324F9-60BE-4D8E-915B-0E63D65B4BC1}" dt="2024-10-15T10:01:24.854" v="1540" actId="14100"/>
-          <ac:spMkLst>
-            <pc:docMk/>
-            <pc:sldMk cId="275254640" sldId="564"/>
-            <ac:spMk id="9" creationId="{9530B3D8-2727-C11F-16E6-3F88C710044A}"/>
-          </ac:spMkLst>
-        </pc:spChg>
-        <pc:picChg chg="del">
-          <ac:chgData name="Chris Moreh" userId="17b81281-9f29-44e0-9273-6dadbf6896a2" providerId="ADAL" clId="{D46324F9-60BE-4D8E-915B-0E63D65B4BC1}" dt="2024-10-15T09:59:03.260" v="1527" actId="478"/>
-          <ac:picMkLst>
-            <pc:docMk/>
-            <pc:sldMk cId="275254640" sldId="564"/>
-            <ac:picMk id="7" creationId="{388F4460-24C3-240C-539A-6A4798396CB9}"/>
-          </ac:picMkLst>
-        </pc:picChg>
-        <pc:picChg chg="add mod">
-          <ac:chgData name="Chris Moreh" userId="17b81281-9f29-44e0-9273-6dadbf6896a2" providerId="ADAL" clId="{D46324F9-60BE-4D8E-915B-0E63D65B4BC1}" dt="2024-10-15T09:59:55.545" v="1531" actId="1076"/>
-          <ac:picMkLst>
-            <pc:docMk/>
-            <pc:sldMk cId="275254640" sldId="564"/>
-            <ac:picMk id="8" creationId="{9CD205ED-8448-CB12-483E-6A2D5FE1D024}"/>
-          </ac:picMkLst>
-        </pc:picChg>
-      </pc:sldChg>
-      <pc:sldMasterChg chg="modSldLayout">
-        <pc:chgData name="Chris Moreh" userId="17b81281-9f29-44e0-9273-6dadbf6896a2" providerId="ADAL" clId="{D46324F9-60BE-4D8E-915B-0E63D65B4BC1}" dt="2024-10-15T02:30:59.170" v="43" actId="1038"/>
-        <pc:sldMasterMkLst>
-          <pc:docMk/>
-          <pc:sldMasterMk cId="3120243165" sldId="2147483660"/>
-        </pc:sldMasterMkLst>
-        <pc:sldLayoutChg chg="modSp mod">
-          <pc:chgData name="Chris Moreh" userId="17b81281-9f29-44e0-9273-6dadbf6896a2" providerId="ADAL" clId="{D46324F9-60BE-4D8E-915B-0E63D65B4BC1}" dt="2024-10-15T02:30:59.170" v="43" actId="1038"/>
-          <pc:sldLayoutMkLst>
-            <pc:docMk/>
-            <pc:sldMasterMk cId="3120243165" sldId="2147483660"/>
-            <pc:sldLayoutMk cId="1963352992" sldId="2147483661"/>
-          </pc:sldLayoutMkLst>
-          <pc:picChg chg="mod">
-            <ac:chgData name="Chris Moreh" userId="17b81281-9f29-44e0-9273-6dadbf6896a2" providerId="ADAL" clId="{D46324F9-60BE-4D8E-915B-0E63D65B4BC1}" dt="2024-10-15T02:30:59.170" v="43" actId="1038"/>
-            <ac:picMkLst>
-              <pc:docMk/>
-              <pc:sldMasterMk cId="3120243165" sldId="2147483660"/>
-              <pc:sldLayoutMk cId="1963352992" sldId="2147483661"/>
-              <ac:picMk id="17" creationId="{5E3F19EF-7B80-6D97-E3A7-968224B76271}"/>
-            </ac:picMkLst>
-          </pc:picChg>
-          <pc:picChg chg="mod">
-            <ac:chgData name="Chris Moreh" userId="17b81281-9f29-44e0-9273-6dadbf6896a2" providerId="ADAL" clId="{D46324F9-60BE-4D8E-915B-0E63D65B4BC1}" dt="2024-10-15T02:30:59.170" v="43" actId="1038"/>
-            <ac:picMkLst>
-              <pc:docMk/>
-              <pc:sldMasterMk cId="3120243165" sldId="2147483660"/>
-              <pc:sldLayoutMk cId="1963352992" sldId="2147483661"/>
-              <ac:picMk id="18" creationId="{D47E78DF-0172-CCB2-A101-66933B097145}"/>
-            </ac:picMkLst>
-          </pc:picChg>
-        </pc:sldLayoutChg>
-      </pc:sldMasterChg>
-    </pc:docChg>
-  </pc:docChgLst>
-  <pc:docChgLst>
-    <pc:chgData name="Chris Moreh" userId="17b81281-9f29-44e0-9273-6dadbf6896a2" providerId="ADAL" clId="{1EFC5699-93E3-49C7-AE41-F6C8E20EB04E}"/>
-    <pc:docChg chg="undo custSel addSld delSld modSld">
-      <pc:chgData name="Chris Moreh" userId="17b81281-9f29-44e0-9273-6dadbf6896a2" providerId="ADAL" clId="{1EFC5699-93E3-49C7-AE41-F6C8E20EB04E}" dt="2024-10-29T10:59:08.593" v="263" actId="255"/>
-      <pc:docMkLst>
-        <pc:docMk/>
-      </pc:docMkLst>
-      <pc:sldChg chg="modSp add del mod modTransition">
-        <pc:chgData name="Chris Moreh" userId="17b81281-9f29-44e0-9273-6dadbf6896a2" providerId="ADAL" clId="{1EFC5699-93E3-49C7-AE41-F6C8E20EB04E}" dt="2024-10-29T10:39:03.207" v="53" actId="27636"/>
-        <pc:sldMkLst>
-          <pc:docMk/>
-          <pc:sldMk cId="0" sldId="257"/>
-        </pc:sldMkLst>
-        <pc:spChg chg="mod">
-          <ac:chgData name="Chris Moreh" userId="17b81281-9f29-44e0-9273-6dadbf6896a2" providerId="ADAL" clId="{1EFC5699-93E3-49C7-AE41-F6C8E20EB04E}" dt="2024-10-29T10:39:03.207" v="53" actId="27636"/>
-          <ac:spMkLst>
-            <pc:docMk/>
-            <pc:sldMk cId="0" sldId="257"/>
-            <ac:spMk id="3" creationId="{00000000-0000-0000-0000-000000000000}"/>
-          </ac:spMkLst>
-        </pc:spChg>
-      </pc:sldChg>
-      <pc:sldChg chg="modSp add del mod modTransition">
-        <pc:chgData name="Chris Moreh" userId="17b81281-9f29-44e0-9273-6dadbf6896a2" providerId="ADAL" clId="{1EFC5699-93E3-49C7-AE41-F6C8E20EB04E}" dt="2024-10-29T10:41:44.124" v="61" actId="47"/>
-        <pc:sldMkLst>
-          <pc:docMk/>
-          <pc:sldMk cId="0" sldId="258"/>
-        </pc:sldMkLst>
-        <pc:spChg chg="mod">
-          <ac:chgData name="Chris Moreh" userId="17b81281-9f29-44e0-9273-6dadbf6896a2" providerId="ADAL" clId="{1EFC5699-93E3-49C7-AE41-F6C8E20EB04E}" dt="2024-10-29T10:39:03.255" v="54" actId="27636"/>
-          <ac:spMkLst>
-            <pc:docMk/>
-            <pc:sldMk cId="0" sldId="258"/>
-            <ac:spMk id="3" creationId="{00000000-0000-0000-0000-000000000000}"/>
-          </ac:spMkLst>
-        </pc:spChg>
-      </pc:sldChg>
-      <pc:sldChg chg="modSp add del mod modTransition">
-        <pc:chgData name="Chris Moreh" userId="17b81281-9f29-44e0-9273-6dadbf6896a2" providerId="ADAL" clId="{1EFC5699-93E3-49C7-AE41-F6C8E20EB04E}" dt="2024-10-29T10:41:08.192" v="60" actId="14100"/>
-        <pc:sldMkLst>
-          <pc:docMk/>
-          <pc:sldMk cId="0" sldId="259"/>
-        </pc:sldMkLst>
-        <pc:spChg chg="mod">
-          <ac:chgData name="Chris Moreh" userId="17b81281-9f29-44e0-9273-6dadbf6896a2" providerId="ADAL" clId="{1EFC5699-93E3-49C7-AE41-F6C8E20EB04E}" dt="2024-10-29T10:39:03.262" v="55" actId="27636"/>
-          <ac:spMkLst>
-            <pc:docMk/>
-            <pc:sldMk cId="0" sldId="259"/>
-            <ac:spMk id="2" creationId="{8C216D18-5879-951E-312D-F35B3AEFF7CC}"/>
-          </ac:spMkLst>
-        </pc:spChg>
-        <pc:picChg chg="mod">
-          <ac:chgData name="Chris Moreh" userId="17b81281-9f29-44e0-9273-6dadbf6896a2" providerId="ADAL" clId="{1EFC5699-93E3-49C7-AE41-F6C8E20EB04E}" dt="2024-10-29T10:41:08.192" v="60" actId="14100"/>
-          <ac:picMkLst>
-            <pc:docMk/>
-            <pc:sldMk cId="0" sldId="259"/>
-            <ac:picMk id="3" creationId="{00000000-0000-0000-0000-000000000000}"/>
-          </ac:picMkLst>
-        </pc:picChg>
-      </pc:sldChg>
-      <pc:sldChg chg="add modTransition">
-        <pc:chgData name="Chris Moreh" userId="17b81281-9f29-44e0-9273-6dadbf6896a2" providerId="ADAL" clId="{1EFC5699-93E3-49C7-AE41-F6C8E20EB04E}" dt="2024-10-29T10:39:03.107" v="52"/>
-        <pc:sldMkLst>
-          <pc:docMk/>
-          <pc:sldMk cId="0" sldId="261"/>
-        </pc:sldMkLst>
-      </pc:sldChg>
-      <pc:sldChg chg="modSp add del modTransition">
-        <pc:chgData name="Chris Moreh" userId="17b81281-9f29-44e0-9273-6dadbf6896a2" providerId="ADAL" clId="{1EFC5699-93E3-49C7-AE41-F6C8E20EB04E}" dt="2024-10-29T10:44:30.672" v="90" actId="20577"/>
-        <pc:sldMkLst>
-          <pc:docMk/>
-          <pc:sldMk cId="0" sldId="262"/>
-        </pc:sldMkLst>
-        <pc:spChg chg="mod">
-          <ac:chgData name="Chris Moreh" userId="17b81281-9f29-44e0-9273-6dadbf6896a2" providerId="ADAL" clId="{1EFC5699-93E3-49C7-AE41-F6C8E20EB04E}" dt="2024-10-29T10:44:30.672" v="90" actId="20577"/>
-          <ac:spMkLst>
-            <pc:docMk/>
-            <pc:sldMk cId="0" sldId="262"/>
-            <ac:spMk id="3" creationId="{00000000-0000-0000-0000-000000000000}"/>
-          </ac:spMkLst>
-        </pc:spChg>
-      </pc:sldChg>
-      <pc:sldChg chg="modSp add del mod modTransition">
-        <pc:chgData name="Chris Moreh" userId="17b81281-9f29-44e0-9273-6dadbf6896a2" providerId="ADAL" clId="{1EFC5699-93E3-49C7-AE41-F6C8E20EB04E}" dt="2024-10-29T10:44:52.950" v="96" actId="113"/>
-        <pc:sldMkLst>
-          <pc:docMk/>
-          <pc:sldMk cId="0" sldId="263"/>
-        </pc:sldMkLst>
-        <pc:spChg chg="mod">
-          <ac:chgData name="Chris Moreh" userId="17b81281-9f29-44e0-9273-6dadbf6896a2" providerId="ADAL" clId="{1EFC5699-93E3-49C7-AE41-F6C8E20EB04E}" dt="2024-10-29T10:44:52.950" v="96" actId="113"/>
-          <ac:spMkLst>
-            <pc:docMk/>
-            <pc:sldMk cId="0" sldId="263"/>
-            <ac:spMk id="3" creationId="{00000000-0000-0000-0000-000000000000}"/>
-          </ac:spMkLst>
-        </pc:spChg>
-      </pc:sldChg>
-      <pc:sldChg chg="add modTransition">
-        <pc:chgData name="Chris Moreh" userId="17b81281-9f29-44e0-9273-6dadbf6896a2" providerId="ADAL" clId="{1EFC5699-93E3-49C7-AE41-F6C8E20EB04E}" dt="2024-10-29T10:39:03.107" v="52"/>
-        <pc:sldMkLst>
-          <pc:docMk/>
-          <pc:sldMk cId="0" sldId="264"/>
-        </pc:sldMkLst>
-      </pc:sldChg>
-      <pc:sldChg chg="add modTransition">
-        <pc:chgData name="Chris Moreh" userId="17b81281-9f29-44e0-9273-6dadbf6896a2" providerId="ADAL" clId="{1EFC5699-93E3-49C7-AE41-F6C8E20EB04E}" dt="2024-10-29T10:49:46.203" v="106"/>
-        <pc:sldMkLst>
-          <pc:docMk/>
-          <pc:sldMk cId="0" sldId="268"/>
-        </pc:sldMkLst>
-      </pc:sldChg>
-      <pc:sldChg chg="add modTransition">
-        <pc:chgData name="Chris Moreh" userId="17b81281-9f29-44e0-9273-6dadbf6896a2" providerId="ADAL" clId="{1EFC5699-93E3-49C7-AE41-F6C8E20EB04E}" dt="2024-10-29T10:49:46.203" v="106"/>
-        <pc:sldMkLst>
-          <pc:docMk/>
-          <pc:sldMk cId="0" sldId="270"/>
-        </pc:sldMkLst>
-      </pc:sldChg>
-      <pc:sldChg chg="add modTransition">
-        <pc:chgData name="Chris Moreh" userId="17b81281-9f29-44e0-9273-6dadbf6896a2" providerId="ADAL" clId="{1EFC5699-93E3-49C7-AE41-F6C8E20EB04E}" dt="2024-10-29T10:49:46.203" v="106"/>
-        <pc:sldMkLst>
-          <pc:docMk/>
-          <pc:sldMk cId="0" sldId="272"/>
-        </pc:sldMkLst>
-      </pc:sldChg>
-      <pc:sldChg chg="modSp add mod modTransition chgLayout">
-        <pc:chgData name="Chris Moreh" userId="17b81281-9f29-44e0-9273-6dadbf6896a2" providerId="ADAL" clId="{1EFC5699-93E3-49C7-AE41-F6C8E20EB04E}" dt="2024-10-29T10:53:40.376" v="162" actId="27636"/>
-        <pc:sldMkLst>
-          <pc:docMk/>
-          <pc:sldMk cId="0" sldId="273"/>
-        </pc:sldMkLst>
-        <pc:spChg chg="mod ord">
-          <ac:chgData name="Chris Moreh" userId="17b81281-9f29-44e0-9273-6dadbf6896a2" providerId="ADAL" clId="{1EFC5699-93E3-49C7-AE41-F6C8E20EB04E}" dt="2024-10-29T10:53:40.376" v="162" actId="27636"/>
-          <ac:spMkLst>
-            <pc:docMk/>
-            <pc:sldMk cId="0" sldId="273"/>
-            <ac:spMk id="2" creationId="{00000000-0000-0000-0000-000000000000}"/>
-          </ac:spMkLst>
-        </pc:spChg>
-        <pc:spChg chg="mod ord">
-          <ac:chgData name="Chris Moreh" userId="17b81281-9f29-44e0-9273-6dadbf6896a2" providerId="ADAL" clId="{1EFC5699-93E3-49C7-AE41-F6C8E20EB04E}" dt="2024-10-29T10:53:40.349" v="161" actId="700"/>
-          <ac:spMkLst>
-            <pc:docMk/>
-            <pc:sldMk cId="0" sldId="273"/>
-            <ac:spMk id="3" creationId="{00000000-0000-0000-0000-000000000000}"/>
-          </ac:spMkLst>
-        </pc:spChg>
-        <pc:spChg chg="mod ord">
-          <ac:chgData name="Chris Moreh" userId="17b81281-9f29-44e0-9273-6dadbf6896a2" providerId="ADAL" clId="{1EFC5699-93E3-49C7-AE41-F6C8E20EB04E}" dt="2024-10-29T10:53:40.349" v="161" actId="700"/>
-          <ac:spMkLst>
-            <pc:docMk/>
-            <pc:sldMk cId="0" sldId="273"/>
-            <ac:spMk id="5" creationId="{00000000-0000-0000-0000-000000000000}"/>
-          </ac:spMkLst>
-        </pc:spChg>
-        <pc:spChg chg="mod ord">
-          <ac:chgData name="Chris Moreh" userId="17b81281-9f29-44e0-9273-6dadbf6896a2" providerId="ADAL" clId="{1EFC5699-93E3-49C7-AE41-F6C8E20EB04E}" dt="2024-10-29T10:53:40.349" v="161" actId="700"/>
-          <ac:spMkLst>
-            <pc:docMk/>
-            <pc:sldMk cId="0" sldId="273"/>
-            <ac:spMk id="6" creationId="{00000000-0000-0000-0000-000000000000}"/>
-          </ac:spMkLst>
-        </pc:spChg>
-      </pc:sldChg>
-      <pc:sldChg chg="modSp add del mod">
-        <pc:chgData name="Chris Moreh" userId="17b81281-9f29-44e0-9273-6dadbf6896a2" providerId="ADAL" clId="{1EFC5699-93E3-49C7-AE41-F6C8E20EB04E}" dt="2024-10-29T10:36:37.943" v="48" actId="47"/>
-        <pc:sldMkLst>
-          <pc:docMk/>
-          <pc:sldMk cId="3814459198" sldId="307"/>
-        </pc:sldMkLst>
-        <pc:spChg chg="mod">
-          <ac:chgData name="Chris Moreh" userId="17b81281-9f29-44e0-9273-6dadbf6896a2" providerId="ADAL" clId="{1EFC5699-93E3-49C7-AE41-F6C8E20EB04E}" dt="2024-10-29T09:10:51.143" v="1" actId="20577"/>
-          <ac:spMkLst>
-            <pc:docMk/>
-            <pc:sldMk cId="3814459198" sldId="307"/>
-            <ac:spMk id="6" creationId="{24060982-6EE3-A8F1-75FE-C4BDB2FF3CBE}"/>
-          </ac:spMkLst>
-        </pc:spChg>
-        <pc:spChg chg="mod">
-          <ac:chgData name="Chris Moreh" userId="17b81281-9f29-44e0-9273-6dadbf6896a2" providerId="ADAL" clId="{1EFC5699-93E3-49C7-AE41-F6C8E20EB04E}" dt="2024-10-29T09:11:01.516" v="27" actId="20577"/>
-          <ac:spMkLst>
-            <pc:docMk/>
-            <pc:sldMk cId="3814459198" sldId="307"/>
-            <ac:spMk id="7" creationId="{E112B5B6-7C9E-9DE5-8D2C-13D42F1FBB68}"/>
-          </ac:spMkLst>
-        </pc:spChg>
-      </pc:sldChg>
-      <pc:sldChg chg="new del">
-        <pc:chgData name="Chris Moreh" userId="17b81281-9f29-44e0-9273-6dadbf6896a2" providerId="ADAL" clId="{1EFC5699-93E3-49C7-AE41-F6C8E20EB04E}" dt="2024-10-29T10:49:55.606" v="107" actId="47"/>
-        <pc:sldMkLst>
-          <pc:docMk/>
-          <pc:sldMk cId="2702943741" sldId="308"/>
-        </pc:sldMkLst>
-      </pc:sldChg>
-      <pc:sldChg chg="new del">
-        <pc:chgData name="Chris Moreh" userId="17b81281-9f29-44e0-9273-6dadbf6896a2" providerId="ADAL" clId="{1EFC5699-93E3-49C7-AE41-F6C8E20EB04E}" dt="2024-10-29T10:49:59.108" v="108" actId="47"/>
-        <pc:sldMkLst>
-          <pc:docMk/>
-          <pc:sldMk cId="941626176" sldId="309"/>
-        </pc:sldMkLst>
-      </pc:sldChg>
-      <pc:sldChg chg="modSp add mod modTransition chgLayout">
-        <pc:chgData name="Chris Moreh" userId="17b81281-9f29-44e0-9273-6dadbf6896a2" providerId="ADAL" clId="{1EFC5699-93E3-49C7-AE41-F6C8E20EB04E}" dt="2024-10-29T10:40:54.354" v="59" actId="14100"/>
-        <pc:sldMkLst>
-          <pc:docMk/>
-          <pc:sldMk cId="0" sldId="310"/>
-        </pc:sldMkLst>
-        <pc:spChg chg="mod ord">
-          <ac:chgData name="Chris Moreh" userId="17b81281-9f29-44e0-9273-6dadbf6896a2" providerId="ADAL" clId="{1EFC5699-93E3-49C7-AE41-F6C8E20EB04E}" dt="2024-10-29T10:40:47.833" v="58" actId="700"/>
-          <ac:spMkLst>
-            <pc:docMk/>
-            <pc:sldMk cId="0" sldId="310"/>
-            <ac:spMk id="2" creationId="{8C216D18-5879-951E-312D-F35B3AEFF7CC}"/>
-          </ac:spMkLst>
-        </pc:spChg>
-        <pc:spChg chg="mod ord">
-          <ac:chgData name="Chris Moreh" userId="17b81281-9f29-44e0-9273-6dadbf6896a2" providerId="ADAL" clId="{1EFC5699-93E3-49C7-AE41-F6C8E20EB04E}" dt="2024-10-29T10:40:54.354" v="59" actId="14100"/>
-          <ac:spMkLst>
-            <pc:docMk/>
-            <pc:sldMk cId="0" sldId="310"/>
-            <ac:spMk id="4" creationId="{824213AC-B520-1C10-5083-9B4C825E476E}"/>
-          </ac:spMkLst>
-        </pc:spChg>
-        <pc:spChg chg="mod ord">
-          <ac:chgData name="Chris Moreh" userId="17b81281-9f29-44e0-9273-6dadbf6896a2" providerId="ADAL" clId="{1EFC5699-93E3-49C7-AE41-F6C8E20EB04E}" dt="2024-10-29T10:40:47.833" v="58" actId="700"/>
-          <ac:spMkLst>
-            <pc:docMk/>
-            <pc:sldMk cId="0" sldId="310"/>
-            <ac:spMk id="5" creationId="{CC8FF6EA-8682-2BC8-E9B8-C6157593BBD6}"/>
-          </ac:spMkLst>
-        </pc:spChg>
-        <pc:spChg chg="mod ord">
-          <ac:chgData name="Chris Moreh" userId="17b81281-9f29-44e0-9273-6dadbf6896a2" providerId="ADAL" clId="{1EFC5699-93E3-49C7-AE41-F6C8E20EB04E}" dt="2024-10-29T10:40:47.833" v="58" actId="700"/>
-          <ac:spMkLst>
-            <pc:docMk/>
-            <pc:sldMk cId="0" sldId="310"/>
-            <ac:spMk id="6" creationId="{B44277B0-3AC5-0D62-7994-A671EFD6E93E}"/>
-          </ac:spMkLst>
-        </pc:spChg>
-      </pc:sldChg>
-      <pc:sldChg chg="del">
-        <pc:chgData name="Chris Moreh" userId="17b81281-9f29-44e0-9273-6dadbf6896a2" providerId="ADAL" clId="{1EFC5699-93E3-49C7-AE41-F6C8E20EB04E}" dt="2024-10-29T10:36:30.981" v="45" actId="47"/>
-        <pc:sldMkLst>
-          <pc:docMk/>
-          <pc:sldMk cId="253129452" sldId="354"/>
-        </pc:sldMkLst>
-      </pc:sldChg>
-      <pc:sldChg chg="del">
-        <pc:chgData name="Chris Moreh" userId="17b81281-9f29-44e0-9273-6dadbf6896a2" providerId="ADAL" clId="{1EFC5699-93E3-49C7-AE41-F6C8E20EB04E}" dt="2024-10-29T10:36:20.759" v="30" actId="47"/>
-        <pc:sldMkLst>
-          <pc:docMk/>
-          <pc:sldMk cId="3948964413" sldId="412"/>
-        </pc:sldMkLst>
-      </pc:sldChg>
-      <pc:sldChg chg="del">
-        <pc:chgData name="Chris Moreh" userId="17b81281-9f29-44e0-9273-6dadbf6896a2" providerId="ADAL" clId="{1EFC5699-93E3-49C7-AE41-F6C8E20EB04E}" dt="2024-10-29T10:36:21.255" v="31" actId="47"/>
-        <pc:sldMkLst>
-          <pc:docMk/>
-          <pc:sldMk cId="3393528998" sldId="413"/>
-        </pc:sldMkLst>
-      </pc:sldChg>
-      <pc:sldChg chg="del">
-        <pc:chgData name="Chris Moreh" userId="17b81281-9f29-44e0-9273-6dadbf6896a2" providerId="ADAL" clId="{1EFC5699-93E3-49C7-AE41-F6C8E20EB04E}" dt="2024-10-29T10:36:39.929" v="49" actId="47"/>
-        <pc:sldMkLst>
-          <pc:docMk/>
-          <pc:sldMk cId="950172282" sldId="415"/>
-        </pc:sldMkLst>
-      </pc:sldChg>
-      <pc:sldChg chg="del">
-        <pc:chgData name="Chris Moreh" userId="17b81281-9f29-44e0-9273-6dadbf6896a2" providerId="ADAL" clId="{1EFC5699-93E3-49C7-AE41-F6C8E20EB04E}" dt="2024-10-29T10:36:21.606" v="32" actId="47"/>
-        <pc:sldMkLst>
-          <pc:docMk/>
-          <pc:sldMk cId="2037983352" sldId="416"/>
-        </pc:sldMkLst>
-      </pc:sldChg>
-      <pc:sldChg chg="del">
-        <pc:chgData name="Chris Moreh" userId="17b81281-9f29-44e0-9273-6dadbf6896a2" providerId="ADAL" clId="{1EFC5699-93E3-49C7-AE41-F6C8E20EB04E}" dt="2024-10-29T10:36:21.928" v="33" actId="47"/>
-        <pc:sldMkLst>
-          <pc:docMk/>
-          <pc:sldMk cId="1943456012" sldId="417"/>
-        </pc:sldMkLst>
-      </pc:sldChg>
-      <pc:sldChg chg="del">
-        <pc:chgData name="Chris Moreh" userId="17b81281-9f29-44e0-9273-6dadbf6896a2" providerId="ADAL" clId="{1EFC5699-93E3-49C7-AE41-F6C8E20EB04E}" dt="2024-10-29T10:36:22.345" v="34" actId="47"/>
-        <pc:sldMkLst>
-          <pc:docMk/>
-          <pc:sldMk cId="2705663212" sldId="418"/>
-        </pc:sldMkLst>
-      </pc:sldChg>
-      <pc:sldChg chg="del">
-        <pc:chgData name="Chris Moreh" userId="17b81281-9f29-44e0-9273-6dadbf6896a2" providerId="ADAL" clId="{1EFC5699-93E3-49C7-AE41-F6C8E20EB04E}" dt="2024-10-29T10:36:22.823" v="35" actId="47"/>
-        <pc:sldMkLst>
-          <pc:docMk/>
-          <pc:sldMk cId="1566893143" sldId="419"/>
-        </pc:sldMkLst>
-      </pc:sldChg>
-      <pc:sldChg chg="del">
-        <pc:chgData name="Chris Moreh" userId="17b81281-9f29-44e0-9273-6dadbf6896a2" providerId="ADAL" clId="{1EFC5699-93E3-49C7-AE41-F6C8E20EB04E}" dt="2024-10-29T10:36:25.356" v="36" actId="47"/>
-        <pc:sldMkLst>
-          <pc:docMk/>
-          <pc:sldMk cId="502470957" sldId="420"/>
-        </pc:sldMkLst>
-      </pc:sldChg>
-      <pc:sldChg chg="del">
-        <pc:chgData name="Chris Moreh" userId="17b81281-9f29-44e0-9273-6dadbf6896a2" providerId="ADAL" clId="{1EFC5699-93E3-49C7-AE41-F6C8E20EB04E}" dt="2024-10-29T10:36:29.163" v="42" actId="47"/>
-        <pc:sldMkLst>
-          <pc:docMk/>
-          <pc:sldMk cId="483183442" sldId="422"/>
-        </pc:sldMkLst>
-      </pc:sldChg>
-      <pc:sldChg chg="del">
-        <pc:chgData name="Chris Moreh" userId="17b81281-9f29-44e0-9273-6dadbf6896a2" providerId="ADAL" clId="{1EFC5699-93E3-49C7-AE41-F6C8E20EB04E}" dt="2024-10-29T10:36:29.707" v="43" actId="47"/>
-        <pc:sldMkLst>
-          <pc:docMk/>
-          <pc:sldMk cId="872078687" sldId="423"/>
-        </pc:sldMkLst>
-      </pc:sldChg>
-      <pc:sldChg chg="del">
-        <pc:chgData name="Chris Moreh" userId="17b81281-9f29-44e0-9273-6dadbf6896a2" providerId="ADAL" clId="{1EFC5699-93E3-49C7-AE41-F6C8E20EB04E}" dt="2024-10-29T10:36:30.088" v="44" actId="47"/>
-        <pc:sldMkLst>
-          <pc:docMk/>
-          <pc:sldMk cId="1719150483" sldId="425"/>
-        </pc:sldMkLst>
-      </pc:sldChg>
-      <pc:sldChg chg="del">
-        <pc:chgData name="Chris Moreh" userId="17b81281-9f29-44e0-9273-6dadbf6896a2" providerId="ADAL" clId="{1EFC5699-93E3-49C7-AE41-F6C8E20EB04E}" dt="2024-10-29T10:36:18.258" v="28" actId="47"/>
-        <pc:sldMkLst>
-          <pc:docMk/>
-          <pc:sldMk cId="3672351687" sldId="522"/>
-        </pc:sldMkLst>
-      </pc:sldChg>
-      <pc:sldChg chg="del">
-        <pc:chgData name="Chris Moreh" userId="17b81281-9f29-44e0-9273-6dadbf6896a2" providerId="ADAL" clId="{1EFC5699-93E3-49C7-AE41-F6C8E20EB04E}" dt="2024-10-29T10:36:31.581" v="46" actId="47"/>
-        <pc:sldMkLst>
-          <pc:docMk/>
-          <pc:sldMk cId="1301853266" sldId="523"/>
-        </pc:sldMkLst>
-      </pc:sldChg>
-      <pc:sldChg chg="modSp add mod">
-        <pc:chgData name="Chris Moreh" userId="17b81281-9f29-44e0-9273-6dadbf6896a2" providerId="ADAL" clId="{1EFC5699-93E3-49C7-AE41-F6C8E20EB04E}" dt="2024-10-29T10:47:40.117" v="104" actId="1076"/>
-        <pc:sldMkLst>
-          <pc:docMk/>
-          <pc:sldMk cId="1599904202" sldId="555"/>
-        </pc:sldMkLst>
-        <pc:picChg chg="mod">
-          <ac:chgData name="Chris Moreh" userId="17b81281-9f29-44e0-9273-6dadbf6896a2" providerId="ADAL" clId="{1EFC5699-93E3-49C7-AE41-F6C8E20EB04E}" dt="2024-10-29T10:47:40.117" v="104" actId="1076"/>
-          <ac:picMkLst>
-            <pc:docMk/>
-            <pc:sldMk cId="1599904202" sldId="555"/>
-            <ac:picMk id="19" creationId="{EA86AE07-9CAC-985C-B0F1-AA1EC47BEB87}"/>
-          </ac:picMkLst>
-        </pc:picChg>
-      </pc:sldChg>
-      <pc:sldChg chg="delSp add del mod delAnim">
-        <pc:chgData name="Chris Moreh" userId="17b81281-9f29-44e0-9273-6dadbf6896a2" providerId="ADAL" clId="{1EFC5699-93E3-49C7-AE41-F6C8E20EB04E}" dt="2024-10-29T10:45:12.977" v="97" actId="2696"/>
-        <pc:sldMkLst>
-          <pc:docMk/>
-          <pc:sldMk cId="3804936684" sldId="555"/>
-        </pc:sldMkLst>
-        <pc:spChg chg="del">
-          <ac:chgData name="Chris Moreh" userId="17b81281-9f29-44e0-9273-6dadbf6896a2" providerId="ADAL" clId="{1EFC5699-93E3-49C7-AE41-F6C8E20EB04E}" dt="2024-10-29T10:42:44.135" v="62" actId="478"/>
-          <ac:spMkLst>
-            <pc:docMk/>
-            <pc:sldMk cId="3804936684" sldId="555"/>
-            <ac:spMk id="3" creationId="{AE7E3ACF-D4C3-2502-17F0-03F90D66731A}"/>
-          </ac:spMkLst>
-        </pc:spChg>
-      </pc:sldChg>
-      <pc:sldChg chg="addSp delSp add mod">
-        <pc:chgData name="Chris Moreh" userId="17b81281-9f29-44e0-9273-6dadbf6896a2" providerId="ADAL" clId="{1EFC5699-93E3-49C7-AE41-F6C8E20EB04E}" dt="2024-10-29T10:47:44.182" v="105" actId="478"/>
-        <pc:sldMkLst>
-          <pc:docMk/>
-          <pc:sldMk cId="220841069" sldId="556"/>
-        </pc:sldMkLst>
-        <pc:picChg chg="add del">
-          <ac:chgData name="Chris Moreh" userId="17b81281-9f29-44e0-9273-6dadbf6896a2" providerId="ADAL" clId="{1EFC5699-93E3-49C7-AE41-F6C8E20EB04E}" dt="2024-10-29T10:47:44.182" v="105" actId="478"/>
-          <ac:picMkLst>
-            <pc:docMk/>
-            <pc:sldMk cId="220841069" sldId="556"/>
-            <ac:picMk id="19" creationId="{EA86AE07-9CAC-985C-B0F1-AA1EC47BEB87}"/>
-          </ac:picMkLst>
-        </pc:picChg>
-      </pc:sldChg>
-      <pc:sldChg chg="add del">
-        <pc:chgData name="Chris Moreh" userId="17b81281-9f29-44e0-9273-6dadbf6896a2" providerId="ADAL" clId="{1EFC5699-93E3-49C7-AE41-F6C8E20EB04E}" dt="2024-10-29T10:45:12.977" v="97" actId="2696"/>
-        <pc:sldMkLst>
-          <pc:docMk/>
-          <pc:sldMk cId="4120332946" sldId="556"/>
-        </pc:sldMkLst>
-      </pc:sldChg>
-      <pc:sldChg chg="modSp new mod">
-        <pc:chgData name="Chris Moreh" userId="17b81281-9f29-44e0-9273-6dadbf6896a2" providerId="ADAL" clId="{1EFC5699-93E3-49C7-AE41-F6C8E20EB04E}" dt="2024-10-29T10:53:33.949" v="160"/>
-        <pc:sldMkLst>
-          <pc:docMk/>
-          <pc:sldMk cId="1085106449" sldId="557"/>
-        </pc:sldMkLst>
-        <pc:spChg chg="mod">
-          <ac:chgData name="Chris Moreh" userId="17b81281-9f29-44e0-9273-6dadbf6896a2" providerId="ADAL" clId="{1EFC5699-93E3-49C7-AE41-F6C8E20EB04E}" dt="2024-10-29T10:53:33.949" v="160"/>
-          <ac:spMkLst>
-            <pc:docMk/>
-            <pc:sldMk cId="1085106449" sldId="557"/>
-            <ac:spMk id="2" creationId="{63D56104-5C50-972F-E964-7953936144E7}"/>
-          </ac:spMkLst>
-        </pc:spChg>
-        <pc:spChg chg="mod">
-          <ac:chgData name="Chris Moreh" userId="17b81281-9f29-44e0-9273-6dadbf6896a2" providerId="ADAL" clId="{1EFC5699-93E3-49C7-AE41-F6C8E20EB04E}" dt="2024-10-29T10:53:21.441" v="159" actId="5793"/>
-          <ac:spMkLst>
-            <pc:docMk/>
-            <pc:sldMk cId="1085106449" sldId="557"/>
-            <ac:spMk id="3" creationId="{7C293158-B3FE-4B91-C71C-9777D9AD94D2}"/>
-          </ac:spMkLst>
-        </pc:spChg>
-      </pc:sldChg>
-      <pc:sldChg chg="add del">
-        <pc:chgData name="Chris Moreh" userId="17b81281-9f29-44e0-9273-6dadbf6896a2" providerId="ADAL" clId="{1EFC5699-93E3-49C7-AE41-F6C8E20EB04E}" dt="2024-10-29T10:44:06.264" v="68"/>
-        <pc:sldMkLst>
-          <pc:docMk/>
-          <pc:sldMk cId="2763157886" sldId="557"/>
-        </pc:sldMkLst>
-      </pc:sldChg>
-      <pc:sldChg chg="add del">
-        <pc:chgData name="Chris Moreh" userId="17b81281-9f29-44e0-9273-6dadbf6896a2" providerId="ADAL" clId="{1EFC5699-93E3-49C7-AE41-F6C8E20EB04E}" dt="2024-10-29T10:44:06.264" v="68"/>
-        <pc:sldMkLst>
-          <pc:docMk/>
-          <pc:sldMk cId="3602405105" sldId="558"/>
-        </pc:sldMkLst>
-      </pc:sldChg>
-      <pc:sldChg chg="modSp add mod">
-        <pc:chgData name="Chris Moreh" userId="17b81281-9f29-44e0-9273-6dadbf6896a2" providerId="ADAL" clId="{1EFC5699-93E3-49C7-AE41-F6C8E20EB04E}" dt="2024-10-29T10:56:12.128" v="224" actId="20577"/>
+        <pc:chgData name="Chris Moreh" userId="17b81281-9f29-44e0-9273-6dadbf6896a2" providerId="ADAL" clId="{BCF66164-2C9C-4B48-AFF3-6B0B0038345A}" dt="2025-12-05T14:58:21.277" v="8" actId="6549"/>
         <pc:sldMkLst>
           <pc:docMk/>
           <pc:sldMk cId="3722870570" sldId="558"/>
         </pc:sldMkLst>
         <pc:spChg chg="mod">
-          <ac:chgData name="Chris Moreh" userId="17b81281-9f29-44e0-9273-6dadbf6896a2" providerId="ADAL" clId="{1EFC5699-93E3-49C7-AE41-F6C8E20EB04E}" dt="2024-10-29T10:56:12.128" v="224" actId="20577"/>
+          <ac:chgData name="Chris Moreh" userId="17b81281-9f29-44e0-9273-6dadbf6896a2" providerId="ADAL" clId="{BCF66164-2C9C-4B48-AFF3-6B0B0038345A}" dt="2025-12-05T14:58:21.277" v="8" actId="6549"/>
           <ac:spMkLst>
             <pc:docMk/>
             <pc:sldMk cId="3722870570" sldId="558"/>
@@ -2230,14 +163,14 @@
           </ac:spMkLst>
         </pc:spChg>
       </pc:sldChg>
-      <pc:sldChg chg="modSp add mod">
-        <pc:chgData name="Chris Moreh" userId="17b81281-9f29-44e0-9273-6dadbf6896a2" providerId="ADAL" clId="{1EFC5699-93E3-49C7-AE41-F6C8E20EB04E}" dt="2024-10-29T10:59:08.593" v="263" actId="255"/>
+      <pc:sldChg chg="modSp mod">
+        <pc:chgData name="Chris Moreh" userId="17b81281-9f29-44e0-9273-6dadbf6896a2" providerId="ADAL" clId="{BCF66164-2C9C-4B48-AFF3-6B0B0038345A}" dt="2025-12-05T14:56:51.380" v="3" actId="113"/>
         <pc:sldMkLst>
           <pc:docMk/>
           <pc:sldMk cId="518544894" sldId="559"/>
         </pc:sldMkLst>
         <pc:spChg chg="mod">
-          <ac:chgData name="Chris Moreh" userId="17b81281-9f29-44e0-9273-6dadbf6896a2" providerId="ADAL" clId="{1EFC5699-93E3-49C7-AE41-F6C8E20EB04E}" dt="2024-10-29T10:59:08.593" v="263" actId="255"/>
+          <ac:chgData name="Chris Moreh" userId="17b81281-9f29-44e0-9273-6dadbf6896a2" providerId="ADAL" clId="{BCF66164-2C9C-4B48-AFF3-6B0B0038345A}" dt="2025-12-05T14:56:51.380" v="3" actId="113"/>
           <ac:spMkLst>
             <pc:docMk/>
             <pc:sldMk cId="518544894" sldId="559"/>
@@ -2245,4251 +178,6 @@
           </ac:spMkLst>
         </pc:spChg>
       </pc:sldChg>
-      <pc:sldChg chg="del">
-        <pc:chgData name="Chris Moreh" userId="17b81281-9f29-44e0-9273-6dadbf6896a2" providerId="ADAL" clId="{1EFC5699-93E3-49C7-AE41-F6C8E20EB04E}" dt="2024-10-29T10:36:19.488" v="29" actId="47"/>
-        <pc:sldMkLst>
-          <pc:docMk/>
-          <pc:sldMk cId="1190259186" sldId="565"/>
-        </pc:sldMkLst>
-      </pc:sldChg>
-      <pc:sldChg chg="del">
-        <pc:chgData name="Chris Moreh" userId="17b81281-9f29-44e0-9273-6dadbf6896a2" providerId="ADAL" clId="{1EFC5699-93E3-49C7-AE41-F6C8E20EB04E}" dt="2024-10-29T10:36:27.503" v="39" actId="47"/>
-        <pc:sldMkLst>
-          <pc:docMk/>
-          <pc:sldMk cId="0" sldId="569"/>
-        </pc:sldMkLst>
-      </pc:sldChg>
-    </pc:docChg>
-  </pc:docChgLst>
-  <pc:docChgLst>
-    <pc:chgData name="Chris Moreh" userId="17b81281-9f29-44e0-9273-6dadbf6896a2" providerId="ADAL" clId="{C881F287-C991-44D9-941D-31328D1263EC}"/>
-    <pc:docChg chg="undo custSel addSld delSld modSld sldOrd modMainMaster">
-      <pc:chgData name="Chris Moreh" userId="17b81281-9f29-44e0-9273-6dadbf6896a2" providerId="ADAL" clId="{C881F287-C991-44D9-941D-31328D1263EC}" dt="2024-10-08T10:04:06.836" v="1537" actId="113"/>
-      <pc:docMkLst>
-        <pc:docMk/>
-      </pc:docMkLst>
-      <pc:sldChg chg="add modTransition">
-        <pc:chgData name="Chris Moreh" userId="17b81281-9f29-44e0-9273-6dadbf6896a2" providerId="ADAL" clId="{C881F287-C991-44D9-941D-31328D1263EC}" dt="2024-10-08T10:01:11.260" v="1487"/>
-        <pc:sldMkLst>
-          <pc:docMk/>
-          <pc:sldMk cId="0" sldId="267"/>
-        </pc:sldMkLst>
-      </pc:sldChg>
-      <pc:sldChg chg="add modTransition">
-        <pc:chgData name="Chris Moreh" userId="17b81281-9f29-44e0-9273-6dadbf6896a2" providerId="ADAL" clId="{C881F287-C991-44D9-941D-31328D1263EC}" dt="2024-10-08T10:01:11.260" v="1487"/>
-        <pc:sldMkLst>
-          <pc:docMk/>
-          <pc:sldMk cId="0" sldId="268"/>
-        </pc:sldMkLst>
-      </pc:sldChg>
-      <pc:sldChg chg="del">
-        <pc:chgData name="Chris Moreh" userId="17b81281-9f29-44e0-9273-6dadbf6896a2" providerId="ADAL" clId="{C881F287-C991-44D9-941D-31328D1263EC}" dt="2024-10-08T09:51:12.202" v="1360" actId="47"/>
-        <pc:sldMkLst>
-          <pc:docMk/>
-          <pc:sldMk cId="1913316541" sldId="268"/>
-        </pc:sldMkLst>
-      </pc:sldChg>
-      <pc:sldChg chg="add modTransition">
-        <pc:chgData name="Chris Moreh" userId="17b81281-9f29-44e0-9273-6dadbf6896a2" providerId="ADAL" clId="{C881F287-C991-44D9-941D-31328D1263EC}" dt="2024-10-08T10:01:11.260" v="1487"/>
-        <pc:sldMkLst>
-          <pc:docMk/>
-          <pc:sldMk cId="0" sldId="269"/>
-        </pc:sldMkLst>
-      </pc:sldChg>
-      <pc:sldChg chg="add modTransition">
-        <pc:chgData name="Chris Moreh" userId="17b81281-9f29-44e0-9273-6dadbf6896a2" providerId="ADAL" clId="{C881F287-C991-44D9-941D-31328D1263EC}" dt="2024-10-08T10:01:11.260" v="1487"/>
-        <pc:sldMkLst>
-          <pc:docMk/>
-          <pc:sldMk cId="0" sldId="270"/>
-        </pc:sldMkLst>
-      </pc:sldChg>
-      <pc:sldChg chg="add modTransition">
-        <pc:chgData name="Chris Moreh" userId="17b81281-9f29-44e0-9273-6dadbf6896a2" providerId="ADAL" clId="{C881F287-C991-44D9-941D-31328D1263EC}" dt="2024-10-08T10:01:11.260" v="1487"/>
-        <pc:sldMkLst>
-          <pc:docMk/>
-          <pc:sldMk cId="0" sldId="272"/>
-        </pc:sldMkLst>
-      </pc:sldChg>
-      <pc:sldChg chg="add modTransition">
-        <pc:chgData name="Chris Moreh" userId="17b81281-9f29-44e0-9273-6dadbf6896a2" providerId="ADAL" clId="{C881F287-C991-44D9-941D-31328D1263EC}" dt="2024-10-08T10:01:11.260" v="1487"/>
-        <pc:sldMkLst>
-          <pc:docMk/>
-          <pc:sldMk cId="0" sldId="273"/>
-        </pc:sldMkLst>
-      </pc:sldChg>
-      <pc:sldChg chg="modSp add mod modTransition modClrScheme chgLayout">
-        <pc:chgData name="Chris Moreh" userId="17b81281-9f29-44e0-9273-6dadbf6896a2" providerId="ADAL" clId="{C881F287-C991-44D9-941D-31328D1263EC}" dt="2024-10-08T09:55:06.055" v="1401" actId="1076"/>
-        <pc:sldMkLst>
-          <pc:docMk/>
-          <pc:sldMk cId="1836731351" sldId="289"/>
-        </pc:sldMkLst>
-        <pc:spChg chg="mod ord">
-          <ac:chgData name="Chris Moreh" userId="17b81281-9f29-44e0-9273-6dadbf6896a2" providerId="ADAL" clId="{C881F287-C991-44D9-941D-31328D1263EC}" dt="2024-10-08T09:55:00.779" v="1399" actId="27636"/>
-          <ac:spMkLst>
-            <pc:docMk/>
-            <pc:sldMk cId="1836731351" sldId="289"/>
-            <ac:spMk id="2" creationId="{00000000-0000-0000-0000-000000000000}"/>
-          </ac:spMkLst>
-        </pc:spChg>
-        <pc:spChg chg="mod ord">
-          <ac:chgData name="Chris Moreh" userId="17b81281-9f29-44e0-9273-6dadbf6896a2" providerId="ADAL" clId="{C881F287-C991-44D9-941D-31328D1263EC}" dt="2024-10-08T09:55:00.763" v="1398" actId="700"/>
-          <ac:spMkLst>
-            <pc:docMk/>
-            <pc:sldMk cId="1836731351" sldId="289"/>
-            <ac:spMk id="5" creationId="{00000000-0000-0000-0000-000000000000}"/>
-          </ac:spMkLst>
-        </pc:spChg>
-        <pc:spChg chg="mod ord">
-          <ac:chgData name="Chris Moreh" userId="17b81281-9f29-44e0-9273-6dadbf6896a2" providerId="ADAL" clId="{C881F287-C991-44D9-941D-31328D1263EC}" dt="2024-10-08T09:55:00.763" v="1398" actId="700"/>
-          <ac:spMkLst>
-            <pc:docMk/>
-            <pc:sldMk cId="1836731351" sldId="289"/>
-            <ac:spMk id="6" creationId="{00000000-0000-0000-0000-000000000000}"/>
-          </ac:spMkLst>
-        </pc:spChg>
-        <pc:picChg chg="mod">
-          <ac:chgData name="Chris Moreh" userId="17b81281-9f29-44e0-9273-6dadbf6896a2" providerId="ADAL" clId="{C881F287-C991-44D9-941D-31328D1263EC}" dt="2024-10-08T09:55:06.055" v="1401" actId="1076"/>
-          <ac:picMkLst>
-            <pc:docMk/>
-            <pc:sldMk cId="1836731351" sldId="289"/>
-            <ac:picMk id="3" creationId="{5790DE78-5D91-9447-BF0B-96D4A9DBCF72}"/>
-          </ac:picMkLst>
-        </pc:picChg>
-      </pc:sldChg>
-      <pc:sldChg chg="modSp add mod modTransition modClrScheme chgLayout">
-        <pc:chgData name="Chris Moreh" userId="17b81281-9f29-44e0-9273-6dadbf6896a2" providerId="ADAL" clId="{C881F287-C991-44D9-941D-31328D1263EC}" dt="2024-10-08T09:55:14.119" v="1405" actId="1076"/>
-        <pc:sldMkLst>
-          <pc:docMk/>
-          <pc:sldMk cId="2510649881" sldId="290"/>
-        </pc:sldMkLst>
-        <pc:spChg chg="mod ord">
-          <ac:chgData name="Chris Moreh" userId="17b81281-9f29-44e0-9273-6dadbf6896a2" providerId="ADAL" clId="{C881F287-C991-44D9-941D-31328D1263EC}" dt="2024-10-08T09:55:10.288" v="1403" actId="27636"/>
-          <ac:spMkLst>
-            <pc:docMk/>
-            <pc:sldMk cId="2510649881" sldId="290"/>
-            <ac:spMk id="2" creationId="{00000000-0000-0000-0000-000000000000}"/>
-          </ac:spMkLst>
-        </pc:spChg>
-        <pc:spChg chg="mod ord">
-          <ac:chgData name="Chris Moreh" userId="17b81281-9f29-44e0-9273-6dadbf6896a2" providerId="ADAL" clId="{C881F287-C991-44D9-941D-31328D1263EC}" dt="2024-10-08T09:55:10.270" v="1402" actId="700"/>
-          <ac:spMkLst>
-            <pc:docMk/>
-            <pc:sldMk cId="2510649881" sldId="290"/>
-            <ac:spMk id="5" creationId="{00000000-0000-0000-0000-000000000000}"/>
-          </ac:spMkLst>
-        </pc:spChg>
-        <pc:spChg chg="mod ord">
-          <ac:chgData name="Chris Moreh" userId="17b81281-9f29-44e0-9273-6dadbf6896a2" providerId="ADAL" clId="{C881F287-C991-44D9-941D-31328D1263EC}" dt="2024-10-08T09:55:10.270" v="1402" actId="700"/>
-          <ac:spMkLst>
-            <pc:docMk/>
-            <pc:sldMk cId="2510649881" sldId="290"/>
-            <ac:spMk id="6" creationId="{00000000-0000-0000-0000-000000000000}"/>
-          </ac:spMkLst>
-        </pc:spChg>
-        <pc:picChg chg="mod">
-          <ac:chgData name="Chris Moreh" userId="17b81281-9f29-44e0-9273-6dadbf6896a2" providerId="ADAL" clId="{C881F287-C991-44D9-941D-31328D1263EC}" dt="2024-10-08T09:55:14.119" v="1405" actId="1076"/>
-          <ac:picMkLst>
-            <pc:docMk/>
-            <pc:sldMk cId="2510649881" sldId="290"/>
-            <ac:picMk id="4" creationId="{BBC67004-7023-2934-B9CC-E419109BD817}"/>
-          </ac:picMkLst>
-        </pc:picChg>
-      </pc:sldChg>
-      <pc:sldChg chg="modSp mod">
-        <pc:chgData name="Chris Moreh" userId="17b81281-9f29-44e0-9273-6dadbf6896a2" providerId="ADAL" clId="{C881F287-C991-44D9-941D-31328D1263EC}" dt="2024-10-08T07:19:01.914" v="56" actId="20577"/>
-        <pc:sldMkLst>
-          <pc:docMk/>
-          <pc:sldMk cId="3814459198" sldId="307"/>
-        </pc:sldMkLst>
-        <pc:spChg chg="mod">
-          <ac:chgData name="Chris Moreh" userId="17b81281-9f29-44e0-9273-6dadbf6896a2" providerId="ADAL" clId="{C881F287-C991-44D9-941D-31328D1263EC}" dt="2024-10-08T07:18:32.371" v="1" actId="20577"/>
-          <ac:spMkLst>
-            <pc:docMk/>
-            <pc:sldMk cId="3814459198" sldId="307"/>
-            <ac:spMk id="6" creationId="{24060982-6EE3-A8F1-75FE-C4BDB2FF3CBE}"/>
-          </ac:spMkLst>
-        </pc:spChg>
-        <pc:spChg chg="mod">
-          <ac:chgData name="Chris Moreh" userId="17b81281-9f29-44e0-9273-6dadbf6896a2" providerId="ADAL" clId="{C881F287-C991-44D9-941D-31328D1263EC}" dt="2024-10-08T07:19:01.914" v="56" actId="20577"/>
-          <ac:spMkLst>
-            <pc:docMk/>
-            <pc:sldMk cId="3814459198" sldId="307"/>
-            <ac:spMk id="7" creationId="{E112B5B6-7C9E-9DE5-8D2C-13D42F1FBB68}"/>
-          </ac:spMkLst>
-        </pc:spChg>
-      </pc:sldChg>
-      <pc:sldChg chg="del">
-        <pc:chgData name="Chris Moreh" userId="17b81281-9f29-44e0-9273-6dadbf6896a2" providerId="ADAL" clId="{C881F287-C991-44D9-941D-31328D1263EC}" dt="2024-10-08T09:50:53.105" v="1350" actId="47"/>
-        <pc:sldMkLst>
-          <pc:docMk/>
-          <pc:sldMk cId="789519299" sldId="308"/>
-        </pc:sldMkLst>
-      </pc:sldChg>
-      <pc:sldChg chg="del">
-        <pc:chgData name="Chris Moreh" userId="17b81281-9f29-44e0-9273-6dadbf6896a2" providerId="ADAL" clId="{C881F287-C991-44D9-941D-31328D1263EC}" dt="2024-10-08T09:50:54.595" v="1352" actId="47"/>
-        <pc:sldMkLst>
-          <pc:docMk/>
-          <pc:sldMk cId="139448700" sldId="309"/>
-        </pc:sldMkLst>
-      </pc:sldChg>
-      <pc:sldChg chg="del">
-        <pc:chgData name="Chris Moreh" userId="17b81281-9f29-44e0-9273-6dadbf6896a2" providerId="ADAL" clId="{C881F287-C991-44D9-941D-31328D1263EC}" dt="2024-10-08T09:51:02.506" v="1355" actId="47"/>
-        <pc:sldMkLst>
-          <pc:docMk/>
-          <pc:sldMk cId="898458003" sldId="310"/>
-        </pc:sldMkLst>
-      </pc:sldChg>
-      <pc:sldChg chg="del">
-        <pc:chgData name="Chris Moreh" userId="17b81281-9f29-44e0-9273-6dadbf6896a2" providerId="ADAL" clId="{C881F287-C991-44D9-941D-31328D1263EC}" dt="2024-10-08T09:50:53.872" v="1351" actId="47"/>
-        <pc:sldMkLst>
-          <pc:docMk/>
-          <pc:sldMk cId="1606940730" sldId="311"/>
-        </pc:sldMkLst>
-      </pc:sldChg>
-      <pc:sldChg chg="del">
-        <pc:chgData name="Chris Moreh" userId="17b81281-9f29-44e0-9273-6dadbf6896a2" providerId="ADAL" clId="{C881F287-C991-44D9-941D-31328D1263EC}" dt="2024-10-08T09:51:13.846" v="1361" actId="47"/>
-        <pc:sldMkLst>
-          <pc:docMk/>
-          <pc:sldMk cId="966591019" sldId="319"/>
-        </pc:sldMkLst>
-      </pc:sldChg>
-      <pc:sldChg chg="del">
-        <pc:chgData name="Chris Moreh" userId="17b81281-9f29-44e0-9273-6dadbf6896a2" providerId="ADAL" clId="{C881F287-C991-44D9-941D-31328D1263EC}" dt="2024-10-08T09:51:14.863" v="1362" actId="47"/>
-        <pc:sldMkLst>
-          <pc:docMk/>
-          <pc:sldMk cId="717278951" sldId="321"/>
-        </pc:sldMkLst>
-      </pc:sldChg>
-      <pc:sldChg chg="del">
-        <pc:chgData name="Chris Moreh" userId="17b81281-9f29-44e0-9273-6dadbf6896a2" providerId="ADAL" clId="{C881F287-C991-44D9-941D-31328D1263EC}" dt="2024-10-08T09:52:00.658" v="1384" actId="47"/>
-        <pc:sldMkLst>
-          <pc:docMk/>
-          <pc:sldMk cId="3603256477" sldId="327"/>
-        </pc:sldMkLst>
-      </pc:sldChg>
-      <pc:sldChg chg="del">
-        <pc:chgData name="Chris Moreh" userId="17b81281-9f29-44e0-9273-6dadbf6896a2" providerId="ADAL" clId="{C881F287-C991-44D9-941D-31328D1263EC}" dt="2024-10-08T09:51:25.366" v="1375" actId="47"/>
-        <pc:sldMkLst>
-          <pc:docMk/>
-          <pc:sldMk cId="322052598" sldId="331"/>
-        </pc:sldMkLst>
-      </pc:sldChg>
-      <pc:sldChg chg="del">
-        <pc:chgData name="Chris Moreh" userId="17b81281-9f29-44e0-9273-6dadbf6896a2" providerId="ADAL" clId="{C881F287-C991-44D9-941D-31328D1263EC}" dt="2024-10-08T09:51:26.076" v="1376" actId="47"/>
-        <pc:sldMkLst>
-          <pc:docMk/>
-          <pc:sldMk cId="3383856965" sldId="332"/>
-        </pc:sldMkLst>
-      </pc:sldChg>
-      <pc:sldChg chg="del">
-        <pc:chgData name="Chris Moreh" userId="17b81281-9f29-44e0-9273-6dadbf6896a2" providerId="ADAL" clId="{C881F287-C991-44D9-941D-31328D1263EC}" dt="2024-10-08T09:51:15.783" v="1363" actId="47"/>
-        <pc:sldMkLst>
-          <pc:docMk/>
-          <pc:sldMk cId="3992132808" sldId="336"/>
-        </pc:sldMkLst>
-      </pc:sldChg>
-      <pc:sldChg chg="del">
-        <pc:chgData name="Chris Moreh" userId="17b81281-9f29-44e0-9273-6dadbf6896a2" providerId="ADAL" clId="{C881F287-C991-44D9-941D-31328D1263EC}" dt="2024-10-08T09:51:21.624" v="1371" actId="47"/>
-        <pc:sldMkLst>
-          <pc:docMk/>
-          <pc:sldMk cId="898719641" sldId="337"/>
-        </pc:sldMkLst>
-      </pc:sldChg>
-      <pc:sldChg chg="del">
-        <pc:chgData name="Chris Moreh" userId="17b81281-9f29-44e0-9273-6dadbf6896a2" providerId="ADAL" clId="{C881F287-C991-44D9-941D-31328D1263EC}" dt="2024-10-08T09:51:28.868" v="1381" actId="47"/>
-        <pc:sldMkLst>
-          <pc:docMk/>
-          <pc:sldMk cId="1888377005" sldId="338"/>
-        </pc:sldMkLst>
-      </pc:sldChg>
-      <pc:sldChg chg="del">
-        <pc:chgData name="Chris Moreh" userId="17b81281-9f29-44e0-9273-6dadbf6896a2" providerId="ADAL" clId="{C881F287-C991-44D9-941D-31328D1263EC}" dt="2024-10-08T09:51:06.990" v="1358" actId="47"/>
-        <pc:sldMkLst>
-          <pc:docMk/>
-          <pc:sldMk cId="269492429" sldId="342"/>
-        </pc:sldMkLst>
-      </pc:sldChg>
-      <pc:sldChg chg="del">
-        <pc:chgData name="Chris Moreh" userId="17b81281-9f29-44e0-9273-6dadbf6896a2" providerId="ADAL" clId="{C881F287-C991-44D9-941D-31328D1263EC}" dt="2024-10-08T09:50:57.674" v="1353" actId="47"/>
-        <pc:sldMkLst>
-          <pc:docMk/>
-          <pc:sldMk cId="2967270402" sldId="352"/>
-        </pc:sldMkLst>
-      </pc:sldChg>
-      <pc:sldChg chg="del">
-        <pc:chgData name="Chris Moreh" userId="17b81281-9f29-44e0-9273-6dadbf6896a2" providerId="ADAL" clId="{C881F287-C991-44D9-941D-31328D1263EC}" dt="2024-10-08T09:51:00.187" v="1354" actId="47"/>
-        <pc:sldMkLst>
-          <pc:docMk/>
-          <pc:sldMk cId="1562431172" sldId="353"/>
-        </pc:sldMkLst>
-      </pc:sldChg>
-      <pc:sldChg chg="del">
-        <pc:chgData name="Chris Moreh" userId="17b81281-9f29-44e0-9273-6dadbf6896a2" providerId="ADAL" clId="{C881F287-C991-44D9-941D-31328D1263EC}" dt="2024-10-08T09:51:10.024" v="1359" actId="47"/>
-        <pc:sldMkLst>
-          <pc:docMk/>
-          <pc:sldMk cId="2041529945" sldId="355"/>
-        </pc:sldMkLst>
-      </pc:sldChg>
-      <pc:sldChg chg="del">
-        <pc:chgData name="Chris Moreh" userId="17b81281-9f29-44e0-9273-6dadbf6896a2" providerId="ADAL" clId="{C881F287-C991-44D9-941D-31328D1263EC}" dt="2024-10-08T09:51:03.666" v="1356" actId="47"/>
-        <pc:sldMkLst>
-          <pc:docMk/>
-          <pc:sldMk cId="1063371618" sldId="356"/>
-        </pc:sldMkLst>
-      </pc:sldChg>
-      <pc:sldChg chg="del">
-        <pc:chgData name="Chris Moreh" userId="17b81281-9f29-44e0-9273-6dadbf6896a2" providerId="ADAL" clId="{C881F287-C991-44D9-941D-31328D1263EC}" dt="2024-10-08T09:51:04.669" v="1357" actId="47"/>
-        <pc:sldMkLst>
-          <pc:docMk/>
-          <pc:sldMk cId="3565505821" sldId="357"/>
-        </pc:sldMkLst>
-      </pc:sldChg>
-      <pc:sldChg chg="del">
-        <pc:chgData name="Chris Moreh" userId="17b81281-9f29-44e0-9273-6dadbf6896a2" providerId="ADAL" clId="{C881F287-C991-44D9-941D-31328D1263EC}" dt="2024-10-08T09:51:16.611" v="1364" actId="47"/>
-        <pc:sldMkLst>
-          <pc:docMk/>
-          <pc:sldMk cId="4042714575" sldId="359"/>
-        </pc:sldMkLst>
-      </pc:sldChg>
-      <pc:sldChg chg="del">
-        <pc:chgData name="Chris Moreh" userId="17b81281-9f29-44e0-9273-6dadbf6896a2" providerId="ADAL" clId="{C881F287-C991-44D9-941D-31328D1263EC}" dt="2024-10-08T09:51:18.808" v="1366" actId="47"/>
-        <pc:sldMkLst>
-          <pc:docMk/>
-          <pc:sldMk cId="4149568844" sldId="360"/>
-        </pc:sldMkLst>
-      </pc:sldChg>
-      <pc:sldChg chg="del">
-        <pc:chgData name="Chris Moreh" userId="17b81281-9f29-44e0-9273-6dadbf6896a2" providerId="ADAL" clId="{C881F287-C991-44D9-941D-31328D1263EC}" dt="2024-10-08T09:51:17.775" v="1365" actId="47"/>
-        <pc:sldMkLst>
-          <pc:docMk/>
-          <pc:sldMk cId="3726797516" sldId="361"/>
-        </pc:sldMkLst>
-      </pc:sldChg>
-      <pc:sldChg chg="del">
-        <pc:chgData name="Chris Moreh" userId="17b81281-9f29-44e0-9273-6dadbf6896a2" providerId="ADAL" clId="{C881F287-C991-44D9-941D-31328D1263EC}" dt="2024-10-08T09:51:21.124" v="1370" actId="47"/>
-        <pc:sldMkLst>
-          <pc:docMk/>
-          <pc:sldMk cId="840503715" sldId="362"/>
-        </pc:sldMkLst>
-      </pc:sldChg>
-      <pc:sldChg chg="del">
-        <pc:chgData name="Chris Moreh" userId="17b81281-9f29-44e0-9273-6dadbf6896a2" providerId="ADAL" clId="{C881F287-C991-44D9-941D-31328D1263EC}" dt="2024-10-08T09:51:20.608" v="1369" actId="47"/>
-        <pc:sldMkLst>
-          <pc:docMk/>
-          <pc:sldMk cId="623919284" sldId="363"/>
-        </pc:sldMkLst>
-      </pc:sldChg>
-      <pc:sldChg chg="del">
-        <pc:chgData name="Chris Moreh" userId="17b81281-9f29-44e0-9273-6dadbf6896a2" providerId="ADAL" clId="{C881F287-C991-44D9-941D-31328D1263EC}" dt="2024-10-08T09:51:19.745" v="1368" actId="47"/>
-        <pc:sldMkLst>
-          <pc:docMk/>
-          <pc:sldMk cId="4271899228" sldId="364"/>
-        </pc:sldMkLst>
-      </pc:sldChg>
-      <pc:sldChg chg="del">
-        <pc:chgData name="Chris Moreh" userId="17b81281-9f29-44e0-9273-6dadbf6896a2" providerId="ADAL" clId="{C881F287-C991-44D9-941D-31328D1263EC}" dt="2024-10-08T09:51:19.369" v="1367" actId="47"/>
-        <pc:sldMkLst>
-          <pc:docMk/>
-          <pc:sldMk cId="3076840088" sldId="365"/>
-        </pc:sldMkLst>
-      </pc:sldChg>
-      <pc:sldChg chg="del">
-        <pc:chgData name="Chris Moreh" userId="17b81281-9f29-44e0-9273-6dadbf6896a2" providerId="ADAL" clId="{C881F287-C991-44D9-941D-31328D1263EC}" dt="2024-10-08T09:51:23.438" v="1372" actId="47"/>
-        <pc:sldMkLst>
-          <pc:docMk/>
-          <pc:sldMk cId="32425137" sldId="366"/>
-        </pc:sldMkLst>
-      </pc:sldChg>
-      <pc:sldChg chg="del">
-        <pc:chgData name="Chris Moreh" userId="17b81281-9f29-44e0-9273-6dadbf6896a2" providerId="ADAL" clId="{C881F287-C991-44D9-941D-31328D1263EC}" dt="2024-10-08T09:51:24.786" v="1373" actId="47"/>
-        <pc:sldMkLst>
-          <pc:docMk/>
-          <pc:sldMk cId="3117409897" sldId="367"/>
-        </pc:sldMkLst>
-      </pc:sldChg>
-      <pc:sldChg chg="del">
-        <pc:chgData name="Chris Moreh" userId="17b81281-9f29-44e0-9273-6dadbf6896a2" providerId="ADAL" clId="{C881F287-C991-44D9-941D-31328D1263EC}" dt="2024-10-08T09:51:27.427" v="1379" actId="47"/>
-        <pc:sldMkLst>
-          <pc:docMk/>
-          <pc:sldMk cId="380690980" sldId="368"/>
-        </pc:sldMkLst>
-      </pc:sldChg>
-      <pc:sldChg chg="del">
-        <pc:chgData name="Chris Moreh" userId="17b81281-9f29-44e0-9273-6dadbf6896a2" providerId="ADAL" clId="{C881F287-C991-44D9-941D-31328D1263EC}" dt="2024-10-08T09:51:27.944" v="1380" actId="47"/>
-        <pc:sldMkLst>
-          <pc:docMk/>
-          <pc:sldMk cId="2523947705" sldId="369"/>
-        </pc:sldMkLst>
-      </pc:sldChg>
-      <pc:sldChg chg="del">
-        <pc:chgData name="Chris Moreh" userId="17b81281-9f29-44e0-9273-6dadbf6896a2" providerId="ADAL" clId="{C881F287-C991-44D9-941D-31328D1263EC}" dt="2024-10-08T09:51:57.958" v="1383" actId="47"/>
-        <pc:sldMkLst>
-          <pc:docMk/>
-          <pc:sldMk cId="511201423" sldId="370"/>
-        </pc:sldMkLst>
-      </pc:sldChg>
-      <pc:sldChg chg="del">
-        <pc:chgData name="Chris Moreh" userId="17b81281-9f29-44e0-9273-6dadbf6896a2" providerId="ADAL" clId="{C881F287-C991-44D9-941D-31328D1263EC}" dt="2024-10-08T09:51:25.053" v="1374" actId="47"/>
-        <pc:sldMkLst>
-          <pc:docMk/>
-          <pc:sldMk cId="1785384435" sldId="371"/>
-        </pc:sldMkLst>
-      </pc:sldChg>
-      <pc:sldChg chg="del">
-        <pc:chgData name="Chris Moreh" userId="17b81281-9f29-44e0-9273-6dadbf6896a2" providerId="ADAL" clId="{C881F287-C991-44D9-941D-31328D1263EC}" dt="2024-10-08T09:51:26.285" v="1377" actId="47"/>
-        <pc:sldMkLst>
-          <pc:docMk/>
-          <pc:sldMk cId="2010348205" sldId="372"/>
-        </pc:sldMkLst>
-      </pc:sldChg>
-      <pc:sldChg chg="del">
-        <pc:chgData name="Chris Moreh" userId="17b81281-9f29-44e0-9273-6dadbf6896a2" providerId="ADAL" clId="{C881F287-C991-44D9-941D-31328D1263EC}" dt="2024-10-08T09:51:26.488" v="1378" actId="47"/>
-        <pc:sldMkLst>
-          <pc:docMk/>
-          <pc:sldMk cId="3998180932" sldId="373"/>
-        </pc:sldMkLst>
-      </pc:sldChg>
-      <pc:sldChg chg="del">
-        <pc:chgData name="Chris Moreh" userId="17b81281-9f29-44e0-9273-6dadbf6896a2" providerId="ADAL" clId="{C881F287-C991-44D9-941D-31328D1263EC}" dt="2024-10-08T09:51:32.576" v="1382" actId="47"/>
-        <pc:sldMkLst>
-          <pc:docMk/>
-          <pc:sldMk cId="4006101882" sldId="374"/>
-        </pc:sldMkLst>
-      </pc:sldChg>
-      <pc:sldChg chg="del">
-        <pc:chgData name="Chris Moreh" userId="17b81281-9f29-44e0-9273-6dadbf6896a2" providerId="ADAL" clId="{C881F287-C991-44D9-941D-31328D1263EC}" dt="2024-10-08T09:52:05.214" v="1385" actId="47"/>
-        <pc:sldMkLst>
-          <pc:docMk/>
-          <pc:sldMk cId="1068929860" sldId="375"/>
-        </pc:sldMkLst>
-      </pc:sldChg>
-      <pc:sldChg chg="addSp modSp new mod ord">
-        <pc:chgData name="Chris Moreh" userId="17b81281-9f29-44e0-9273-6dadbf6896a2" providerId="ADAL" clId="{C881F287-C991-44D9-941D-31328D1263EC}" dt="2024-10-08T09:30:31.582" v="193" actId="12"/>
-        <pc:sldMkLst>
-          <pc:docMk/>
-          <pc:sldMk cId="1974505271" sldId="376"/>
-        </pc:sldMkLst>
-        <pc:spChg chg="mod">
-          <ac:chgData name="Chris Moreh" userId="17b81281-9f29-44e0-9273-6dadbf6896a2" providerId="ADAL" clId="{C881F287-C991-44D9-941D-31328D1263EC}" dt="2024-10-08T09:26:28.798" v="150" actId="27636"/>
-          <ac:spMkLst>
-            <pc:docMk/>
-            <pc:sldMk cId="1974505271" sldId="376"/>
-            <ac:spMk id="2" creationId="{AEE5F401-650A-7724-809A-D7F7C823E285}"/>
-          </ac:spMkLst>
-        </pc:spChg>
-        <pc:spChg chg="mod">
-          <ac:chgData name="Chris Moreh" userId="17b81281-9f29-44e0-9273-6dadbf6896a2" providerId="ADAL" clId="{C881F287-C991-44D9-941D-31328D1263EC}" dt="2024-10-08T09:30:31.582" v="193" actId="12"/>
-          <ac:spMkLst>
-            <pc:docMk/>
-            <pc:sldMk cId="1974505271" sldId="376"/>
-            <ac:spMk id="3" creationId="{76CBFD96-8EE6-C88E-D622-48A8847362BD}"/>
-          </ac:spMkLst>
-        </pc:spChg>
-        <pc:graphicFrameChg chg="add mod modGraphic">
-          <ac:chgData name="Chris Moreh" userId="17b81281-9f29-44e0-9273-6dadbf6896a2" providerId="ADAL" clId="{C881F287-C991-44D9-941D-31328D1263EC}" dt="2024-10-08T09:27:50.394" v="165" actId="14100"/>
-          <ac:graphicFrameMkLst>
-            <pc:docMk/>
-            <pc:sldMk cId="1974505271" sldId="376"/>
-            <ac:graphicFrameMk id="9" creationId="{37D5BF8E-0193-E1A5-D2CA-07C41652D2E4}"/>
-          </ac:graphicFrameMkLst>
-        </pc:graphicFrameChg>
-        <pc:picChg chg="add mod">
-          <ac:chgData name="Chris Moreh" userId="17b81281-9f29-44e0-9273-6dadbf6896a2" providerId="ADAL" clId="{C881F287-C991-44D9-941D-31328D1263EC}" dt="2024-10-08T09:28:00.370" v="170" actId="14100"/>
-          <ac:picMkLst>
-            <pc:docMk/>
-            <pc:sldMk cId="1974505271" sldId="376"/>
-            <ac:picMk id="7" creationId="{E1EDB5D5-6FDA-BB3B-AAF4-D36B918EE8F6}"/>
-          </ac:picMkLst>
-        </pc:picChg>
-        <pc:picChg chg="add mod">
-          <ac:chgData name="Chris Moreh" userId="17b81281-9f29-44e0-9273-6dadbf6896a2" providerId="ADAL" clId="{C881F287-C991-44D9-941D-31328D1263EC}" dt="2024-10-08T09:27:57.383" v="169" actId="1076"/>
-          <ac:picMkLst>
-            <pc:docMk/>
-            <pc:sldMk cId="1974505271" sldId="376"/>
-            <ac:picMk id="8" creationId="{709C734D-B7AD-7A17-5C24-48BFDF89B34F}"/>
-          </ac:picMkLst>
-        </pc:picChg>
-      </pc:sldChg>
-      <pc:sldChg chg="new del">
-        <pc:chgData name="Chris Moreh" userId="17b81281-9f29-44e0-9273-6dadbf6896a2" providerId="ADAL" clId="{C881F287-C991-44D9-941D-31328D1263EC}" dt="2024-10-08T10:01:21.261" v="1491" actId="47"/>
-        <pc:sldMkLst>
-          <pc:docMk/>
-          <pc:sldMk cId="4029941185" sldId="377"/>
-        </pc:sldMkLst>
-      </pc:sldChg>
-      <pc:sldChg chg="new del">
-        <pc:chgData name="Chris Moreh" userId="17b81281-9f29-44e0-9273-6dadbf6896a2" providerId="ADAL" clId="{C881F287-C991-44D9-941D-31328D1263EC}" dt="2024-10-08T10:01:21.988" v="1492" actId="47"/>
-        <pc:sldMkLst>
-          <pc:docMk/>
-          <pc:sldMk cId="81196815" sldId="378"/>
-        </pc:sldMkLst>
-      </pc:sldChg>
-      <pc:sldChg chg="new del">
-        <pc:chgData name="Chris Moreh" userId="17b81281-9f29-44e0-9273-6dadbf6896a2" providerId="ADAL" clId="{C881F287-C991-44D9-941D-31328D1263EC}" dt="2024-10-08T10:01:26.067" v="1493" actId="47"/>
-        <pc:sldMkLst>
-          <pc:docMk/>
-          <pc:sldMk cId="1301475950" sldId="379"/>
-        </pc:sldMkLst>
-      </pc:sldChg>
-      <pc:sldChg chg="delSp modSp add del mod modTransition modClrScheme chgLayout">
-        <pc:chgData name="Chris Moreh" userId="17b81281-9f29-44e0-9273-6dadbf6896a2" providerId="ADAL" clId="{C881F287-C991-44D9-941D-31328D1263EC}" dt="2024-10-08T09:28:51.246" v="180" actId="47"/>
-        <pc:sldMkLst>
-          <pc:docMk/>
-          <pc:sldMk cId="1414621572" sldId="513"/>
-        </pc:sldMkLst>
-        <pc:spChg chg="del">
-          <ac:chgData name="Chris Moreh" userId="17b81281-9f29-44e0-9273-6dadbf6896a2" providerId="ADAL" clId="{C881F287-C991-44D9-941D-31328D1263EC}" dt="2024-10-08T09:28:31.011" v="175" actId="21"/>
-          <ac:spMkLst>
-            <pc:docMk/>
-            <pc:sldMk cId="1414621572" sldId="513"/>
-            <ac:spMk id="7" creationId="{4CFE870A-DE02-462E-B98D-FCDDFE3CE2F9}"/>
-          </ac:spMkLst>
-        </pc:spChg>
-        <pc:spChg chg="del">
-          <ac:chgData name="Chris Moreh" userId="17b81281-9f29-44e0-9273-6dadbf6896a2" providerId="ADAL" clId="{C881F287-C991-44D9-941D-31328D1263EC}" dt="2024-10-08T09:28:31.011" v="175" actId="21"/>
-          <ac:spMkLst>
-            <pc:docMk/>
-            <pc:sldMk cId="1414621572" sldId="513"/>
-            <ac:spMk id="8" creationId="{60BA844F-925A-482F-AEA6-A1C19BC2B721}"/>
-          </ac:spMkLst>
-        </pc:spChg>
-        <pc:spChg chg="del">
-          <ac:chgData name="Chris Moreh" userId="17b81281-9f29-44e0-9273-6dadbf6896a2" providerId="ADAL" clId="{C881F287-C991-44D9-941D-31328D1263EC}" dt="2024-10-08T09:28:31.011" v="175" actId="21"/>
-          <ac:spMkLst>
-            <pc:docMk/>
-            <pc:sldMk cId="1414621572" sldId="513"/>
-            <ac:spMk id="9" creationId="{CD3B7E98-6E18-4358-B76C-CC893A991317}"/>
-          </ac:spMkLst>
-        </pc:spChg>
-        <pc:spChg chg="mod ord">
-          <ac:chgData name="Chris Moreh" userId="17b81281-9f29-44e0-9273-6dadbf6896a2" providerId="ADAL" clId="{C881F287-C991-44D9-941D-31328D1263EC}" dt="2024-10-08T09:28:10.424" v="171" actId="700"/>
-          <ac:spMkLst>
-            <pc:docMk/>
-            <pc:sldMk cId="1414621572" sldId="513"/>
-            <ac:spMk id="14" creationId="{3608FA36-266A-4FF2-9A6F-14C80255FD11}"/>
-          </ac:spMkLst>
-        </pc:spChg>
-        <pc:picChg chg="del">
-          <ac:chgData name="Chris Moreh" userId="17b81281-9f29-44e0-9273-6dadbf6896a2" providerId="ADAL" clId="{C881F287-C991-44D9-941D-31328D1263EC}" dt="2024-10-08T09:28:31.011" v="175" actId="21"/>
-          <ac:picMkLst>
-            <pc:docMk/>
-            <pc:sldMk cId="1414621572" sldId="513"/>
-            <ac:picMk id="4" creationId="{82FD8197-AD3F-4E46-8396-3CB8693B1FF9}"/>
-          </ac:picMkLst>
-        </pc:picChg>
-        <pc:picChg chg="del">
-          <ac:chgData name="Chris Moreh" userId="17b81281-9f29-44e0-9273-6dadbf6896a2" providerId="ADAL" clId="{C881F287-C991-44D9-941D-31328D1263EC}" dt="2024-10-08T09:28:31.011" v="175" actId="21"/>
-          <ac:picMkLst>
-            <pc:docMk/>
-            <pc:sldMk cId="1414621572" sldId="513"/>
-            <ac:picMk id="5" creationId="{35092435-6B9D-42CE-9942-D45DCDFEFA8E}"/>
-          </ac:picMkLst>
-        </pc:picChg>
-        <pc:picChg chg="del">
-          <ac:chgData name="Chris Moreh" userId="17b81281-9f29-44e0-9273-6dadbf6896a2" providerId="ADAL" clId="{C881F287-C991-44D9-941D-31328D1263EC}" dt="2024-10-08T09:28:31.011" v="175" actId="21"/>
-          <ac:picMkLst>
-            <pc:docMk/>
-            <pc:sldMk cId="1414621572" sldId="513"/>
-            <ac:picMk id="6" creationId="{7898E259-4F4F-4490-8628-7C470BE519BE}"/>
-          </ac:picMkLst>
-        </pc:picChg>
-      </pc:sldChg>
-      <pc:sldChg chg="add del ord modTransition">
-        <pc:chgData name="Chris Moreh" userId="17b81281-9f29-44e0-9273-6dadbf6896a2" providerId="ADAL" clId="{C881F287-C991-44D9-941D-31328D1263EC}" dt="2024-10-08T09:44:52.765" v="1256" actId="47"/>
-        <pc:sldMkLst>
-          <pc:docMk/>
-          <pc:sldMk cId="4261850743" sldId="514"/>
-        </pc:sldMkLst>
-      </pc:sldChg>
-      <pc:sldChg chg="modSp add del mod modTransition modClrScheme chgLayout">
-        <pc:chgData name="Chris Moreh" userId="17b81281-9f29-44e0-9273-6dadbf6896a2" providerId="ADAL" clId="{C881F287-C991-44D9-941D-31328D1263EC}" dt="2024-10-08T09:31:21.635" v="194" actId="47"/>
-        <pc:sldMkLst>
-          <pc:docMk/>
-          <pc:sldMk cId="379185727" sldId="515"/>
-        </pc:sldMkLst>
-        <pc:spChg chg="mod ord">
-          <ac:chgData name="Chris Moreh" userId="17b81281-9f29-44e0-9273-6dadbf6896a2" providerId="ADAL" clId="{C881F287-C991-44D9-941D-31328D1263EC}" dt="2024-10-08T09:25:29.010" v="134" actId="700"/>
-          <ac:spMkLst>
-            <pc:docMk/>
-            <pc:sldMk cId="379185727" sldId="515"/>
-            <ac:spMk id="6" creationId="{56BC2B75-09B9-4092-B01C-D2106A55B0AE}"/>
-          </ac:spMkLst>
-        </pc:spChg>
-        <pc:graphicFrameChg chg="modGraphic">
-          <ac:chgData name="Chris Moreh" userId="17b81281-9f29-44e0-9273-6dadbf6896a2" providerId="ADAL" clId="{C881F287-C991-44D9-941D-31328D1263EC}" dt="2024-10-08T09:24:36.006" v="115" actId="207"/>
-          <ac:graphicFrameMkLst>
-            <pc:docMk/>
-            <pc:sldMk cId="379185727" sldId="515"/>
-            <ac:graphicFrameMk id="7" creationId="{18D2D474-4A9C-44E3-91B9-4D73D788827C}"/>
-          </ac:graphicFrameMkLst>
-        </pc:graphicFrameChg>
-        <pc:picChg chg="mod ord">
-          <ac:chgData name="Chris Moreh" userId="17b81281-9f29-44e0-9273-6dadbf6896a2" providerId="ADAL" clId="{C881F287-C991-44D9-941D-31328D1263EC}" dt="2024-10-08T09:25:29.010" v="134" actId="700"/>
-          <ac:picMkLst>
-            <pc:docMk/>
-            <pc:sldMk cId="379185727" sldId="515"/>
-            <ac:picMk id="4" creationId="{498A3AB6-41B4-4751-8DEE-836357A4C677}"/>
-          </ac:picMkLst>
-        </pc:picChg>
-        <pc:picChg chg="mod">
-          <ac:chgData name="Chris Moreh" userId="17b81281-9f29-44e0-9273-6dadbf6896a2" providerId="ADAL" clId="{C881F287-C991-44D9-941D-31328D1263EC}" dt="2024-10-08T09:24:40.718" v="117" actId="14100"/>
-          <ac:picMkLst>
-            <pc:docMk/>
-            <pc:sldMk cId="379185727" sldId="515"/>
-            <ac:picMk id="5" creationId="{B12A0B61-E25A-45C5-8377-99622CEFB09B}"/>
-          </ac:picMkLst>
-        </pc:picChg>
-      </pc:sldChg>
-      <pc:sldChg chg="add del modTransition">
-        <pc:chgData name="Chris Moreh" userId="17b81281-9f29-44e0-9273-6dadbf6896a2" providerId="ADAL" clId="{C881F287-C991-44D9-941D-31328D1263EC}" dt="2024-10-08T09:31:31.552" v="195" actId="47"/>
-        <pc:sldMkLst>
-          <pc:docMk/>
-          <pc:sldMk cId="582782949" sldId="516"/>
-        </pc:sldMkLst>
-      </pc:sldChg>
-      <pc:sldChg chg="addSp delSp modSp add mod ord modTransition modClrScheme chgLayout">
-        <pc:chgData name="Chris Moreh" userId="17b81281-9f29-44e0-9273-6dadbf6896a2" providerId="ADAL" clId="{C881F287-C991-44D9-941D-31328D1263EC}" dt="2024-10-08T09:35:52.645" v="587" actId="20577"/>
-        <pc:sldMkLst>
-          <pc:docMk/>
-          <pc:sldMk cId="3296848859" sldId="517"/>
-        </pc:sldMkLst>
-        <pc:spChg chg="add del mod ord">
-          <ac:chgData name="Chris Moreh" userId="17b81281-9f29-44e0-9273-6dadbf6896a2" providerId="ADAL" clId="{C881F287-C991-44D9-941D-31328D1263EC}" dt="2024-10-08T09:32:25.828" v="200" actId="700"/>
-          <ac:spMkLst>
-            <pc:docMk/>
-            <pc:sldMk cId="3296848859" sldId="517"/>
-            <ac:spMk id="2" creationId="{1E63338C-D817-2DEB-D028-190D583B6432}"/>
-          </ac:spMkLst>
-        </pc:spChg>
-        <pc:spChg chg="add mod">
-          <ac:chgData name="Chris Moreh" userId="17b81281-9f29-44e0-9273-6dadbf6896a2" providerId="ADAL" clId="{C881F287-C991-44D9-941D-31328D1263EC}" dt="2024-10-08T09:35:52.645" v="587" actId="20577"/>
-          <ac:spMkLst>
-            <pc:docMk/>
-            <pc:sldMk cId="3296848859" sldId="517"/>
-            <ac:spMk id="4" creationId="{79E77290-7E9E-5817-7D8D-BEA0520F0718}"/>
-          </ac:spMkLst>
-        </pc:spChg>
-        <pc:spChg chg="mod ord">
-          <ac:chgData name="Chris Moreh" userId="17b81281-9f29-44e0-9273-6dadbf6896a2" providerId="ADAL" clId="{C881F287-C991-44D9-941D-31328D1263EC}" dt="2024-10-08T09:33:56.833" v="254" actId="20577"/>
-          <ac:spMkLst>
-            <pc:docMk/>
-            <pc:sldMk cId="3296848859" sldId="517"/>
-            <ac:spMk id="6" creationId="{56BC2B75-09B9-4092-B01C-D2106A55B0AE}"/>
-          </ac:spMkLst>
-        </pc:spChg>
-        <pc:picChg chg="mod">
-          <ac:chgData name="Chris Moreh" userId="17b81281-9f29-44e0-9273-6dadbf6896a2" providerId="ADAL" clId="{C881F287-C991-44D9-941D-31328D1263EC}" dt="2024-10-08T09:32:54.545" v="208" actId="1076"/>
-          <ac:picMkLst>
-            <pc:docMk/>
-            <pc:sldMk cId="3296848859" sldId="517"/>
-            <ac:picMk id="3" creationId="{E9EDBBEA-F163-4B2F-BC6D-0A2F6D1E6CAC}"/>
-          </ac:picMkLst>
-        </pc:picChg>
-      </pc:sldChg>
-      <pc:sldChg chg="addSp delSp modSp add mod modTransition modClrScheme chgLayout">
-        <pc:chgData name="Chris Moreh" userId="17b81281-9f29-44e0-9273-6dadbf6896a2" providerId="ADAL" clId="{C881F287-C991-44D9-941D-31328D1263EC}" dt="2024-10-08T09:53:31.532" v="1389" actId="1076"/>
-        <pc:sldMkLst>
-          <pc:docMk/>
-          <pc:sldMk cId="3523596212" sldId="518"/>
-        </pc:sldMkLst>
-        <pc:spChg chg="add del mod ord">
-          <ac:chgData name="Chris Moreh" userId="17b81281-9f29-44e0-9273-6dadbf6896a2" providerId="ADAL" clId="{C881F287-C991-44D9-941D-31328D1263EC}" dt="2024-10-08T09:53:20.608" v="1386" actId="700"/>
-          <ac:spMkLst>
-            <pc:docMk/>
-            <pc:sldMk cId="3523596212" sldId="518"/>
-            <ac:spMk id="3" creationId="{AB08AF9D-0B95-3556-2BC3-E01D34D11C5C}"/>
-          </ac:spMkLst>
-        </pc:spChg>
-        <pc:spChg chg="del">
-          <ac:chgData name="Chris Moreh" userId="17b81281-9f29-44e0-9273-6dadbf6896a2" providerId="ADAL" clId="{C881F287-C991-44D9-941D-31328D1263EC}" dt="2024-10-08T09:45:31.218" v="1276" actId="21"/>
-          <ac:spMkLst>
-            <pc:docMk/>
-            <pc:sldMk cId="3523596212" sldId="518"/>
-            <ac:spMk id="4" creationId="{F10DEB46-1089-4DB0-9D46-DB261134DE74}"/>
-          </ac:spMkLst>
-        </pc:spChg>
-        <pc:spChg chg="del">
-          <ac:chgData name="Chris Moreh" userId="17b81281-9f29-44e0-9273-6dadbf6896a2" providerId="ADAL" clId="{C881F287-C991-44D9-941D-31328D1263EC}" dt="2024-10-08T09:45:31.218" v="1276" actId="21"/>
-          <ac:spMkLst>
-            <pc:docMk/>
-            <pc:sldMk cId="3523596212" sldId="518"/>
-            <ac:spMk id="5" creationId="{06901C45-0960-4222-86DD-2EBC275AB02C}"/>
-          </ac:spMkLst>
-        </pc:spChg>
-        <pc:spChg chg="add del mod ord">
-          <ac:chgData name="Chris Moreh" userId="17b81281-9f29-44e0-9273-6dadbf6896a2" providerId="ADAL" clId="{C881F287-C991-44D9-941D-31328D1263EC}" dt="2024-10-08T09:53:20.608" v="1386" actId="700"/>
-          <ac:spMkLst>
-            <pc:docMk/>
-            <pc:sldMk cId="3523596212" sldId="518"/>
-            <ac:spMk id="7" creationId="{02AD053C-A0EA-59CF-FB33-86966B3A7EDB}"/>
-          </ac:spMkLst>
-        </pc:spChg>
-        <pc:spChg chg="del">
-          <ac:chgData name="Chris Moreh" userId="17b81281-9f29-44e0-9273-6dadbf6896a2" providerId="ADAL" clId="{C881F287-C991-44D9-941D-31328D1263EC}" dt="2024-10-08T09:45:31.218" v="1276" actId="21"/>
-          <ac:spMkLst>
-            <pc:docMk/>
-            <pc:sldMk cId="3523596212" sldId="518"/>
-            <ac:spMk id="11" creationId="{A79F868A-630C-4299-8043-194F7E28FF37}"/>
-          </ac:spMkLst>
-        </pc:spChg>
-        <pc:spChg chg="del">
-          <ac:chgData name="Chris Moreh" userId="17b81281-9f29-44e0-9273-6dadbf6896a2" providerId="ADAL" clId="{C881F287-C991-44D9-941D-31328D1263EC}" dt="2024-10-08T09:45:31.218" v="1276" actId="21"/>
-          <ac:spMkLst>
-            <pc:docMk/>
-            <pc:sldMk cId="3523596212" sldId="518"/>
-            <ac:spMk id="12" creationId="{EEE649C4-951B-4A6E-A063-61E0AB812998}"/>
-          </ac:spMkLst>
-        </pc:spChg>
-        <pc:spChg chg="add mod ord">
-          <ac:chgData name="Chris Moreh" userId="17b81281-9f29-44e0-9273-6dadbf6896a2" providerId="ADAL" clId="{C881F287-C991-44D9-941D-31328D1263EC}" dt="2024-10-08T09:53:31.532" v="1389" actId="1076"/>
-          <ac:spMkLst>
-            <pc:docMk/>
-            <pc:sldMk cId="3523596212" sldId="518"/>
-            <ac:spMk id="13" creationId="{2C10D394-C9B2-B03C-4136-7B6EEA8FFA9D}"/>
-          </ac:spMkLst>
-        </pc:spChg>
-        <pc:spChg chg="del">
-          <ac:chgData name="Chris Moreh" userId="17b81281-9f29-44e0-9273-6dadbf6896a2" providerId="ADAL" clId="{C881F287-C991-44D9-941D-31328D1263EC}" dt="2024-10-08T09:45:31.218" v="1276" actId="21"/>
-          <ac:spMkLst>
-            <pc:docMk/>
-            <pc:sldMk cId="3523596212" sldId="518"/>
-            <ac:spMk id="14" creationId="{76D39039-27A2-4299-9309-8A3EA97B9DFC}"/>
-          </ac:spMkLst>
-        </pc:spChg>
-        <pc:spChg chg="add del mod ord">
-          <ac:chgData name="Chris Moreh" userId="17b81281-9f29-44e0-9273-6dadbf6896a2" providerId="ADAL" clId="{C881F287-C991-44D9-941D-31328D1263EC}" dt="2024-10-08T09:53:28.211" v="1388" actId="478"/>
-          <ac:spMkLst>
-            <pc:docMk/>
-            <pc:sldMk cId="3523596212" sldId="518"/>
-            <ac:spMk id="15" creationId="{8FF969B6-83BD-FE51-441F-35651FD5AE5F}"/>
-          </ac:spMkLst>
-        </pc:spChg>
-        <pc:spChg chg="del">
-          <ac:chgData name="Chris Moreh" userId="17b81281-9f29-44e0-9273-6dadbf6896a2" providerId="ADAL" clId="{C881F287-C991-44D9-941D-31328D1263EC}" dt="2024-10-08T09:45:25.372" v="1275" actId="478"/>
-          <ac:spMkLst>
-            <pc:docMk/>
-            <pc:sldMk cId="3523596212" sldId="518"/>
-            <ac:spMk id="18" creationId="{914069BB-D883-4CCD-B3EF-D31A8054B709}"/>
-          </ac:spMkLst>
-        </pc:spChg>
-        <pc:graphicFrameChg chg="del">
-          <ac:chgData name="Chris Moreh" userId="17b81281-9f29-44e0-9273-6dadbf6896a2" providerId="ADAL" clId="{C881F287-C991-44D9-941D-31328D1263EC}" dt="2024-10-08T09:45:31.218" v="1276" actId="21"/>
-          <ac:graphicFrameMkLst>
-            <pc:docMk/>
-            <pc:sldMk cId="3523596212" sldId="518"/>
-            <ac:graphicFrameMk id="10" creationId="{EE7B91DE-3674-48DA-9557-9EF69F259CF2}"/>
-          </ac:graphicFrameMkLst>
-        </pc:graphicFrameChg>
-        <pc:picChg chg="del">
-          <ac:chgData name="Chris Moreh" userId="17b81281-9f29-44e0-9273-6dadbf6896a2" providerId="ADAL" clId="{C881F287-C991-44D9-941D-31328D1263EC}" dt="2024-10-08T09:45:31.218" v="1276" actId="21"/>
-          <ac:picMkLst>
-            <pc:docMk/>
-            <pc:sldMk cId="3523596212" sldId="518"/>
-            <ac:picMk id="8" creationId="{8924BD7D-ABDD-4514-A568-8C9B4E14CB51}"/>
-          </ac:picMkLst>
-        </pc:picChg>
-        <pc:picChg chg="del">
-          <ac:chgData name="Chris Moreh" userId="17b81281-9f29-44e0-9273-6dadbf6896a2" providerId="ADAL" clId="{C881F287-C991-44D9-941D-31328D1263EC}" dt="2024-10-08T09:45:31.218" v="1276" actId="21"/>
-          <ac:picMkLst>
-            <pc:docMk/>
-            <pc:sldMk cId="3523596212" sldId="518"/>
-            <ac:picMk id="9" creationId="{3C832D1F-E22D-40B6-9975-B59801C71789}"/>
-          </ac:picMkLst>
-        </pc:picChg>
-      </pc:sldChg>
-      <pc:sldChg chg="addSp delSp modSp add mod ord modTransition">
-        <pc:chgData name="Chris Moreh" userId="17b81281-9f29-44e0-9273-6dadbf6896a2" providerId="ADAL" clId="{C881F287-C991-44D9-941D-31328D1263EC}" dt="2024-10-08T09:46:38.883" v="1290" actId="1076"/>
-        <pc:sldMkLst>
-          <pc:docMk/>
-          <pc:sldMk cId="1759930319" sldId="519"/>
-        </pc:sldMkLst>
-        <pc:spChg chg="add mod">
-          <ac:chgData name="Chris Moreh" userId="17b81281-9f29-44e0-9273-6dadbf6896a2" providerId="ADAL" clId="{C881F287-C991-44D9-941D-31328D1263EC}" dt="2024-10-08T09:46:29.391" v="1288" actId="1076"/>
-          <ac:spMkLst>
-            <pc:docMk/>
-            <pc:sldMk cId="1759930319" sldId="519"/>
-            <ac:spMk id="2" creationId="{4F0CFF98-671A-ED95-2076-9810F4107B7D}"/>
-          </ac:spMkLst>
-        </pc:spChg>
-        <pc:spChg chg="mod">
-          <ac:chgData name="Chris Moreh" userId="17b81281-9f29-44e0-9273-6dadbf6896a2" providerId="ADAL" clId="{C881F287-C991-44D9-941D-31328D1263EC}" dt="2024-10-08T09:46:35.694" v="1289" actId="14100"/>
-          <ac:spMkLst>
-            <pc:docMk/>
-            <pc:sldMk cId="1759930319" sldId="519"/>
-            <ac:spMk id="6" creationId="{E0C07184-B427-4031-86AE-735CAAAD0845}"/>
-          </ac:spMkLst>
-        </pc:spChg>
-        <pc:spChg chg="mod">
-          <ac:chgData name="Chris Moreh" userId="17b81281-9f29-44e0-9273-6dadbf6896a2" providerId="ADAL" clId="{C881F287-C991-44D9-941D-31328D1263EC}" dt="2024-10-08T09:46:38.883" v="1290" actId="1076"/>
-          <ac:spMkLst>
-            <pc:docMk/>
-            <pc:sldMk cId="1759930319" sldId="519"/>
-            <ac:spMk id="12" creationId="{EEE649C4-951B-4A6E-A063-61E0AB812998}"/>
-          </ac:spMkLst>
-        </pc:spChg>
-        <pc:spChg chg="del">
-          <ac:chgData name="Chris Moreh" userId="17b81281-9f29-44e0-9273-6dadbf6896a2" providerId="ADAL" clId="{C881F287-C991-44D9-941D-31328D1263EC}" dt="2024-10-08T09:46:25.577" v="1286" actId="478"/>
-          <ac:spMkLst>
-            <pc:docMk/>
-            <pc:sldMk cId="1759930319" sldId="519"/>
-            <ac:spMk id="14" creationId="{76D39039-27A2-4299-9309-8A3EA97B9DFC}"/>
-          </ac:spMkLst>
-        </pc:spChg>
-      </pc:sldChg>
-      <pc:sldChg chg="addSp modSp add mod ord modTransition">
-        <pc:chgData name="Chris Moreh" userId="17b81281-9f29-44e0-9273-6dadbf6896a2" providerId="ADAL" clId="{C881F287-C991-44D9-941D-31328D1263EC}" dt="2024-10-08T09:50:28.740" v="1349" actId="208"/>
-        <pc:sldMkLst>
-          <pc:docMk/>
-          <pc:sldMk cId="274966957" sldId="520"/>
-        </pc:sldMkLst>
-        <pc:spChg chg="mod">
-          <ac:chgData name="Chris Moreh" userId="17b81281-9f29-44e0-9273-6dadbf6896a2" providerId="ADAL" clId="{C881F287-C991-44D9-941D-31328D1263EC}" dt="2024-10-08T09:46:58.372" v="1293" actId="114"/>
-          <ac:spMkLst>
-            <pc:docMk/>
-            <pc:sldMk cId="274966957" sldId="520"/>
-            <ac:spMk id="2" creationId="{949BDA8C-53D8-441C-94AA-F12FFB289AB6}"/>
-          </ac:spMkLst>
-        </pc:spChg>
-        <pc:spChg chg="mod">
-          <ac:chgData name="Chris Moreh" userId="17b81281-9f29-44e0-9273-6dadbf6896a2" providerId="ADAL" clId="{C881F287-C991-44D9-941D-31328D1263EC}" dt="2024-10-08T09:47:45.512" v="1309" actId="1076"/>
-          <ac:spMkLst>
-            <pc:docMk/>
-            <pc:sldMk cId="274966957" sldId="520"/>
-            <ac:spMk id="3" creationId="{426DDDF5-4FF1-458C-AA99-F61F1D0D9105}"/>
-          </ac:spMkLst>
-        </pc:spChg>
-        <pc:spChg chg="add mod">
-          <ac:chgData name="Chris Moreh" userId="17b81281-9f29-44e0-9273-6dadbf6896a2" providerId="ADAL" clId="{C881F287-C991-44D9-941D-31328D1263EC}" dt="2024-10-08T09:50:28.740" v="1349" actId="208"/>
-          <ac:spMkLst>
-            <pc:docMk/>
-            <pc:sldMk cId="274966957" sldId="520"/>
-            <ac:spMk id="9" creationId="{1A2AB173-E18A-FEE9-F16C-50A41C11E954}"/>
-          </ac:spMkLst>
-        </pc:spChg>
-        <pc:picChg chg="add mod">
-          <ac:chgData name="Chris Moreh" userId="17b81281-9f29-44e0-9273-6dadbf6896a2" providerId="ADAL" clId="{C881F287-C991-44D9-941D-31328D1263EC}" dt="2024-10-08T09:49:21.805" v="1332" actId="1076"/>
-          <ac:picMkLst>
-            <pc:docMk/>
-            <pc:sldMk cId="274966957" sldId="520"/>
-            <ac:picMk id="4" creationId="{FBFD9FB3-1C8D-C3AA-404D-C3AD18FEE7C3}"/>
-          </ac:picMkLst>
-        </pc:picChg>
-        <pc:picChg chg="add mod">
-          <ac:chgData name="Chris Moreh" userId="17b81281-9f29-44e0-9273-6dadbf6896a2" providerId="ADAL" clId="{C881F287-C991-44D9-941D-31328D1263EC}" dt="2024-10-08T09:49:16.247" v="1329" actId="1076"/>
-          <ac:picMkLst>
-            <pc:docMk/>
-            <pc:sldMk cId="274966957" sldId="520"/>
-            <ac:picMk id="5" creationId="{CC22D729-170C-797E-EDD4-6AE32DD99CA6}"/>
-          </ac:picMkLst>
-        </pc:picChg>
-        <pc:picChg chg="add mod">
-          <ac:chgData name="Chris Moreh" userId="17b81281-9f29-44e0-9273-6dadbf6896a2" providerId="ADAL" clId="{C881F287-C991-44D9-941D-31328D1263EC}" dt="2024-10-08T09:49:29.058" v="1334" actId="1076"/>
-          <ac:picMkLst>
-            <pc:docMk/>
-            <pc:sldMk cId="274966957" sldId="520"/>
-            <ac:picMk id="6" creationId="{3B43B85F-2DCE-A4FA-1455-46D704AA6DEE}"/>
-          </ac:picMkLst>
-        </pc:picChg>
-        <pc:cxnChg chg="add mod">
-          <ac:chgData name="Chris Moreh" userId="17b81281-9f29-44e0-9273-6dadbf6896a2" providerId="ADAL" clId="{C881F287-C991-44D9-941D-31328D1263EC}" dt="2024-10-08T09:49:50.818" v="1336" actId="208"/>
-          <ac:cxnSpMkLst>
-            <pc:docMk/>
-            <pc:sldMk cId="274966957" sldId="520"/>
-            <ac:cxnSpMk id="8" creationId="{55E157B0-FF5A-5C31-B69A-934EA5BE6C9A}"/>
-          </ac:cxnSpMkLst>
-        </pc:cxnChg>
-      </pc:sldChg>
-      <pc:sldChg chg="addSp delSp modSp add mod">
-        <pc:chgData name="Chris Moreh" userId="17b81281-9f29-44e0-9273-6dadbf6896a2" providerId="ADAL" clId="{C881F287-C991-44D9-941D-31328D1263EC}" dt="2024-10-08T09:27:44.021" v="163" actId="14100"/>
-        <pc:sldMkLst>
-          <pc:docMk/>
-          <pc:sldMk cId="3931397907" sldId="521"/>
-        </pc:sldMkLst>
-        <pc:graphicFrameChg chg="del">
-          <ac:chgData name="Chris Moreh" userId="17b81281-9f29-44e0-9273-6dadbf6896a2" providerId="ADAL" clId="{C881F287-C991-44D9-941D-31328D1263EC}" dt="2024-10-08T09:27:15.758" v="154" actId="478"/>
-          <ac:graphicFrameMkLst>
-            <pc:docMk/>
-            <pc:sldMk cId="3931397907" sldId="521"/>
-            <ac:graphicFrameMk id="9" creationId="{37D5BF8E-0193-E1A5-D2CA-07C41652D2E4}"/>
-          </ac:graphicFrameMkLst>
-        </pc:graphicFrameChg>
-        <pc:graphicFrameChg chg="add mod modGraphic">
-          <ac:chgData name="Chris Moreh" userId="17b81281-9f29-44e0-9273-6dadbf6896a2" providerId="ADAL" clId="{C881F287-C991-44D9-941D-31328D1263EC}" dt="2024-10-08T09:27:41.273" v="162" actId="14100"/>
-          <ac:graphicFrameMkLst>
-            <pc:docMk/>
-            <pc:sldMk cId="3931397907" sldId="521"/>
-            <ac:graphicFrameMk id="11" creationId="{0F633F09-A7AC-CAC7-0326-C071E8A48A63}"/>
-          </ac:graphicFrameMkLst>
-        </pc:graphicFrameChg>
-        <pc:picChg chg="del">
-          <ac:chgData name="Chris Moreh" userId="17b81281-9f29-44e0-9273-6dadbf6896a2" providerId="ADAL" clId="{C881F287-C991-44D9-941D-31328D1263EC}" dt="2024-10-08T09:27:19.323" v="155" actId="478"/>
-          <ac:picMkLst>
-            <pc:docMk/>
-            <pc:sldMk cId="3931397907" sldId="521"/>
-            <ac:picMk id="7" creationId="{E1EDB5D5-6FDA-BB3B-AAF4-D36B918EE8F6}"/>
-          </ac:picMkLst>
-        </pc:picChg>
-        <pc:picChg chg="del">
-          <ac:chgData name="Chris Moreh" userId="17b81281-9f29-44e0-9273-6dadbf6896a2" providerId="ADAL" clId="{C881F287-C991-44D9-941D-31328D1263EC}" dt="2024-10-08T09:27:20.060" v="156" actId="478"/>
-          <ac:picMkLst>
-            <pc:docMk/>
-            <pc:sldMk cId="3931397907" sldId="521"/>
-            <ac:picMk id="8" creationId="{709C734D-B7AD-7A17-5C24-48BFDF89B34F}"/>
-          </ac:picMkLst>
-        </pc:picChg>
-        <pc:picChg chg="add mod">
-          <ac:chgData name="Chris Moreh" userId="17b81281-9f29-44e0-9273-6dadbf6896a2" providerId="ADAL" clId="{C881F287-C991-44D9-941D-31328D1263EC}" dt="2024-10-08T09:27:44.021" v="163" actId="14100"/>
-          <ac:picMkLst>
-            <pc:docMk/>
-            <pc:sldMk cId="3931397907" sldId="521"/>
-            <ac:picMk id="10" creationId="{DB604764-DE1B-ECDD-1D85-A3D97E0F7698}"/>
-          </ac:picMkLst>
-        </pc:picChg>
-        <pc:picChg chg="add mod">
-          <ac:chgData name="Chris Moreh" userId="17b81281-9f29-44e0-9273-6dadbf6896a2" providerId="ADAL" clId="{C881F287-C991-44D9-941D-31328D1263EC}" dt="2024-10-08T09:27:24.577" v="158" actId="1076"/>
-          <ac:picMkLst>
-            <pc:docMk/>
-            <pc:sldMk cId="3931397907" sldId="521"/>
-            <ac:picMk id="12" creationId="{1B195D9A-932A-0740-298C-DDD011D5A711}"/>
-          </ac:picMkLst>
-        </pc:picChg>
-      </pc:sldChg>
-      <pc:sldChg chg="addSp modSp new mod">
-        <pc:chgData name="Chris Moreh" userId="17b81281-9f29-44e0-9273-6dadbf6896a2" providerId="ADAL" clId="{C881F287-C991-44D9-941D-31328D1263EC}" dt="2024-10-08T09:29:50.314" v="191" actId="1076"/>
-        <pc:sldMkLst>
-          <pc:docMk/>
-          <pc:sldMk cId="3672351687" sldId="522"/>
-        </pc:sldMkLst>
-        <pc:spChg chg="mod">
-          <ac:chgData name="Chris Moreh" userId="17b81281-9f29-44e0-9273-6dadbf6896a2" providerId="ADAL" clId="{C881F287-C991-44D9-941D-31328D1263EC}" dt="2024-10-08T09:28:23.345" v="174" actId="20577"/>
-          <ac:spMkLst>
-            <pc:docMk/>
-            <pc:sldMk cId="3672351687" sldId="522"/>
-            <ac:spMk id="2" creationId="{1F19201D-2A10-AAC3-1006-C86286DC0339}"/>
-          </ac:spMkLst>
-        </pc:spChg>
-        <pc:spChg chg="add mod">
-          <ac:chgData name="Chris Moreh" userId="17b81281-9f29-44e0-9273-6dadbf6896a2" providerId="ADAL" clId="{C881F287-C991-44D9-941D-31328D1263EC}" dt="2024-10-08T09:29:41.504" v="189" actId="1076"/>
-          <ac:spMkLst>
-            <pc:docMk/>
-            <pc:sldMk cId="3672351687" sldId="522"/>
-            <ac:spMk id="9" creationId="{4CFE870A-DE02-462E-B98D-FCDDFE3CE2F9}"/>
-          </ac:spMkLst>
-        </pc:spChg>
-        <pc:spChg chg="add mod">
-          <ac:chgData name="Chris Moreh" userId="17b81281-9f29-44e0-9273-6dadbf6896a2" providerId="ADAL" clId="{C881F287-C991-44D9-941D-31328D1263EC}" dt="2024-10-08T09:29:41.504" v="189" actId="1076"/>
-          <ac:spMkLst>
-            <pc:docMk/>
-            <pc:sldMk cId="3672351687" sldId="522"/>
-            <ac:spMk id="10" creationId="{60BA844F-925A-482F-AEA6-A1C19BC2B721}"/>
-          </ac:spMkLst>
-        </pc:spChg>
-        <pc:spChg chg="add mod">
-          <ac:chgData name="Chris Moreh" userId="17b81281-9f29-44e0-9273-6dadbf6896a2" providerId="ADAL" clId="{C881F287-C991-44D9-941D-31328D1263EC}" dt="2024-10-08T09:29:50.314" v="191" actId="1076"/>
-          <ac:spMkLst>
-            <pc:docMk/>
-            <pc:sldMk cId="3672351687" sldId="522"/>
-            <ac:spMk id="11" creationId="{CD3B7E98-6E18-4358-B76C-CC893A991317}"/>
-          </ac:spMkLst>
-        </pc:spChg>
-        <pc:picChg chg="add mod">
-          <ac:chgData name="Chris Moreh" userId="17b81281-9f29-44e0-9273-6dadbf6896a2" providerId="ADAL" clId="{C881F287-C991-44D9-941D-31328D1263EC}" dt="2024-10-08T09:29:41.504" v="189" actId="1076"/>
-          <ac:picMkLst>
-            <pc:docMk/>
-            <pc:sldMk cId="3672351687" sldId="522"/>
-            <ac:picMk id="6" creationId="{82FD8197-AD3F-4E46-8396-3CB8693B1FF9}"/>
-          </ac:picMkLst>
-        </pc:picChg>
-        <pc:picChg chg="add mod">
-          <ac:chgData name="Chris Moreh" userId="17b81281-9f29-44e0-9273-6dadbf6896a2" providerId="ADAL" clId="{C881F287-C991-44D9-941D-31328D1263EC}" dt="2024-10-08T09:29:50.314" v="191" actId="1076"/>
-          <ac:picMkLst>
-            <pc:docMk/>
-            <pc:sldMk cId="3672351687" sldId="522"/>
-            <ac:picMk id="7" creationId="{35092435-6B9D-42CE-9942-D45DCDFEFA8E}"/>
-          </ac:picMkLst>
-        </pc:picChg>
-        <pc:picChg chg="add mod">
-          <ac:chgData name="Chris Moreh" userId="17b81281-9f29-44e0-9273-6dadbf6896a2" providerId="ADAL" clId="{C881F287-C991-44D9-941D-31328D1263EC}" dt="2024-10-08T09:29:44.016" v="190" actId="1076"/>
-          <ac:picMkLst>
-            <pc:docMk/>
-            <pc:sldMk cId="3672351687" sldId="522"/>
-            <ac:picMk id="8" creationId="{7898E259-4F4F-4490-8628-7C470BE519BE}"/>
-          </ac:picMkLst>
-        </pc:picChg>
-      </pc:sldChg>
-      <pc:sldChg chg="addSp delSp modSp new mod modClrScheme chgLayout">
-        <pc:chgData name="Chris Moreh" userId="17b81281-9f29-44e0-9273-6dadbf6896a2" providerId="ADAL" clId="{C881F287-C991-44D9-941D-31328D1263EC}" dt="2024-10-08T10:04:06.836" v="1537" actId="113"/>
-        <pc:sldMkLst>
-          <pc:docMk/>
-          <pc:sldMk cId="1301853266" sldId="523"/>
-        </pc:sldMkLst>
-        <pc:spChg chg="del mod ord">
-          <ac:chgData name="Chris Moreh" userId="17b81281-9f29-44e0-9273-6dadbf6896a2" providerId="ADAL" clId="{C881F287-C991-44D9-941D-31328D1263EC}" dt="2024-10-08T09:28:48.622" v="179" actId="700"/>
-          <ac:spMkLst>
-            <pc:docMk/>
-            <pc:sldMk cId="1301853266" sldId="523"/>
-            <ac:spMk id="2" creationId="{058E35F5-49DF-EA78-F83F-158C775F0BDF}"/>
-          </ac:spMkLst>
-        </pc:spChg>
-        <pc:spChg chg="del mod ord">
-          <ac:chgData name="Chris Moreh" userId="17b81281-9f29-44e0-9273-6dadbf6896a2" providerId="ADAL" clId="{C881F287-C991-44D9-941D-31328D1263EC}" dt="2024-10-08T09:28:48.622" v="179" actId="700"/>
-          <ac:spMkLst>
-            <pc:docMk/>
-            <pc:sldMk cId="1301853266" sldId="523"/>
-            <ac:spMk id="3" creationId="{AE129DA2-4633-D79A-46DC-34102DE6A03D}"/>
-          </ac:spMkLst>
-        </pc:spChg>
-        <pc:spChg chg="mod ord">
-          <ac:chgData name="Chris Moreh" userId="17b81281-9f29-44e0-9273-6dadbf6896a2" providerId="ADAL" clId="{C881F287-C991-44D9-941D-31328D1263EC}" dt="2024-10-08T09:28:48.622" v="179" actId="700"/>
-          <ac:spMkLst>
-            <pc:docMk/>
-            <pc:sldMk cId="1301853266" sldId="523"/>
-            <ac:spMk id="4" creationId="{5F74CD3D-6209-B71E-328E-3CEE4431F3F5}"/>
-          </ac:spMkLst>
-        </pc:spChg>
-        <pc:spChg chg="mod ord">
-          <ac:chgData name="Chris Moreh" userId="17b81281-9f29-44e0-9273-6dadbf6896a2" providerId="ADAL" clId="{C881F287-C991-44D9-941D-31328D1263EC}" dt="2024-10-08T09:28:48.622" v="179" actId="700"/>
-          <ac:spMkLst>
-            <pc:docMk/>
-            <pc:sldMk cId="1301853266" sldId="523"/>
-            <ac:spMk id="5" creationId="{DE0B2AC9-C062-ACDA-78EB-2E5B2DF3BA3F}"/>
-          </ac:spMkLst>
-        </pc:spChg>
-        <pc:spChg chg="mod ord">
-          <ac:chgData name="Chris Moreh" userId="17b81281-9f29-44e0-9273-6dadbf6896a2" providerId="ADAL" clId="{C881F287-C991-44D9-941D-31328D1263EC}" dt="2024-10-08T09:28:48.622" v="179" actId="700"/>
-          <ac:spMkLst>
-            <pc:docMk/>
-            <pc:sldMk cId="1301853266" sldId="523"/>
-            <ac:spMk id="6" creationId="{63AA58D7-3FC7-1868-4188-EE9D3329FE70}"/>
-          </ac:spMkLst>
-        </pc:spChg>
-        <pc:spChg chg="add mod ord">
-          <ac:chgData name="Chris Moreh" userId="17b81281-9f29-44e0-9273-6dadbf6896a2" providerId="ADAL" clId="{C881F287-C991-44D9-941D-31328D1263EC}" dt="2024-10-08T10:02:36.465" v="1513" actId="20577"/>
-          <ac:spMkLst>
-            <pc:docMk/>
-            <pc:sldMk cId="1301853266" sldId="523"/>
-            <ac:spMk id="7" creationId="{75BCA108-CB1D-5541-DFA5-C4B6F5FB8C65}"/>
-          </ac:spMkLst>
-        </pc:spChg>
-        <pc:spChg chg="add mod ord">
-          <ac:chgData name="Chris Moreh" userId="17b81281-9f29-44e0-9273-6dadbf6896a2" providerId="ADAL" clId="{C881F287-C991-44D9-941D-31328D1263EC}" dt="2024-10-08T10:04:06.836" v="1537" actId="113"/>
-          <ac:spMkLst>
-            <pc:docMk/>
-            <pc:sldMk cId="1301853266" sldId="523"/>
-            <ac:spMk id="8" creationId="{00E86ADC-9F29-16A6-FCC9-F4480732B527}"/>
-          </ac:spMkLst>
-        </pc:spChg>
-      </pc:sldChg>
-      <pc:sldChg chg="add del">
-        <pc:chgData name="Chris Moreh" userId="17b81281-9f29-44e0-9273-6dadbf6896a2" providerId="ADAL" clId="{C881F287-C991-44D9-941D-31328D1263EC}" dt="2024-10-08T09:41:23.194" v="853" actId="47"/>
-        <pc:sldMkLst>
-          <pc:docMk/>
-          <pc:sldMk cId="2449665670" sldId="524"/>
-        </pc:sldMkLst>
-      </pc:sldChg>
-      <pc:sldChg chg="addSp delSp modSp add mod modAnim">
-        <pc:chgData name="Chris Moreh" userId="17b81281-9f29-44e0-9273-6dadbf6896a2" providerId="ADAL" clId="{C881F287-C991-44D9-941D-31328D1263EC}" dt="2024-10-08T09:40:57.127" v="852"/>
-        <pc:sldMkLst>
-          <pc:docMk/>
-          <pc:sldMk cId="3520677906" sldId="525"/>
-        </pc:sldMkLst>
-        <pc:spChg chg="mod">
-          <ac:chgData name="Chris Moreh" userId="17b81281-9f29-44e0-9273-6dadbf6896a2" providerId="ADAL" clId="{C881F287-C991-44D9-941D-31328D1263EC}" dt="2024-10-08T09:40:50.420" v="851" actId="20577"/>
-          <ac:spMkLst>
-            <pc:docMk/>
-            <pc:sldMk cId="3520677906" sldId="525"/>
-            <ac:spMk id="4" creationId="{79E77290-7E9E-5817-7D8D-BEA0520F0718}"/>
-          </ac:spMkLst>
-        </pc:spChg>
-        <pc:picChg chg="del">
-          <ac:chgData name="Chris Moreh" userId="17b81281-9f29-44e0-9273-6dadbf6896a2" providerId="ADAL" clId="{C881F287-C991-44D9-941D-31328D1263EC}" dt="2024-10-08T09:36:54.567" v="589" actId="478"/>
-          <ac:picMkLst>
-            <pc:docMk/>
-            <pc:sldMk cId="3520677906" sldId="525"/>
-            <ac:picMk id="3" creationId="{E9EDBBEA-F163-4B2F-BC6D-0A2F6D1E6CAC}"/>
-          </ac:picMkLst>
-        </pc:picChg>
-        <pc:picChg chg="add mod">
-          <ac:chgData name="Chris Moreh" userId="17b81281-9f29-44e0-9273-6dadbf6896a2" providerId="ADAL" clId="{C881F287-C991-44D9-941D-31328D1263EC}" dt="2024-10-08T09:37:05.790" v="595" actId="14100"/>
-          <ac:picMkLst>
-            <pc:docMk/>
-            <pc:sldMk cId="3520677906" sldId="525"/>
-            <ac:picMk id="5" creationId="{C19A1C8A-FFFC-7150-F54B-519669594EF9}"/>
-          </ac:picMkLst>
-        </pc:picChg>
-      </pc:sldChg>
-      <pc:sldChg chg="new del">
-        <pc:chgData name="Chris Moreh" userId="17b81281-9f29-44e0-9273-6dadbf6896a2" providerId="ADAL" clId="{C881F287-C991-44D9-941D-31328D1263EC}" dt="2024-10-08T09:44:54.890" v="1257" actId="47"/>
-        <pc:sldMkLst>
-          <pc:docMk/>
-          <pc:sldMk cId="2744344574" sldId="526"/>
-        </pc:sldMkLst>
-      </pc:sldChg>
-      <pc:sldChg chg="addSp delSp modSp add del mod modAnim">
-        <pc:chgData name="Chris Moreh" userId="17b81281-9f29-44e0-9273-6dadbf6896a2" providerId="ADAL" clId="{C881F287-C991-44D9-941D-31328D1263EC}" dt="2024-10-08T09:45:00.590" v="1259" actId="47"/>
-        <pc:sldMkLst>
-          <pc:docMk/>
-          <pc:sldMk cId="625175555" sldId="527"/>
-        </pc:sldMkLst>
-        <pc:spChg chg="add mod">
-          <ac:chgData name="Chris Moreh" userId="17b81281-9f29-44e0-9273-6dadbf6896a2" providerId="ADAL" clId="{C881F287-C991-44D9-941D-31328D1263EC}" dt="2024-10-08T09:44:29.055" v="1255" actId="20577"/>
-          <ac:spMkLst>
-            <pc:docMk/>
-            <pc:sldMk cId="625175555" sldId="527"/>
-            <ac:spMk id="3" creationId="{8FA03281-1AA3-7FD7-7A18-24BD14962098}"/>
-          </ac:spMkLst>
-        </pc:spChg>
-        <pc:spChg chg="del">
-          <ac:chgData name="Chris Moreh" userId="17b81281-9f29-44e0-9273-6dadbf6896a2" providerId="ADAL" clId="{C881F287-C991-44D9-941D-31328D1263EC}" dt="2024-10-08T09:40:18.775" v="808" actId="478"/>
-          <ac:spMkLst>
-            <pc:docMk/>
-            <pc:sldMk cId="625175555" sldId="527"/>
-            <ac:spMk id="4" creationId="{79E77290-7E9E-5817-7D8D-BEA0520F0718}"/>
-          </ac:spMkLst>
-        </pc:spChg>
-        <pc:spChg chg="mod">
-          <ac:chgData name="Chris Moreh" userId="17b81281-9f29-44e0-9273-6dadbf6896a2" providerId="ADAL" clId="{C881F287-C991-44D9-941D-31328D1263EC}" dt="2024-10-08T09:41:36.992" v="867" actId="20577"/>
-          <ac:spMkLst>
-            <pc:docMk/>
-            <pc:sldMk cId="625175555" sldId="527"/>
-            <ac:spMk id="6" creationId="{56BC2B75-09B9-4092-B01C-D2106A55B0AE}"/>
-          </ac:spMkLst>
-        </pc:spChg>
-        <pc:picChg chg="add mod">
-          <ac:chgData name="Chris Moreh" userId="17b81281-9f29-44e0-9273-6dadbf6896a2" providerId="ADAL" clId="{C881F287-C991-44D9-941D-31328D1263EC}" dt="2024-10-08T09:41:49.255" v="870" actId="1076"/>
-          <ac:picMkLst>
-            <pc:docMk/>
-            <pc:sldMk cId="625175555" sldId="527"/>
-            <ac:picMk id="2" creationId="{8BD80079-BE6D-A064-0234-5B999E2D651E}"/>
-          </ac:picMkLst>
-        </pc:picChg>
-        <pc:picChg chg="del">
-          <ac:chgData name="Chris Moreh" userId="17b81281-9f29-44e0-9273-6dadbf6896a2" providerId="ADAL" clId="{C881F287-C991-44D9-941D-31328D1263EC}" dt="2024-10-08T09:40:16.836" v="807" actId="478"/>
-          <ac:picMkLst>
-            <pc:docMk/>
-            <pc:sldMk cId="625175555" sldId="527"/>
-            <ac:picMk id="5" creationId="{C19A1C8A-FFFC-7150-F54B-519669594EF9}"/>
-          </ac:picMkLst>
-        </pc:picChg>
-      </pc:sldChg>
-      <pc:sldChg chg="modSp add mod ord">
-        <pc:chgData name="Chris Moreh" userId="17b81281-9f29-44e0-9273-6dadbf6896a2" providerId="ADAL" clId="{C881F287-C991-44D9-941D-31328D1263EC}" dt="2024-10-08T09:40:35.343" v="821" actId="20577"/>
-        <pc:sldMkLst>
-          <pc:docMk/>
-          <pc:sldMk cId="2410549944" sldId="528"/>
-        </pc:sldMkLst>
-        <pc:spChg chg="mod">
-          <ac:chgData name="Chris Moreh" userId="17b81281-9f29-44e0-9273-6dadbf6896a2" providerId="ADAL" clId="{C881F287-C991-44D9-941D-31328D1263EC}" dt="2024-10-08T09:40:35.343" v="821" actId="20577"/>
-          <ac:spMkLst>
-            <pc:docMk/>
-            <pc:sldMk cId="2410549944" sldId="528"/>
-            <ac:spMk id="2" creationId="{458B02B2-42BE-434E-8F9E-1AAD6454CF83}"/>
-          </ac:spMkLst>
-        </pc:spChg>
-      </pc:sldChg>
-      <pc:sldChg chg="addSp modSp new mod">
-        <pc:chgData name="Chris Moreh" userId="17b81281-9f29-44e0-9273-6dadbf6896a2" providerId="ADAL" clId="{C881F287-C991-44D9-941D-31328D1263EC}" dt="2024-10-08T09:46:03.732" v="1283" actId="1076"/>
-        <pc:sldMkLst>
-          <pc:docMk/>
-          <pc:sldMk cId="3011893373" sldId="529"/>
-        </pc:sldMkLst>
-        <pc:spChg chg="mod">
-          <ac:chgData name="Chris Moreh" userId="17b81281-9f29-44e0-9273-6dadbf6896a2" providerId="ADAL" clId="{C881F287-C991-44D9-941D-31328D1263EC}" dt="2024-10-08T09:45:21.680" v="1274"/>
-          <ac:spMkLst>
-            <pc:docMk/>
-            <pc:sldMk cId="3011893373" sldId="529"/>
-            <ac:spMk id="2" creationId="{8082366A-82E4-558A-3C35-A03F17BB03BF}"/>
-          </ac:spMkLst>
-        </pc:spChg>
-        <pc:spChg chg="add mod">
-          <ac:chgData name="Chris Moreh" userId="17b81281-9f29-44e0-9273-6dadbf6896a2" providerId="ADAL" clId="{C881F287-C991-44D9-941D-31328D1263EC}" dt="2024-10-08T09:45:33.623" v="1277"/>
-          <ac:spMkLst>
-            <pc:docMk/>
-            <pc:sldMk cId="3011893373" sldId="529"/>
-            <ac:spMk id="6" creationId="{F10DEB46-1089-4DB0-9D46-DB261134DE74}"/>
-          </ac:spMkLst>
-        </pc:spChg>
-        <pc:spChg chg="add mod">
-          <ac:chgData name="Chris Moreh" userId="17b81281-9f29-44e0-9273-6dadbf6896a2" providerId="ADAL" clId="{C881F287-C991-44D9-941D-31328D1263EC}" dt="2024-10-08T09:45:33.623" v="1277"/>
-          <ac:spMkLst>
-            <pc:docMk/>
-            <pc:sldMk cId="3011893373" sldId="529"/>
-            <ac:spMk id="7" creationId="{06901C45-0960-4222-86DD-2EBC275AB02C}"/>
-          </ac:spMkLst>
-        </pc:spChg>
-        <pc:spChg chg="add mod">
-          <ac:chgData name="Chris Moreh" userId="17b81281-9f29-44e0-9273-6dadbf6896a2" providerId="ADAL" clId="{C881F287-C991-44D9-941D-31328D1263EC}" dt="2024-10-08T09:45:33.623" v="1277"/>
-          <ac:spMkLst>
-            <pc:docMk/>
-            <pc:sldMk cId="3011893373" sldId="529"/>
-            <ac:spMk id="11" creationId="{A79F868A-630C-4299-8043-194F7E28FF37}"/>
-          </ac:spMkLst>
-        </pc:spChg>
-        <pc:spChg chg="add mod">
-          <ac:chgData name="Chris Moreh" userId="17b81281-9f29-44e0-9273-6dadbf6896a2" providerId="ADAL" clId="{C881F287-C991-44D9-941D-31328D1263EC}" dt="2024-10-08T09:45:33.623" v="1277"/>
-          <ac:spMkLst>
-            <pc:docMk/>
-            <pc:sldMk cId="3011893373" sldId="529"/>
-            <ac:spMk id="12" creationId="{EEE649C4-951B-4A6E-A063-61E0AB812998}"/>
-          </ac:spMkLst>
-        </pc:spChg>
-        <pc:spChg chg="add mod">
-          <ac:chgData name="Chris Moreh" userId="17b81281-9f29-44e0-9273-6dadbf6896a2" providerId="ADAL" clId="{C881F287-C991-44D9-941D-31328D1263EC}" dt="2024-10-08T09:46:03.732" v="1283" actId="1076"/>
-          <ac:spMkLst>
-            <pc:docMk/>
-            <pc:sldMk cId="3011893373" sldId="529"/>
-            <ac:spMk id="14" creationId="{76D39039-27A2-4299-9309-8A3EA97B9DFC}"/>
-          </ac:spMkLst>
-        </pc:spChg>
-        <pc:graphicFrameChg chg="add mod modGraphic">
-          <ac:chgData name="Chris Moreh" userId="17b81281-9f29-44e0-9273-6dadbf6896a2" providerId="ADAL" clId="{C881F287-C991-44D9-941D-31328D1263EC}" dt="2024-10-08T09:45:57.153" v="1282" actId="207"/>
-          <ac:graphicFrameMkLst>
-            <pc:docMk/>
-            <pc:sldMk cId="3011893373" sldId="529"/>
-            <ac:graphicFrameMk id="10" creationId="{EE7B91DE-3674-48DA-9557-9EF69F259CF2}"/>
-          </ac:graphicFrameMkLst>
-        </pc:graphicFrameChg>
-        <pc:picChg chg="add mod">
-          <ac:chgData name="Chris Moreh" userId="17b81281-9f29-44e0-9273-6dadbf6896a2" providerId="ADAL" clId="{C881F287-C991-44D9-941D-31328D1263EC}" dt="2024-10-08T09:45:33.623" v="1277"/>
-          <ac:picMkLst>
-            <pc:docMk/>
-            <pc:sldMk cId="3011893373" sldId="529"/>
-            <ac:picMk id="8" creationId="{8924BD7D-ABDD-4514-A568-8C9B4E14CB51}"/>
-          </ac:picMkLst>
-        </pc:picChg>
-        <pc:picChg chg="add mod">
-          <ac:chgData name="Chris Moreh" userId="17b81281-9f29-44e0-9273-6dadbf6896a2" providerId="ADAL" clId="{C881F287-C991-44D9-941D-31328D1263EC}" dt="2024-10-08T09:45:33.623" v="1277"/>
-          <ac:picMkLst>
-            <pc:docMk/>
-            <pc:sldMk cId="3011893373" sldId="529"/>
-            <ac:picMk id="9" creationId="{3C832D1F-E22D-40B6-9975-B59801C71789}"/>
-          </ac:picMkLst>
-        </pc:picChg>
-      </pc:sldChg>
-      <pc:sldChg chg="modSp add mod modTransition modClrScheme chgLayout">
-        <pc:chgData name="Chris Moreh" userId="17b81281-9f29-44e0-9273-6dadbf6896a2" providerId="ADAL" clId="{C881F287-C991-44D9-941D-31328D1263EC}" dt="2024-10-08T09:54:09.095" v="1396" actId="1076"/>
-        <pc:sldMkLst>
-          <pc:docMk/>
-          <pc:sldMk cId="0" sldId="530"/>
-        </pc:sldMkLst>
-        <pc:spChg chg="mod ord">
-          <ac:chgData name="Chris Moreh" userId="17b81281-9f29-44e0-9273-6dadbf6896a2" providerId="ADAL" clId="{C881F287-C991-44D9-941D-31328D1263EC}" dt="2024-10-08T09:53:55.071" v="1392" actId="27636"/>
-          <ac:spMkLst>
-            <pc:docMk/>
-            <pc:sldMk cId="0" sldId="530"/>
-            <ac:spMk id="2" creationId="{00000000-0000-0000-0000-000000000000}"/>
-          </ac:spMkLst>
-        </pc:spChg>
-        <pc:spChg chg="mod ord">
-          <ac:chgData name="Chris Moreh" userId="17b81281-9f29-44e0-9273-6dadbf6896a2" providerId="ADAL" clId="{C881F287-C991-44D9-941D-31328D1263EC}" dt="2024-10-08T09:53:55.044" v="1391" actId="700"/>
-          <ac:spMkLst>
-            <pc:docMk/>
-            <pc:sldMk cId="0" sldId="530"/>
-            <ac:spMk id="5" creationId="{00000000-0000-0000-0000-000000000000}"/>
-          </ac:spMkLst>
-        </pc:spChg>
-        <pc:spChg chg="mod ord">
-          <ac:chgData name="Chris Moreh" userId="17b81281-9f29-44e0-9273-6dadbf6896a2" providerId="ADAL" clId="{C881F287-C991-44D9-941D-31328D1263EC}" dt="2024-10-08T09:53:55.044" v="1391" actId="700"/>
-          <ac:spMkLst>
-            <pc:docMk/>
-            <pc:sldMk cId="0" sldId="530"/>
-            <ac:spMk id="6" creationId="{00000000-0000-0000-0000-000000000000}"/>
-          </ac:spMkLst>
-        </pc:spChg>
-        <pc:picChg chg="mod">
-          <ac:chgData name="Chris Moreh" userId="17b81281-9f29-44e0-9273-6dadbf6896a2" providerId="ADAL" clId="{C881F287-C991-44D9-941D-31328D1263EC}" dt="2024-10-08T09:54:09.095" v="1396" actId="1076"/>
-          <ac:picMkLst>
-            <pc:docMk/>
-            <pc:sldMk cId="0" sldId="530"/>
-            <ac:picMk id="4" creationId="{EBC206A0-F9E8-E772-3BA8-FFF14852643B}"/>
-          </ac:picMkLst>
-        </pc:picChg>
-        <pc:picChg chg="mod">
-          <ac:chgData name="Chris Moreh" userId="17b81281-9f29-44e0-9273-6dadbf6896a2" providerId="ADAL" clId="{C881F287-C991-44D9-941D-31328D1263EC}" dt="2024-10-08T09:54:07.214" v="1395" actId="1076"/>
-          <ac:picMkLst>
-            <pc:docMk/>
-            <pc:sldMk cId="0" sldId="530"/>
-            <ac:picMk id="1026" creationId="{A76EC4F5-D491-B613-8EA8-7A7CE063F574}"/>
-          </ac:picMkLst>
-        </pc:picChg>
-      </pc:sldChg>
-      <pc:sldChg chg="delSp add del mod">
-        <pc:chgData name="Chris Moreh" userId="17b81281-9f29-44e0-9273-6dadbf6896a2" providerId="ADAL" clId="{C881F287-C991-44D9-941D-31328D1263EC}" dt="2024-10-08T09:59:11.229" v="1440" actId="47"/>
-        <pc:sldMkLst>
-          <pc:docMk/>
-          <pc:sldMk cId="3987443650" sldId="531"/>
-        </pc:sldMkLst>
-        <pc:picChg chg="del">
-          <ac:chgData name="Chris Moreh" userId="17b81281-9f29-44e0-9273-6dadbf6896a2" providerId="ADAL" clId="{C881F287-C991-44D9-941D-31328D1263EC}" dt="2024-10-08T09:56:17.338" v="1407" actId="478"/>
-          <ac:picMkLst>
-            <pc:docMk/>
-            <pc:sldMk cId="3987443650" sldId="531"/>
-            <ac:picMk id="4" creationId="{BBC67004-7023-2934-B9CC-E419109BD817}"/>
-          </ac:picMkLst>
-        </pc:picChg>
-      </pc:sldChg>
-      <pc:sldChg chg="addSp modSp add mod">
-        <pc:chgData name="Chris Moreh" userId="17b81281-9f29-44e0-9273-6dadbf6896a2" providerId="ADAL" clId="{C881F287-C991-44D9-941D-31328D1263EC}" dt="2024-10-08T10:00:14.444" v="1486" actId="20577"/>
-        <pc:sldMkLst>
-          <pc:docMk/>
-          <pc:sldMk cId="1632811419" sldId="532"/>
-        </pc:sldMkLst>
-        <pc:spChg chg="add mod">
-          <ac:chgData name="Chris Moreh" userId="17b81281-9f29-44e0-9273-6dadbf6896a2" providerId="ADAL" clId="{C881F287-C991-44D9-941D-31328D1263EC}" dt="2024-10-08T10:00:14.444" v="1486" actId="20577"/>
-          <ac:spMkLst>
-            <pc:docMk/>
-            <pc:sldMk cId="1632811419" sldId="532"/>
-            <ac:spMk id="3" creationId="{A0360E62-B99A-5AC6-2377-CB188A7B5947}"/>
-          </ac:spMkLst>
-        </pc:spChg>
-      </pc:sldChg>
-      <pc:sldChg chg="addSp delSp modSp add">
-        <pc:chgData name="Chris Moreh" userId="17b81281-9f29-44e0-9273-6dadbf6896a2" providerId="ADAL" clId="{C881F287-C991-44D9-941D-31328D1263EC}" dt="2024-10-08T09:58:35.510" v="1437" actId="14100"/>
-        <pc:sldMkLst>
-          <pc:docMk/>
-          <pc:sldMk cId="4111163125" sldId="533"/>
-        </pc:sldMkLst>
-        <pc:spChg chg="add del mod">
-          <ac:chgData name="Chris Moreh" userId="17b81281-9f29-44e0-9273-6dadbf6896a2" providerId="ADAL" clId="{C881F287-C991-44D9-941D-31328D1263EC}" dt="2024-10-08T09:58:09.210" v="1431" actId="1076"/>
-          <ac:spMkLst>
-            <pc:docMk/>
-            <pc:sldMk cId="4111163125" sldId="533"/>
-            <ac:spMk id="3" creationId="{C7AAE53C-DB34-9D6C-7CA4-74C6B56DEBE8}"/>
-          </ac:spMkLst>
-        </pc:spChg>
-        <pc:spChg chg="add">
-          <ac:chgData name="Chris Moreh" userId="17b81281-9f29-44e0-9273-6dadbf6896a2" providerId="ADAL" clId="{C881F287-C991-44D9-941D-31328D1263EC}" dt="2024-10-08T09:58:23.366" v="1432"/>
-          <ac:spMkLst>
-            <pc:docMk/>
-            <pc:sldMk cId="4111163125" sldId="533"/>
-            <ac:spMk id="4" creationId="{3437FD75-68B6-1739-F774-11BC3DF693CF}"/>
-          </ac:spMkLst>
-        </pc:spChg>
-        <pc:picChg chg="add mod">
-          <ac:chgData name="Chris Moreh" userId="17b81281-9f29-44e0-9273-6dadbf6896a2" providerId="ADAL" clId="{C881F287-C991-44D9-941D-31328D1263EC}" dt="2024-10-08T09:58:09.210" v="1431" actId="1076"/>
-          <ac:picMkLst>
-            <pc:docMk/>
-            <pc:sldMk cId="4111163125" sldId="533"/>
-            <ac:picMk id="2050" creationId="{8403DCF6-99E2-285F-57CE-0CBC7DC9FD15}"/>
-          </ac:picMkLst>
-        </pc:picChg>
-        <pc:picChg chg="add mod">
-          <ac:chgData name="Chris Moreh" userId="17b81281-9f29-44e0-9273-6dadbf6896a2" providerId="ADAL" clId="{C881F287-C991-44D9-941D-31328D1263EC}" dt="2024-10-08T09:58:09.210" v="1431" actId="1076"/>
-          <ac:picMkLst>
-            <pc:docMk/>
-            <pc:sldMk cId="4111163125" sldId="533"/>
-            <ac:picMk id="2051" creationId="{A504593D-D953-B5CF-8B4B-C394BA6EAE30}"/>
-          </ac:picMkLst>
-        </pc:picChg>
-        <pc:picChg chg="add mod">
-          <ac:chgData name="Chris Moreh" userId="17b81281-9f29-44e0-9273-6dadbf6896a2" providerId="ADAL" clId="{C881F287-C991-44D9-941D-31328D1263EC}" dt="2024-10-08T09:58:35.510" v="1437" actId="14100"/>
-          <ac:picMkLst>
-            <pc:docMk/>
-            <pc:sldMk cId="4111163125" sldId="533"/>
-            <ac:picMk id="2053" creationId="{C1B84274-D26E-E237-668F-6891FDB12083}"/>
-          </ac:picMkLst>
-        </pc:picChg>
-      </pc:sldChg>
-      <pc:sldChg chg="add del">
-        <pc:chgData name="Chris Moreh" userId="17b81281-9f29-44e0-9273-6dadbf6896a2" providerId="ADAL" clId="{C881F287-C991-44D9-941D-31328D1263EC}" dt="2024-10-08T10:01:17.991" v="1488" actId="47"/>
-        <pc:sldMkLst>
-          <pc:docMk/>
-          <pc:sldMk cId="3571996569" sldId="534"/>
-        </pc:sldMkLst>
-      </pc:sldChg>
-      <pc:sldChg chg="add del">
-        <pc:chgData name="Chris Moreh" userId="17b81281-9f29-44e0-9273-6dadbf6896a2" providerId="ADAL" clId="{C881F287-C991-44D9-941D-31328D1263EC}" dt="2024-10-08T10:01:18.758" v="1489" actId="47"/>
-        <pc:sldMkLst>
-          <pc:docMk/>
-          <pc:sldMk cId="1289871492" sldId="535"/>
-        </pc:sldMkLst>
-      </pc:sldChg>
-      <pc:sldChg chg="add del">
-        <pc:chgData name="Chris Moreh" userId="17b81281-9f29-44e0-9273-6dadbf6896a2" providerId="ADAL" clId="{C881F287-C991-44D9-941D-31328D1263EC}" dt="2024-10-08T10:01:19.602" v="1490" actId="47"/>
-        <pc:sldMkLst>
-          <pc:docMk/>
-          <pc:sldMk cId="2867059037" sldId="536"/>
-        </pc:sldMkLst>
-      </pc:sldChg>
-      <pc:sldChg chg="addSp modSp add mod">
-        <pc:chgData name="Chris Moreh" userId="17b81281-9f29-44e0-9273-6dadbf6896a2" providerId="ADAL" clId="{C881F287-C991-44D9-941D-31328D1263EC}" dt="2024-10-08T09:56:49.833" v="1416" actId="1076"/>
-        <pc:sldMkLst>
-          <pc:docMk/>
-          <pc:sldMk cId="2695840908" sldId="537"/>
-        </pc:sldMkLst>
-        <pc:graphicFrameChg chg="add mod">
-          <ac:chgData name="Chris Moreh" userId="17b81281-9f29-44e0-9273-6dadbf6896a2" providerId="ADAL" clId="{C881F287-C991-44D9-941D-31328D1263EC}" dt="2024-10-08T09:56:49.833" v="1416" actId="1076"/>
-          <ac:graphicFrameMkLst>
-            <pc:docMk/>
-            <pc:sldMk cId="2695840908" sldId="537"/>
-            <ac:graphicFrameMk id="3" creationId="{A0C14315-CCEC-5435-D7AF-9C6F17DEDE08}"/>
-          </ac:graphicFrameMkLst>
-        </pc:graphicFrameChg>
-      </pc:sldChg>
-      <pc:sldChg chg="modSp add">
-        <pc:chgData name="Chris Moreh" userId="17b81281-9f29-44e0-9273-6dadbf6896a2" providerId="ADAL" clId="{C881F287-C991-44D9-941D-31328D1263EC}" dt="2024-10-08T09:58:59.242" v="1439" actId="14826"/>
-        <pc:sldMkLst>
-          <pc:docMk/>
-          <pc:sldMk cId="1063760435" sldId="538"/>
-        </pc:sldMkLst>
-        <pc:picChg chg="mod">
-          <ac:chgData name="Chris Moreh" userId="17b81281-9f29-44e0-9273-6dadbf6896a2" providerId="ADAL" clId="{C881F287-C991-44D9-941D-31328D1263EC}" dt="2024-10-08T09:58:59.242" v="1439" actId="14826"/>
-          <ac:picMkLst>
-            <pc:docMk/>
-            <pc:sldMk cId="1063760435" sldId="538"/>
-            <ac:picMk id="2053" creationId="{C1B84274-D26E-E237-668F-6891FDB12083}"/>
-          </ac:picMkLst>
-        </pc:picChg>
-      </pc:sldChg>
-      <pc:sldMasterChg chg="setBg modSldLayout">
-        <pc:chgData name="Chris Moreh" userId="17b81281-9f29-44e0-9273-6dadbf6896a2" providerId="ADAL" clId="{C881F287-C991-44D9-941D-31328D1263EC}" dt="2024-10-08T07:25:40.501" v="112"/>
-        <pc:sldMasterMkLst>
-          <pc:docMk/>
-          <pc:sldMasterMk cId="3120243165" sldId="2147483660"/>
-        </pc:sldMasterMkLst>
-        <pc:sldLayoutChg chg="addSp delSp modSp mod setBg">
-          <pc:chgData name="Chris Moreh" userId="17b81281-9f29-44e0-9273-6dadbf6896a2" providerId="ADAL" clId="{C881F287-C991-44D9-941D-31328D1263EC}" dt="2024-10-08T07:25:40.501" v="112"/>
-          <pc:sldLayoutMkLst>
-            <pc:docMk/>
-            <pc:sldMasterMk cId="3120243165" sldId="2147483660"/>
-            <pc:sldLayoutMk cId="1963352992" sldId="2147483661"/>
-          </pc:sldLayoutMkLst>
-          <pc:spChg chg="add del">
-            <ac:chgData name="Chris Moreh" userId="17b81281-9f29-44e0-9273-6dadbf6896a2" providerId="ADAL" clId="{C881F287-C991-44D9-941D-31328D1263EC}" dt="2024-10-08T07:21:33.811" v="63" actId="11529"/>
-            <ac:spMkLst>
-              <pc:docMk/>
-              <pc:sldMasterMk cId="3120243165" sldId="2147483660"/>
-              <pc:sldLayoutMk cId="1963352992" sldId="2147483661"/>
-              <ac:spMk id="2" creationId="{CE772638-39CB-2213-87C8-C28E30148097}"/>
-            </ac:spMkLst>
-          </pc:spChg>
-          <pc:spChg chg="add del mod">
-            <ac:chgData name="Chris Moreh" userId="17b81281-9f29-44e0-9273-6dadbf6896a2" providerId="ADAL" clId="{C881F287-C991-44D9-941D-31328D1263EC}" dt="2024-10-08T07:21:39.780" v="64" actId="478"/>
-            <ac:spMkLst>
-              <pc:docMk/>
-              <pc:sldMasterMk cId="3120243165" sldId="2147483660"/>
-              <pc:sldLayoutMk cId="1963352992" sldId="2147483661"/>
-              <ac:spMk id="3" creationId="{9A7989AA-170E-19BF-9AB2-08BC41978273}"/>
-            </ac:spMkLst>
-          </pc:spChg>
-        </pc:sldLayoutChg>
-        <pc:sldLayoutChg chg="setBg">
-          <pc:chgData name="Chris Moreh" userId="17b81281-9f29-44e0-9273-6dadbf6896a2" providerId="ADAL" clId="{C881F287-C991-44D9-941D-31328D1263EC}" dt="2024-10-08T07:25:40.501" v="112"/>
-          <pc:sldLayoutMkLst>
-            <pc:docMk/>
-            <pc:sldMasterMk cId="3120243165" sldId="2147483660"/>
-            <pc:sldLayoutMk cId="2595251350" sldId="2147483662"/>
-          </pc:sldLayoutMkLst>
-        </pc:sldLayoutChg>
-        <pc:sldLayoutChg chg="setBg">
-          <pc:chgData name="Chris Moreh" userId="17b81281-9f29-44e0-9273-6dadbf6896a2" providerId="ADAL" clId="{C881F287-C991-44D9-941D-31328D1263EC}" dt="2024-10-08T07:25:40.501" v="112"/>
-          <pc:sldLayoutMkLst>
-            <pc:docMk/>
-            <pc:sldMasterMk cId="3120243165" sldId="2147483660"/>
-            <pc:sldLayoutMk cId="3269691050" sldId="2147483663"/>
-          </pc:sldLayoutMkLst>
-        </pc:sldLayoutChg>
-        <pc:sldLayoutChg chg="setBg">
-          <pc:chgData name="Chris Moreh" userId="17b81281-9f29-44e0-9273-6dadbf6896a2" providerId="ADAL" clId="{C881F287-C991-44D9-941D-31328D1263EC}" dt="2024-10-08T07:25:40.501" v="112"/>
-          <pc:sldLayoutMkLst>
-            <pc:docMk/>
-            <pc:sldMasterMk cId="3120243165" sldId="2147483660"/>
-            <pc:sldLayoutMk cId="2000362926" sldId="2147483664"/>
-          </pc:sldLayoutMkLst>
-        </pc:sldLayoutChg>
-        <pc:sldLayoutChg chg="setBg">
-          <pc:chgData name="Chris Moreh" userId="17b81281-9f29-44e0-9273-6dadbf6896a2" providerId="ADAL" clId="{C881F287-C991-44D9-941D-31328D1263EC}" dt="2024-10-08T07:25:40.501" v="112"/>
-          <pc:sldLayoutMkLst>
-            <pc:docMk/>
-            <pc:sldMasterMk cId="3120243165" sldId="2147483660"/>
-            <pc:sldLayoutMk cId="1048557662" sldId="2147483665"/>
-          </pc:sldLayoutMkLst>
-        </pc:sldLayoutChg>
-        <pc:sldLayoutChg chg="setBg">
-          <pc:chgData name="Chris Moreh" userId="17b81281-9f29-44e0-9273-6dadbf6896a2" providerId="ADAL" clId="{C881F287-C991-44D9-941D-31328D1263EC}" dt="2024-10-08T07:25:40.501" v="112"/>
-          <pc:sldLayoutMkLst>
-            <pc:docMk/>
-            <pc:sldMasterMk cId="3120243165" sldId="2147483660"/>
-            <pc:sldLayoutMk cId="1290176558" sldId="2147483666"/>
-          </pc:sldLayoutMkLst>
-        </pc:sldLayoutChg>
-        <pc:sldLayoutChg chg="setBg">
-          <pc:chgData name="Chris Moreh" userId="17b81281-9f29-44e0-9273-6dadbf6896a2" providerId="ADAL" clId="{C881F287-C991-44D9-941D-31328D1263EC}" dt="2024-10-08T07:25:40.501" v="112"/>
-          <pc:sldLayoutMkLst>
-            <pc:docMk/>
-            <pc:sldMasterMk cId="3120243165" sldId="2147483660"/>
-            <pc:sldLayoutMk cId="3269464527" sldId="2147483667"/>
-          </pc:sldLayoutMkLst>
-        </pc:sldLayoutChg>
-        <pc:sldLayoutChg chg="setBg">
-          <pc:chgData name="Chris Moreh" userId="17b81281-9f29-44e0-9273-6dadbf6896a2" providerId="ADAL" clId="{C881F287-C991-44D9-941D-31328D1263EC}" dt="2024-10-08T07:25:40.501" v="112"/>
-          <pc:sldLayoutMkLst>
-            <pc:docMk/>
-            <pc:sldMasterMk cId="3120243165" sldId="2147483660"/>
-            <pc:sldLayoutMk cId="529753349" sldId="2147483668"/>
-          </pc:sldLayoutMkLst>
-        </pc:sldLayoutChg>
-        <pc:sldLayoutChg chg="setBg">
-          <pc:chgData name="Chris Moreh" userId="17b81281-9f29-44e0-9273-6dadbf6896a2" providerId="ADAL" clId="{C881F287-C991-44D9-941D-31328D1263EC}" dt="2024-10-08T07:25:40.501" v="112"/>
-          <pc:sldLayoutMkLst>
-            <pc:docMk/>
-            <pc:sldMasterMk cId="3120243165" sldId="2147483660"/>
-            <pc:sldLayoutMk cId="1201317367" sldId="2147483669"/>
-          </pc:sldLayoutMkLst>
-        </pc:sldLayoutChg>
-        <pc:sldLayoutChg chg="setBg">
-          <pc:chgData name="Chris Moreh" userId="17b81281-9f29-44e0-9273-6dadbf6896a2" providerId="ADAL" clId="{C881F287-C991-44D9-941D-31328D1263EC}" dt="2024-10-08T07:25:40.501" v="112"/>
-          <pc:sldLayoutMkLst>
-            <pc:docMk/>
-            <pc:sldMasterMk cId="3120243165" sldId="2147483660"/>
-            <pc:sldLayoutMk cId="4034479074" sldId="2147483670"/>
-          </pc:sldLayoutMkLst>
-        </pc:sldLayoutChg>
-        <pc:sldLayoutChg chg="setBg">
-          <pc:chgData name="Chris Moreh" userId="17b81281-9f29-44e0-9273-6dadbf6896a2" providerId="ADAL" clId="{C881F287-C991-44D9-941D-31328D1263EC}" dt="2024-10-08T07:25:40.501" v="112"/>
-          <pc:sldLayoutMkLst>
-            <pc:docMk/>
-            <pc:sldMasterMk cId="3120243165" sldId="2147483660"/>
-            <pc:sldLayoutMk cId="4060267296" sldId="2147483671"/>
-          </pc:sldLayoutMkLst>
-        </pc:sldLayoutChg>
-        <pc:sldLayoutChg chg="setBg">
-          <pc:chgData name="Chris Moreh" userId="17b81281-9f29-44e0-9273-6dadbf6896a2" providerId="ADAL" clId="{C881F287-C991-44D9-941D-31328D1263EC}" dt="2024-10-08T07:25:40.501" v="112"/>
-          <pc:sldLayoutMkLst>
-            <pc:docMk/>
-            <pc:sldMasterMk cId="3120243165" sldId="2147483660"/>
-            <pc:sldLayoutMk cId="2900277239" sldId="2147483672"/>
-          </pc:sldLayoutMkLst>
-        </pc:sldLayoutChg>
-        <pc:sldLayoutChg chg="setBg">
-          <pc:chgData name="Chris Moreh" userId="17b81281-9f29-44e0-9273-6dadbf6896a2" providerId="ADAL" clId="{C881F287-C991-44D9-941D-31328D1263EC}" dt="2024-10-08T07:25:40.501" v="112"/>
-          <pc:sldLayoutMkLst>
-            <pc:docMk/>
-            <pc:sldMasterMk cId="3120243165" sldId="2147483660"/>
-            <pc:sldLayoutMk cId="691324733" sldId="2147483673"/>
-          </pc:sldLayoutMkLst>
-        </pc:sldLayoutChg>
-        <pc:sldLayoutChg chg="setBg">
-          <pc:chgData name="Chris Moreh" userId="17b81281-9f29-44e0-9273-6dadbf6896a2" providerId="ADAL" clId="{C881F287-C991-44D9-941D-31328D1263EC}" dt="2024-10-08T07:25:40.501" v="112"/>
-          <pc:sldLayoutMkLst>
-            <pc:docMk/>
-            <pc:sldMasterMk cId="3120243165" sldId="2147483660"/>
-            <pc:sldLayoutMk cId="1477845932" sldId="2147483674"/>
-          </pc:sldLayoutMkLst>
-        </pc:sldLayoutChg>
-        <pc:sldLayoutChg chg="setBg">
-          <pc:chgData name="Chris Moreh" userId="17b81281-9f29-44e0-9273-6dadbf6896a2" providerId="ADAL" clId="{C881F287-C991-44D9-941D-31328D1263EC}" dt="2024-10-08T07:25:40.501" v="112"/>
-          <pc:sldLayoutMkLst>
-            <pc:docMk/>
-            <pc:sldMasterMk cId="3120243165" sldId="2147483660"/>
-            <pc:sldLayoutMk cId="3724895204" sldId="2147483675"/>
-          </pc:sldLayoutMkLst>
-        </pc:sldLayoutChg>
-        <pc:sldLayoutChg chg="setBg">
-          <pc:chgData name="Chris Moreh" userId="17b81281-9f29-44e0-9273-6dadbf6896a2" providerId="ADAL" clId="{C881F287-C991-44D9-941D-31328D1263EC}" dt="2024-10-08T07:25:40.501" v="112"/>
-          <pc:sldLayoutMkLst>
-            <pc:docMk/>
-            <pc:sldMasterMk cId="3120243165" sldId="2147483660"/>
-            <pc:sldLayoutMk cId="1270494045" sldId="2147483676"/>
-          </pc:sldLayoutMkLst>
-        </pc:sldLayoutChg>
-        <pc:sldLayoutChg chg="setBg">
-          <pc:chgData name="Chris Moreh" userId="17b81281-9f29-44e0-9273-6dadbf6896a2" providerId="ADAL" clId="{C881F287-C991-44D9-941D-31328D1263EC}" dt="2024-10-08T07:25:40.501" v="112"/>
-          <pc:sldLayoutMkLst>
-            <pc:docMk/>
-            <pc:sldMasterMk cId="3120243165" sldId="2147483660"/>
-            <pc:sldLayoutMk cId="746363300" sldId="2147483677"/>
-          </pc:sldLayoutMkLst>
-        </pc:sldLayoutChg>
-      </pc:sldMasterChg>
-    </pc:docChg>
-  </pc:docChgLst>
-  <pc:docChgLst>
-    <pc:chgData name="Chris Moreh" userId="17b81281-9f29-44e0-9273-6dadbf6896a2" providerId="ADAL" clId="{2952FB45-6E2C-4A86-8113-AD5D0B310964}"/>
-    <pc:docChg chg="custSel addSld delSld modSld">
-      <pc:chgData name="Chris Moreh" userId="17b81281-9f29-44e0-9273-6dadbf6896a2" providerId="ADAL" clId="{2952FB45-6E2C-4A86-8113-AD5D0B310964}" dt="2024-10-22T09:55:13.136" v="150" actId="47"/>
-      <pc:docMkLst>
-        <pc:docMk/>
-      </pc:docMkLst>
-      <pc:sldChg chg="modSp add mod modTransition">
-        <pc:chgData name="Chris Moreh" userId="17b81281-9f29-44e0-9273-6dadbf6896a2" providerId="ADAL" clId="{2952FB45-6E2C-4A86-8113-AD5D0B310964}" dt="2024-10-22T09:45:25.896" v="57" actId="27636"/>
-        <pc:sldMkLst>
-          <pc:docMk/>
-          <pc:sldMk cId="0" sldId="257"/>
-        </pc:sldMkLst>
-        <pc:spChg chg="mod">
-          <ac:chgData name="Chris Moreh" userId="17b81281-9f29-44e0-9273-6dadbf6896a2" providerId="ADAL" clId="{2952FB45-6E2C-4A86-8113-AD5D0B310964}" dt="2024-10-22T09:45:25.896" v="57" actId="27636"/>
-          <ac:spMkLst>
-            <pc:docMk/>
-            <pc:sldMk cId="0" sldId="257"/>
-            <ac:spMk id="3" creationId="{00000000-0000-0000-0000-000000000000}"/>
-          </ac:spMkLst>
-        </pc:spChg>
-      </pc:sldChg>
-      <pc:sldChg chg="add modTransition">
-        <pc:chgData name="Chris Moreh" userId="17b81281-9f29-44e0-9273-6dadbf6896a2" providerId="ADAL" clId="{2952FB45-6E2C-4A86-8113-AD5D0B310964}" dt="2024-10-22T09:45:25.727" v="49"/>
-        <pc:sldMkLst>
-          <pc:docMk/>
-          <pc:sldMk cId="0" sldId="259"/>
-        </pc:sldMkLst>
-      </pc:sldChg>
-      <pc:sldChg chg="add modTransition">
-        <pc:chgData name="Chris Moreh" userId="17b81281-9f29-44e0-9273-6dadbf6896a2" providerId="ADAL" clId="{2952FB45-6E2C-4A86-8113-AD5D0B310964}" dt="2024-10-22T09:45:25.727" v="49"/>
-        <pc:sldMkLst>
-          <pc:docMk/>
-          <pc:sldMk cId="0" sldId="262"/>
-        </pc:sldMkLst>
-      </pc:sldChg>
-      <pc:sldChg chg="add modTransition">
-        <pc:chgData name="Chris Moreh" userId="17b81281-9f29-44e0-9273-6dadbf6896a2" providerId="ADAL" clId="{2952FB45-6E2C-4A86-8113-AD5D0B310964}" dt="2024-10-22T09:45:25.727" v="49"/>
-        <pc:sldMkLst>
-          <pc:docMk/>
-          <pc:sldMk cId="0" sldId="263"/>
-        </pc:sldMkLst>
-      </pc:sldChg>
-      <pc:sldChg chg="del">
-        <pc:chgData name="Chris Moreh" userId="17b81281-9f29-44e0-9273-6dadbf6896a2" providerId="ADAL" clId="{2952FB45-6E2C-4A86-8113-AD5D0B310964}" dt="2024-10-22T09:51:17.682" v="134" actId="47"/>
-        <pc:sldMkLst>
-          <pc:docMk/>
-          <pc:sldMk cId="2550670278" sldId="295"/>
-        </pc:sldMkLst>
-      </pc:sldChg>
-      <pc:sldChg chg="del">
-        <pc:chgData name="Chris Moreh" userId="17b81281-9f29-44e0-9273-6dadbf6896a2" providerId="ADAL" clId="{2952FB45-6E2C-4A86-8113-AD5D0B310964}" dt="2024-10-22T09:51:18.808" v="135" actId="47"/>
-        <pc:sldMkLst>
-          <pc:docMk/>
-          <pc:sldMk cId="2397369031" sldId="296"/>
-        </pc:sldMkLst>
-      </pc:sldChg>
-      <pc:sldChg chg="del">
-        <pc:chgData name="Chris Moreh" userId="17b81281-9f29-44e0-9273-6dadbf6896a2" providerId="ADAL" clId="{2952FB45-6E2C-4A86-8113-AD5D0B310964}" dt="2024-10-22T09:51:21.046" v="136" actId="47"/>
-        <pc:sldMkLst>
-          <pc:docMk/>
-          <pc:sldMk cId="782263443" sldId="297"/>
-        </pc:sldMkLst>
-      </pc:sldChg>
-      <pc:sldChg chg="modSp mod">
-        <pc:chgData name="Chris Moreh" userId="17b81281-9f29-44e0-9273-6dadbf6896a2" providerId="ADAL" clId="{2952FB45-6E2C-4A86-8113-AD5D0B310964}" dt="2024-10-22T09:38:53.471" v="5" actId="20577"/>
-        <pc:sldMkLst>
-          <pc:docMk/>
-          <pc:sldMk cId="3814459198" sldId="307"/>
-        </pc:sldMkLst>
-        <pc:spChg chg="mod">
-          <ac:chgData name="Chris Moreh" userId="17b81281-9f29-44e0-9273-6dadbf6896a2" providerId="ADAL" clId="{2952FB45-6E2C-4A86-8113-AD5D0B310964}" dt="2024-10-22T09:38:40.009" v="1" actId="20577"/>
-          <ac:spMkLst>
-            <pc:docMk/>
-            <pc:sldMk cId="3814459198" sldId="307"/>
-            <ac:spMk id="6" creationId="{24060982-6EE3-A8F1-75FE-C4BDB2FF3CBE}"/>
-          </ac:spMkLst>
-        </pc:spChg>
-        <pc:spChg chg="mod">
-          <ac:chgData name="Chris Moreh" userId="17b81281-9f29-44e0-9273-6dadbf6896a2" providerId="ADAL" clId="{2952FB45-6E2C-4A86-8113-AD5D0B310964}" dt="2024-10-22T09:38:53.471" v="5" actId="20577"/>
-          <ac:spMkLst>
-            <pc:docMk/>
-            <pc:sldMk cId="3814459198" sldId="307"/>
-            <ac:spMk id="7" creationId="{E112B5B6-7C9E-9DE5-8D2C-13D42F1FBB68}"/>
-          </ac:spMkLst>
-        </pc:spChg>
-      </pc:sldChg>
-      <pc:sldChg chg="del">
-        <pc:chgData name="Chris Moreh" userId="17b81281-9f29-44e0-9273-6dadbf6896a2" providerId="ADAL" clId="{2952FB45-6E2C-4A86-8113-AD5D0B310964}" dt="2024-10-22T09:51:22.610" v="137" actId="47"/>
-        <pc:sldMkLst>
-          <pc:docMk/>
-          <pc:sldMk cId="1180492818" sldId="308"/>
-        </pc:sldMkLst>
-      </pc:sldChg>
-      <pc:sldChg chg="del">
-        <pc:chgData name="Chris Moreh" userId="17b81281-9f29-44e0-9273-6dadbf6896a2" providerId="ADAL" clId="{2952FB45-6E2C-4A86-8113-AD5D0B310964}" dt="2024-10-22T09:51:24.002" v="138" actId="47"/>
-        <pc:sldMkLst>
-          <pc:docMk/>
-          <pc:sldMk cId="583205345" sldId="309"/>
-        </pc:sldMkLst>
-      </pc:sldChg>
-      <pc:sldChg chg="modSp mod">
-        <pc:chgData name="Chris Moreh" userId="17b81281-9f29-44e0-9273-6dadbf6896a2" providerId="ADAL" clId="{2952FB45-6E2C-4A86-8113-AD5D0B310964}" dt="2024-10-22T09:55:01.558" v="147" actId="14100"/>
-        <pc:sldMkLst>
-          <pc:docMk/>
-          <pc:sldMk cId="253129452" sldId="354"/>
-        </pc:sldMkLst>
-        <pc:spChg chg="mod">
-          <ac:chgData name="Chris Moreh" userId="17b81281-9f29-44e0-9273-6dadbf6896a2" providerId="ADAL" clId="{2952FB45-6E2C-4A86-8113-AD5D0B310964}" dt="2024-10-22T09:54:58.569" v="146" actId="14100"/>
-          <ac:spMkLst>
-            <pc:docMk/>
-            <pc:sldMk cId="253129452" sldId="354"/>
-            <ac:spMk id="7" creationId="{FF2CBA3A-E59C-1E5C-37CA-CD0F1E185ED5}"/>
-          </ac:spMkLst>
-        </pc:spChg>
-        <pc:spChg chg="mod">
-          <ac:chgData name="Chris Moreh" userId="17b81281-9f29-44e0-9273-6dadbf6896a2" providerId="ADAL" clId="{2952FB45-6E2C-4A86-8113-AD5D0B310964}" dt="2024-10-22T09:55:01.558" v="147" actId="14100"/>
-          <ac:spMkLst>
-            <pc:docMk/>
-            <pc:sldMk cId="253129452" sldId="354"/>
-            <ac:spMk id="8" creationId="{636F7FD2-53FA-4A51-9681-6FC5C8960063}"/>
-          </ac:spMkLst>
-        </pc:spChg>
-      </pc:sldChg>
-      <pc:sldChg chg="del">
-        <pc:chgData name="Chris Moreh" userId="17b81281-9f29-44e0-9273-6dadbf6896a2" providerId="ADAL" clId="{2952FB45-6E2C-4A86-8113-AD5D0B310964}" dt="2024-10-22T09:51:15.526" v="133" actId="47"/>
-        <pc:sldMkLst>
-          <pc:docMk/>
-          <pc:sldMk cId="404413708" sldId="357"/>
-        </pc:sldMkLst>
-      </pc:sldChg>
-      <pc:sldChg chg="modSp add mod modTransition">
-        <pc:chgData name="Chris Moreh" userId="17b81281-9f29-44e0-9273-6dadbf6896a2" providerId="ADAL" clId="{2952FB45-6E2C-4A86-8113-AD5D0B310964}" dt="2024-10-22T09:45:40.907" v="62" actId="732"/>
-        <pc:sldMkLst>
-          <pc:docMk/>
-          <pc:sldMk cId="3948964413" sldId="412"/>
-        </pc:sldMkLst>
-        <pc:spChg chg="mod">
-          <ac:chgData name="Chris Moreh" userId="17b81281-9f29-44e0-9273-6dadbf6896a2" providerId="ADAL" clId="{2952FB45-6E2C-4A86-8113-AD5D0B310964}" dt="2024-10-22T09:45:25.783" v="50" actId="27636"/>
-          <ac:spMkLst>
-            <pc:docMk/>
-            <pc:sldMk cId="3948964413" sldId="412"/>
-            <ac:spMk id="2" creationId="{FAB03E04-C9D5-A3F0-E59C-BA9F7072BAEF}"/>
-          </ac:spMkLst>
-        </pc:spChg>
-        <pc:picChg chg="mod modCrop">
-          <ac:chgData name="Chris Moreh" userId="17b81281-9f29-44e0-9273-6dadbf6896a2" providerId="ADAL" clId="{2952FB45-6E2C-4A86-8113-AD5D0B310964}" dt="2024-10-22T09:45:40.907" v="62" actId="732"/>
-          <ac:picMkLst>
-            <pc:docMk/>
-            <pc:sldMk cId="3948964413" sldId="412"/>
-            <ac:picMk id="8" creationId="{E7A4CE3A-5A16-271D-BF97-A905D7721713}"/>
-          </ac:picMkLst>
-        </pc:picChg>
-      </pc:sldChg>
-      <pc:sldChg chg="modSp add mod modTransition">
-        <pc:chgData name="Chris Moreh" userId="17b81281-9f29-44e0-9273-6dadbf6896a2" providerId="ADAL" clId="{2952FB45-6E2C-4A86-8113-AD5D0B310964}" dt="2024-10-22T09:46:39.199" v="67" actId="1076"/>
-        <pc:sldMkLst>
-          <pc:docMk/>
-          <pc:sldMk cId="3393528998" sldId="413"/>
-        </pc:sldMkLst>
-        <pc:spChg chg="mod">
-          <ac:chgData name="Chris Moreh" userId="17b81281-9f29-44e0-9273-6dadbf6896a2" providerId="ADAL" clId="{2952FB45-6E2C-4A86-8113-AD5D0B310964}" dt="2024-10-22T09:45:25.786" v="51" actId="27636"/>
-          <ac:spMkLst>
-            <pc:docMk/>
-            <pc:sldMk cId="3393528998" sldId="413"/>
-            <ac:spMk id="2" creationId="{2C98AB17-CB0A-429F-78B9-F85E47DD1750}"/>
-          </ac:spMkLst>
-        </pc:spChg>
-        <pc:picChg chg="mod">
-          <ac:chgData name="Chris Moreh" userId="17b81281-9f29-44e0-9273-6dadbf6896a2" providerId="ADAL" clId="{2952FB45-6E2C-4A86-8113-AD5D0B310964}" dt="2024-10-22T09:46:39.199" v="67" actId="1076"/>
-          <ac:picMkLst>
-            <pc:docMk/>
-            <pc:sldMk cId="3393528998" sldId="413"/>
-            <ac:picMk id="7" creationId="{62DB8D79-57EE-DED0-165E-AA432170F4EC}"/>
-          </ac:picMkLst>
-        </pc:picChg>
-      </pc:sldChg>
-      <pc:sldChg chg="modSp add mod modTransition">
-        <pc:chgData name="Chris Moreh" userId="17b81281-9f29-44e0-9273-6dadbf6896a2" providerId="ADAL" clId="{2952FB45-6E2C-4A86-8113-AD5D0B310964}" dt="2024-10-22T09:48:13.644" v="84" actId="1076"/>
-        <pc:sldMkLst>
-          <pc:docMk/>
-          <pc:sldMk cId="950172282" sldId="415"/>
-        </pc:sldMkLst>
-        <pc:spChg chg="mod">
-          <ac:chgData name="Chris Moreh" userId="17b81281-9f29-44e0-9273-6dadbf6896a2" providerId="ADAL" clId="{2952FB45-6E2C-4A86-8113-AD5D0B310964}" dt="2024-10-22T09:45:25.802" v="56" actId="27636"/>
-          <ac:spMkLst>
-            <pc:docMk/>
-            <pc:sldMk cId="950172282" sldId="415"/>
-            <ac:spMk id="2" creationId="{2C98AB17-CB0A-429F-78B9-F85E47DD1750}"/>
-          </ac:spMkLst>
-        </pc:spChg>
-        <pc:picChg chg="mod">
-          <ac:chgData name="Chris Moreh" userId="17b81281-9f29-44e0-9273-6dadbf6896a2" providerId="ADAL" clId="{2952FB45-6E2C-4A86-8113-AD5D0B310964}" dt="2024-10-22T09:48:13.644" v="84" actId="1076"/>
-          <ac:picMkLst>
-            <pc:docMk/>
-            <pc:sldMk cId="950172282" sldId="415"/>
-            <ac:picMk id="6" creationId="{C2D15601-CD04-BE13-28C3-356486A7A5F7}"/>
-          </ac:picMkLst>
-        </pc:picChg>
-      </pc:sldChg>
-      <pc:sldChg chg="modSp add mod modTransition">
-        <pc:chgData name="Chris Moreh" userId="17b81281-9f29-44e0-9273-6dadbf6896a2" providerId="ADAL" clId="{2952FB45-6E2C-4A86-8113-AD5D0B310964}" dt="2024-10-22T09:46:34.040" v="65" actId="1076"/>
-        <pc:sldMkLst>
-          <pc:docMk/>
-          <pc:sldMk cId="2037983352" sldId="416"/>
-        </pc:sldMkLst>
-        <pc:spChg chg="mod">
-          <ac:chgData name="Chris Moreh" userId="17b81281-9f29-44e0-9273-6dadbf6896a2" providerId="ADAL" clId="{2952FB45-6E2C-4A86-8113-AD5D0B310964}" dt="2024-10-22T09:45:25.786" v="52" actId="27636"/>
-          <ac:spMkLst>
-            <pc:docMk/>
-            <pc:sldMk cId="2037983352" sldId="416"/>
-            <ac:spMk id="2" creationId="{2C98AB17-CB0A-429F-78B9-F85E47DD1750}"/>
-          </ac:spMkLst>
-        </pc:spChg>
-        <pc:picChg chg="mod">
-          <ac:chgData name="Chris Moreh" userId="17b81281-9f29-44e0-9273-6dadbf6896a2" providerId="ADAL" clId="{2952FB45-6E2C-4A86-8113-AD5D0B310964}" dt="2024-10-22T09:46:34.040" v="65" actId="1076"/>
-          <ac:picMkLst>
-            <pc:docMk/>
-            <pc:sldMk cId="2037983352" sldId="416"/>
-            <ac:picMk id="6" creationId="{0D8C4645-422E-66D6-2734-437BEF56C75D}"/>
-          </ac:picMkLst>
-        </pc:picChg>
-      </pc:sldChg>
-      <pc:sldChg chg="modSp add mod modTransition">
-        <pc:chgData name="Chris Moreh" userId="17b81281-9f29-44e0-9273-6dadbf6896a2" providerId="ADAL" clId="{2952FB45-6E2C-4A86-8113-AD5D0B310964}" dt="2024-10-22T09:46:57.352" v="70" actId="1076"/>
-        <pc:sldMkLst>
-          <pc:docMk/>
-          <pc:sldMk cId="1943456012" sldId="417"/>
-        </pc:sldMkLst>
-        <pc:spChg chg="mod">
-          <ac:chgData name="Chris Moreh" userId="17b81281-9f29-44e0-9273-6dadbf6896a2" providerId="ADAL" clId="{2952FB45-6E2C-4A86-8113-AD5D0B310964}" dt="2024-10-22T09:45:25.786" v="53" actId="27636"/>
-          <ac:spMkLst>
-            <pc:docMk/>
-            <pc:sldMk cId="1943456012" sldId="417"/>
-            <ac:spMk id="2" creationId="{2C98AB17-CB0A-429F-78B9-F85E47DD1750}"/>
-          </ac:spMkLst>
-        </pc:spChg>
-        <pc:picChg chg="mod">
-          <ac:chgData name="Chris Moreh" userId="17b81281-9f29-44e0-9273-6dadbf6896a2" providerId="ADAL" clId="{2952FB45-6E2C-4A86-8113-AD5D0B310964}" dt="2024-10-22T09:46:57.352" v="70" actId="1076"/>
-          <ac:picMkLst>
-            <pc:docMk/>
-            <pc:sldMk cId="1943456012" sldId="417"/>
-            <ac:picMk id="3074" creationId="{59914363-6F8B-31D2-AD62-CF83AC6ECC68}"/>
-          </ac:picMkLst>
-        </pc:picChg>
-      </pc:sldChg>
-      <pc:sldChg chg="modSp add mod modTransition">
-        <pc:chgData name="Chris Moreh" userId="17b81281-9f29-44e0-9273-6dadbf6896a2" providerId="ADAL" clId="{2952FB45-6E2C-4A86-8113-AD5D0B310964}" dt="2024-10-22T09:47:40.460" v="78" actId="1076"/>
-        <pc:sldMkLst>
-          <pc:docMk/>
-          <pc:sldMk cId="2705663212" sldId="418"/>
-        </pc:sldMkLst>
-        <pc:spChg chg="mod">
-          <ac:chgData name="Chris Moreh" userId="17b81281-9f29-44e0-9273-6dadbf6896a2" providerId="ADAL" clId="{2952FB45-6E2C-4A86-8113-AD5D0B310964}" dt="2024-10-22T09:45:25.786" v="54" actId="27636"/>
-          <ac:spMkLst>
-            <pc:docMk/>
-            <pc:sldMk cId="2705663212" sldId="418"/>
-            <ac:spMk id="2" creationId="{2C98AB17-CB0A-429F-78B9-F85E47DD1750}"/>
-          </ac:spMkLst>
-        </pc:spChg>
-        <pc:spChg chg="mod">
-          <ac:chgData name="Chris Moreh" userId="17b81281-9f29-44e0-9273-6dadbf6896a2" providerId="ADAL" clId="{2952FB45-6E2C-4A86-8113-AD5D0B310964}" dt="2024-10-22T09:47:40.460" v="78" actId="1076"/>
-          <ac:spMkLst>
-            <pc:docMk/>
-            <pc:sldMk cId="2705663212" sldId="418"/>
-            <ac:spMk id="3" creationId="{5133DE63-011D-312C-37EB-44B7C00E9F73}"/>
-          </ac:spMkLst>
-        </pc:spChg>
-        <pc:spChg chg="mod">
-          <ac:chgData name="Chris Moreh" userId="17b81281-9f29-44e0-9273-6dadbf6896a2" providerId="ADAL" clId="{2952FB45-6E2C-4A86-8113-AD5D0B310964}" dt="2024-10-22T09:47:40.460" v="78" actId="1076"/>
-          <ac:spMkLst>
-            <pc:docMk/>
-            <pc:sldMk cId="2705663212" sldId="418"/>
-            <ac:spMk id="6" creationId="{15C8F51A-7356-A527-F990-898C7344A596}"/>
-          </ac:spMkLst>
-        </pc:spChg>
-        <pc:picChg chg="mod">
-          <ac:chgData name="Chris Moreh" userId="17b81281-9f29-44e0-9273-6dadbf6896a2" providerId="ADAL" clId="{2952FB45-6E2C-4A86-8113-AD5D0B310964}" dt="2024-10-22T09:47:40.460" v="78" actId="1076"/>
-          <ac:picMkLst>
-            <pc:docMk/>
-            <pc:sldMk cId="2705663212" sldId="418"/>
-            <ac:picMk id="3074" creationId="{59914363-6F8B-31D2-AD62-CF83AC6ECC68}"/>
-          </ac:picMkLst>
-        </pc:picChg>
-      </pc:sldChg>
-      <pc:sldChg chg="modSp add mod modTransition">
-        <pc:chgData name="Chris Moreh" userId="17b81281-9f29-44e0-9273-6dadbf6896a2" providerId="ADAL" clId="{2952FB45-6E2C-4A86-8113-AD5D0B310964}" dt="2024-10-22T09:47:50.548" v="81" actId="1076"/>
-        <pc:sldMkLst>
-          <pc:docMk/>
-          <pc:sldMk cId="1566893143" sldId="419"/>
-        </pc:sldMkLst>
-        <pc:spChg chg="mod">
-          <ac:chgData name="Chris Moreh" userId="17b81281-9f29-44e0-9273-6dadbf6896a2" providerId="ADAL" clId="{2952FB45-6E2C-4A86-8113-AD5D0B310964}" dt="2024-10-22T09:45:25.786" v="55" actId="27636"/>
-          <ac:spMkLst>
-            <pc:docMk/>
-            <pc:sldMk cId="1566893143" sldId="419"/>
-            <ac:spMk id="2" creationId="{2C98AB17-CB0A-429F-78B9-F85E47DD1750}"/>
-          </ac:spMkLst>
-        </pc:spChg>
-        <pc:picChg chg="mod">
-          <ac:chgData name="Chris Moreh" userId="17b81281-9f29-44e0-9273-6dadbf6896a2" providerId="ADAL" clId="{2952FB45-6E2C-4A86-8113-AD5D0B310964}" dt="2024-10-22T09:47:50.548" v="81" actId="1076"/>
-          <ac:picMkLst>
-            <pc:docMk/>
-            <pc:sldMk cId="1566893143" sldId="419"/>
-            <ac:picMk id="3074" creationId="{59914363-6F8B-31D2-AD62-CF83AC6ECC68}"/>
-          </ac:picMkLst>
-        </pc:picChg>
-      </pc:sldChg>
-      <pc:sldChg chg="addSp modSp add mod modClrScheme chgLayout">
-        <pc:chgData name="Chris Moreh" userId="17b81281-9f29-44e0-9273-6dadbf6896a2" providerId="ADAL" clId="{2952FB45-6E2C-4A86-8113-AD5D0B310964}" dt="2024-10-22T09:48:36.008" v="89" actId="20577"/>
-        <pc:sldMkLst>
-          <pc:docMk/>
-          <pc:sldMk cId="502470957" sldId="420"/>
-        </pc:sldMkLst>
-        <pc:spChg chg="add mod ord">
-          <ac:chgData name="Chris Moreh" userId="17b81281-9f29-44e0-9273-6dadbf6896a2" providerId="ADAL" clId="{2952FB45-6E2C-4A86-8113-AD5D0B310964}" dt="2024-10-22T09:48:24.934" v="85" actId="700"/>
-          <ac:spMkLst>
-            <pc:docMk/>
-            <pc:sldMk cId="502470957" sldId="420"/>
-            <ac:spMk id="2" creationId="{01542C17-2D4C-7318-D8DB-750135EFE689}"/>
-          </ac:spMkLst>
-        </pc:spChg>
-        <pc:spChg chg="mod ord">
-          <ac:chgData name="Chris Moreh" userId="17b81281-9f29-44e0-9273-6dadbf6896a2" providerId="ADAL" clId="{2952FB45-6E2C-4A86-8113-AD5D0B310964}" dt="2024-10-22T09:48:24.934" v="85" actId="700"/>
-          <ac:spMkLst>
-            <pc:docMk/>
-            <pc:sldMk cId="502470957" sldId="420"/>
-            <ac:spMk id="5" creationId="{AE0D6E3E-A79C-6D08-92A0-45BEB560584D}"/>
-          </ac:spMkLst>
-        </pc:spChg>
-        <pc:spChg chg="mod ord">
-          <ac:chgData name="Chris Moreh" userId="17b81281-9f29-44e0-9273-6dadbf6896a2" providerId="ADAL" clId="{2952FB45-6E2C-4A86-8113-AD5D0B310964}" dt="2024-10-22T09:48:36.008" v="89" actId="20577"/>
-          <ac:spMkLst>
-            <pc:docMk/>
-            <pc:sldMk cId="502470957" sldId="420"/>
-            <ac:spMk id="6" creationId="{12CD23AC-0A85-D9D0-4F22-DC32EC044CC9}"/>
-          </ac:spMkLst>
-        </pc:spChg>
-      </pc:sldChg>
-      <pc:sldChg chg="modSp add mod modTransition">
-        <pc:chgData name="Chris Moreh" userId="17b81281-9f29-44e0-9273-6dadbf6896a2" providerId="ADAL" clId="{2952FB45-6E2C-4A86-8113-AD5D0B310964}" dt="2024-10-22T09:49:53.273" v="97" actId="14734"/>
-        <pc:sldMkLst>
-          <pc:docMk/>
-          <pc:sldMk cId="483183442" sldId="422"/>
-        </pc:sldMkLst>
-        <pc:graphicFrameChg chg="mod modGraphic">
-          <ac:chgData name="Chris Moreh" userId="17b81281-9f29-44e0-9273-6dadbf6896a2" providerId="ADAL" clId="{2952FB45-6E2C-4A86-8113-AD5D0B310964}" dt="2024-10-22T09:49:53.273" v="97" actId="14734"/>
-          <ac:graphicFrameMkLst>
-            <pc:docMk/>
-            <pc:sldMk cId="483183442" sldId="422"/>
-            <ac:graphicFrameMk id="3" creationId="{52DF0E5A-73B1-3A2C-72F4-1C6EE39DE554}"/>
-          </ac:graphicFrameMkLst>
-        </pc:graphicFrameChg>
-      </pc:sldChg>
-      <pc:sldChg chg="modSp add mod modTransition">
-        <pc:chgData name="Chris Moreh" userId="17b81281-9f29-44e0-9273-6dadbf6896a2" providerId="ADAL" clId="{2952FB45-6E2C-4A86-8113-AD5D0B310964}" dt="2024-10-22T09:45:26.042" v="59" actId="27636"/>
-        <pc:sldMkLst>
-          <pc:docMk/>
-          <pc:sldMk cId="872078687" sldId="423"/>
-        </pc:sldMkLst>
-        <pc:spChg chg="mod">
-          <ac:chgData name="Chris Moreh" userId="17b81281-9f29-44e0-9273-6dadbf6896a2" providerId="ADAL" clId="{2952FB45-6E2C-4A86-8113-AD5D0B310964}" dt="2024-10-22T09:45:26.042" v="59" actId="27636"/>
-          <ac:spMkLst>
-            <pc:docMk/>
-            <pc:sldMk cId="872078687" sldId="423"/>
-            <ac:spMk id="2" creationId="{3E3368BD-5D6D-7C67-683D-849E17A9883A}"/>
-          </ac:spMkLst>
-        </pc:spChg>
-      </pc:sldChg>
-      <pc:sldChg chg="modSp add mod modTransition">
-        <pc:chgData name="Chris Moreh" userId="17b81281-9f29-44e0-9273-6dadbf6896a2" providerId="ADAL" clId="{2952FB45-6E2C-4A86-8113-AD5D0B310964}" dt="2024-10-22T09:45:26.042" v="60" actId="27636"/>
-        <pc:sldMkLst>
-          <pc:docMk/>
-          <pc:sldMk cId="1719150483" sldId="425"/>
-        </pc:sldMkLst>
-        <pc:spChg chg="mod">
-          <ac:chgData name="Chris Moreh" userId="17b81281-9f29-44e0-9273-6dadbf6896a2" providerId="ADAL" clId="{2952FB45-6E2C-4A86-8113-AD5D0B310964}" dt="2024-10-22T09:45:26.042" v="60" actId="27636"/>
-          <ac:spMkLst>
-            <pc:docMk/>
-            <pc:sldMk cId="1719150483" sldId="425"/>
-            <ac:spMk id="2" creationId="{6D3C35E3-7A94-3F06-8310-D0F46BEF356D}"/>
-          </ac:spMkLst>
-        </pc:spChg>
-      </pc:sldChg>
-      <pc:sldChg chg="del">
-        <pc:chgData name="Chris Moreh" userId="17b81281-9f29-44e0-9273-6dadbf6896a2" providerId="ADAL" clId="{2952FB45-6E2C-4A86-8113-AD5D0B310964}" dt="2024-10-22T09:43:50.970" v="40" actId="47"/>
-        <pc:sldMkLst>
-          <pc:docMk/>
-          <pc:sldMk cId="3523596212" sldId="518"/>
-        </pc:sldMkLst>
-      </pc:sldChg>
-      <pc:sldChg chg="del">
-        <pc:chgData name="Chris Moreh" userId="17b81281-9f29-44e0-9273-6dadbf6896a2" providerId="ADAL" clId="{2952FB45-6E2C-4A86-8113-AD5D0B310964}" dt="2024-10-22T09:43:48.639" v="37" actId="47"/>
-        <pc:sldMkLst>
-          <pc:docMk/>
-          <pc:sldMk cId="1759930319" sldId="519"/>
-        </pc:sldMkLst>
-      </pc:sldChg>
-      <pc:sldChg chg="modSp mod">
-        <pc:chgData name="Chris Moreh" userId="17b81281-9f29-44e0-9273-6dadbf6896a2" providerId="ADAL" clId="{2952FB45-6E2C-4A86-8113-AD5D0B310964}" dt="2024-10-22T09:39:09.559" v="16" actId="20577"/>
-        <pc:sldMkLst>
-          <pc:docMk/>
-          <pc:sldMk cId="3672351687" sldId="522"/>
-        </pc:sldMkLst>
-        <pc:spChg chg="mod">
-          <ac:chgData name="Chris Moreh" userId="17b81281-9f29-44e0-9273-6dadbf6896a2" providerId="ADAL" clId="{2952FB45-6E2C-4A86-8113-AD5D0B310964}" dt="2024-10-22T09:39:09.559" v="16" actId="20577"/>
-          <ac:spMkLst>
-            <pc:docMk/>
-            <pc:sldMk cId="3672351687" sldId="522"/>
-            <ac:spMk id="2" creationId="{1F19201D-2A10-AAC3-1006-C86286DC0339}"/>
-          </ac:spMkLst>
-        </pc:spChg>
-      </pc:sldChg>
-      <pc:sldChg chg="del">
-        <pc:chgData name="Chris Moreh" userId="17b81281-9f29-44e0-9273-6dadbf6896a2" providerId="ADAL" clId="{2952FB45-6E2C-4A86-8113-AD5D0B310964}" dt="2024-10-22T09:43:59.415" v="42" actId="47"/>
-        <pc:sldMkLst>
-          <pc:docMk/>
-          <pc:sldMk cId="0" sldId="530"/>
-        </pc:sldMkLst>
-      </pc:sldChg>
-      <pc:sldChg chg="del">
-        <pc:chgData name="Chris Moreh" userId="17b81281-9f29-44e0-9273-6dadbf6896a2" providerId="ADAL" clId="{2952FB45-6E2C-4A86-8113-AD5D0B310964}" dt="2024-10-22T09:44:01.199" v="44" actId="47"/>
-        <pc:sldMkLst>
-          <pc:docMk/>
-          <pc:sldMk cId="2121120123" sldId="542"/>
-        </pc:sldMkLst>
-      </pc:sldChg>
-      <pc:sldChg chg="del">
-        <pc:chgData name="Chris Moreh" userId="17b81281-9f29-44e0-9273-6dadbf6896a2" providerId="ADAL" clId="{2952FB45-6E2C-4A86-8113-AD5D0B310964}" dt="2024-10-22T09:51:13.962" v="132" actId="47"/>
-        <pc:sldMkLst>
-          <pc:docMk/>
-          <pc:sldMk cId="2171080681" sldId="543"/>
-        </pc:sldMkLst>
-      </pc:sldChg>
-      <pc:sldChg chg="del">
-        <pc:chgData name="Chris Moreh" userId="17b81281-9f29-44e0-9273-6dadbf6896a2" providerId="ADAL" clId="{2952FB45-6E2C-4A86-8113-AD5D0B310964}" dt="2024-10-22T09:43:56.507" v="41" actId="47"/>
-        <pc:sldMkLst>
-          <pc:docMk/>
-          <pc:sldMk cId="558277556" sldId="544"/>
-        </pc:sldMkLst>
-      </pc:sldChg>
-      <pc:sldChg chg="del">
-        <pc:chgData name="Chris Moreh" userId="17b81281-9f29-44e0-9273-6dadbf6896a2" providerId="ADAL" clId="{2952FB45-6E2C-4A86-8113-AD5D0B310964}" dt="2024-10-22T09:44:00.463" v="43" actId="47"/>
-        <pc:sldMkLst>
-          <pc:docMk/>
-          <pc:sldMk cId="2617544839" sldId="549"/>
-        </pc:sldMkLst>
-      </pc:sldChg>
-      <pc:sldChg chg="del">
-        <pc:chgData name="Chris Moreh" userId="17b81281-9f29-44e0-9273-6dadbf6896a2" providerId="ADAL" clId="{2952FB45-6E2C-4A86-8113-AD5D0B310964}" dt="2024-10-22T09:51:06.487" v="127" actId="47"/>
-        <pc:sldMkLst>
-          <pc:docMk/>
-          <pc:sldMk cId="1896707103" sldId="551"/>
-        </pc:sldMkLst>
-      </pc:sldChg>
-      <pc:sldChg chg="del">
-        <pc:chgData name="Chris Moreh" userId="17b81281-9f29-44e0-9273-6dadbf6896a2" providerId="ADAL" clId="{2952FB45-6E2C-4A86-8113-AD5D0B310964}" dt="2024-10-22T09:51:07.910" v="128" actId="47"/>
-        <pc:sldMkLst>
-          <pc:docMk/>
-          <pc:sldMk cId="3374055334" sldId="553"/>
-        </pc:sldMkLst>
-      </pc:sldChg>
-      <pc:sldChg chg="del">
-        <pc:chgData name="Chris Moreh" userId="17b81281-9f29-44e0-9273-6dadbf6896a2" providerId="ADAL" clId="{2952FB45-6E2C-4A86-8113-AD5D0B310964}" dt="2024-10-22T09:51:10.287" v="129" actId="47"/>
-        <pc:sldMkLst>
-          <pc:docMk/>
-          <pc:sldMk cId="2124584835" sldId="554"/>
-        </pc:sldMkLst>
-      </pc:sldChg>
-      <pc:sldChg chg="del">
-        <pc:chgData name="Chris Moreh" userId="17b81281-9f29-44e0-9273-6dadbf6896a2" providerId="ADAL" clId="{2952FB45-6E2C-4A86-8113-AD5D0B310964}" dt="2024-10-22T09:51:12.663" v="131" actId="47"/>
-        <pc:sldMkLst>
-          <pc:docMk/>
-          <pc:sldMk cId="3804936684" sldId="555"/>
-        </pc:sldMkLst>
-      </pc:sldChg>
-      <pc:sldChg chg="del">
-        <pc:chgData name="Chris Moreh" userId="17b81281-9f29-44e0-9273-6dadbf6896a2" providerId="ADAL" clId="{2952FB45-6E2C-4A86-8113-AD5D0B310964}" dt="2024-10-22T09:51:11.412" v="130" actId="47"/>
-        <pc:sldMkLst>
-          <pc:docMk/>
-          <pc:sldMk cId="4120332946" sldId="556"/>
-        </pc:sldMkLst>
-      </pc:sldChg>
-      <pc:sldChg chg="del">
-        <pc:chgData name="Chris Moreh" userId="17b81281-9f29-44e0-9273-6dadbf6896a2" providerId="ADAL" clId="{2952FB45-6E2C-4A86-8113-AD5D0B310964}" dt="2024-10-22T09:43:49.953" v="38" actId="47"/>
-        <pc:sldMkLst>
-          <pc:docMk/>
-          <pc:sldMk cId="3506495282" sldId="557"/>
-        </pc:sldMkLst>
-      </pc:sldChg>
-      <pc:sldChg chg="del">
-        <pc:chgData name="Chris Moreh" userId="17b81281-9f29-44e0-9273-6dadbf6896a2" providerId="ADAL" clId="{2952FB45-6E2C-4A86-8113-AD5D0B310964}" dt="2024-10-22T09:43:50.532" v="39" actId="47"/>
-        <pc:sldMkLst>
-          <pc:docMk/>
-          <pc:sldMk cId="897844589" sldId="558"/>
-        </pc:sldMkLst>
-      </pc:sldChg>
-      <pc:sldChg chg="del">
-        <pc:chgData name="Chris Moreh" userId="17b81281-9f29-44e0-9273-6dadbf6896a2" providerId="ADAL" clId="{2952FB45-6E2C-4A86-8113-AD5D0B310964}" dt="2024-10-22T09:44:02.089" v="45" actId="47"/>
-        <pc:sldMkLst>
-          <pc:docMk/>
-          <pc:sldMk cId="324367232" sldId="560"/>
-        </pc:sldMkLst>
-      </pc:sldChg>
-      <pc:sldChg chg="del">
-        <pc:chgData name="Chris Moreh" userId="17b81281-9f29-44e0-9273-6dadbf6896a2" providerId="ADAL" clId="{2952FB45-6E2C-4A86-8113-AD5D0B310964}" dt="2024-10-22T09:51:25.848" v="139" actId="47"/>
-        <pc:sldMkLst>
-          <pc:docMk/>
-          <pc:sldMk cId="3329067806" sldId="563"/>
-        </pc:sldMkLst>
-      </pc:sldChg>
-      <pc:sldChg chg="del">
-        <pc:chgData name="Chris Moreh" userId="17b81281-9f29-44e0-9273-6dadbf6896a2" providerId="ADAL" clId="{2952FB45-6E2C-4A86-8113-AD5D0B310964}" dt="2024-10-22T09:51:27.349" v="140" actId="47"/>
-        <pc:sldMkLst>
-          <pc:docMk/>
-          <pc:sldMk cId="275254640" sldId="564"/>
-        </pc:sldMkLst>
-      </pc:sldChg>
-      <pc:sldChg chg="addSp modSp add mod">
-        <pc:chgData name="Chris Moreh" userId="17b81281-9f29-44e0-9273-6dadbf6896a2" providerId="ADAL" clId="{2952FB45-6E2C-4A86-8113-AD5D0B310964}" dt="2024-10-22T09:43:15.864" v="36" actId="1076"/>
-        <pc:sldMkLst>
-          <pc:docMk/>
-          <pc:sldMk cId="1190259186" sldId="565"/>
-        </pc:sldMkLst>
-        <pc:spChg chg="add mod">
-          <ac:chgData name="Chris Moreh" userId="17b81281-9f29-44e0-9273-6dadbf6896a2" providerId="ADAL" clId="{2952FB45-6E2C-4A86-8113-AD5D0B310964}" dt="2024-10-22T09:42:59.455" v="32" actId="207"/>
-          <ac:spMkLst>
-            <pc:docMk/>
-            <pc:sldMk cId="1190259186" sldId="565"/>
-            <ac:spMk id="16" creationId="{EEB901A4-00D9-9AE5-A130-74A51A245B06}"/>
-          </ac:spMkLst>
-        </pc:spChg>
-        <pc:spChg chg="add mod">
-          <ac:chgData name="Chris Moreh" userId="17b81281-9f29-44e0-9273-6dadbf6896a2" providerId="ADAL" clId="{2952FB45-6E2C-4A86-8113-AD5D0B310964}" dt="2024-10-22T09:43:15.864" v="36" actId="1076"/>
-          <ac:spMkLst>
-            <pc:docMk/>
-            <pc:sldMk cId="1190259186" sldId="565"/>
-            <ac:spMk id="17" creationId="{6FA37E77-1D9C-8162-DD1D-D1B21718FF12}"/>
-          </ac:spMkLst>
-        </pc:spChg>
-        <pc:picChg chg="mod">
-          <ac:chgData name="Chris Moreh" userId="17b81281-9f29-44e0-9273-6dadbf6896a2" providerId="ADAL" clId="{2952FB45-6E2C-4A86-8113-AD5D0B310964}" dt="2024-10-22T09:41:36.663" v="26" actId="1076"/>
-          <ac:picMkLst>
-            <pc:docMk/>
-            <pc:sldMk cId="1190259186" sldId="565"/>
-            <ac:picMk id="6" creationId="{82FD8197-AD3F-4E46-8396-3CB8693B1FF9}"/>
-          </ac:picMkLst>
-        </pc:picChg>
-        <pc:picChg chg="add mod">
-          <ac:chgData name="Chris Moreh" userId="17b81281-9f29-44e0-9273-6dadbf6896a2" providerId="ADAL" clId="{2952FB45-6E2C-4A86-8113-AD5D0B310964}" dt="2024-10-22T09:41:32.988" v="25" actId="1076"/>
-          <ac:picMkLst>
-            <pc:docMk/>
-            <pc:sldMk cId="1190259186" sldId="565"/>
-            <ac:picMk id="7" creationId="{36B0C099-3F52-C0CA-3516-AA2A41B9E166}"/>
-          </ac:picMkLst>
-        </pc:picChg>
-        <pc:picChg chg="mod modCrop">
-          <ac:chgData name="Chris Moreh" userId="17b81281-9f29-44e0-9273-6dadbf6896a2" providerId="ADAL" clId="{2952FB45-6E2C-4A86-8113-AD5D0B310964}" dt="2024-10-22T09:40:39.843" v="18" actId="732"/>
-          <ac:picMkLst>
-            <pc:docMk/>
-            <pc:sldMk cId="1190259186" sldId="565"/>
-            <ac:picMk id="8" creationId="{7898E259-4F4F-4490-8628-7C470BE519BE}"/>
-          </ac:picMkLst>
-        </pc:picChg>
-        <pc:cxnChg chg="add mod">
-          <ac:chgData name="Chris Moreh" userId="17b81281-9f29-44e0-9273-6dadbf6896a2" providerId="ADAL" clId="{2952FB45-6E2C-4A86-8113-AD5D0B310964}" dt="2024-10-22T09:42:04.885" v="29" actId="1582"/>
-          <ac:cxnSpMkLst>
-            <pc:docMk/>
-            <pc:sldMk cId="1190259186" sldId="565"/>
-            <ac:cxnSpMk id="15" creationId="{6A41527C-6099-08ED-29D3-B300E8FBF0F3}"/>
-          </ac:cxnSpMkLst>
-        </pc:cxnChg>
-      </pc:sldChg>
-      <pc:sldChg chg="addSp delSp modSp new del mod modClrScheme chgLayout">
-        <pc:chgData name="Chris Moreh" userId="17b81281-9f29-44e0-9273-6dadbf6896a2" providerId="ADAL" clId="{2952FB45-6E2C-4A86-8113-AD5D0B310964}" dt="2024-10-22T09:55:10.022" v="148" actId="47"/>
-        <pc:sldMkLst>
-          <pc:docMk/>
-          <pc:sldMk cId="108372590" sldId="566"/>
-        </pc:sldMkLst>
-        <pc:spChg chg="del mod ord">
-          <ac:chgData name="Chris Moreh" userId="17b81281-9f29-44e0-9273-6dadbf6896a2" providerId="ADAL" clId="{2952FB45-6E2C-4A86-8113-AD5D0B310964}" dt="2024-10-22T09:50:46.425" v="98" actId="700"/>
-          <ac:spMkLst>
-            <pc:docMk/>
-            <pc:sldMk cId="108372590" sldId="566"/>
-            <ac:spMk id="2" creationId="{660B80A0-7836-0CB3-1A5B-258E2C84B5FD}"/>
-          </ac:spMkLst>
-        </pc:spChg>
-        <pc:spChg chg="mod ord">
-          <ac:chgData name="Chris Moreh" userId="17b81281-9f29-44e0-9273-6dadbf6896a2" providerId="ADAL" clId="{2952FB45-6E2C-4A86-8113-AD5D0B310964}" dt="2024-10-22T09:50:46.425" v="98" actId="700"/>
-          <ac:spMkLst>
-            <pc:docMk/>
-            <pc:sldMk cId="108372590" sldId="566"/>
-            <ac:spMk id="3" creationId="{5109CC58-B261-103E-3590-88181BE0C67C}"/>
-          </ac:spMkLst>
-        </pc:spChg>
-        <pc:spChg chg="mod ord">
-          <ac:chgData name="Chris Moreh" userId="17b81281-9f29-44e0-9273-6dadbf6896a2" providerId="ADAL" clId="{2952FB45-6E2C-4A86-8113-AD5D0B310964}" dt="2024-10-22T09:50:46.425" v="98" actId="700"/>
-          <ac:spMkLst>
-            <pc:docMk/>
-            <pc:sldMk cId="108372590" sldId="566"/>
-            <ac:spMk id="4" creationId="{8D4C0D04-EE70-D5D7-70F8-9BD032808B6C}"/>
-          </ac:spMkLst>
-        </pc:spChg>
-        <pc:spChg chg="mod ord">
-          <ac:chgData name="Chris Moreh" userId="17b81281-9f29-44e0-9273-6dadbf6896a2" providerId="ADAL" clId="{2952FB45-6E2C-4A86-8113-AD5D0B310964}" dt="2024-10-22T09:50:46.425" v="98" actId="700"/>
-          <ac:spMkLst>
-            <pc:docMk/>
-            <pc:sldMk cId="108372590" sldId="566"/>
-            <ac:spMk id="5" creationId="{FCDCC194-2CE9-25FC-DDAD-84E1EF490840}"/>
-          </ac:spMkLst>
-        </pc:spChg>
-        <pc:spChg chg="add mod ord">
-          <ac:chgData name="Chris Moreh" userId="17b81281-9f29-44e0-9273-6dadbf6896a2" providerId="ADAL" clId="{2952FB45-6E2C-4A86-8113-AD5D0B310964}" dt="2024-10-22T09:50:53.886" v="126" actId="20577"/>
-          <ac:spMkLst>
-            <pc:docMk/>
-            <pc:sldMk cId="108372590" sldId="566"/>
-            <ac:spMk id="6" creationId="{64C9B6C2-99EF-8628-9F23-7BD5A5B16EFE}"/>
-          </ac:spMkLst>
-        </pc:spChg>
-        <pc:spChg chg="add mod ord">
-          <ac:chgData name="Chris Moreh" userId="17b81281-9f29-44e0-9273-6dadbf6896a2" providerId="ADAL" clId="{2952FB45-6E2C-4A86-8113-AD5D0B310964}" dt="2024-10-22T09:50:46.425" v="98" actId="700"/>
-          <ac:spMkLst>
-            <pc:docMk/>
-            <pc:sldMk cId="108372590" sldId="566"/>
-            <ac:spMk id="7" creationId="{99689597-CBF8-EEF6-B8DB-C62071AD1E97}"/>
-          </ac:spMkLst>
-        </pc:spChg>
-      </pc:sldChg>
-      <pc:sldChg chg="new del">
-        <pc:chgData name="Chris Moreh" userId="17b81281-9f29-44e0-9273-6dadbf6896a2" providerId="ADAL" clId="{2952FB45-6E2C-4A86-8113-AD5D0B310964}" dt="2024-10-22T09:55:11.791" v="149" actId="47"/>
-        <pc:sldMkLst>
-          <pc:docMk/>
-          <pc:sldMk cId="2472628779" sldId="567"/>
-        </pc:sldMkLst>
-      </pc:sldChg>
-      <pc:sldChg chg="new del">
-        <pc:chgData name="Chris Moreh" userId="17b81281-9f29-44e0-9273-6dadbf6896a2" providerId="ADAL" clId="{2952FB45-6E2C-4A86-8113-AD5D0B310964}" dt="2024-10-22T09:55:13.136" v="150" actId="47"/>
-        <pc:sldMkLst>
-          <pc:docMk/>
-          <pc:sldMk cId="2198474162" sldId="568"/>
-        </pc:sldMkLst>
-      </pc:sldChg>
-      <pc:sldChg chg="modSp add mod modTransition">
-        <pc:chgData name="Chris Moreh" userId="17b81281-9f29-44e0-9273-6dadbf6896a2" providerId="ADAL" clId="{2952FB45-6E2C-4A86-8113-AD5D0B310964}" dt="2024-10-22T09:45:26.021" v="58" actId="27636"/>
-        <pc:sldMkLst>
-          <pc:docMk/>
-          <pc:sldMk cId="0" sldId="569"/>
-        </pc:sldMkLst>
-        <pc:spChg chg="mod">
-          <ac:chgData name="Chris Moreh" userId="17b81281-9f29-44e0-9273-6dadbf6896a2" providerId="ADAL" clId="{2952FB45-6E2C-4A86-8113-AD5D0B310964}" dt="2024-10-22T09:45:26.021" v="58" actId="27636"/>
-          <ac:spMkLst>
-            <pc:docMk/>
-            <pc:sldMk cId="0" sldId="569"/>
-            <ac:spMk id="3" creationId="{00000000-0000-0000-0000-000000000000}"/>
-          </ac:spMkLst>
-        </pc:spChg>
-      </pc:sldChg>
-    </pc:docChg>
-  </pc:docChgLst>
-  <pc:docChgLst>
-    <pc:chgData name="Chris Moreh" userId="17b81281-9f29-44e0-9273-6dadbf6896a2" providerId="ADAL" clId="{2B41A477-2A84-4B8D-9025-16417BC1047B}"/>
-    <pc:docChg chg="undo custSel addSld delSld modSld modMainMaster">
-      <pc:chgData name="Chris Moreh" userId="17b81281-9f29-44e0-9273-6dadbf6896a2" providerId="ADAL" clId="{2B41A477-2A84-4B8D-9025-16417BC1047B}" dt="2024-10-01T09:56:00.182" v="829" actId="20577"/>
-      <pc:docMkLst>
-        <pc:docMk/>
-      </pc:docMkLst>
-      <pc:sldChg chg="delSp mod delAnim modAnim">
-        <pc:chgData name="Chris Moreh" userId="17b81281-9f29-44e0-9273-6dadbf6896a2" providerId="ADAL" clId="{2B41A477-2A84-4B8D-9025-16417BC1047B}" dt="2024-10-01T08:12:43.142" v="476" actId="478"/>
-        <pc:sldMkLst>
-          <pc:docMk/>
-          <pc:sldMk cId="1670613332" sldId="256"/>
-        </pc:sldMkLst>
-        <pc:spChg chg="del">
-          <ac:chgData name="Chris Moreh" userId="17b81281-9f29-44e0-9273-6dadbf6896a2" providerId="ADAL" clId="{2B41A477-2A84-4B8D-9025-16417BC1047B}" dt="2024-10-01T08:12:36.709" v="473" actId="478"/>
-          <ac:spMkLst>
-            <pc:docMk/>
-            <pc:sldMk cId="1670613332" sldId="256"/>
-            <ac:spMk id="2" creationId="{7F1528AB-E855-B75D-1B22-6FD2298C7C84}"/>
-          </ac:spMkLst>
-        </pc:spChg>
-        <pc:spChg chg="del">
-          <ac:chgData name="Chris Moreh" userId="17b81281-9f29-44e0-9273-6dadbf6896a2" providerId="ADAL" clId="{2B41A477-2A84-4B8D-9025-16417BC1047B}" dt="2024-10-01T08:12:39.422" v="474" actId="478"/>
-          <ac:spMkLst>
-            <pc:docMk/>
-            <pc:sldMk cId="1670613332" sldId="256"/>
-            <ac:spMk id="3" creationId="{3AF5CABD-BAEB-103A-45F6-027AFD9B287F}"/>
-          </ac:spMkLst>
-        </pc:spChg>
-        <pc:picChg chg="del">
-          <ac:chgData name="Chris Moreh" userId="17b81281-9f29-44e0-9273-6dadbf6896a2" providerId="ADAL" clId="{2B41A477-2A84-4B8D-9025-16417BC1047B}" dt="2024-10-01T08:12:41.678" v="475" actId="478"/>
-          <ac:picMkLst>
-            <pc:docMk/>
-            <pc:sldMk cId="1670613332" sldId="256"/>
-            <ac:picMk id="4" creationId="{BBBE28EF-95AA-49A6-8D6D-CAB05F606220}"/>
-          </ac:picMkLst>
-        </pc:picChg>
-        <pc:picChg chg="del">
-          <ac:chgData name="Chris Moreh" userId="17b81281-9f29-44e0-9273-6dadbf6896a2" providerId="ADAL" clId="{2B41A477-2A84-4B8D-9025-16417BC1047B}" dt="2024-10-01T08:12:43.142" v="476" actId="478"/>
-          <ac:picMkLst>
-            <pc:docMk/>
-            <pc:sldMk cId="1670613332" sldId="256"/>
-            <ac:picMk id="1026" creationId="{6ADB5E4B-E8BC-768D-B385-5990B3FD38CB}"/>
-          </ac:picMkLst>
-        </pc:picChg>
-      </pc:sldChg>
-      <pc:sldChg chg="del">
-        <pc:chgData name="Chris Moreh" userId="17b81281-9f29-44e0-9273-6dadbf6896a2" providerId="ADAL" clId="{2B41A477-2A84-4B8D-9025-16417BC1047B}" dt="2024-10-01T08:12:54.144" v="483" actId="47"/>
-        <pc:sldMkLst>
-          <pc:docMk/>
-          <pc:sldMk cId="946479859" sldId="264"/>
-        </pc:sldMkLst>
-      </pc:sldChg>
-      <pc:sldChg chg="del">
-        <pc:chgData name="Chris Moreh" userId="17b81281-9f29-44e0-9273-6dadbf6896a2" providerId="ADAL" clId="{2B41A477-2A84-4B8D-9025-16417BC1047B}" dt="2024-10-01T08:12:53.784" v="481" actId="47"/>
-        <pc:sldMkLst>
-          <pc:docMk/>
-          <pc:sldMk cId="2775220474" sldId="265"/>
-        </pc:sldMkLst>
-      </pc:sldChg>
-      <pc:sldChg chg="del">
-        <pc:chgData name="Chris Moreh" userId="17b81281-9f29-44e0-9273-6dadbf6896a2" providerId="ADAL" clId="{2B41A477-2A84-4B8D-9025-16417BC1047B}" dt="2024-10-01T08:12:54.304" v="484" actId="47"/>
-        <pc:sldMkLst>
-          <pc:docMk/>
-          <pc:sldMk cId="962040558" sldId="266"/>
-        </pc:sldMkLst>
-      </pc:sldChg>
-      <pc:sldChg chg="del">
-        <pc:chgData name="Chris Moreh" userId="17b81281-9f29-44e0-9273-6dadbf6896a2" providerId="ADAL" clId="{2B41A477-2A84-4B8D-9025-16417BC1047B}" dt="2024-10-01T08:12:48.358" v="477" actId="47"/>
-        <pc:sldMkLst>
-          <pc:docMk/>
-          <pc:sldMk cId="1333931431" sldId="268"/>
-        </pc:sldMkLst>
-      </pc:sldChg>
-      <pc:sldChg chg="addSp delSp modSp add mod modTransition chgLayout">
-        <pc:chgData name="Chris Moreh" userId="17b81281-9f29-44e0-9273-6dadbf6896a2" providerId="ADAL" clId="{2B41A477-2A84-4B8D-9025-16417BC1047B}" dt="2024-10-01T09:51:37.010" v="786" actId="478"/>
-        <pc:sldMkLst>
-          <pc:docMk/>
-          <pc:sldMk cId="1913316541" sldId="268"/>
-        </pc:sldMkLst>
-        <pc:spChg chg="add del mod ord">
-          <ac:chgData name="Chris Moreh" userId="17b81281-9f29-44e0-9273-6dadbf6896a2" providerId="ADAL" clId="{2B41A477-2A84-4B8D-9025-16417BC1047B}" dt="2024-10-01T09:51:37.010" v="786" actId="478"/>
-          <ac:spMkLst>
-            <pc:docMk/>
-            <pc:sldMk cId="1913316541" sldId="268"/>
-            <ac:spMk id="15" creationId="{67CFE884-7162-9FEB-60F9-5AAA0423A8C6}"/>
-          </ac:spMkLst>
-        </pc:spChg>
-        <pc:spChg chg="mod ord">
-          <ac:chgData name="Chris Moreh" userId="17b81281-9f29-44e0-9273-6dadbf6896a2" providerId="ADAL" clId="{2B41A477-2A84-4B8D-9025-16417BC1047B}" dt="2024-10-01T09:51:32.733" v="785" actId="27636"/>
-          <ac:spMkLst>
-            <pc:docMk/>
-            <pc:sldMk cId="1913316541" sldId="268"/>
-            <ac:spMk id="23" creationId="{189E9B5B-A460-44C4-8CAF-0F92F71DD924}"/>
-          </ac:spMkLst>
-        </pc:spChg>
-      </pc:sldChg>
-      <pc:sldChg chg="del">
-        <pc:chgData name="Chris Moreh" userId="17b81281-9f29-44e0-9273-6dadbf6896a2" providerId="ADAL" clId="{2B41A477-2A84-4B8D-9025-16417BC1047B}" dt="2024-10-01T08:12:48.971" v="478" actId="47"/>
-        <pc:sldMkLst>
-          <pc:docMk/>
-          <pc:sldMk cId="2923334914" sldId="270"/>
-        </pc:sldMkLst>
-      </pc:sldChg>
-      <pc:sldChg chg="del">
-        <pc:chgData name="Chris Moreh" userId="17b81281-9f29-44e0-9273-6dadbf6896a2" providerId="ADAL" clId="{2B41A477-2A84-4B8D-9025-16417BC1047B}" dt="2024-10-01T08:12:51.652" v="479" actId="47"/>
-        <pc:sldMkLst>
-          <pc:docMk/>
-          <pc:sldMk cId="3797750423" sldId="271"/>
-        </pc:sldMkLst>
-      </pc:sldChg>
-      <pc:sldChg chg="del">
-        <pc:chgData name="Chris Moreh" userId="17b81281-9f29-44e0-9273-6dadbf6896a2" providerId="ADAL" clId="{2B41A477-2A84-4B8D-9025-16417BC1047B}" dt="2024-10-01T09:55:36.807" v="809" actId="47"/>
-        <pc:sldMkLst>
-          <pc:docMk/>
-          <pc:sldMk cId="2434060694" sldId="272"/>
-        </pc:sldMkLst>
-      </pc:sldChg>
-      <pc:sldChg chg="del">
-        <pc:chgData name="Chris Moreh" userId="17b81281-9f29-44e0-9273-6dadbf6896a2" providerId="ADAL" clId="{2B41A477-2A84-4B8D-9025-16417BC1047B}" dt="2024-10-01T08:12:53.081" v="480" actId="47"/>
-        <pc:sldMkLst>
-          <pc:docMk/>
-          <pc:sldMk cId="2540468224" sldId="274"/>
-        </pc:sldMkLst>
-      </pc:sldChg>
-      <pc:sldChg chg="del">
-        <pc:chgData name="Chris Moreh" userId="17b81281-9f29-44e0-9273-6dadbf6896a2" providerId="ADAL" clId="{2B41A477-2A84-4B8D-9025-16417BC1047B}" dt="2024-10-01T08:12:53.994" v="482" actId="47"/>
-        <pc:sldMkLst>
-          <pc:docMk/>
-          <pc:sldMk cId="3317414059" sldId="275"/>
-        </pc:sldMkLst>
-      </pc:sldChg>
-      <pc:sldChg chg="del">
-        <pc:chgData name="Chris Moreh" userId="17b81281-9f29-44e0-9273-6dadbf6896a2" providerId="ADAL" clId="{2B41A477-2A84-4B8D-9025-16417BC1047B}" dt="2024-10-01T08:12:58.789" v="495" actId="47"/>
-        <pc:sldMkLst>
-          <pc:docMk/>
-          <pc:sldMk cId="3993768132" sldId="279"/>
-        </pc:sldMkLst>
-      </pc:sldChg>
-      <pc:sldChg chg="del">
-        <pc:chgData name="Chris Moreh" userId="17b81281-9f29-44e0-9273-6dadbf6896a2" providerId="ADAL" clId="{2B41A477-2A84-4B8D-9025-16417BC1047B}" dt="2024-10-01T08:12:54.471" v="485" actId="47"/>
-        <pc:sldMkLst>
-          <pc:docMk/>
-          <pc:sldMk cId="3515922634" sldId="281"/>
-        </pc:sldMkLst>
-      </pc:sldChg>
-      <pc:sldChg chg="del">
-        <pc:chgData name="Chris Moreh" userId="17b81281-9f29-44e0-9273-6dadbf6896a2" providerId="ADAL" clId="{2B41A477-2A84-4B8D-9025-16417BC1047B}" dt="2024-10-01T08:12:54.645" v="486" actId="47"/>
-        <pc:sldMkLst>
-          <pc:docMk/>
-          <pc:sldMk cId="2388134861" sldId="282"/>
-        </pc:sldMkLst>
-      </pc:sldChg>
-      <pc:sldChg chg="modSp del mod">
-        <pc:chgData name="Chris Moreh" userId="17b81281-9f29-44e0-9273-6dadbf6896a2" providerId="ADAL" clId="{2B41A477-2A84-4B8D-9025-16417BC1047B}" dt="2024-10-01T08:13:00.589" v="502" actId="47"/>
-        <pc:sldMkLst>
-          <pc:docMk/>
-          <pc:sldMk cId="2783893935" sldId="285"/>
-        </pc:sldMkLst>
-        <pc:spChg chg="mod">
-          <ac:chgData name="Chris Moreh" userId="17b81281-9f29-44e0-9273-6dadbf6896a2" providerId="ADAL" clId="{2B41A477-2A84-4B8D-9025-16417BC1047B}" dt="2024-10-01T08:10:55.495" v="472" actId="27636"/>
-          <ac:spMkLst>
-            <pc:docMk/>
-            <pc:sldMk cId="2783893935" sldId="285"/>
-            <ac:spMk id="6" creationId="{1E2F62A5-11E1-49F2-FFAE-74F48F0D47FD}"/>
-          </ac:spMkLst>
-        </pc:spChg>
-      </pc:sldChg>
-      <pc:sldChg chg="del">
-        <pc:chgData name="Chris Moreh" userId="17b81281-9f29-44e0-9273-6dadbf6896a2" providerId="ADAL" clId="{2B41A477-2A84-4B8D-9025-16417BC1047B}" dt="2024-10-01T08:12:57.107" v="494" actId="47"/>
-        <pc:sldMkLst>
-          <pc:docMk/>
-          <pc:sldMk cId="1962864283" sldId="286"/>
-        </pc:sldMkLst>
-      </pc:sldChg>
-      <pc:sldChg chg="del">
-        <pc:chgData name="Chris Moreh" userId="17b81281-9f29-44e0-9273-6dadbf6896a2" providerId="ADAL" clId="{2B41A477-2A84-4B8D-9025-16417BC1047B}" dt="2024-10-01T08:12:55.171" v="487" actId="47"/>
-        <pc:sldMkLst>
-          <pc:docMk/>
-          <pc:sldMk cId="455057181" sldId="287"/>
-        </pc:sldMkLst>
-      </pc:sldChg>
-      <pc:sldChg chg="del">
-        <pc:chgData name="Chris Moreh" userId="17b81281-9f29-44e0-9273-6dadbf6896a2" providerId="ADAL" clId="{2B41A477-2A84-4B8D-9025-16417BC1047B}" dt="2024-10-01T08:12:55.445" v="489" actId="47"/>
-        <pc:sldMkLst>
-          <pc:docMk/>
-          <pc:sldMk cId="422561252" sldId="288"/>
-        </pc:sldMkLst>
-      </pc:sldChg>
-      <pc:sldChg chg="del">
-        <pc:chgData name="Chris Moreh" userId="17b81281-9f29-44e0-9273-6dadbf6896a2" providerId="ADAL" clId="{2B41A477-2A84-4B8D-9025-16417BC1047B}" dt="2024-10-01T08:12:55.288" v="488" actId="47"/>
-        <pc:sldMkLst>
-          <pc:docMk/>
-          <pc:sldMk cId="2504512988" sldId="289"/>
-        </pc:sldMkLst>
-      </pc:sldChg>
-      <pc:sldChg chg="del">
-        <pc:chgData name="Chris Moreh" userId="17b81281-9f29-44e0-9273-6dadbf6896a2" providerId="ADAL" clId="{2B41A477-2A84-4B8D-9025-16417BC1047B}" dt="2024-10-01T08:12:55.737" v="491" actId="47"/>
-        <pc:sldMkLst>
-          <pc:docMk/>
-          <pc:sldMk cId="2719270279" sldId="290"/>
-        </pc:sldMkLst>
-      </pc:sldChg>
-      <pc:sldChg chg="del">
-        <pc:chgData name="Chris Moreh" userId="17b81281-9f29-44e0-9273-6dadbf6896a2" providerId="ADAL" clId="{2B41A477-2A84-4B8D-9025-16417BC1047B}" dt="2024-10-01T08:12:59.507" v="497" actId="47"/>
-        <pc:sldMkLst>
-          <pc:docMk/>
-          <pc:sldMk cId="202889404" sldId="291"/>
-        </pc:sldMkLst>
-      </pc:sldChg>
-      <pc:sldChg chg="del">
-        <pc:chgData name="Chris Moreh" userId="17b81281-9f29-44e0-9273-6dadbf6896a2" providerId="ADAL" clId="{2B41A477-2A84-4B8D-9025-16417BC1047B}" dt="2024-10-01T08:12:59.701" v="498" actId="47"/>
-        <pc:sldMkLst>
-          <pc:docMk/>
-          <pc:sldMk cId="1140739574" sldId="292"/>
-        </pc:sldMkLst>
-      </pc:sldChg>
-      <pc:sldChg chg="del">
-        <pc:chgData name="Chris Moreh" userId="17b81281-9f29-44e0-9273-6dadbf6896a2" providerId="ADAL" clId="{2B41A477-2A84-4B8D-9025-16417BC1047B}" dt="2024-10-01T08:12:59.334" v="496" actId="47"/>
-        <pc:sldMkLst>
-          <pc:docMk/>
-          <pc:sldMk cId="2703706686" sldId="293"/>
-        </pc:sldMkLst>
-      </pc:sldChg>
-      <pc:sldChg chg="del">
-        <pc:chgData name="Chris Moreh" userId="17b81281-9f29-44e0-9273-6dadbf6896a2" providerId="ADAL" clId="{2B41A477-2A84-4B8D-9025-16417BC1047B}" dt="2024-10-01T08:12:59.863" v="499" actId="47"/>
-        <pc:sldMkLst>
-          <pc:docMk/>
-          <pc:sldMk cId="4193090091" sldId="295"/>
-        </pc:sldMkLst>
-      </pc:sldChg>
-      <pc:sldChg chg="del">
-        <pc:chgData name="Chris Moreh" userId="17b81281-9f29-44e0-9273-6dadbf6896a2" providerId="ADAL" clId="{2B41A477-2A84-4B8D-9025-16417BC1047B}" dt="2024-10-01T08:13:00.250" v="500" actId="47"/>
-        <pc:sldMkLst>
-          <pc:docMk/>
-          <pc:sldMk cId="1000442492" sldId="296"/>
-        </pc:sldMkLst>
-      </pc:sldChg>
-      <pc:sldChg chg="del">
-        <pc:chgData name="Chris Moreh" userId="17b81281-9f29-44e0-9273-6dadbf6896a2" providerId="ADAL" clId="{2B41A477-2A84-4B8D-9025-16417BC1047B}" dt="2024-10-01T08:12:55.873" v="492" actId="47"/>
-        <pc:sldMkLst>
-          <pc:docMk/>
-          <pc:sldMk cId="1875989957" sldId="297"/>
-        </pc:sldMkLst>
-      </pc:sldChg>
-      <pc:sldChg chg="del">
-        <pc:chgData name="Chris Moreh" userId="17b81281-9f29-44e0-9273-6dadbf6896a2" providerId="ADAL" clId="{2B41A477-2A84-4B8D-9025-16417BC1047B}" dt="2024-10-01T08:12:56.030" v="493" actId="47"/>
-        <pc:sldMkLst>
-          <pc:docMk/>
-          <pc:sldMk cId="941434098" sldId="298"/>
-        </pc:sldMkLst>
-      </pc:sldChg>
-      <pc:sldChg chg="modSp del mod">
-        <pc:chgData name="Chris Moreh" userId="17b81281-9f29-44e0-9273-6dadbf6896a2" providerId="ADAL" clId="{2B41A477-2A84-4B8D-9025-16417BC1047B}" dt="2024-10-01T09:27:50.765" v="632" actId="47"/>
-        <pc:sldMkLst>
-          <pc:docMk/>
-          <pc:sldMk cId="1797633007" sldId="299"/>
-        </pc:sldMkLst>
-        <pc:spChg chg="mod">
-          <ac:chgData name="Chris Moreh" userId="17b81281-9f29-44e0-9273-6dadbf6896a2" providerId="ADAL" clId="{2B41A477-2A84-4B8D-9025-16417BC1047B}" dt="2024-10-01T08:23:01.853" v="589" actId="27636"/>
-          <ac:spMkLst>
-            <pc:docMk/>
-            <pc:sldMk cId="1797633007" sldId="299"/>
-            <ac:spMk id="7" creationId="{976ECF1F-61F7-CF29-4F8D-54F7FE834BC0}"/>
-          </ac:spMkLst>
-        </pc:spChg>
-      </pc:sldChg>
-      <pc:sldChg chg="del">
-        <pc:chgData name="Chris Moreh" userId="17b81281-9f29-44e0-9273-6dadbf6896a2" providerId="ADAL" clId="{2B41A477-2A84-4B8D-9025-16417BC1047B}" dt="2024-10-01T08:13:00.413" v="501" actId="47"/>
-        <pc:sldMkLst>
-          <pc:docMk/>
-          <pc:sldMk cId="2643123211" sldId="300"/>
-        </pc:sldMkLst>
-      </pc:sldChg>
-      <pc:sldChg chg="del">
-        <pc:chgData name="Chris Moreh" userId="17b81281-9f29-44e0-9273-6dadbf6896a2" providerId="ADAL" clId="{2B41A477-2A84-4B8D-9025-16417BC1047B}" dt="2024-10-01T08:13:01.609" v="503" actId="47"/>
-        <pc:sldMkLst>
-          <pc:docMk/>
-          <pc:sldMk cId="1452267536" sldId="302"/>
-        </pc:sldMkLst>
-      </pc:sldChg>
-      <pc:sldChg chg="del">
-        <pc:chgData name="Chris Moreh" userId="17b81281-9f29-44e0-9273-6dadbf6896a2" providerId="ADAL" clId="{2B41A477-2A84-4B8D-9025-16417BC1047B}" dt="2024-10-01T09:27:51.530" v="633" actId="47"/>
-        <pc:sldMkLst>
-          <pc:docMk/>
-          <pc:sldMk cId="3644252549" sldId="303"/>
-        </pc:sldMkLst>
-      </pc:sldChg>
-      <pc:sldChg chg="del">
-        <pc:chgData name="Chris Moreh" userId="17b81281-9f29-44e0-9273-6dadbf6896a2" providerId="ADAL" clId="{2B41A477-2A84-4B8D-9025-16417BC1047B}" dt="2024-10-01T09:27:52.090" v="634" actId="47"/>
-        <pc:sldMkLst>
-          <pc:docMk/>
-          <pc:sldMk cId="3095642639" sldId="304"/>
-        </pc:sldMkLst>
-      </pc:sldChg>
-      <pc:sldChg chg="del">
-        <pc:chgData name="Chris Moreh" userId="17b81281-9f29-44e0-9273-6dadbf6896a2" providerId="ADAL" clId="{2B41A477-2A84-4B8D-9025-16417BC1047B}" dt="2024-10-01T09:55:38.915" v="811" actId="47"/>
-        <pc:sldMkLst>
-          <pc:docMk/>
-          <pc:sldMk cId="1609695612" sldId="305"/>
-        </pc:sldMkLst>
-      </pc:sldChg>
-      <pc:sldChg chg="del">
-        <pc:chgData name="Chris Moreh" userId="17b81281-9f29-44e0-9273-6dadbf6896a2" providerId="ADAL" clId="{2B41A477-2A84-4B8D-9025-16417BC1047B}" dt="2024-10-01T09:55:37.752" v="810" actId="47"/>
-        <pc:sldMkLst>
-          <pc:docMk/>
-          <pc:sldMk cId="472146206" sldId="306"/>
-        </pc:sldMkLst>
-      </pc:sldChg>
-      <pc:sldChg chg="addSp delSp modSp new mod modClrScheme chgLayout">
-        <pc:chgData name="Chris Moreh" userId="17b81281-9f29-44e0-9273-6dadbf6896a2" providerId="ADAL" clId="{2B41A477-2A84-4B8D-9025-16417BC1047B}" dt="2024-10-01T08:14:00.335" v="551" actId="403"/>
-        <pc:sldMkLst>
-          <pc:docMk/>
-          <pc:sldMk cId="3814459198" sldId="307"/>
-        </pc:sldMkLst>
-        <pc:spChg chg="del mod ord">
-          <ac:chgData name="Chris Moreh" userId="17b81281-9f29-44e0-9273-6dadbf6896a2" providerId="ADAL" clId="{2B41A477-2A84-4B8D-9025-16417BC1047B}" dt="2024-10-01T08:13:12.980" v="505" actId="700"/>
-          <ac:spMkLst>
-            <pc:docMk/>
-            <pc:sldMk cId="3814459198" sldId="307"/>
-            <ac:spMk id="2" creationId="{76811593-39A3-1261-F57A-9A5CA18E2E27}"/>
-          </ac:spMkLst>
-        </pc:spChg>
-        <pc:spChg chg="mod ord">
-          <ac:chgData name="Chris Moreh" userId="17b81281-9f29-44e0-9273-6dadbf6896a2" providerId="ADAL" clId="{2B41A477-2A84-4B8D-9025-16417BC1047B}" dt="2024-10-01T08:13:12.980" v="505" actId="700"/>
-          <ac:spMkLst>
-            <pc:docMk/>
-            <pc:sldMk cId="3814459198" sldId="307"/>
-            <ac:spMk id="3" creationId="{746383FB-FAD5-ACBF-8362-99A44C5BACCD}"/>
-          </ac:spMkLst>
-        </pc:spChg>
-        <pc:spChg chg="mod ord">
-          <ac:chgData name="Chris Moreh" userId="17b81281-9f29-44e0-9273-6dadbf6896a2" providerId="ADAL" clId="{2B41A477-2A84-4B8D-9025-16417BC1047B}" dt="2024-10-01T08:13:12.980" v="505" actId="700"/>
-          <ac:spMkLst>
-            <pc:docMk/>
-            <pc:sldMk cId="3814459198" sldId="307"/>
-            <ac:spMk id="4" creationId="{EC4BC908-4805-889D-BE4F-455E3A449AA4}"/>
-          </ac:spMkLst>
-        </pc:spChg>
-        <pc:spChg chg="mod ord">
-          <ac:chgData name="Chris Moreh" userId="17b81281-9f29-44e0-9273-6dadbf6896a2" providerId="ADAL" clId="{2B41A477-2A84-4B8D-9025-16417BC1047B}" dt="2024-10-01T08:13:12.980" v="505" actId="700"/>
-          <ac:spMkLst>
-            <pc:docMk/>
-            <pc:sldMk cId="3814459198" sldId="307"/>
-            <ac:spMk id="5" creationId="{9E2F49CC-8A5A-2FB3-FD34-139202D1D593}"/>
-          </ac:spMkLst>
-        </pc:spChg>
-        <pc:spChg chg="add mod ord">
-          <ac:chgData name="Chris Moreh" userId="17b81281-9f29-44e0-9273-6dadbf6896a2" providerId="ADAL" clId="{2B41A477-2A84-4B8D-9025-16417BC1047B}" dt="2024-10-01T08:14:00.335" v="551" actId="403"/>
-          <ac:spMkLst>
-            <pc:docMk/>
-            <pc:sldMk cId="3814459198" sldId="307"/>
-            <ac:spMk id="6" creationId="{24060982-6EE3-A8F1-75FE-C4BDB2FF3CBE}"/>
-          </ac:spMkLst>
-        </pc:spChg>
-        <pc:spChg chg="add mod ord">
-          <ac:chgData name="Chris Moreh" userId="17b81281-9f29-44e0-9273-6dadbf6896a2" providerId="ADAL" clId="{2B41A477-2A84-4B8D-9025-16417BC1047B}" dt="2024-10-01T08:13:48.698" v="545" actId="403"/>
-          <ac:spMkLst>
-            <pc:docMk/>
-            <pc:sldMk cId="3814459198" sldId="307"/>
-            <ac:spMk id="7" creationId="{E112B5B6-7C9E-9DE5-8D2C-13D42F1FBB68}"/>
-          </ac:spMkLst>
-        </pc:spChg>
-      </pc:sldChg>
-      <pc:sldChg chg="del">
-        <pc:chgData name="Chris Moreh" userId="17b81281-9f29-44e0-9273-6dadbf6896a2" providerId="ADAL" clId="{2B41A477-2A84-4B8D-9025-16417BC1047B}" dt="2024-10-01T08:12:55.585" v="490" actId="47"/>
-        <pc:sldMkLst>
-          <pc:docMk/>
-          <pc:sldMk cId="3921884830" sldId="307"/>
-        </pc:sldMkLst>
-      </pc:sldChg>
-      <pc:sldChg chg="addSp delSp modSp new mod modClrScheme modAnim chgLayout">
-        <pc:chgData name="Chris Moreh" userId="17b81281-9f29-44e0-9273-6dadbf6896a2" providerId="ADAL" clId="{2B41A477-2A84-4B8D-9025-16417BC1047B}" dt="2024-10-01T09:27:11.106" v="631"/>
-        <pc:sldMkLst>
-          <pc:docMk/>
-          <pc:sldMk cId="789519299" sldId="308"/>
-        </pc:sldMkLst>
-        <pc:spChg chg="del mod ord">
-          <ac:chgData name="Chris Moreh" userId="17b81281-9f29-44e0-9273-6dadbf6896a2" providerId="ADAL" clId="{2B41A477-2A84-4B8D-9025-16417BC1047B}" dt="2024-10-01T08:14:19.429" v="553" actId="700"/>
-          <ac:spMkLst>
-            <pc:docMk/>
-            <pc:sldMk cId="789519299" sldId="308"/>
-            <ac:spMk id="2" creationId="{A176F019-6A03-C59E-2C86-D1FBA0C8A1A2}"/>
-          </ac:spMkLst>
-        </pc:spChg>
-        <pc:spChg chg="del mod ord">
-          <ac:chgData name="Chris Moreh" userId="17b81281-9f29-44e0-9273-6dadbf6896a2" providerId="ADAL" clId="{2B41A477-2A84-4B8D-9025-16417BC1047B}" dt="2024-10-01T08:14:19.429" v="553" actId="700"/>
-          <ac:spMkLst>
-            <pc:docMk/>
-            <pc:sldMk cId="789519299" sldId="308"/>
-            <ac:spMk id="3" creationId="{658F879A-61EF-E833-0BB3-EEF3EE2B2A05}"/>
-          </ac:spMkLst>
-        </pc:spChg>
-        <pc:spChg chg="mod ord">
-          <ac:chgData name="Chris Moreh" userId="17b81281-9f29-44e0-9273-6dadbf6896a2" providerId="ADAL" clId="{2B41A477-2A84-4B8D-9025-16417BC1047B}" dt="2024-10-01T08:14:39.698" v="555" actId="700"/>
-          <ac:spMkLst>
-            <pc:docMk/>
-            <pc:sldMk cId="789519299" sldId="308"/>
-            <ac:spMk id="4" creationId="{5CC3A4AF-2B7D-0521-FFAC-1771048EDBC0}"/>
-          </ac:spMkLst>
-        </pc:spChg>
-        <pc:spChg chg="mod ord">
-          <ac:chgData name="Chris Moreh" userId="17b81281-9f29-44e0-9273-6dadbf6896a2" providerId="ADAL" clId="{2B41A477-2A84-4B8D-9025-16417BC1047B}" dt="2024-10-01T08:14:39.698" v="555" actId="700"/>
-          <ac:spMkLst>
-            <pc:docMk/>
-            <pc:sldMk cId="789519299" sldId="308"/>
-            <ac:spMk id="5" creationId="{6772CAAB-9C32-D830-FF00-86600C487E94}"/>
-          </ac:spMkLst>
-        </pc:spChg>
-        <pc:spChg chg="mod ord">
-          <ac:chgData name="Chris Moreh" userId="17b81281-9f29-44e0-9273-6dadbf6896a2" providerId="ADAL" clId="{2B41A477-2A84-4B8D-9025-16417BC1047B}" dt="2024-10-01T08:14:39.698" v="555" actId="700"/>
-          <ac:spMkLst>
-            <pc:docMk/>
-            <pc:sldMk cId="789519299" sldId="308"/>
-            <ac:spMk id="6" creationId="{953B9D79-309D-D507-17FF-67827394EFDB}"/>
-          </ac:spMkLst>
-        </pc:spChg>
-        <pc:spChg chg="add del mod ord">
-          <ac:chgData name="Chris Moreh" userId="17b81281-9f29-44e0-9273-6dadbf6896a2" providerId="ADAL" clId="{2B41A477-2A84-4B8D-9025-16417BC1047B}" dt="2024-10-01T08:14:33.411" v="554" actId="700"/>
-          <ac:spMkLst>
-            <pc:docMk/>
-            <pc:sldMk cId="789519299" sldId="308"/>
-            <ac:spMk id="7" creationId="{976013F7-0F18-FA0B-6705-44CD98D531E0}"/>
-          </ac:spMkLst>
-        </pc:spChg>
-        <pc:spChg chg="add del mod ord">
-          <ac:chgData name="Chris Moreh" userId="17b81281-9f29-44e0-9273-6dadbf6896a2" providerId="ADAL" clId="{2B41A477-2A84-4B8D-9025-16417BC1047B}" dt="2024-10-01T08:14:33.411" v="554" actId="700"/>
-          <ac:spMkLst>
-            <pc:docMk/>
-            <pc:sldMk cId="789519299" sldId="308"/>
-            <ac:spMk id="8" creationId="{D6EBE4F3-CD6F-0060-59EE-7E568191EED8}"/>
-          </ac:spMkLst>
-        </pc:spChg>
-        <pc:spChg chg="add del mod ord">
-          <ac:chgData name="Chris Moreh" userId="17b81281-9f29-44e0-9273-6dadbf6896a2" providerId="ADAL" clId="{2B41A477-2A84-4B8D-9025-16417BC1047B}" dt="2024-10-01T08:14:39.698" v="555" actId="700"/>
-          <ac:spMkLst>
-            <pc:docMk/>
-            <pc:sldMk cId="789519299" sldId="308"/>
-            <ac:spMk id="9" creationId="{929756A2-A1D1-DD15-0E73-F2B30B074099}"/>
-          </ac:spMkLst>
-        </pc:spChg>
-        <pc:spChg chg="add mod ord">
-          <ac:chgData name="Chris Moreh" userId="17b81281-9f29-44e0-9273-6dadbf6896a2" providerId="ADAL" clId="{2B41A477-2A84-4B8D-9025-16417BC1047B}" dt="2024-10-01T09:22:58.118" v="614" actId="20577"/>
-          <ac:spMkLst>
-            <pc:docMk/>
-            <pc:sldMk cId="789519299" sldId="308"/>
-            <ac:spMk id="10" creationId="{3E217EB9-ECD3-60A1-B9CF-AF9D317C2CF5}"/>
-          </ac:spMkLst>
-        </pc:spChg>
-        <pc:spChg chg="add del mod ord">
-          <ac:chgData name="Chris Moreh" userId="17b81281-9f29-44e0-9273-6dadbf6896a2" providerId="ADAL" clId="{2B41A477-2A84-4B8D-9025-16417BC1047B}" dt="2024-10-01T09:25:36.433" v="615" actId="478"/>
-          <ac:spMkLst>
-            <pc:docMk/>
-            <pc:sldMk cId="789519299" sldId="308"/>
-            <ac:spMk id="11" creationId="{D338C314-3C3C-AE9C-9F8B-DF3986D2B700}"/>
-          </ac:spMkLst>
-        </pc:spChg>
-        <pc:picChg chg="add mod">
-          <ac:chgData name="Chris Moreh" userId="17b81281-9f29-44e0-9273-6dadbf6896a2" providerId="ADAL" clId="{2B41A477-2A84-4B8D-9025-16417BC1047B}" dt="2024-10-01T09:26:38.904" v="626" actId="1076"/>
-          <ac:picMkLst>
-            <pc:docMk/>
-            <pc:sldMk cId="789519299" sldId="308"/>
-            <ac:picMk id="1026" creationId="{16184B3D-EE26-D688-2008-ECC6BC04FBD7}"/>
-          </ac:picMkLst>
-        </pc:picChg>
-        <pc:picChg chg="add mod">
-          <ac:chgData name="Chris Moreh" userId="17b81281-9f29-44e0-9273-6dadbf6896a2" providerId="ADAL" clId="{2B41A477-2A84-4B8D-9025-16417BC1047B}" dt="2024-10-01T09:26:32.786" v="624" actId="1076"/>
-          <ac:picMkLst>
-            <pc:docMk/>
-            <pc:sldMk cId="789519299" sldId="308"/>
-            <ac:picMk id="1028" creationId="{09348C58-B6F5-DF30-779E-768B9D89EA98}"/>
-          </ac:picMkLst>
-        </pc:picChg>
-        <pc:picChg chg="add mod">
-          <ac:chgData name="Chris Moreh" userId="17b81281-9f29-44e0-9273-6dadbf6896a2" providerId="ADAL" clId="{2B41A477-2A84-4B8D-9025-16417BC1047B}" dt="2024-10-01T09:27:05.254" v="630" actId="1076"/>
-          <ac:picMkLst>
-            <pc:docMk/>
-            <pc:sldMk cId="789519299" sldId="308"/>
-            <ac:picMk id="1030" creationId="{F7773267-224B-DA6A-1555-12F2DFBEEF1F}"/>
-          </ac:picMkLst>
-        </pc:picChg>
-      </pc:sldChg>
-      <pc:sldChg chg="addSp delSp modSp new mod">
-        <pc:chgData name="Chris Moreh" userId="17b81281-9f29-44e0-9273-6dadbf6896a2" providerId="ADAL" clId="{2B41A477-2A84-4B8D-9025-16417BC1047B}" dt="2024-10-01T09:22:06.730" v="599" actId="14100"/>
-        <pc:sldMkLst>
-          <pc:docMk/>
-          <pc:sldMk cId="139448700" sldId="309"/>
-        </pc:sldMkLst>
-        <pc:spChg chg="del">
-          <ac:chgData name="Chris Moreh" userId="17b81281-9f29-44e0-9273-6dadbf6896a2" providerId="ADAL" clId="{2B41A477-2A84-4B8D-9025-16417BC1047B}" dt="2024-10-01T09:21:09.135" v="596" actId="478"/>
-          <ac:spMkLst>
-            <pc:docMk/>
-            <pc:sldMk cId="139448700" sldId="309"/>
-            <ac:spMk id="3" creationId="{7DA5F17A-869F-1C4D-F6D6-FC0C44469A2D}"/>
-          </ac:spMkLst>
-        </pc:spChg>
-        <pc:graphicFrameChg chg="add mod">
-          <ac:chgData name="Chris Moreh" userId="17b81281-9f29-44e0-9273-6dadbf6896a2" providerId="ADAL" clId="{2B41A477-2A84-4B8D-9025-16417BC1047B}" dt="2024-10-01T09:22:06.730" v="599" actId="14100"/>
-          <ac:graphicFrameMkLst>
-            <pc:docMk/>
-            <pc:sldMk cId="139448700" sldId="309"/>
-            <ac:graphicFrameMk id="7" creationId="{4588E4A6-4909-D80C-1879-A8B2B8BE1826}"/>
-          </ac:graphicFrameMkLst>
-        </pc:graphicFrameChg>
-      </pc:sldChg>
-      <pc:sldChg chg="addSp delSp modSp new mod">
-        <pc:chgData name="Chris Moreh" userId="17b81281-9f29-44e0-9273-6dadbf6896a2" providerId="ADAL" clId="{2B41A477-2A84-4B8D-9025-16417BC1047B}" dt="2024-10-01T09:42:28.211" v="728" actId="1076"/>
-        <pc:sldMkLst>
-          <pc:docMk/>
-          <pc:sldMk cId="898458003" sldId="310"/>
-        </pc:sldMkLst>
-        <pc:spChg chg="mod">
-          <ac:chgData name="Chris Moreh" userId="17b81281-9f29-44e0-9273-6dadbf6896a2" providerId="ADAL" clId="{2B41A477-2A84-4B8D-9025-16417BC1047B}" dt="2024-10-01T09:39:42.820" v="717" actId="20577"/>
-          <ac:spMkLst>
-            <pc:docMk/>
-            <pc:sldMk cId="898458003" sldId="310"/>
-            <ac:spMk id="2" creationId="{2361F0D9-5A48-148E-F22D-2492926AFA90}"/>
-          </ac:spMkLst>
-        </pc:spChg>
-        <pc:spChg chg="del">
-          <ac:chgData name="Chris Moreh" userId="17b81281-9f29-44e0-9273-6dadbf6896a2" providerId="ADAL" clId="{2B41A477-2A84-4B8D-9025-16417BC1047B}" dt="2024-10-01T09:39:47.943" v="718" actId="478"/>
-          <ac:spMkLst>
-            <pc:docMk/>
-            <pc:sldMk cId="898458003" sldId="310"/>
-            <ac:spMk id="3" creationId="{FA1FA58F-63F9-7243-F2DA-2AA8201CEC32}"/>
-          </ac:spMkLst>
-        </pc:spChg>
-        <pc:picChg chg="add mod">
-          <ac:chgData name="Chris Moreh" userId="17b81281-9f29-44e0-9273-6dadbf6896a2" providerId="ADAL" clId="{2B41A477-2A84-4B8D-9025-16417BC1047B}" dt="2024-10-01T09:42:28.211" v="728" actId="1076"/>
-          <ac:picMkLst>
-            <pc:docMk/>
-            <pc:sldMk cId="898458003" sldId="310"/>
-            <ac:picMk id="8" creationId="{B2270D3B-103F-2A9C-1BED-96FD2DA4E5BC}"/>
-          </ac:picMkLst>
-        </pc:picChg>
-      </pc:sldChg>
-      <pc:sldChg chg="addSp delSp modSp new mod modAnim">
-        <pc:chgData name="Chris Moreh" userId="17b81281-9f29-44e0-9273-6dadbf6896a2" providerId="ADAL" clId="{2B41A477-2A84-4B8D-9025-16417BC1047B}" dt="2024-10-01T09:33:31.195" v="668"/>
-        <pc:sldMkLst>
-          <pc:docMk/>
-          <pc:sldMk cId="1606940730" sldId="311"/>
-        </pc:sldMkLst>
-        <pc:spChg chg="mod">
-          <ac:chgData name="Chris Moreh" userId="17b81281-9f29-44e0-9273-6dadbf6896a2" providerId="ADAL" clId="{2B41A477-2A84-4B8D-9025-16417BC1047B}" dt="2024-10-01T09:30:04.873" v="647" actId="20577"/>
-          <ac:spMkLst>
-            <pc:docMk/>
-            <pc:sldMk cId="1606940730" sldId="311"/>
-            <ac:spMk id="2" creationId="{D955D283-6261-1179-CAFB-86CC30323982}"/>
-          </ac:spMkLst>
-        </pc:spChg>
-        <pc:spChg chg="del">
-          <ac:chgData name="Chris Moreh" userId="17b81281-9f29-44e0-9273-6dadbf6896a2" providerId="ADAL" clId="{2B41A477-2A84-4B8D-9025-16417BC1047B}" dt="2024-10-01T09:30:08.332" v="648" actId="478"/>
-          <ac:spMkLst>
-            <pc:docMk/>
-            <pc:sldMk cId="1606940730" sldId="311"/>
-            <ac:spMk id="3" creationId="{AED12BC2-4E22-3329-7F3A-C72AC7BFBF01}"/>
-          </ac:spMkLst>
-        </pc:spChg>
-        <pc:picChg chg="add mod">
-          <ac:chgData name="Chris Moreh" userId="17b81281-9f29-44e0-9273-6dadbf6896a2" providerId="ADAL" clId="{2B41A477-2A84-4B8D-9025-16417BC1047B}" dt="2024-10-01T09:32:28.773" v="658" actId="1076"/>
-          <ac:picMkLst>
-            <pc:docMk/>
-            <pc:sldMk cId="1606940730" sldId="311"/>
-            <ac:picMk id="2050" creationId="{C6F34968-FFEF-B235-2AE8-3AB20A6C5F7E}"/>
-          </ac:picMkLst>
-        </pc:picChg>
-        <pc:picChg chg="add mod">
-          <ac:chgData name="Chris Moreh" userId="17b81281-9f29-44e0-9273-6dadbf6896a2" providerId="ADAL" clId="{2B41A477-2A84-4B8D-9025-16417BC1047B}" dt="2024-10-01T09:32:54.627" v="664" actId="14100"/>
-          <ac:picMkLst>
-            <pc:docMk/>
-            <pc:sldMk cId="1606940730" sldId="311"/>
-            <ac:picMk id="2052" creationId="{BF95AEBE-F22D-AEBD-1DCF-9254B99EE420}"/>
-          </ac:picMkLst>
-        </pc:picChg>
-        <pc:picChg chg="add mod">
-          <ac:chgData name="Chris Moreh" userId="17b81281-9f29-44e0-9273-6dadbf6896a2" providerId="ADAL" clId="{2B41A477-2A84-4B8D-9025-16417BC1047B}" dt="2024-10-01T09:32:34.960" v="660" actId="1076"/>
-          <ac:picMkLst>
-            <pc:docMk/>
-            <pc:sldMk cId="1606940730" sldId="311"/>
-            <ac:picMk id="2054" creationId="{A783B1E3-2737-FAC9-EEF0-24F92BA2872E}"/>
-          </ac:picMkLst>
-        </pc:picChg>
-        <pc:picChg chg="add mod">
-          <ac:chgData name="Chris Moreh" userId="17b81281-9f29-44e0-9273-6dadbf6896a2" providerId="ADAL" clId="{2B41A477-2A84-4B8D-9025-16417BC1047B}" dt="2024-10-01T09:33:28.866" v="667" actId="14100"/>
-          <ac:picMkLst>
-            <pc:docMk/>
-            <pc:sldMk cId="1606940730" sldId="311"/>
-            <ac:picMk id="2056" creationId="{CB6A280B-B30C-5004-CE83-B5E8E0D4B57E}"/>
-          </ac:picMkLst>
-        </pc:picChg>
-      </pc:sldChg>
-      <pc:sldChg chg="modSp add mod modTransition modClrScheme chgLayout">
-        <pc:chgData name="Chris Moreh" userId="17b81281-9f29-44e0-9273-6dadbf6896a2" providerId="ADAL" clId="{2B41A477-2A84-4B8D-9025-16417BC1047B}" dt="2024-10-01T09:51:43.083" v="788" actId="27636"/>
-        <pc:sldMkLst>
-          <pc:docMk/>
-          <pc:sldMk cId="966591019" sldId="319"/>
-        </pc:sldMkLst>
-        <pc:spChg chg="mod ord">
-          <ac:chgData name="Chris Moreh" userId="17b81281-9f29-44e0-9273-6dadbf6896a2" providerId="ADAL" clId="{2B41A477-2A84-4B8D-9025-16417BC1047B}" dt="2024-10-01T09:51:43.083" v="788" actId="27636"/>
-          <ac:spMkLst>
-            <pc:docMk/>
-            <pc:sldMk cId="966591019" sldId="319"/>
-            <ac:spMk id="12" creationId="{67DAF8FC-C191-450B-947B-545B65E60CE8}"/>
-          </ac:spMkLst>
-        </pc:spChg>
-      </pc:sldChg>
-      <pc:sldChg chg="modSp add mod modTransition modClrScheme chgLayout">
-        <pc:chgData name="Chris Moreh" userId="17b81281-9f29-44e0-9273-6dadbf6896a2" providerId="ADAL" clId="{2B41A477-2A84-4B8D-9025-16417BC1047B}" dt="2024-10-01T09:52:05.360" v="790" actId="27636"/>
-        <pc:sldMkLst>
-          <pc:docMk/>
-          <pc:sldMk cId="717278951" sldId="321"/>
-        </pc:sldMkLst>
-        <pc:spChg chg="mod ord">
-          <ac:chgData name="Chris Moreh" userId="17b81281-9f29-44e0-9273-6dadbf6896a2" providerId="ADAL" clId="{2B41A477-2A84-4B8D-9025-16417BC1047B}" dt="2024-10-01T09:52:05.360" v="790" actId="27636"/>
-          <ac:spMkLst>
-            <pc:docMk/>
-            <pc:sldMk cId="717278951" sldId="321"/>
-            <ac:spMk id="12" creationId="{67DAF8FC-C191-450B-947B-545B65E60CE8}"/>
-          </ac:spMkLst>
-        </pc:spChg>
-      </pc:sldChg>
-      <pc:sldChg chg="addSp delSp modSp add mod modTransition chgLayout">
-        <pc:chgData name="Chris Moreh" userId="17b81281-9f29-44e0-9273-6dadbf6896a2" providerId="ADAL" clId="{2B41A477-2A84-4B8D-9025-16417BC1047B}" dt="2024-10-01T09:55:26.873" v="808" actId="478"/>
-        <pc:sldMkLst>
-          <pc:docMk/>
-          <pc:sldMk cId="3603256477" sldId="327"/>
-        </pc:sldMkLst>
-        <pc:spChg chg="mod ord">
-          <ac:chgData name="Chris Moreh" userId="17b81281-9f29-44e0-9273-6dadbf6896a2" providerId="ADAL" clId="{2B41A477-2A84-4B8D-9025-16417BC1047B}" dt="2024-10-01T09:55:23.743" v="807" actId="700"/>
-          <ac:spMkLst>
-            <pc:docMk/>
-            <pc:sldMk cId="3603256477" sldId="327"/>
-            <ac:spMk id="2" creationId="{A8E319C1-3248-4033-B708-B2B5583A88C0}"/>
-          </ac:spMkLst>
-        </pc:spChg>
-        <pc:spChg chg="add del mod ord">
-          <ac:chgData name="Chris Moreh" userId="17b81281-9f29-44e0-9273-6dadbf6896a2" providerId="ADAL" clId="{2B41A477-2A84-4B8D-9025-16417BC1047B}" dt="2024-10-01T09:55:26.873" v="808" actId="478"/>
-          <ac:spMkLst>
-            <pc:docMk/>
-            <pc:sldMk cId="3603256477" sldId="327"/>
-            <ac:spMk id="3" creationId="{0726B159-72E3-DEEA-C665-2FC7FF5DC477}"/>
-          </ac:spMkLst>
-        </pc:spChg>
-      </pc:sldChg>
-      <pc:sldChg chg="modSp add mod modTransition modClrScheme chgLayout">
-        <pc:chgData name="Chris Moreh" userId="17b81281-9f29-44e0-9273-6dadbf6896a2" providerId="ADAL" clId="{2B41A477-2A84-4B8D-9025-16417BC1047B}" dt="2024-10-01T09:54:40.538" v="802" actId="700"/>
-        <pc:sldMkLst>
-          <pc:docMk/>
-          <pc:sldMk cId="322052598" sldId="331"/>
-        </pc:sldMkLst>
-        <pc:spChg chg="mod ord">
-          <ac:chgData name="Chris Moreh" userId="17b81281-9f29-44e0-9273-6dadbf6896a2" providerId="ADAL" clId="{2B41A477-2A84-4B8D-9025-16417BC1047B}" dt="2024-10-01T09:54:40.538" v="802" actId="700"/>
-          <ac:spMkLst>
-            <pc:docMk/>
-            <pc:sldMk cId="322052598" sldId="331"/>
-            <ac:spMk id="2" creationId="{A888F937-CB9E-4768-865B-E6969F560B01}"/>
-          </ac:spMkLst>
-        </pc:spChg>
-        <pc:picChg chg="mod ord">
-          <ac:chgData name="Chris Moreh" userId="17b81281-9f29-44e0-9273-6dadbf6896a2" providerId="ADAL" clId="{2B41A477-2A84-4B8D-9025-16417BC1047B}" dt="2024-10-01T09:54:40.538" v="802" actId="700"/>
-          <ac:picMkLst>
-            <pc:docMk/>
-            <pc:sldMk cId="322052598" sldId="331"/>
-            <ac:picMk id="6" creationId="{FA100196-E71B-400B-B56E-458F765CF89B}"/>
-          </ac:picMkLst>
-        </pc:picChg>
-      </pc:sldChg>
-      <pc:sldChg chg="add modTransition">
-        <pc:chgData name="Chris Moreh" userId="17b81281-9f29-44e0-9273-6dadbf6896a2" providerId="ADAL" clId="{2B41A477-2A84-4B8D-9025-16417BC1047B}" dt="2024-10-01T09:53:14.880" v="794"/>
-        <pc:sldMkLst>
-          <pc:docMk/>
-          <pc:sldMk cId="3383856965" sldId="332"/>
-        </pc:sldMkLst>
-      </pc:sldChg>
-      <pc:sldChg chg="delSp modSp add mod modTransition setBg modClrScheme delDesignElem chgLayout">
-        <pc:chgData name="Chris Moreh" userId="17b81281-9f29-44e0-9273-6dadbf6896a2" providerId="ADAL" clId="{2B41A477-2A84-4B8D-9025-16417BC1047B}" dt="2024-10-01T09:53:34.329" v="796" actId="700"/>
-        <pc:sldMkLst>
-          <pc:docMk/>
-          <pc:sldMk cId="3992132808" sldId="336"/>
-        </pc:sldMkLst>
-        <pc:spChg chg="mod ord">
-          <ac:chgData name="Chris Moreh" userId="17b81281-9f29-44e0-9273-6dadbf6896a2" providerId="ADAL" clId="{2B41A477-2A84-4B8D-9025-16417BC1047B}" dt="2024-10-01T09:53:34.329" v="796" actId="700"/>
-          <ac:spMkLst>
-            <pc:docMk/>
-            <pc:sldMk cId="3992132808" sldId="336"/>
-            <ac:spMk id="2" creationId="{60C4B25A-7A41-4AEA-935C-86980FFB7802}"/>
-          </ac:spMkLst>
-        </pc:spChg>
-        <pc:spChg chg="mod ord">
-          <ac:chgData name="Chris Moreh" userId="17b81281-9f29-44e0-9273-6dadbf6896a2" providerId="ADAL" clId="{2B41A477-2A84-4B8D-9025-16417BC1047B}" dt="2024-10-01T09:53:34.329" v="796" actId="700"/>
-          <ac:spMkLst>
-            <pc:docMk/>
-            <pc:sldMk cId="3992132808" sldId="336"/>
-            <ac:spMk id="4" creationId="{EA8A8C7F-216B-4C24-84F3-351180DFE941}"/>
-          </ac:spMkLst>
-        </pc:spChg>
-        <pc:spChg chg="del">
-          <ac:chgData name="Chris Moreh" userId="17b81281-9f29-44e0-9273-6dadbf6896a2" providerId="ADAL" clId="{2B41A477-2A84-4B8D-9025-16417BC1047B}" dt="2024-10-01T09:53:14.880" v="794"/>
-          <ac:spMkLst>
-            <pc:docMk/>
-            <pc:sldMk cId="3992132808" sldId="336"/>
-            <ac:spMk id="9" creationId="{50F21DC9-D0AC-495C-8CC8-D5DDF8C11C22}"/>
-          </ac:spMkLst>
-        </pc:spChg>
-        <pc:spChg chg="del">
-          <ac:chgData name="Chris Moreh" userId="17b81281-9f29-44e0-9273-6dadbf6896a2" providerId="ADAL" clId="{2B41A477-2A84-4B8D-9025-16417BC1047B}" dt="2024-10-01T09:53:14.880" v="794"/>
-          <ac:spMkLst>
-            <pc:docMk/>
-            <pc:sldMk cId="3992132808" sldId="336"/>
-            <ac:spMk id="24" creationId="{8324065E-E64E-484D-84AE-BB73D056C968}"/>
-          </ac:spMkLst>
-        </pc:spChg>
-        <pc:picChg chg="del">
-          <ac:chgData name="Chris Moreh" userId="17b81281-9f29-44e0-9273-6dadbf6896a2" providerId="ADAL" clId="{2B41A477-2A84-4B8D-9025-16417BC1047B}" dt="2024-10-01T09:53:14.880" v="794"/>
-          <ac:picMkLst>
-            <pc:docMk/>
-            <pc:sldMk cId="3992132808" sldId="336"/>
-            <ac:picMk id="8" creationId="{BF7680B5-1A78-4401-BA9A-78832F0FD90E}"/>
-          </ac:picMkLst>
-        </pc:picChg>
-        <pc:picChg chg="del">
-          <ac:chgData name="Chris Moreh" userId="17b81281-9f29-44e0-9273-6dadbf6896a2" providerId="ADAL" clId="{2B41A477-2A84-4B8D-9025-16417BC1047B}" dt="2024-10-01T09:53:14.880" v="794"/>
-          <ac:picMkLst>
-            <pc:docMk/>
-            <pc:sldMk cId="3992132808" sldId="336"/>
-            <ac:picMk id="23" creationId="{1E1838EA-1FA2-4DC4-B182-B8D2C57E74B8}"/>
-          </ac:picMkLst>
-        </pc:picChg>
-        <pc:picChg chg="del">
-          <ac:chgData name="Chris Moreh" userId="17b81281-9f29-44e0-9273-6dadbf6896a2" providerId="ADAL" clId="{2B41A477-2A84-4B8D-9025-16417BC1047B}" dt="2024-10-01T09:53:14.880" v="794"/>
-          <ac:picMkLst>
-            <pc:docMk/>
-            <pc:sldMk cId="3992132808" sldId="336"/>
-            <ac:picMk id="25" creationId="{4B0E1570-C6E8-49B6-A377-07EB44A368D0}"/>
-          </ac:picMkLst>
-        </pc:picChg>
-        <pc:cxnChg chg="del">
-          <ac:chgData name="Chris Moreh" userId="17b81281-9f29-44e0-9273-6dadbf6896a2" providerId="ADAL" clId="{2B41A477-2A84-4B8D-9025-16417BC1047B}" dt="2024-10-01T09:53:14.880" v="794"/>
-          <ac:cxnSpMkLst>
-            <pc:docMk/>
-            <pc:sldMk cId="3992132808" sldId="336"/>
-            <ac:cxnSpMk id="22" creationId="{A26B82D7-D05B-412B-9A0D-6430BCD1182D}"/>
-          </ac:cxnSpMkLst>
-        </pc:cxnChg>
-      </pc:sldChg>
-      <pc:sldChg chg="delSp modSp add mod modTransition setBg modClrScheme delDesignElem chgLayout">
-        <pc:chgData name="Chris Moreh" userId="17b81281-9f29-44e0-9273-6dadbf6896a2" providerId="ADAL" clId="{2B41A477-2A84-4B8D-9025-16417BC1047B}" dt="2024-10-01T09:54:05.610" v="798" actId="700"/>
-        <pc:sldMkLst>
-          <pc:docMk/>
-          <pc:sldMk cId="898719641" sldId="337"/>
-        </pc:sldMkLst>
-        <pc:spChg chg="mod ord">
-          <ac:chgData name="Chris Moreh" userId="17b81281-9f29-44e0-9273-6dadbf6896a2" providerId="ADAL" clId="{2B41A477-2A84-4B8D-9025-16417BC1047B}" dt="2024-10-01T09:54:05.610" v="798" actId="700"/>
-          <ac:spMkLst>
-            <pc:docMk/>
-            <pc:sldMk cId="898719641" sldId="337"/>
-            <ac:spMk id="2" creationId="{60C4B25A-7A41-4AEA-935C-86980FFB7802}"/>
-          </ac:spMkLst>
-        </pc:spChg>
-        <pc:spChg chg="mod ord">
-          <ac:chgData name="Chris Moreh" userId="17b81281-9f29-44e0-9273-6dadbf6896a2" providerId="ADAL" clId="{2B41A477-2A84-4B8D-9025-16417BC1047B}" dt="2024-10-01T09:54:05.610" v="798" actId="700"/>
-          <ac:spMkLst>
-            <pc:docMk/>
-            <pc:sldMk cId="898719641" sldId="337"/>
-            <ac:spMk id="4" creationId="{EA8A8C7F-216B-4C24-84F3-351180DFE941}"/>
-          </ac:spMkLst>
-        </pc:spChg>
-        <pc:spChg chg="del">
-          <ac:chgData name="Chris Moreh" userId="17b81281-9f29-44e0-9273-6dadbf6896a2" providerId="ADAL" clId="{2B41A477-2A84-4B8D-9025-16417BC1047B}" dt="2024-10-01T09:53:14.880" v="794"/>
-          <ac:spMkLst>
-            <pc:docMk/>
-            <pc:sldMk cId="898719641" sldId="337"/>
-            <ac:spMk id="9" creationId="{50F21DC9-D0AC-495C-8CC8-D5DDF8C11C22}"/>
-          </ac:spMkLst>
-        </pc:spChg>
-        <pc:spChg chg="del">
-          <ac:chgData name="Chris Moreh" userId="17b81281-9f29-44e0-9273-6dadbf6896a2" providerId="ADAL" clId="{2B41A477-2A84-4B8D-9025-16417BC1047B}" dt="2024-10-01T09:53:14.880" v="794"/>
-          <ac:spMkLst>
-            <pc:docMk/>
-            <pc:sldMk cId="898719641" sldId="337"/>
-            <ac:spMk id="24" creationId="{8324065E-E64E-484D-84AE-BB73D056C968}"/>
-          </ac:spMkLst>
-        </pc:spChg>
-        <pc:picChg chg="del">
-          <ac:chgData name="Chris Moreh" userId="17b81281-9f29-44e0-9273-6dadbf6896a2" providerId="ADAL" clId="{2B41A477-2A84-4B8D-9025-16417BC1047B}" dt="2024-10-01T09:53:14.880" v="794"/>
-          <ac:picMkLst>
-            <pc:docMk/>
-            <pc:sldMk cId="898719641" sldId="337"/>
-            <ac:picMk id="8" creationId="{BF7680B5-1A78-4401-BA9A-78832F0FD90E}"/>
-          </ac:picMkLst>
-        </pc:picChg>
-        <pc:picChg chg="del">
-          <ac:chgData name="Chris Moreh" userId="17b81281-9f29-44e0-9273-6dadbf6896a2" providerId="ADAL" clId="{2B41A477-2A84-4B8D-9025-16417BC1047B}" dt="2024-10-01T09:53:14.880" v="794"/>
-          <ac:picMkLst>
-            <pc:docMk/>
-            <pc:sldMk cId="898719641" sldId="337"/>
-            <ac:picMk id="23" creationId="{1E1838EA-1FA2-4DC4-B182-B8D2C57E74B8}"/>
-          </ac:picMkLst>
-        </pc:picChg>
-        <pc:picChg chg="del">
-          <ac:chgData name="Chris Moreh" userId="17b81281-9f29-44e0-9273-6dadbf6896a2" providerId="ADAL" clId="{2B41A477-2A84-4B8D-9025-16417BC1047B}" dt="2024-10-01T09:53:14.880" v="794"/>
-          <ac:picMkLst>
-            <pc:docMk/>
-            <pc:sldMk cId="898719641" sldId="337"/>
-            <ac:picMk id="25" creationId="{4B0E1570-C6E8-49B6-A377-07EB44A368D0}"/>
-          </ac:picMkLst>
-        </pc:picChg>
-        <pc:cxnChg chg="del">
-          <ac:chgData name="Chris Moreh" userId="17b81281-9f29-44e0-9273-6dadbf6896a2" providerId="ADAL" clId="{2B41A477-2A84-4B8D-9025-16417BC1047B}" dt="2024-10-01T09:53:14.880" v="794"/>
-          <ac:cxnSpMkLst>
-            <pc:docMk/>
-            <pc:sldMk cId="898719641" sldId="337"/>
-            <ac:cxnSpMk id="22" creationId="{A26B82D7-D05B-412B-9A0D-6430BCD1182D}"/>
-          </ac:cxnSpMkLst>
-        </pc:cxnChg>
-      </pc:sldChg>
-      <pc:sldChg chg="delSp modSp add mod modTransition setBg modClrScheme delDesignElem chgLayout">
-        <pc:chgData name="Chris Moreh" userId="17b81281-9f29-44e0-9273-6dadbf6896a2" providerId="ADAL" clId="{2B41A477-2A84-4B8D-9025-16417BC1047B}" dt="2024-10-01T09:55:08.603" v="805" actId="700"/>
-        <pc:sldMkLst>
-          <pc:docMk/>
-          <pc:sldMk cId="1888377005" sldId="338"/>
-        </pc:sldMkLst>
-        <pc:spChg chg="mod ord">
-          <ac:chgData name="Chris Moreh" userId="17b81281-9f29-44e0-9273-6dadbf6896a2" providerId="ADAL" clId="{2B41A477-2A84-4B8D-9025-16417BC1047B}" dt="2024-10-01T09:55:08.603" v="805" actId="700"/>
-          <ac:spMkLst>
-            <pc:docMk/>
-            <pc:sldMk cId="1888377005" sldId="338"/>
-            <ac:spMk id="2" creationId="{60C4B25A-7A41-4AEA-935C-86980FFB7802}"/>
-          </ac:spMkLst>
-        </pc:spChg>
-        <pc:spChg chg="mod ord">
-          <ac:chgData name="Chris Moreh" userId="17b81281-9f29-44e0-9273-6dadbf6896a2" providerId="ADAL" clId="{2B41A477-2A84-4B8D-9025-16417BC1047B}" dt="2024-10-01T09:55:08.603" v="805" actId="700"/>
-          <ac:spMkLst>
-            <pc:docMk/>
-            <pc:sldMk cId="1888377005" sldId="338"/>
-            <ac:spMk id="4" creationId="{EA8A8C7F-216B-4C24-84F3-351180DFE941}"/>
-          </ac:spMkLst>
-        </pc:spChg>
-        <pc:spChg chg="del">
-          <ac:chgData name="Chris Moreh" userId="17b81281-9f29-44e0-9273-6dadbf6896a2" providerId="ADAL" clId="{2B41A477-2A84-4B8D-9025-16417BC1047B}" dt="2024-10-01T09:53:14.880" v="794"/>
-          <ac:spMkLst>
-            <pc:docMk/>
-            <pc:sldMk cId="1888377005" sldId="338"/>
-            <ac:spMk id="9" creationId="{50F21DC9-D0AC-495C-8CC8-D5DDF8C11C22}"/>
-          </ac:spMkLst>
-        </pc:spChg>
-        <pc:spChg chg="del">
-          <ac:chgData name="Chris Moreh" userId="17b81281-9f29-44e0-9273-6dadbf6896a2" providerId="ADAL" clId="{2B41A477-2A84-4B8D-9025-16417BC1047B}" dt="2024-10-01T09:53:14.880" v="794"/>
-          <ac:spMkLst>
-            <pc:docMk/>
-            <pc:sldMk cId="1888377005" sldId="338"/>
-            <ac:spMk id="24" creationId="{8324065E-E64E-484D-84AE-BB73D056C968}"/>
-          </ac:spMkLst>
-        </pc:spChg>
-        <pc:picChg chg="del">
-          <ac:chgData name="Chris Moreh" userId="17b81281-9f29-44e0-9273-6dadbf6896a2" providerId="ADAL" clId="{2B41A477-2A84-4B8D-9025-16417BC1047B}" dt="2024-10-01T09:53:14.880" v="794"/>
-          <ac:picMkLst>
-            <pc:docMk/>
-            <pc:sldMk cId="1888377005" sldId="338"/>
-            <ac:picMk id="8" creationId="{BF7680B5-1A78-4401-BA9A-78832F0FD90E}"/>
-          </ac:picMkLst>
-        </pc:picChg>
-        <pc:picChg chg="del">
-          <ac:chgData name="Chris Moreh" userId="17b81281-9f29-44e0-9273-6dadbf6896a2" providerId="ADAL" clId="{2B41A477-2A84-4B8D-9025-16417BC1047B}" dt="2024-10-01T09:53:14.880" v="794"/>
-          <ac:picMkLst>
-            <pc:docMk/>
-            <pc:sldMk cId="1888377005" sldId="338"/>
-            <ac:picMk id="23" creationId="{1E1838EA-1FA2-4DC4-B182-B8D2C57E74B8}"/>
-          </ac:picMkLst>
-        </pc:picChg>
-        <pc:picChg chg="del">
-          <ac:chgData name="Chris Moreh" userId="17b81281-9f29-44e0-9273-6dadbf6896a2" providerId="ADAL" clId="{2B41A477-2A84-4B8D-9025-16417BC1047B}" dt="2024-10-01T09:53:14.880" v="794"/>
-          <ac:picMkLst>
-            <pc:docMk/>
-            <pc:sldMk cId="1888377005" sldId="338"/>
-            <ac:picMk id="25" creationId="{4B0E1570-C6E8-49B6-A377-07EB44A368D0}"/>
-          </ac:picMkLst>
-        </pc:picChg>
-        <pc:cxnChg chg="del">
-          <ac:chgData name="Chris Moreh" userId="17b81281-9f29-44e0-9273-6dadbf6896a2" providerId="ADAL" clId="{2B41A477-2A84-4B8D-9025-16417BC1047B}" dt="2024-10-01T09:53:14.880" v="794"/>
-          <ac:cxnSpMkLst>
-            <pc:docMk/>
-            <pc:sldMk cId="1888377005" sldId="338"/>
-            <ac:cxnSpMk id="22" creationId="{A26B82D7-D05B-412B-9A0D-6430BCD1182D}"/>
-          </ac:cxnSpMkLst>
-        </pc:cxnChg>
-      </pc:sldChg>
-      <pc:sldChg chg="modSp add mod modTransition setBg chgLayout">
-        <pc:chgData name="Chris Moreh" userId="17b81281-9f29-44e0-9273-6dadbf6896a2" providerId="ADAL" clId="{2B41A477-2A84-4B8D-9025-16417BC1047B}" dt="2024-10-01T09:41:48.244" v="726" actId="700"/>
-        <pc:sldMkLst>
-          <pc:docMk/>
-          <pc:sldMk cId="269492429" sldId="342"/>
-        </pc:sldMkLst>
-        <pc:spChg chg="mod ord">
-          <ac:chgData name="Chris Moreh" userId="17b81281-9f29-44e0-9273-6dadbf6896a2" providerId="ADAL" clId="{2B41A477-2A84-4B8D-9025-16417BC1047B}" dt="2024-10-01T09:41:48.244" v="726" actId="700"/>
-          <ac:spMkLst>
-            <pc:docMk/>
-            <pc:sldMk cId="269492429" sldId="342"/>
-            <ac:spMk id="2" creationId="{F3FC8804-72A9-4C86-A722-3B7579EC5F17}"/>
-          </ac:spMkLst>
-        </pc:spChg>
-        <pc:graphicFrameChg chg="mod ord">
-          <ac:chgData name="Chris Moreh" userId="17b81281-9f29-44e0-9273-6dadbf6896a2" providerId="ADAL" clId="{2B41A477-2A84-4B8D-9025-16417BC1047B}" dt="2024-10-01T09:41:48.244" v="726" actId="700"/>
-          <ac:graphicFrameMkLst>
-            <pc:docMk/>
-            <pc:sldMk cId="269492429" sldId="342"/>
-            <ac:graphicFrameMk id="5" creationId="{5FA5CA1B-4772-44B7-97DA-8331ADEE2739}"/>
-          </ac:graphicFrameMkLst>
-        </pc:graphicFrameChg>
-      </pc:sldChg>
-      <pc:sldChg chg="delSp add del mod">
-        <pc:chgData name="Chris Moreh" userId="17b81281-9f29-44e0-9273-6dadbf6896a2" providerId="ADAL" clId="{2B41A477-2A84-4B8D-9025-16417BC1047B}" dt="2024-10-01T09:36:34.580" v="682" actId="47"/>
-        <pc:sldMkLst>
-          <pc:docMk/>
-          <pc:sldMk cId="1895574651" sldId="349"/>
-        </pc:sldMkLst>
-        <pc:picChg chg="del">
-          <ac:chgData name="Chris Moreh" userId="17b81281-9f29-44e0-9273-6dadbf6896a2" providerId="ADAL" clId="{2B41A477-2A84-4B8D-9025-16417BC1047B}" dt="2024-10-01T09:36:06.814" v="674" actId="21"/>
-          <ac:picMkLst>
-            <pc:docMk/>
-            <pc:sldMk cId="1895574651" sldId="349"/>
-            <ac:picMk id="10" creationId="{6951AE10-F327-F34B-B1BF-26D2AFB940FF}"/>
-          </ac:picMkLst>
-        </pc:picChg>
-      </pc:sldChg>
-      <pc:sldChg chg="delSp add del mod">
-        <pc:chgData name="Chris Moreh" userId="17b81281-9f29-44e0-9273-6dadbf6896a2" providerId="ADAL" clId="{2B41A477-2A84-4B8D-9025-16417BC1047B}" dt="2024-10-01T09:36:35.986" v="683" actId="47"/>
-        <pc:sldMkLst>
-          <pc:docMk/>
-          <pc:sldMk cId="3325492450" sldId="351"/>
-        </pc:sldMkLst>
-        <pc:picChg chg="del">
-          <ac:chgData name="Chris Moreh" userId="17b81281-9f29-44e0-9273-6dadbf6896a2" providerId="ADAL" clId="{2B41A477-2A84-4B8D-9025-16417BC1047B}" dt="2024-10-01T09:36:17.442" v="677" actId="21"/>
-          <ac:picMkLst>
-            <pc:docMk/>
-            <pc:sldMk cId="3325492450" sldId="351"/>
-            <ac:picMk id="3" creationId="{E799476A-680D-2840-9DFF-2E990754A068}"/>
-          </ac:picMkLst>
-        </pc:picChg>
-      </pc:sldChg>
-      <pc:sldChg chg="addSp delSp modSp new mod">
-        <pc:chgData name="Chris Moreh" userId="17b81281-9f29-44e0-9273-6dadbf6896a2" providerId="ADAL" clId="{2B41A477-2A84-4B8D-9025-16417BC1047B}" dt="2024-10-01T09:37:22.378" v="685" actId="1076"/>
-        <pc:sldMkLst>
-          <pc:docMk/>
-          <pc:sldMk cId="2967270402" sldId="352"/>
-        </pc:sldMkLst>
-        <pc:spChg chg="mod">
-          <ac:chgData name="Chris Moreh" userId="17b81281-9f29-44e0-9273-6dadbf6896a2" providerId="ADAL" clId="{2B41A477-2A84-4B8D-9025-16417BC1047B}" dt="2024-10-01T09:35:53.121" v="672"/>
-          <ac:spMkLst>
-            <pc:docMk/>
-            <pc:sldMk cId="2967270402" sldId="352"/>
-            <ac:spMk id="2" creationId="{FC537BB3-27CB-8EF1-ABA8-6796AD98E2C5}"/>
-          </ac:spMkLst>
-        </pc:spChg>
-        <pc:spChg chg="del">
-          <ac:chgData name="Chris Moreh" userId="17b81281-9f29-44e0-9273-6dadbf6896a2" providerId="ADAL" clId="{2B41A477-2A84-4B8D-9025-16417BC1047B}" dt="2024-10-01T09:36:12.216" v="675" actId="478"/>
-          <ac:spMkLst>
-            <pc:docMk/>
-            <pc:sldMk cId="2967270402" sldId="352"/>
-            <ac:spMk id="3" creationId="{18868135-2465-7ECF-CBA2-2BF8184B9423}"/>
-          </ac:spMkLst>
-        </pc:spChg>
-        <pc:picChg chg="add mod">
-          <ac:chgData name="Chris Moreh" userId="17b81281-9f29-44e0-9273-6dadbf6896a2" providerId="ADAL" clId="{2B41A477-2A84-4B8D-9025-16417BC1047B}" dt="2024-10-01T09:37:22.378" v="685" actId="1076"/>
-          <ac:picMkLst>
-            <pc:docMk/>
-            <pc:sldMk cId="2967270402" sldId="352"/>
-            <ac:picMk id="10" creationId="{6951AE10-F327-F34B-B1BF-26D2AFB940FF}"/>
-          </ac:picMkLst>
-        </pc:picChg>
-      </pc:sldChg>
-      <pc:sldChg chg="addSp delSp modSp new mod">
-        <pc:chgData name="Chris Moreh" userId="17b81281-9f29-44e0-9273-6dadbf6896a2" providerId="ADAL" clId="{2B41A477-2A84-4B8D-9025-16417BC1047B}" dt="2024-10-01T09:37:54.423" v="695" actId="20577"/>
-        <pc:sldMkLst>
-          <pc:docMk/>
-          <pc:sldMk cId="1562431172" sldId="353"/>
-        </pc:sldMkLst>
-        <pc:spChg chg="mod">
-          <ac:chgData name="Chris Moreh" userId="17b81281-9f29-44e0-9273-6dadbf6896a2" providerId="ADAL" clId="{2B41A477-2A84-4B8D-9025-16417BC1047B}" dt="2024-10-01T09:37:54.423" v="695" actId="20577"/>
-          <ac:spMkLst>
-            <pc:docMk/>
-            <pc:sldMk cId="1562431172" sldId="353"/>
-            <ac:spMk id="2" creationId="{D9641BC8-DCF4-F058-F446-222E48C379C8}"/>
-          </ac:spMkLst>
-        </pc:spChg>
-        <pc:spChg chg="del">
-          <ac:chgData name="Chris Moreh" userId="17b81281-9f29-44e0-9273-6dadbf6896a2" providerId="ADAL" clId="{2B41A477-2A84-4B8D-9025-16417BC1047B}" dt="2024-10-01T09:36:22.605" v="678" actId="478"/>
-          <ac:spMkLst>
-            <pc:docMk/>
-            <pc:sldMk cId="1562431172" sldId="353"/>
-            <ac:spMk id="3" creationId="{5CD09B86-3D50-D279-C911-8BE1CCDDAC8D}"/>
-          </ac:spMkLst>
-        </pc:spChg>
-        <pc:picChg chg="add mod">
-          <ac:chgData name="Chris Moreh" userId="17b81281-9f29-44e0-9273-6dadbf6896a2" providerId="ADAL" clId="{2B41A477-2A84-4B8D-9025-16417BC1047B}" dt="2024-10-01T09:36:31.933" v="681" actId="1076"/>
-          <ac:picMkLst>
-            <pc:docMk/>
-            <pc:sldMk cId="1562431172" sldId="353"/>
-            <ac:picMk id="7" creationId="{E799476A-680D-2840-9DFF-2E990754A068}"/>
-          </ac:picMkLst>
-        </pc:picChg>
-      </pc:sldChg>
-      <pc:sldChg chg="addSp delSp modSp new mod modClrScheme chgLayout">
-        <pc:chgData name="Chris Moreh" userId="17b81281-9f29-44e0-9273-6dadbf6896a2" providerId="ADAL" clId="{2B41A477-2A84-4B8D-9025-16417BC1047B}" dt="2024-10-01T09:56:00.182" v="829" actId="20577"/>
-        <pc:sldMkLst>
-          <pc:docMk/>
-          <pc:sldMk cId="253129452" sldId="354"/>
-        </pc:sldMkLst>
-        <pc:spChg chg="del mod ord">
-          <ac:chgData name="Chris Moreh" userId="17b81281-9f29-44e0-9273-6dadbf6896a2" providerId="ADAL" clId="{2B41A477-2A84-4B8D-9025-16417BC1047B}" dt="2024-10-01T09:55:46.264" v="812" actId="700"/>
-          <ac:spMkLst>
-            <pc:docMk/>
-            <pc:sldMk cId="253129452" sldId="354"/>
-            <ac:spMk id="2" creationId="{35325FDB-DC5C-8B64-2FD6-BE7314E44098}"/>
-          </ac:spMkLst>
-        </pc:spChg>
-        <pc:spChg chg="del mod ord">
-          <ac:chgData name="Chris Moreh" userId="17b81281-9f29-44e0-9273-6dadbf6896a2" providerId="ADAL" clId="{2B41A477-2A84-4B8D-9025-16417BC1047B}" dt="2024-10-01T09:55:46.264" v="812" actId="700"/>
-          <ac:spMkLst>
-            <pc:docMk/>
-            <pc:sldMk cId="253129452" sldId="354"/>
-            <ac:spMk id="3" creationId="{FE9EA550-1A90-941C-E2B2-21EF2D0E4650}"/>
-          </ac:spMkLst>
-        </pc:spChg>
-        <pc:spChg chg="mod ord">
-          <ac:chgData name="Chris Moreh" userId="17b81281-9f29-44e0-9273-6dadbf6896a2" providerId="ADAL" clId="{2B41A477-2A84-4B8D-9025-16417BC1047B}" dt="2024-10-01T09:55:46.264" v="812" actId="700"/>
-          <ac:spMkLst>
-            <pc:docMk/>
-            <pc:sldMk cId="253129452" sldId="354"/>
-            <ac:spMk id="4" creationId="{7452334B-2A42-251C-845C-1CED233665F2}"/>
-          </ac:spMkLst>
-        </pc:spChg>
-        <pc:spChg chg="mod ord">
-          <ac:chgData name="Chris Moreh" userId="17b81281-9f29-44e0-9273-6dadbf6896a2" providerId="ADAL" clId="{2B41A477-2A84-4B8D-9025-16417BC1047B}" dt="2024-10-01T09:55:46.264" v="812" actId="700"/>
-          <ac:spMkLst>
-            <pc:docMk/>
-            <pc:sldMk cId="253129452" sldId="354"/>
-            <ac:spMk id="5" creationId="{E7848055-4F62-3048-C4D2-554FF0041ADC}"/>
-          </ac:spMkLst>
-        </pc:spChg>
-        <pc:spChg chg="mod ord">
-          <ac:chgData name="Chris Moreh" userId="17b81281-9f29-44e0-9273-6dadbf6896a2" providerId="ADAL" clId="{2B41A477-2A84-4B8D-9025-16417BC1047B}" dt="2024-10-01T09:55:46.264" v="812" actId="700"/>
-          <ac:spMkLst>
-            <pc:docMk/>
-            <pc:sldMk cId="253129452" sldId="354"/>
-            <ac:spMk id="6" creationId="{70535960-24E1-CFDC-22DF-A828C2B2C10E}"/>
-          </ac:spMkLst>
-        </pc:spChg>
-        <pc:spChg chg="add mod ord">
-          <ac:chgData name="Chris Moreh" userId="17b81281-9f29-44e0-9273-6dadbf6896a2" providerId="ADAL" clId="{2B41A477-2A84-4B8D-9025-16417BC1047B}" dt="2024-10-01T09:55:54.227" v="822" actId="20577"/>
-          <ac:spMkLst>
-            <pc:docMk/>
-            <pc:sldMk cId="253129452" sldId="354"/>
-            <ac:spMk id="7" creationId="{FF2CBA3A-E59C-1E5C-37CA-CD0F1E185ED5}"/>
-          </ac:spMkLst>
-        </pc:spChg>
-        <pc:spChg chg="add mod ord">
-          <ac:chgData name="Chris Moreh" userId="17b81281-9f29-44e0-9273-6dadbf6896a2" providerId="ADAL" clId="{2B41A477-2A84-4B8D-9025-16417BC1047B}" dt="2024-10-01T09:56:00.182" v="829" actId="20577"/>
-          <ac:spMkLst>
-            <pc:docMk/>
-            <pc:sldMk cId="253129452" sldId="354"/>
-            <ac:spMk id="8" creationId="{636F7FD2-53FA-4A51-9681-6FC5C8960063}"/>
-          </ac:spMkLst>
-        </pc:spChg>
-      </pc:sldChg>
-      <pc:sldChg chg="modSp add">
-        <pc:chgData name="Chris Moreh" userId="17b81281-9f29-44e0-9273-6dadbf6896a2" providerId="ADAL" clId="{2B41A477-2A84-4B8D-9025-16417BC1047B}" dt="2024-10-01T09:43:23.679" v="730" actId="207"/>
-        <pc:sldMkLst>
-          <pc:docMk/>
-          <pc:sldMk cId="2041529945" sldId="355"/>
-        </pc:sldMkLst>
-        <pc:graphicFrameChg chg="mod">
-          <ac:chgData name="Chris Moreh" userId="17b81281-9f29-44e0-9273-6dadbf6896a2" providerId="ADAL" clId="{2B41A477-2A84-4B8D-9025-16417BC1047B}" dt="2024-10-01T09:43:23.679" v="730" actId="207"/>
-          <ac:graphicFrameMkLst>
-            <pc:docMk/>
-            <pc:sldMk cId="2041529945" sldId="355"/>
-            <ac:graphicFrameMk id="5" creationId="{5FA5CA1B-4772-44B7-97DA-8331ADEE2739}"/>
-          </ac:graphicFrameMkLst>
-        </pc:graphicFrameChg>
-      </pc:sldChg>
-      <pc:sldChg chg="addSp delSp modSp add mod modAnim">
-        <pc:chgData name="Chris Moreh" userId="17b81281-9f29-44e0-9273-6dadbf6896a2" providerId="ADAL" clId="{2B41A477-2A84-4B8D-9025-16417BC1047B}" dt="2024-10-01T09:48:40.321" v="769"/>
-        <pc:sldMkLst>
-          <pc:docMk/>
-          <pc:sldMk cId="1063371618" sldId="356"/>
-        </pc:sldMkLst>
-        <pc:spChg chg="add del mod">
-          <ac:chgData name="Chris Moreh" userId="17b81281-9f29-44e0-9273-6dadbf6896a2" providerId="ADAL" clId="{2B41A477-2A84-4B8D-9025-16417BC1047B}" dt="2024-10-01T09:46:19.605" v="746" actId="478"/>
-          <ac:spMkLst>
-            <pc:docMk/>
-            <pc:sldMk cId="1063371618" sldId="356"/>
-            <ac:spMk id="3" creationId="{3DEE70D5-B410-48B0-1297-B53388A1C3FB}"/>
-          </ac:spMkLst>
-        </pc:spChg>
-        <pc:spChg chg="add del mod">
-          <ac:chgData name="Chris Moreh" userId="17b81281-9f29-44e0-9273-6dadbf6896a2" providerId="ADAL" clId="{2B41A477-2A84-4B8D-9025-16417BC1047B}" dt="2024-10-01T09:46:19.605" v="746" actId="478"/>
-          <ac:spMkLst>
-            <pc:docMk/>
-            <pc:sldMk cId="1063371618" sldId="356"/>
-            <ac:spMk id="9" creationId="{892E4999-D7D5-A731-B7FF-19EF33876093}"/>
-          </ac:spMkLst>
-        </pc:spChg>
-        <pc:spChg chg="add del mod">
-          <ac:chgData name="Chris Moreh" userId="17b81281-9f29-44e0-9273-6dadbf6896a2" providerId="ADAL" clId="{2B41A477-2A84-4B8D-9025-16417BC1047B}" dt="2024-10-01T09:46:19.605" v="746" actId="478"/>
-          <ac:spMkLst>
-            <pc:docMk/>
-            <pc:sldMk cId="1063371618" sldId="356"/>
-            <ac:spMk id="10" creationId="{47E5AE7E-8592-BFA6-9E6B-E7CEC527779F}"/>
-          </ac:spMkLst>
-        </pc:spChg>
-        <pc:spChg chg="add del mod">
-          <ac:chgData name="Chris Moreh" userId="17b81281-9f29-44e0-9273-6dadbf6896a2" providerId="ADAL" clId="{2B41A477-2A84-4B8D-9025-16417BC1047B}" dt="2024-10-01T09:46:19.605" v="746" actId="478"/>
-          <ac:spMkLst>
-            <pc:docMk/>
-            <pc:sldMk cId="1063371618" sldId="356"/>
-            <ac:spMk id="12" creationId="{76EB5506-25D4-2C1C-55F8-412E41741C0E}"/>
-          </ac:spMkLst>
-        </pc:spChg>
-        <pc:spChg chg="add mod">
-          <ac:chgData name="Chris Moreh" userId="17b81281-9f29-44e0-9273-6dadbf6896a2" providerId="ADAL" clId="{2B41A477-2A84-4B8D-9025-16417BC1047B}" dt="2024-10-01T09:47:06.402" v="751" actId="207"/>
-          <ac:spMkLst>
-            <pc:docMk/>
-            <pc:sldMk cId="1063371618" sldId="356"/>
-            <ac:spMk id="18" creationId="{0A6B4BD8-3553-0D82-6F18-E498715C695E}"/>
-          </ac:spMkLst>
-        </pc:spChg>
-        <pc:spChg chg="add mod">
-          <ac:chgData name="Chris Moreh" userId="17b81281-9f29-44e0-9273-6dadbf6896a2" providerId="ADAL" clId="{2B41A477-2A84-4B8D-9025-16417BC1047B}" dt="2024-10-01T09:47:40.079" v="757" actId="1076"/>
-          <ac:spMkLst>
-            <pc:docMk/>
-            <pc:sldMk cId="1063371618" sldId="356"/>
-            <ac:spMk id="19" creationId="{C7AA7184-ECFA-A188-14D3-C0836E0FD6BA}"/>
-          </ac:spMkLst>
-        </pc:spChg>
-        <pc:spChg chg="add mod">
-          <ac:chgData name="Chris Moreh" userId="17b81281-9f29-44e0-9273-6dadbf6896a2" providerId="ADAL" clId="{2B41A477-2A84-4B8D-9025-16417BC1047B}" dt="2024-10-01T09:47:32.720" v="756" actId="1076"/>
-          <ac:spMkLst>
-            <pc:docMk/>
-            <pc:sldMk cId="1063371618" sldId="356"/>
-            <ac:spMk id="20" creationId="{A35BF732-3AAD-387B-73E7-06D7DF39EFED}"/>
-          </ac:spMkLst>
-        </pc:spChg>
-        <pc:spChg chg="add mod">
-          <ac:chgData name="Chris Moreh" userId="17b81281-9f29-44e0-9273-6dadbf6896a2" providerId="ADAL" clId="{2B41A477-2A84-4B8D-9025-16417BC1047B}" dt="2024-10-01T09:47:58.150" v="761" actId="14100"/>
-          <ac:spMkLst>
-            <pc:docMk/>
-            <pc:sldMk cId="1063371618" sldId="356"/>
-            <ac:spMk id="21" creationId="{4BB4D75F-F6F9-C3E0-F709-814AAB64D1B8}"/>
-          </ac:spMkLst>
-        </pc:spChg>
-        <pc:spChg chg="add mod">
-          <ac:chgData name="Chris Moreh" userId="17b81281-9f29-44e0-9273-6dadbf6896a2" providerId="ADAL" clId="{2B41A477-2A84-4B8D-9025-16417BC1047B}" dt="2024-10-01T09:48:08.277" v="764" actId="14100"/>
-          <ac:spMkLst>
-            <pc:docMk/>
-            <pc:sldMk cId="1063371618" sldId="356"/>
-            <ac:spMk id="22" creationId="{EDE75385-D404-25BD-7E4C-EAF671C0923E}"/>
-          </ac:spMkLst>
-        </pc:spChg>
-        <pc:cxnChg chg="add del mod">
-          <ac:chgData name="Chris Moreh" userId="17b81281-9f29-44e0-9273-6dadbf6896a2" providerId="ADAL" clId="{2B41A477-2A84-4B8D-9025-16417BC1047B}" dt="2024-10-01T09:46:19.605" v="746" actId="478"/>
-          <ac:cxnSpMkLst>
-            <pc:docMk/>
-            <pc:sldMk cId="1063371618" sldId="356"/>
-            <ac:cxnSpMk id="7" creationId="{E6A65E0A-9DD1-2A3D-D444-1B1DD080115C}"/>
-          </ac:cxnSpMkLst>
-        </pc:cxnChg>
-        <pc:cxnChg chg="add del mod">
-          <ac:chgData name="Chris Moreh" userId="17b81281-9f29-44e0-9273-6dadbf6896a2" providerId="ADAL" clId="{2B41A477-2A84-4B8D-9025-16417BC1047B}" dt="2024-10-01T09:46:19.605" v="746" actId="478"/>
-          <ac:cxnSpMkLst>
-            <pc:docMk/>
-            <pc:sldMk cId="1063371618" sldId="356"/>
-            <ac:cxnSpMk id="11" creationId="{B9EB88DF-AF32-5A08-DF98-A399DB930D09}"/>
-          </ac:cxnSpMkLst>
-        </pc:cxnChg>
-        <pc:cxnChg chg="add del mod">
-          <ac:chgData name="Chris Moreh" userId="17b81281-9f29-44e0-9273-6dadbf6896a2" providerId="ADAL" clId="{2B41A477-2A84-4B8D-9025-16417BC1047B}" dt="2024-10-01T09:46:19.605" v="746" actId="478"/>
-          <ac:cxnSpMkLst>
-            <pc:docMk/>
-            <pc:sldMk cId="1063371618" sldId="356"/>
-            <ac:cxnSpMk id="13" creationId="{735C6ADF-D440-F26D-34E4-DB3B579EBED3}"/>
-          </ac:cxnSpMkLst>
-        </pc:cxnChg>
-        <pc:cxnChg chg="add del mod">
-          <ac:chgData name="Chris Moreh" userId="17b81281-9f29-44e0-9273-6dadbf6896a2" providerId="ADAL" clId="{2B41A477-2A84-4B8D-9025-16417BC1047B}" dt="2024-10-01T09:46:19.605" v="746" actId="478"/>
-          <ac:cxnSpMkLst>
-            <pc:docMk/>
-            <pc:sldMk cId="1063371618" sldId="356"/>
-            <ac:cxnSpMk id="14" creationId="{96C91C15-28F7-0EC4-9E1A-79A65805F426}"/>
-          </ac:cxnSpMkLst>
-        </pc:cxnChg>
-      </pc:sldChg>
-      <pc:sldChg chg="delSp modSp add mod delAnim modAnim">
-        <pc:chgData name="Chris Moreh" userId="17b81281-9f29-44e0-9273-6dadbf6896a2" providerId="ADAL" clId="{2B41A477-2A84-4B8D-9025-16417BC1047B}" dt="2024-10-01T09:50:36.205" v="779"/>
-        <pc:sldMkLst>
-          <pc:docMk/>
-          <pc:sldMk cId="3565505821" sldId="357"/>
-        </pc:sldMkLst>
-        <pc:spChg chg="mod">
-          <ac:chgData name="Chris Moreh" userId="17b81281-9f29-44e0-9273-6dadbf6896a2" providerId="ADAL" clId="{2B41A477-2A84-4B8D-9025-16417BC1047B}" dt="2024-10-01T09:50:31.695" v="778" actId="14100"/>
-          <ac:spMkLst>
-            <pc:docMk/>
-            <pc:sldMk cId="3565505821" sldId="357"/>
-            <ac:spMk id="18" creationId="{0A6B4BD8-3553-0D82-6F18-E498715C695E}"/>
-          </ac:spMkLst>
-        </pc:spChg>
-        <pc:spChg chg="del">
-          <ac:chgData name="Chris Moreh" userId="17b81281-9f29-44e0-9273-6dadbf6896a2" providerId="ADAL" clId="{2B41A477-2A84-4B8D-9025-16417BC1047B}" dt="2024-10-01T09:50:15.690" v="774" actId="478"/>
-          <ac:spMkLst>
-            <pc:docMk/>
-            <pc:sldMk cId="3565505821" sldId="357"/>
-            <ac:spMk id="19" creationId="{C7AA7184-ECFA-A188-14D3-C0836E0FD6BA}"/>
-          </ac:spMkLst>
-        </pc:spChg>
-        <pc:spChg chg="del mod">
-          <ac:chgData name="Chris Moreh" userId="17b81281-9f29-44e0-9273-6dadbf6896a2" providerId="ADAL" clId="{2B41A477-2A84-4B8D-9025-16417BC1047B}" dt="2024-10-01T09:50:19.129" v="776" actId="478"/>
-          <ac:spMkLst>
-            <pc:docMk/>
-            <pc:sldMk cId="3565505821" sldId="357"/>
-            <ac:spMk id="20" creationId="{A35BF732-3AAD-387B-73E7-06D7DF39EFED}"/>
-          </ac:spMkLst>
-        </pc:spChg>
-        <pc:spChg chg="del">
-          <ac:chgData name="Chris Moreh" userId="17b81281-9f29-44e0-9273-6dadbf6896a2" providerId="ADAL" clId="{2B41A477-2A84-4B8D-9025-16417BC1047B}" dt="2024-10-01T09:50:13.387" v="773" actId="478"/>
-          <ac:spMkLst>
-            <pc:docMk/>
-            <pc:sldMk cId="3565505821" sldId="357"/>
-            <ac:spMk id="21" creationId="{4BB4D75F-F6F9-C3E0-F709-814AAB64D1B8}"/>
-          </ac:spMkLst>
-        </pc:spChg>
-        <pc:spChg chg="del">
-          <ac:chgData name="Chris Moreh" userId="17b81281-9f29-44e0-9273-6dadbf6896a2" providerId="ADAL" clId="{2B41A477-2A84-4B8D-9025-16417BC1047B}" dt="2024-10-01T09:50:10.754" v="772" actId="478"/>
-          <ac:spMkLst>
-            <pc:docMk/>
-            <pc:sldMk cId="3565505821" sldId="357"/>
-            <ac:spMk id="22" creationId="{EDE75385-D404-25BD-7E4C-EAF671C0923E}"/>
-          </ac:spMkLst>
-        </pc:spChg>
-        <pc:picChg chg="mod">
-          <ac:chgData name="Chris Moreh" userId="17b81281-9f29-44e0-9273-6dadbf6896a2" providerId="ADAL" clId="{2B41A477-2A84-4B8D-9025-16417BC1047B}" dt="2024-10-01T09:50:05.547" v="771" actId="14826"/>
-          <ac:picMkLst>
-            <pc:docMk/>
-            <pc:sldMk cId="3565505821" sldId="357"/>
-            <ac:picMk id="8" creationId="{B2270D3B-103F-2A9C-1BED-96FD2DA4E5BC}"/>
-          </ac:picMkLst>
-        </pc:picChg>
-      </pc:sldChg>
-      <pc:sldChg chg="modSp add mod modTransition chgLayout">
-        <pc:chgData name="Chris Moreh" userId="17b81281-9f29-44e0-9273-6dadbf6896a2" providerId="ADAL" clId="{2B41A477-2A84-4B8D-9025-16417BC1047B}" dt="2024-10-01T09:53:43.497" v="797" actId="700"/>
-        <pc:sldMkLst>
-          <pc:docMk/>
-          <pc:sldMk cId="4042714575" sldId="359"/>
-        </pc:sldMkLst>
-        <pc:spChg chg="mod ord">
-          <ac:chgData name="Chris Moreh" userId="17b81281-9f29-44e0-9273-6dadbf6896a2" providerId="ADAL" clId="{2B41A477-2A84-4B8D-9025-16417BC1047B}" dt="2024-10-01T09:53:43.497" v="797" actId="700"/>
-          <ac:spMkLst>
-            <pc:docMk/>
-            <pc:sldMk cId="4042714575" sldId="359"/>
-            <ac:spMk id="6" creationId="{D733834A-F0F1-4560-9915-A1756951B213}"/>
-          </ac:spMkLst>
-        </pc:spChg>
-        <pc:spChg chg="mod ord">
-          <ac:chgData name="Chris Moreh" userId="17b81281-9f29-44e0-9273-6dadbf6896a2" providerId="ADAL" clId="{2B41A477-2A84-4B8D-9025-16417BC1047B}" dt="2024-10-01T09:53:43.497" v="797" actId="700"/>
-          <ac:spMkLst>
-            <pc:docMk/>
-            <pc:sldMk cId="4042714575" sldId="359"/>
-            <ac:spMk id="7" creationId="{139B8748-6F7A-436D-89BA-6FB1FC011C31}"/>
-          </ac:spMkLst>
-        </pc:spChg>
-      </pc:sldChg>
-      <pc:sldChg chg="add modTransition">
-        <pc:chgData name="Chris Moreh" userId="17b81281-9f29-44e0-9273-6dadbf6896a2" providerId="ADAL" clId="{2B41A477-2A84-4B8D-9025-16417BC1047B}" dt="2024-10-01T09:53:14.880" v="794"/>
-        <pc:sldMkLst>
-          <pc:docMk/>
-          <pc:sldMk cId="4149568844" sldId="360"/>
-        </pc:sldMkLst>
-      </pc:sldChg>
-      <pc:sldChg chg="add modTransition">
-        <pc:chgData name="Chris Moreh" userId="17b81281-9f29-44e0-9273-6dadbf6896a2" providerId="ADAL" clId="{2B41A477-2A84-4B8D-9025-16417BC1047B}" dt="2024-10-01T09:53:14.880" v="794"/>
-        <pc:sldMkLst>
-          <pc:docMk/>
-          <pc:sldMk cId="3726797516" sldId="361"/>
-        </pc:sldMkLst>
-      </pc:sldChg>
-      <pc:sldChg chg="add modTransition">
-        <pc:chgData name="Chris Moreh" userId="17b81281-9f29-44e0-9273-6dadbf6896a2" providerId="ADAL" clId="{2B41A477-2A84-4B8D-9025-16417BC1047B}" dt="2024-10-01T09:53:14.880" v="794"/>
-        <pc:sldMkLst>
-          <pc:docMk/>
-          <pc:sldMk cId="840503715" sldId="362"/>
-        </pc:sldMkLst>
-      </pc:sldChg>
-      <pc:sldChg chg="add modTransition">
-        <pc:chgData name="Chris Moreh" userId="17b81281-9f29-44e0-9273-6dadbf6896a2" providerId="ADAL" clId="{2B41A477-2A84-4B8D-9025-16417BC1047B}" dt="2024-10-01T09:53:14.880" v="794"/>
-        <pc:sldMkLst>
-          <pc:docMk/>
-          <pc:sldMk cId="623919284" sldId="363"/>
-        </pc:sldMkLst>
-      </pc:sldChg>
-      <pc:sldChg chg="add modTransition">
-        <pc:chgData name="Chris Moreh" userId="17b81281-9f29-44e0-9273-6dadbf6896a2" providerId="ADAL" clId="{2B41A477-2A84-4B8D-9025-16417BC1047B}" dt="2024-10-01T09:53:14.880" v="794"/>
-        <pc:sldMkLst>
-          <pc:docMk/>
-          <pc:sldMk cId="4271899228" sldId="364"/>
-        </pc:sldMkLst>
-      </pc:sldChg>
-      <pc:sldChg chg="add modTransition">
-        <pc:chgData name="Chris Moreh" userId="17b81281-9f29-44e0-9273-6dadbf6896a2" providerId="ADAL" clId="{2B41A477-2A84-4B8D-9025-16417BC1047B}" dt="2024-10-01T09:53:14.880" v="794"/>
-        <pc:sldMkLst>
-          <pc:docMk/>
-          <pc:sldMk cId="3076840088" sldId="365"/>
-        </pc:sldMkLst>
-      </pc:sldChg>
-      <pc:sldChg chg="modSp add mod modTransition">
-        <pc:chgData name="Chris Moreh" userId="17b81281-9f29-44e0-9273-6dadbf6896a2" providerId="ADAL" clId="{2B41A477-2A84-4B8D-9025-16417BC1047B}" dt="2024-10-01T09:54:16.928" v="800" actId="20577"/>
-        <pc:sldMkLst>
-          <pc:docMk/>
-          <pc:sldMk cId="32425137" sldId="366"/>
-        </pc:sldMkLst>
-        <pc:spChg chg="mod">
-          <ac:chgData name="Chris Moreh" userId="17b81281-9f29-44e0-9273-6dadbf6896a2" providerId="ADAL" clId="{2B41A477-2A84-4B8D-9025-16417BC1047B}" dt="2024-10-01T09:54:16.928" v="800" actId="20577"/>
-          <ac:spMkLst>
-            <pc:docMk/>
-            <pc:sldMk cId="32425137" sldId="366"/>
-            <ac:spMk id="5" creationId="{CB2C076B-496B-4F65-9386-EC888A4B7735}"/>
-          </ac:spMkLst>
-        </pc:spChg>
-      </pc:sldChg>
-      <pc:sldChg chg="modSp add mod modTransition modClrScheme chgLayout">
-        <pc:chgData name="Chris Moreh" userId="17b81281-9f29-44e0-9273-6dadbf6896a2" providerId="ADAL" clId="{2B41A477-2A84-4B8D-9025-16417BC1047B}" dt="2024-10-01T09:54:52.528" v="804" actId="700"/>
-        <pc:sldMkLst>
-          <pc:docMk/>
-          <pc:sldMk cId="3117409897" sldId="367"/>
-        </pc:sldMkLst>
-        <pc:spChg chg="mod ord">
-          <ac:chgData name="Chris Moreh" userId="17b81281-9f29-44e0-9273-6dadbf6896a2" providerId="ADAL" clId="{2B41A477-2A84-4B8D-9025-16417BC1047B}" dt="2024-10-01T09:54:52.528" v="804" actId="700"/>
-          <ac:spMkLst>
-            <pc:docMk/>
-            <pc:sldMk cId="3117409897" sldId="367"/>
-            <ac:spMk id="2" creationId="{A888F937-CB9E-4768-865B-E6969F560B01}"/>
-          </ac:spMkLst>
-        </pc:spChg>
-        <pc:picChg chg="mod ord">
-          <ac:chgData name="Chris Moreh" userId="17b81281-9f29-44e0-9273-6dadbf6896a2" providerId="ADAL" clId="{2B41A477-2A84-4B8D-9025-16417BC1047B}" dt="2024-10-01T09:54:52.528" v="804" actId="700"/>
-          <ac:picMkLst>
-            <pc:docMk/>
-            <pc:sldMk cId="3117409897" sldId="367"/>
-            <ac:picMk id="6" creationId="{FA100196-E71B-400B-B56E-458F765CF89B}"/>
-          </ac:picMkLst>
-        </pc:picChg>
-      </pc:sldChg>
-      <pc:sldChg chg="add modTransition">
-        <pc:chgData name="Chris Moreh" userId="17b81281-9f29-44e0-9273-6dadbf6896a2" providerId="ADAL" clId="{2B41A477-2A84-4B8D-9025-16417BC1047B}" dt="2024-10-01T09:53:14.880" v="794"/>
-        <pc:sldMkLst>
-          <pc:docMk/>
-          <pc:sldMk cId="380690980" sldId="368"/>
-        </pc:sldMkLst>
-      </pc:sldChg>
-      <pc:sldChg chg="add modTransition">
-        <pc:chgData name="Chris Moreh" userId="17b81281-9f29-44e0-9273-6dadbf6896a2" providerId="ADAL" clId="{2B41A477-2A84-4B8D-9025-16417BC1047B}" dt="2024-10-01T09:53:14.880" v="794"/>
-        <pc:sldMkLst>
-          <pc:docMk/>
-          <pc:sldMk cId="2523947705" sldId="369"/>
-        </pc:sldMkLst>
-      </pc:sldChg>
-      <pc:sldChg chg="add modTransition">
-        <pc:chgData name="Chris Moreh" userId="17b81281-9f29-44e0-9273-6dadbf6896a2" providerId="ADAL" clId="{2B41A477-2A84-4B8D-9025-16417BC1047B}" dt="2024-10-01T09:53:14.880" v="794"/>
-        <pc:sldMkLst>
-          <pc:docMk/>
-          <pc:sldMk cId="511201423" sldId="370"/>
-        </pc:sldMkLst>
-      </pc:sldChg>
-      <pc:sldChg chg="modSp add mod modTransition modClrScheme chgLayout">
-        <pc:chgData name="Chris Moreh" userId="17b81281-9f29-44e0-9273-6dadbf6896a2" providerId="ADAL" clId="{2B41A477-2A84-4B8D-9025-16417BC1047B}" dt="2024-10-01T09:54:46.242" v="803" actId="700"/>
-        <pc:sldMkLst>
-          <pc:docMk/>
-          <pc:sldMk cId="1785384435" sldId="371"/>
-        </pc:sldMkLst>
-        <pc:spChg chg="mod ord">
-          <ac:chgData name="Chris Moreh" userId="17b81281-9f29-44e0-9273-6dadbf6896a2" providerId="ADAL" clId="{2B41A477-2A84-4B8D-9025-16417BC1047B}" dt="2024-10-01T09:54:46.242" v="803" actId="700"/>
-          <ac:spMkLst>
-            <pc:docMk/>
-            <pc:sldMk cId="1785384435" sldId="371"/>
-            <ac:spMk id="2" creationId="{A888F937-CB9E-4768-865B-E6969F560B01}"/>
-          </ac:spMkLst>
-        </pc:spChg>
-        <pc:picChg chg="mod ord">
-          <ac:chgData name="Chris Moreh" userId="17b81281-9f29-44e0-9273-6dadbf6896a2" providerId="ADAL" clId="{2B41A477-2A84-4B8D-9025-16417BC1047B}" dt="2024-10-01T09:54:46.242" v="803" actId="700"/>
-          <ac:picMkLst>
-            <pc:docMk/>
-            <pc:sldMk cId="1785384435" sldId="371"/>
-            <ac:picMk id="6" creationId="{FA100196-E71B-400B-B56E-458F765CF89B}"/>
-          </ac:picMkLst>
-        </pc:picChg>
-      </pc:sldChg>
-      <pc:sldChg chg="modSp add mod modTransition modClrScheme chgLayout">
-        <pc:chgData name="Chris Moreh" userId="17b81281-9f29-44e0-9273-6dadbf6896a2" providerId="ADAL" clId="{2B41A477-2A84-4B8D-9025-16417BC1047B}" dt="2024-10-01T09:54:33.549" v="801" actId="700"/>
-        <pc:sldMkLst>
-          <pc:docMk/>
-          <pc:sldMk cId="2010348205" sldId="372"/>
-        </pc:sldMkLst>
-        <pc:spChg chg="mod ord">
-          <ac:chgData name="Chris Moreh" userId="17b81281-9f29-44e0-9273-6dadbf6896a2" providerId="ADAL" clId="{2B41A477-2A84-4B8D-9025-16417BC1047B}" dt="2024-10-01T09:54:33.549" v="801" actId="700"/>
-          <ac:spMkLst>
-            <pc:docMk/>
-            <pc:sldMk cId="2010348205" sldId="372"/>
-            <ac:spMk id="2" creationId="{A888F937-CB9E-4768-865B-E6969F560B01}"/>
-          </ac:spMkLst>
-        </pc:spChg>
-        <pc:picChg chg="mod ord">
-          <ac:chgData name="Chris Moreh" userId="17b81281-9f29-44e0-9273-6dadbf6896a2" providerId="ADAL" clId="{2B41A477-2A84-4B8D-9025-16417BC1047B}" dt="2024-10-01T09:54:33.549" v="801" actId="700"/>
-          <ac:picMkLst>
-            <pc:docMk/>
-            <pc:sldMk cId="2010348205" sldId="372"/>
-            <ac:picMk id="6" creationId="{FA100196-E71B-400B-B56E-458F765CF89B}"/>
-          </ac:picMkLst>
-        </pc:picChg>
-      </pc:sldChg>
-      <pc:sldChg chg="add modTransition">
-        <pc:chgData name="Chris Moreh" userId="17b81281-9f29-44e0-9273-6dadbf6896a2" providerId="ADAL" clId="{2B41A477-2A84-4B8D-9025-16417BC1047B}" dt="2024-10-01T09:53:14.880" v="794"/>
-        <pc:sldMkLst>
-          <pc:docMk/>
-          <pc:sldMk cId="3998180932" sldId="373"/>
-        </pc:sldMkLst>
-      </pc:sldChg>
-      <pc:sldChg chg="modSp add mod modTransition modClrScheme chgLayout">
-        <pc:chgData name="Chris Moreh" userId="17b81281-9f29-44e0-9273-6dadbf6896a2" providerId="ADAL" clId="{2B41A477-2A84-4B8D-9025-16417BC1047B}" dt="2024-10-01T09:55:16.022" v="806" actId="700"/>
-        <pc:sldMkLst>
-          <pc:docMk/>
-          <pc:sldMk cId="4006101882" sldId="374"/>
-        </pc:sldMkLst>
-        <pc:spChg chg="mod ord">
-          <ac:chgData name="Chris Moreh" userId="17b81281-9f29-44e0-9273-6dadbf6896a2" providerId="ADAL" clId="{2B41A477-2A84-4B8D-9025-16417BC1047B}" dt="2024-10-01T09:55:16.022" v="806" actId="700"/>
-          <ac:spMkLst>
-            <pc:docMk/>
-            <pc:sldMk cId="4006101882" sldId="374"/>
-            <ac:spMk id="2" creationId="{17C3804A-BC62-4742-A6FD-F17B3D3424E3}"/>
-          </ac:spMkLst>
-        </pc:spChg>
-        <pc:picChg chg="mod ord">
-          <ac:chgData name="Chris Moreh" userId="17b81281-9f29-44e0-9273-6dadbf6896a2" providerId="ADAL" clId="{2B41A477-2A84-4B8D-9025-16417BC1047B}" dt="2024-10-01T09:55:16.022" v="806" actId="700"/>
-          <ac:picMkLst>
-            <pc:docMk/>
-            <pc:sldMk cId="4006101882" sldId="374"/>
-            <ac:picMk id="6" creationId="{11BF58D3-1E9C-4DD3-8F88-6E4B4C677574}"/>
-          </ac:picMkLst>
-        </pc:picChg>
-      </pc:sldChg>
-      <pc:sldChg chg="add modTransition">
-        <pc:chgData name="Chris Moreh" userId="17b81281-9f29-44e0-9273-6dadbf6896a2" providerId="ADAL" clId="{2B41A477-2A84-4B8D-9025-16417BC1047B}" dt="2024-10-01T09:53:14.880" v="794"/>
-        <pc:sldMkLst>
-          <pc:docMk/>
-          <pc:sldMk cId="1068929860" sldId="375"/>
-        </pc:sldMkLst>
-      </pc:sldChg>
-      <pc:sldMasterChg chg="addSp delSp modSp mod delSldLayout modSldLayout">
-        <pc:chgData name="Chris Moreh" userId="17b81281-9f29-44e0-9273-6dadbf6896a2" providerId="ADAL" clId="{2B41A477-2A84-4B8D-9025-16417BC1047B}" dt="2024-10-01T09:36:35.986" v="683" actId="47"/>
-        <pc:sldMasterMkLst>
-          <pc:docMk/>
-          <pc:sldMasterMk cId="3120243165" sldId="2147483660"/>
-        </pc:sldMasterMkLst>
-        <pc:spChg chg="mod">
-          <ac:chgData name="Chris Moreh" userId="17b81281-9f29-44e0-9273-6dadbf6896a2" providerId="ADAL" clId="{2B41A477-2A84-4B8D-9025-16417BC1047B}" dt="2024-10-01T08:23:24.822" v="593" actId="14100"/>
-          <ac:spMkLst>
-            <pc:docMk/>
-            <pc:sldMasterMk cId="3120243165" sldId="2147483660"/>
-            <ac:spMk id="2" creationId="{00000000-0000-0000-0000-000000000000}"/>
-          </ac:spMkLst>
-        </pc:spChg>
-        <pc:spChg chg="mod">
-          <ac:chgData name="Chris Moreh" userId="17b81281-9f29-44e0-9273-6dadbf6896a2" providerId="ADAL" clId="{2B41A477-2A84-4B8D-9025-16417BC1047B}" dt="2024-10-01T08:10:55.448" v="471" actId="404"/>
-          <ac:spMkLst>
-            <pc:docMk/>
-            <pc:sldMasterMk cId="3120243165" sldId="2147483660"/>
-            <ac:spMk id="3" creationId="{00000000-0000-0000-0000-000000000000}"/>
-          </ac:spMkLst>
-        </pc:spChg>
-        <pc:picChg chg="add del mod">
-          <ac:chgData name="Chris Moreh" userId="17b81281-9f29-44e0-9273-6dadbf6896a2" providerId="ADAL" clId="{2B41A477-2A84-4B8D-9025-16417BC1047B}" dt="2024-10-01T08:23:59.553" v="594" actId="478"/>
-          <ac:picMkLst>
-            <pc:docMk/>
-            <pc:sldMasterMk cId="3120243165" sldId="2147483660"/>
-            <ac:picMk id="8" creationId="{1610174C-5A12-03D4-004F-C65E2662D630}"/>
-          </ac:picMkLst>
-        </pc:picChg>
-        <pc:sldLayoutChg chg="delSp modSp mod setBg">
-          <pc:chgData name="Chris Moreh" userId="17b81281-9f29-44e0-9273-6dadbf6896a2" providerId="ADAL" clId="{2B41A477-2A84-4B8D-9025-16417BC1047B}" dt="2024-10-01T08:05:32.765" v="355"/>
-          <pc:sldLayoutMkLst>
-            <pc:docMk/>
-            <pc:sldMasterMk cId="3120243165" sldId="2147483660"/>
-            <pc:sldLayoutMk cId="1963352992" sldId="2147483661"/>
-          </pc:sldLayoutMkLst>
-          <pc:spChg chg="del">
-            <ac:chgData name="Chris Moreh" userId="17b81281-9f29-44e0-9273-6dadbf6896a2" providerId="ADAL" clId="{2B41A477-2A84-4B8D-9025-16417BC1047B}" dt="2024-10-01T08:00:48.259" v="64" actId="478"/>
-            <ac:spMkLst>
-              <pc:docMk/>
-              <pc:sldMasterMk cId="3120243165" sldId="2147483660"/>
-              <pc:sldLayoutMk cId="1963352992" sldId="2147483661"/>
-              <ac:spMk id="2" creationId="{00000000-0000-0000-0000-000000000000}"/>
-            </ac:spMkLst>
-          </pc:spChg>
-          <pc:spChg chg="del">
-            <ac:chgData name="Chris Moreh" userId="17b81281-9f29-44e0-9273-6dadbf6896a2" providerId="ADAL" clId="{2B41A477-2A84-4B8D-9025-16417BC1047B}" dt="2024-10-01T08:00:45.432" v="63" actId="478"/>
-            <ac:spMkLst>
-              <pc:docMk/>
-              <pc:sldMasterMk cId="3120243165" sldId="2147483660"/>
-              <pc:sldLayoutMk cId="1963352992" sldId="2147483661"/>
-              <ac:spMk id="3" creationId="{00000000-0000-0000-0000-000000000000}"/>
-            </ac:spMkLst>
-          </pc:spChg>
-          <pc:spChg chg="mod">
-            <ac:chgData name="Chris Moreh" userId="17b81281-9f29-44e0-9273-6dadbf6896a2" providerId="ADAL" clId="{2B41A477-2A84-4B8D-9025-16417BC1047B}" dt="2024-10-01T08:04:14" v="343" actId="113"/>
-            <ac:spMkLst>
-              <pc:docMk/>
-              <pc:sldMasterMk cId="3120243165" sldId="2147483660"/>
-              <pc:sldLayoutMk cId="1963352992" sldId="2147483661"/>
-              <ac:spMk id="10" creationId="{564B1F7A-19A6-1CF3-BEAB-784AD8D53EB1}"/>
-            </ac:spMkLst>
-          </pc:spChg>
-          <pc:spChg chg="mod">
-            <ac:chgData name="Chris Moreh" userId="17b81281-9f29-44e0-9273-6dadbf6896a2" providerId="ADAL" clId="{2B41A477-2A84-4B8D-9025-16417BC1047B}" dt="2024-10-01T08:00:40.137" v="62" actId="207"/>
-            <ac:spMkLst>
-              <pc:docMk/>
-              <pc:sldMasterMk cId="3120243165" sldId="2147483660"/>
-              <pc:sldLayoutMk cId="1963352992" sldId="2147483661"/>
-              <ac:spMk id="19" creationId="{D366C7AD-815A-A77E-DFE5-343F532EBF9A}"/>
-            </ac:spMkLst>
-          </pc:spChg>
-        </pc:sldLayoutChg>
-        <pc:sldLayoutChg chg="addSp modSp mod">
-          <pc:chgData name="Chris Moreh" userId="17b81281-9f29-44e0-9273-6dadbf6896a2" providerId="ADAL" clId="{2B41A477-2A84-4B8D-9025-16417BC1047B}" dt="2024-10-01T08:23:01.836" v="588" actId="14100"/>
-          <pc:sldLayoutMkLst>
-            <pc:docMk/>
-            <pc:sldMasterMk cId="3120243165" sldId="2147483660"/>
-            <pc:sldLayoutMk cId="2595251350" sldId="2147483662"/>
-          </pc:sldLayoutMkLst>
-          <pc:spChg chg="mod">
-            <ac:chgData name="Chris Moreh" userId="17b81281-9f29-44e0-9273-6dadbf6896a2" providerId="ADAL" clId="{2B41A477-2A84-4B8D-9025-16417BC1047B}" dt="2024-10-01T08:23:01.836" v="588" actId="14100"/>
-            <ac:spMkLst>
-              <pc:docMk/>
-              <pc:sldMasterMk cId="3120243165" sldId="2147483660"/>
-              <pc:sldLayoutMk cId="2595251350" sldId="2147483662"/>
-              <ac:spMk id="2" creationId="{00000000-0000-0000-0000-000000000000}"/>
-            </ac:spMkLst>
-          </pc:spChg>
-          <pc:picChg chg="add mod">
-            <ac:chgData name="Chris Moreh" userId="17b81281-9f29-44e0-9273-6dadbf6896a2" providerId="ADAL" clId="{2B41A477-2A84-4B8D-9025-16417BC1047B}" dt="2024-10-01T08:22:48.260" v="587" actId="1076"/>
-            <ac:picMkLst>
-              <pc:docMk/>
-              <pc:sldMasterMk cId="3120243165" sldId="2147483660"/>
-              <pc:sldLayoutMk cId="2595251350" sldId="2147483662"/>
-              <ac:picMk id="8" creationId="{77856388-EE09-056A-2FE4-8DA8669CE65E}"/>
-            </ac:picMkLst>
-          </pc:picChg>
-        </pc:sldLayoutChg>
-        <pc:sldLayoutChg chg="modSp">
-          <pc:chgData name="Chris Moreh" userId="17b81281-9f29-44e0-9273-6dadbf6896a2" providerId="ADAL" clId="{2B41A477-2A84-4B8D-9025-16417BC1047B}" dt="2024-10-01T08:16:48.868" v="557" actId="113"/>
-          <pc:sldLayoutMkLst>
-            <pc:docMk/>
-            <pc:sldMasterMk cId="3120243165" sldId="2147483660"/>
-            <pc:sldLayoutMk cId="2000362926" sldId="2147483664"/>
-          </pc:sldLayoutMkLst>
-          <pc:spChg chg="mod">
-            <ac:chgData name="Chris Moreh" userId="17b81281-9f29-44e0-9273-6dadbf6896a2" providerId="ADAL" clId="{2B41A477-2A84-4B8D-9025-16417BC1047B}" dt="2024-10-01T08:16:48.868" v="557" actId="113"/>
-            <ac:spMkLst>
-              <pc:docMk/>
-              <pc:sldMasterMk cId="3120243165" sldId="2147483660"/>
-              <pc:sldLayoutMk cId="2000362926" sldId="2147483664"/>
-              <ac:spMk id="8" creationId="{00000000-0000-0000-0000-000000000000}"/>
-            </ac:spMkLst>
-          </pc:spChg>
-        </pc:sldLayoutChg>
-        <pc:sldLayoutChg chg="modSp">
-          <pc:chgData name="Chris Moreh" userId="17b81281-9f29-44e0-9273-6dadbf6896a2" providerId="ADAL" clId="{2B41A477-2A84-4B8D-9025-16417BC1047B}" dt="2024-10-01T08:16:53.465" v="558" actId="113"/>
-          <pc:sldLayoutMkLst>
-            <pc:docMk/>
-            <pc:sldMasterMk cId="3120243165" sldId="2147483660"/>
-            <pc:sldLayoutMk cId="1048557662" sldId="2147483665"/>
-          </pc:sldLayoutMkLst>
-          <pc:spChg chg="mod">
-            <ac:chgData name="Chris Moreh" userId="17b81281-9f29-44e0-9273-6dadbf6896a2" providerId="ADAL" clId="{2B41A477-2A84-4B8D-9025-16417BC1047B}" dt="2024-10-01T08:16:53.465" v="558" actId="113"/>
-            <ac:spMkLst>
-              <pc:docMk/>
-              <pc:sldMasterMk cId="3120243165" sldId="2147483660"/>
-              <pc:sldLayoutMk cId="1048557662" sldId="2147483665"/>
-              <ac:spMk id="10" creationId="{00000000-0000-0000-0000-000000000000}"/>
-            </ac:spMkLst>
-          </pc:spChg>
-        </pc:sldLayoutChg>
-        <pc:sldLayoutChg chg="modSp">
-          <pc:chgData name="Chris Moreh" userId="17b81281-9f29-44e0-9273-6dadbf6896a2" providerId="ADAL" clId="{2B41A477-2A84-4B8D-9025-16417BC1047B}" dt="2024-10-01T08:16:58.223" v="559" actId="113"/>
-          <pc:sldLayoutMkLst>
-            <pc:docMk/>
-            <pc:sldMasterMk cId="3120243165" sldId="2147483660"/>
-            <pc:sldLayoutMk cId="1290176558" sldId="2147483666"/>
-          </pc:sldLayoutMkLst>
-          <pc:spChg chg="mod">
-            <ac:chgData name="Chris Moreh" userId="17b81281-9f29-44e0-9273-6dadbf6896a2" providerId="ADAL" clId="{2B41A477-2A84-4B8D-9025-16417BC1047B}" dt="2024-10-01T08:16:58.223" v="559" actId="113"/>
-            <ac:spMkLst>
-              <pc:docMk/>
-              <pc:sldMasterMk cId="3120243165" sldId="2147483660"/>
-              <pc:sldLayoutMk cId="1290176558" sldId="2147483666"/>
-              <ac:spMk id="2" creationId="{00000000-0000-0000-0000-000000000000}"/>
-            </ac:spMkLst>
-          </pc:spChg>
-        </pc:sldLayoutChg>
-        <pc:sldLayoutChg chg="modSp">
-          <pc:chgData name="Chris Moreh" userId="17b81281-9f29-44e0-9273-6dadbf6896a2" providerId="ADAL" clId="{2B41A477-2A84-4B8D-9025-16417BC1047B}" dt="2024-10-01T08:18:49.154" v="575" actId="113"/>
-          <pc:sldLayoutMkLst>
-            <pc:docMk/>
-            <pc:sldMasterMk cId="3120243165" sldId="2147483660"/>
-            <pc:sldLayoutMk cId="529753349" sldId="2147483668"/>
-          </pc:sldLayoutMkLst>
-          <pc:spChg chg="mod">
-            <ac:chgData name="Chris Moreh" userId="17b81281-9f29-44e0-9273-6dadbf6896a2" providerId="ADAL" clId="{2B41A477-2A84-4B8D-9025-16417BC1047B}" dt="2024-10-01T08:18:49.154" v="575" actId="113"/>
-            <ac:spMkLst>
-              <pc:docMk/>
-              <pc:sldMasterMk cId="3120243165" sldId="2147483660"/>
-              <pc:sldLayoutMk cId="529753349" sldId="2147483668"/>
-              <ac:spMk id="2" creationId="{00000000-0000-0000-0000-000000000000}"/>
-            </ac:spMkLst>
-          </pc:spChg>
-        </pc:sldLayoutChg>
-        <pc:sldLayoutChg chg="delSp modSp mod setBg">
-          <pc:chgData name="Chris Moreh" userId="17b81281-9f29-44e0-9273-6dadbf6896a2" providerId="ADAL" clId="{2B41A477-2A84-4B8D-9025-16417BC1047B}" dt="2024-10-01T08:18:39.146" v="574" actId="403"/>
-          <pc:sldLayoutMkLst>
-            <pc:docMk/>
-            <pc:sldMasterMk cId="3120243165" sldId="2147483660"/>
-            <pc:sldLayoutMk cId="1201317367" sldId="2147483669"/>
-          </pc:sldLayoutMkLst>
-          <pc:spChg chg="mod">
-            <ac:chgData name="Chris Moreh" userId="17b81281-9f29-44e0-9273-6dadbf6896a2" providerId="ADAL" clId="{2B41A477-2A84-4B8D-9025-16417BC1047B}" dt="2024-10-01T08:18:33.288" v="568" actId="113"/>
-            <ac:spMkLst>
-              <pc:docMk/>
-              <pc:sldMasterMk cId="3120243165" sldId="2147483660"/>
-              <pc:sldLayoutMk cId="1201317367" sldId="2147483669"/>
-              <ac:spMk id="2" creationId="{00000000-0000-0000-0000-000000000000}"/>
-            </ac:spMkLst>
-          </pc:spChg>
-          <pc:spChg chg="del mod">
-            <ac:chgData name="Chris Moreh" userId="17b81281-9f29-44e0-9273-6dadbf6896a2" providerId="ADAL" clId="{2B41A477-2A84-4B8D-9025-16417BC1047B}" dt="2024-10-01T08:07:20.743" v="423" actId="478"/>
-            <ac:spMkLst>
-              <pc:docMk/>
-              <pc:sldMasterMk cId="3120243165" sldId="2147483660"/>
-              <pc:sldLayoutMk cId="1201317367" sldId="2147483669"/>
-              <ac:spMk id="3" creationId="{00000000-0000-0000-0000-000000000000}"/>
-            </ac:spMkLst>
-          </pc:spChg>
-          <pc:spChg chg="mod">
-            <ac:chgData name="Chris Moreh" userId="17b81281-9f29-44e0-9273-6dadbf6896a2" providerId="ADAL" clId="{2B41A477-2A84-4B8D-9025-16417BC1047B}" dt="2024-10-01T08:18:39.146" v="574" actId="403"/>
-            <ac:spMkLst>
-              <pc:docMk/>
-              <pc:sldMasterMk cId="3120243165" sldId="2147483660"/>
-              <pc:sldLayoutMk cId="1201317367" sldId="2147483669"/>
-              <ac:spMk id="4" creationId="{00000000-0000-0000-0000-000000000000}"/>
-            </ac:spMkLst>
-          </pc:spChg>
-          <pc:spChg chg="mod">
-            <ac:chgData name="Chris Moreh" userId="17b81281-9f29-44e0-9273-6dadbf6896a2" providerId="ADAL" clId="{2B41A477-2A84-4B8D-9025-16417BC1047B}" dt="2024-10-01T08:09:25.741" v="450" actId="1076"/>
-            <ac:spMkLst>
-              <pc:docMk/>
-              <pc:sldMasterMk cId="3120243165" sldId="2147483660"/>
-              <pc:sldLayoutMk cId="1201317367" sldId="2147483669"/>
-              <ac:spMk id="8" creationId="{00000000-0000-0000-0000-000000000000}"/>
-            </ac:spMkLst>
-          </pc:spChg>
-          <pc:spChg chg="del mod">
-            <ac:chgData name="Chris Moreh" userId="17b81281-9f29-44e0-9273-6dadbf6896a2" providerId="ADAL" clId="{2B41A477-2A84-4B8D-9025-16417BC1047B}" dt="2024-10-01T08:08:50.612" v="446" actId="478"/>
-            <ac:spMkLst>
-              <pc:docMk/>
-              <pc:sldMasterMk cId="3120243165" sldId="2147483660"/>
-              <pc:sldLayoutMk cId="1201317367" sldId="2147483669"/>
-              <ac:spMk id="9" creationId="{00000000-0000-0000-0000-000000000000}"/>
-            </ac:spMkLst>
-          </pc:spChg>
-        </pc:sldLayoutChg>
-        <pc:sldLayoutChg chg="modSp">
-          <pc:chgData name="Chris Moreh" userId="17b81281-9f29-44e0-9273-6dadbf6896a2" providerId="ADAL" clId="{2B41A477-2A84-4B8D-9025-16417BC1047B}" dt="2024-10-01T08:17:12.777" v="560" actId="113"/>
-          <pc:sldLayoutMkLst>
-            <pc:docMk/>
-            <pc:sldMasterMk cId="3120243165" sldId="2147483660"/>
-            <pc:sldLayoutMk cId="4034479074" sldId="2147483670"/>
-          </pc:sldLayoutMkLst>
-          <pc:spChg chg="mod">
-            <ac:chgData name="Chris Moreh" userId="17b81281-9f29-44e0-9273-6dadbf6896a2" providerId="ADAL" clId="{2B41A477-2A84-4B8D-9025-16417BC1047B}" dt="2024-10-01T08:17:12.777" v="560" actId="113"/>
-            <ac:spMkLst>
-              <pc:docMk/>
-              <pc:sldMasterMk cId="3120243165" sldId="2147483660"/>
-              <pc:sldLayoutMk cId="4034479074" sldId="2147483670"/>
-              <ac:spMk id="2" creationId="{00000000-0000-0000-0000-000000000000}"/>
-            </ac:spMkLst>
-          </pc:spChg>
-        </pc:sldLayoutChg>
-        <pc:sldLayoutChg chg="addSp modSp mod">
-          <pc:chgData name="Chris Moreh" userId="17b81281-9f29-44e0-9273-6dadbf6896a2" providerId="ADAL" clId="{2B41A477-2A84-4B8D-9025-16417BC1047B}" dt="2024-10-01T08:23:13.900" v="591" actId="14100"/>
-          <pc:sldLayoutMkLst>
-            <pc:docMk/>
-            <pc:sldMasterMk cId="3120243165" sldId="2147483660"/>
-            <pc:sldLayoutMk cId="2900277239" sldId="2147483672"/>
-          </pc:sldLayoutMkLst>
-          <pc:spChg chg="mod">
-            <ac:chgData name="Chris Moreh" userId="17b81281-9f29-44e0-9273-6dadbf6896a2" providerId="ADAL" clId="{2B41A477-2A84-4B8D-9025-16417BC1047B}" dt="2024-10-01T08:23:13.900" v="591" actId="14100"/>
-            <ac:spMkLst>
-              <pc:docMk/>
-              <pc:sldMasterMk cId="3120243165" sldId="2147483660"/>
-              <pc:sldLayoutMk cId="2900277239" sldId="2147483672"/>
-              <ac:spMk id="2" creationId="{09CE3F75-4629-998C-D4E2-8B503E840A60}"/>
-            </ac:spMkLst>
-          </pc:spChg>
-          <pc:picChg chg="add mod">
-            <ac:chgData name="Chris Moreh" userId="17b81281-9f29-44e0-9273-6dadbf6896a2" providerId="ADAL" clId="{2B41A477-2A84-4B8D-9025-16417BC1047B}" dt="2024-10-01T08:23:08.776" v="590"/>
-            <ac:picMkLst>
-              <pc:docMk/>
-              <pc:sldMasterMk cId="3120243165" sldId="2147483660"/>
-              <pc:sldLayoutMk cId="2900277239" sldId="2147483672"/>
-              <ac:picMk id="6" creationId="{064384DD-349E-96E1-9F2A-86B3CB91EDDA}"/>
-            </ac:picMkLst>
-          </pc:picChg>
-        </pc:sldLayoutChg>
-        <pc:sldLayoutChg chg="modSp mod">
-          <pc:chgData name="Chris Moreh" userId="17b81281-9f29-44e0-9273-6dadbf6896a2" providerId="ADAL" clId="{2B41A477-2A84-4B8D-9025-16417BC1047B}" dt="2024-10-01T08:18:13.368" v="563" actId="1076"/>
-          <pc:sldLayoutMkLst>
-            <pc:docMk/>
-            <pc:sldMasterMk cId="3120243165" sldId="2147483660"/>
-            <pc:sldLayoutMk cId="691324733" sldId="2147483673"/>
-          </pc:sldLayoutMkLst>
-          <pc:spChg chg="mod">
-            <ac:chgData name="Chris Moreh" userId="17b81281-9f29-44e0-9273-6dadbf6896a2" providerId="ADAL" clId="{2B41A477-2A84-4B8D-9025-16417BC1047B}" dt="2024-10-01T08:18:13.368" v="563" actId="1076"/>
-            <ac:spMkLst>
-              <pc:docMk/>
-              <pc:sldMasterMk cId="3120243165" sldId="2147483660"/>
-              <pc:sldLayoutMk cId="691324733" sldId="2147483673"/>
-              <ac:spMk id="16" creationId="{2B8C7C2A-22F2-9C49-D70E-5C8A22C35019}"/>
-            </ac:spMkLst>
-          </pc:spChg>
-          <pc:picChg chg="mod">
-            <ac:chgData name="Chris Moreh" userId="17b81281-9f29-44e0-9273-6dadbf6896a2" providerId="ADAL" clId="{2B41A477-2A84-4B8D-9025-16417BC1047B}" dt="2024-10-01T08:18:13.368" v="563" actId="1076"/>
-            <ac:picMkLst>
-              <pc:docMk/>
-              <pc:sldMasterMk cId="3120243165" sldId="2147483660"/>
-              <pc:sldLayoutMk cId="691324733" sldId="2147483673"/>
-              <ac:picMk id="17" creationId="{DD7CACF7-D679-73AB-9142-786DA076C3A7}"/>
-            </ac:picMkLst>
-          </pc:picChg>
-          <pc:picChg chg="mod">
-            <ac:chgData name="Chris Moreh" userId="17b81281-9f29-44e0-9273-6dadbf6896a2" providerId="ADAL" clId="{2B41A477-2A84-4B8D-9025-16417BC1047B}" dt="2024-10-01T08:18:13.368" v="563" actId="1076"/>
-            <ac:picMkLst>
-              <pc:docMk/>
-              <pc:sldMasterMk cId="3120243165" sldId="2147483660"/>
-              <pc:sldLayoutMk cId="691324733" sldId="2147483673"/>
-              <ac:picMk id="18" creationId="{F5D755EC-05C2-0884-2C2F-74A7297B707D}"/>
-            </ac:picMkLst>
-          </pc:picChg>
-          <pc:picChg chg="mod">
-            <ac:chgData name="Chris Moreh" userId="17b81281-9f29-44e0-9273-6dadbf6896a2" providerId="ADAL" clId="{2B41A477-2A84-4B8D-9025-16417BC1047B}" dt="2024-10-01T08:18:13.368" v="563" actId="1076"/>
-            <ac:picMkLst>
-              <pc:docMk/>
-              <pc:sldMasterMk cId="3120243165" sldId="2147483660"/>
-              <pc:sldLayoutMk cId="691324733" sldId="2147483673"/>
-              <ac:picMk id="19" creationId="{40A42823-F60C-D577-74D9-FE8C3E3A6237}"/>
-            </ac:picMkLst>
-          </pc:picChg>
-          <pc:picChg chg="mod">
-            <ac:chgData name="Chris Moreh" userId="17b81281-9f29-44e0-9273-6dadbf6896a2" providerId="ADAL" clId="{2B41A477-2A84-4B8D-9025-16417BC1047B}" dt="2024-10-01T08:18:13.368" v="563" actId="1076"/>
-            <ac:picMkLst>
-              <pc:docMk/>
-              <pc:sldMasterMk cId="3120243165" sldId="2147483660"/>
-              <pc:sldLayoutMk cId="691324733" sldId="2147483673"/>
-              <ac:picMk id="20" creationId="{ECDBB212-ABA5-CE0D-7F0C-C37D656E0D6B}"/>
-            </ac:picMkLst>
-          </pc:picChg>
-          <pc:picChg chg="mod">
-            <ac:chgData name="Chris Moreh" userId="17b81281-9f29-44e0-9273-6dadbf6896a2" providerId="ADAL" clId="{2B41A477-2A84-4B8D-9025-16417BC1047B}" dt="2024-10-01T08:18:13.368" v="563" actId="1076"/>
-            <ac:picMkLst>
-              <pc:docMk/>
-              <pc:sldMasterMk cId="3120243165" sldId="2147483660"/>
-              <pc:sldLayoutMk cId="691324733" sldId="2147483673"/>
-              <ac:picMk id="21" creationId="{9AD65224-3024-068D-2B15-9BC765970543}"/>
-            </ac:picMkLst>
-          </pc:picChg>
-        </pc:sldLayoutChg>
-        <pc:sldLayoutChg chg="modSp mod">
-          <pc:chgData name="Chris Moreh" userId="17b81281-9f29-44e0-9273-6dadbf6896a2" providerId="ADAL" clId="{2B41A477-2A84-4B8D-9025-16417BC1047B}" dt="2024-10-01T08:06:41.955" v="422" actId="20577"/>
-          <pc:sldLayoutMkLst>
-            <pc:docMk/>
-            <pc:sldMasterMk cId="3120243165" sldId="2147483660"/>
-            <pc:sldLayoutMk cId="1477845932" sldId="2147483674"/>
-          </pc:sldLayoutMkLst>
-          <pc:spChg chg="mod">
-            <ac:chgData name="Chris Moreh" userId="17b81281-9f29-44e0-9273-6dadbf6896a2" providerId="ADAL" clId="{2B41A477-2A84-4B8D-9025-16417BC1047B}" dt="2024-10-01T08:06:41.955" v="422" actId="20577"/>
-            <ac:spMkLst>
-              <pc:docMk/>
-              <pc:sldMasterMk cId="3120243165" sldId="2147483660"/>
-              <pc:sldLayoutMk cId="1477845932" sldId="2147483674"/>
-              <ac:spMk id="4" creationId="{85343B67-CE49-0A0C-7F9C-757FF38AD817}"/>
-            </ac:spMkLst>
-          </pc:spChg>
-        </pc:sldLayoutChg>
-        <pc:sldLayoutChg chg="modSp mod">
-          <pc:chgData name="Chris Moreh" userId="17b81281-9f29-44e0-9273-6dadbf6896a2" providerId="ADAL" clId="{2B41A477-2A84-4B8D-9025-16417BC1047B}" dt="2024-10-01T08:06:12.673" v="377" actId="20577"/>
-          <pc:sldLayoutMkLst>
-            <pc:docMk/>
-            <pc:sldMasterMk cId="3120243165" sldId="2147483660"/>
-            <pc:sldLayoutMk cId="1270494045" sldId="2147483676"/>
-          </pc:sldLayoutMkLst>
-          <pc:graphicFrameChg chg="modGraphic">
-            <ac:chgData name="Chris Moreh" userId="17b81281-9f29-44e0-9273-6dadbf6896a2" providerId="ADAL" clId="{2B41A477-2A84-4B8D-9025-16417BC1047B}" dt="2024-10-01T08:06:12.673" v="377" actId="20577"/>
-            <ac:graphicFrameMkLst>
-              <pc:docMk/>
-              <pc:sldMasterMk cId="3120243165" sldId="2147483660"/>
-              <pc:sldLayoutMk cId="1270494045" sldId="2147483676"/>
-              <ac:graphicFrameMk id="6" creationId="{A549E6D0-17C2-32B5-650D-F84097C07BFD}"/>
-            </ac:graphicFrameMkLst>
-          </pc:graphicFrameChg>
-        </pc:sldLayoutChg>
-        <pc:sldLayoutChg chg="del">
-          <pc:chgData name="Chris Moreh" userId="17b81281-9f29-44e0-9273-6dadbf6896a2" providerId="ADAL" clId="{2B41A477-2A84-4B8D-9025-16417BC1047B}" dt="2024-10-01T09:36:35.986" v="683" actId="47"/>
-          <pc:sldLayoutMkLst>
-            <pc:docMk/>
-            <pc:sldMasterMk cId="3120243165" sldId="2147483660"/>
-            <pc:sldLayoutMk cId="1580391947" sldId="2147483678"/>
-          </pc:sldLayoutMkLst>
-        </pc:sldLayoutChg>
-      </pc:sldMasterChg>
-    </pc:docChg>
-  </pc:docChgLst>
-  <pc:docChgLst>
-    <pc:chgData name="Chris Moreh" userId="17b81281-9f29-44e0-9273-6dadbf6896a2" providerId="ADAL" clId="{0587631C-E615-4358-AA79-1980FA25ACE0}"/>
-    <pc:docChg chg="undo custSel addSld delSld modSld sldOrd modMainMaster">
-      <pc:chgData name="Chris Moreh" userId="17b81281-9f29-44e0-9273-6dadbf6896a2" providerId="ADAL" clId="{0587631C-E615-4358-AA79-1980FA25ACE0}" dt="2024-07-22T15:39:12.405" v="69" actId="167"/>
-      <pc:docMkLst>
-        <pc:docMk/>
-      </pc:docMkLst>
-      <pc:sldChg chg="modSp mod">
-        <pc:chgData name="Chris Moreh" userId="17b81281-9f29-44e0-9273-6dadbf6896a2" providerId="ADAL" clId="{0587631C-E615-4358-AA79-1980FA25ACE0}" dt="2024-07-22T15:31:14.097" v="56" actId="14100"/>
-        <pc:sldMkLst>
-          <pc:docMk/>
-          <pc:sldMk cId="2434060694" sldId="272"/>
-        </pc:sldMkLst>
-        <pc:spChg chg="mod">
-          <ac:chgData name="Chris Moreh" userId="17b81281-9f29-44e0-9273-6dadbf6896a2" providerId="ADAL" clId="{0587631C-E615-4358-AA79-1980FA25ACE0}" dt="2024-07-22T15:31:14.097" v="56" actId="14100"/>
-          <ac:spMkLst>
-            <pc:docMk/>
-            <pc:sldMk cId="2434060694" sldId="272"/>
-            <ac:spMk id="7" creationId="{ED61ED77-8162-28C5-EA68-6A5845CA0A41}"/>
-          </ac:spMkLst>
-        </pc:spChg>
-      </pc:sldChg>
-      <pc:sldChg chg="modSp mod">
-        <pc:chgData name="Chris Moreh" userId="17b81281-9f29-44e0-9273-6dadbf6896a2" providerId="ADAL" clId="{0587631C-E615-4358-AA79-1980FA25ACE0}" dt="2024-07-22T15:39:12.405" v="69" actId="167"/>
-        <pc:sldMkLst>
-          <pc:docMk/>
-          <pc:sldMk cId="422561252" sldId="288"/>
-        </pc:sldMkLst>
-        <pc:spChg chg="ord">
-          <ac:chgData name="Chris Moreh" userId="17b81281-9f29-44e0-9273-6dadbf6896a2" providerId="ADAL" clId="{0587631C-E615-4358-AA79-1980FA25ACE0}" dt="2024-07-22T15:39:12.405" v="69" actId="167"/>
-          <ac:spMkLst>
-            <pc:docMk/>
-            <pc:sldMk cId="422561252" sldId="288"/>
-            <ac:spMk id="16" creationId="{B508C0B4-EF5E-073D-ECE4-0B793D2523DC}"/>
-          </ac:spMkLst>
-        </pc:spChg>
-        <pc:spChg chg="ord">
-          <ac:chgData name="Chris Moreh" userId="17b81281-9f29-44e0-9273-6dadbf6896a2" providerId="ADAL" clId="{0587631C-E615-4358-AA79-1980FA25ACE0}" dt="2024-07-22T15:39:09.338" v="68" actId="171"/>
-          <ac:spMkLst>
-            <pc:docMk/>
-            <pc:sldMk cId="422561252" sldId="288"/>
-            <ac:spMk id="17" creationId="{88455115-4E1D-0B1E-C083-1DA5C6D7503A}"/>
-          </ac:spMkLst>
-        </pc:spChg>
-      </pc:sldChg>
-      <pc:sldChg chg="addSp delSp modSp new del mod modClrScheme chgLayout">
-        <pc:chgData name="Chris Moreh" userId="17b81281-9f29-44e0-9273-6dadbf6896a2" providerId="ADAL" clId="{0587631C-E615-4358-AA79-1980FA25ACE0}" dt="2024-07-22T15:28:53.947" v="34" actId="47"/>
-        <pc:sldMkLst>
-          <pc:docMk/>
-          <pc:sldMk cId="1491049506" sldId="305"/>
-        </pc:sldMkLst>
-        <pc:spChg chg="del mod ord">
-          <ac:chgData name="Chris Moreh" userId="17b81281-9f29-44e0-9273-6dadbf6896a2" providerId="ADAL" clId="{0587631C-E615-4358-AA79-1980FA25ACE0}" dt="2024-07-22T15:21:56.401" v="14" actId="700"/>
-          <ac:spMkLst>
-            <pc:docMk/>
-            <pc:sldMk cId="1491049506" sldId="305"/>
-            <ac:spMk id="2" creationId="{679848C9-673D-7F9B-070F-162DB7152E86}"/>
-          </ac:spMkLst>
-        </pc:spChg>
-        <pc:spChg chg="del">
-          <ac:chgData name="Chris Moreh" userId="17b81281-9f29-44e0-9273-6dadbf6896a2" providerId="ADAL" clId="{0587631C-E615-4358-AA79-1980FA25ACE0}" dt="2024-07-22T15:19:26.595" v="1" actId="478"/>
-          <ac:spMkLst>
-            <pc:docMk/>
-            <pc:sldMk cId="1491049506" sldId="305"/>
-            <ac:spMk id="3" creationId="{1EF78EB6-82C8-3863-2D4E-6AADAB7BDD01}"/>
-          </ac:spMkLst>
-        </pc:spChg>
-        <pc:spChg chg="mod ord">
-          <ac:chgData name="Chris Moreh" userId="17b81281-9f29-44e0-9273-6dadbf6896a2" providerId="ADAL" clId="{0587631C-E615-4358-AA79-1980FA25ACE0}" dt="2024-07-22T15:22:06.415" v="15" actId="700"/>
-          <ac:spMkLst>
-            <pc:docMk/>
-            <pc:sldMk cId="1491049506" sldId="305"/>
-            <ac:spMk id="4" creationId="{B70D0A1E-8BBD-BACA-6A7A-B80FA74D701A}"/>
-          </ac:spMkLst>
-        </pc:spChg>
-        <pc:spChg chg="mod ord">
-          <ac:chgData name="Chris Moreh" userId="17b81281-9f29-44e0-9273-6dadbf6896a2" providerId="ADAL" clId="{0587631C-E615-4358-AA79-1980FA25ACE0}" dt="2024-07-22T15:22:06.415" v="15" actId="700"/>
-          <ac:spMkLst>
-            <pc:docMk/>
-            <pc:sldMk cId="1491049506" sldId="305"/>
-            <ac:spMk id="5" creationId="{09D3D71A-223F-8A6C-51A6-82E7AEE2C1A4}"/>
-          </ac:spMkLst>
-        </pc:spChg>
-        <pc:spChg chg="mod ord">
-          <ac:chgData name="Chris Moreh" userId="17b81281-9f29-44e0-9273-6dadbf6896a2" providerId="ADAL" clId="{0587631C-E615-4358-AA79-1980FA25ACE0}" dt="2024-07-22T15:22:06.415" v="15" actId="700"/>
-          <ac:spMkLst>
-            <pc:docMk/>
-            <pc:sldMk cId="1491049506" sldId="305"/>
-            <ac:spMk id="6" creationId="{F46E126F-A2B9-3CE3-735D-D4E104556097}"/>
-          </ac:spMkLst>
-        </pc:spChg>
-        <pc:spChg chg="add del mod ord">
-          <ac:chgData name="Chris Moreh" userId="17b81281-9f29-44e0-9273-6dadbf6896a2" providerId="ADAL" clId="{0587631C-E615-4358-AA79-1980FA25ACE0}" dt="2024-07-22T15:22:06.415" v="15" actId="700"/>
-          <ac:spMkLst>
-            <pc:docMk/>
-            <pc:sldMk cId="1491049506" sldId="305"/>
-            <ac:spMk id="7" creationId="{D37F845F-33CA-7477-24B9-F89DAFB65E7A}"/>
-          </ac:spMkLst>
-        </pc:spChg>
-        <pc:spChg chg="add mod ord">
-          <ac:chgData name="Chris Moreh" userId="17b81281-9f29-44e0-9273-6dadbf6896a2" providerId="ADAL" clId="{0587631C-E615-4358-AA79-1980FA25ACE0}" dt="2024-07-22T15:22:06.415" v="15" actId="700"/>
-          <ac:spMkLst>
-            <pc:docMk/>
-            <pc:sldMk cId="1491049506" sldId="305"/>
-            <ac:spMk id="8" creationId="{E150AA9B-C844-0D03-1C7E-0248CCBE8C8D}"/>
-          </ac:spMkLst>
-        </pc:spChg>
-        <pc:spChg chg="add mod ord">
-          <ac:chgData name="Chris Moreh" userId="17b81281-9f29-44e0-9273-6dadbf6896a2" providerId="ADAL" clId="{0587631C-E615-4358-AA79-1980FA25ACE0}" dt="2024-07-22T15:23:34.564" v="33" actId="948"/>
-          <ac:spMkLst>
-            <pc:docMk/>
-            <pc:sldMk cId="1491049506" sldId="305"/>
-            <ac:spMk id="9" creationId="{262F7B96-BD6B-1542-5578-E6C2479A4659}"/>
-          </ac:spMkLst>
-        </pc:spChg>
-      </pc:sldChg>
-      <pc:sldChg chg="modSp add mod">
-        <pc:chgData name="Chris Moreh" userId="17b81281-9f29-44e0-9273-6dadbf6896a2" providerId="ADAL" clId="{0587631C-E615-4358-AA79-1980FA25ACE0}" dt="2024-07-22T15:30:54.450" v="54" actId="6549"/>
-        <pc:sldMkLst>
-          <pc:docMk/>
-          <pc:sldMk cId="1609695612" sldId="305"/>
-        </pc:sldMkLst>
-        <pc:spChg chg="mod">
-          <ac:chgData name="Chris Moreh" userId="17b81281-9f29-44e0-9273-6dadbf6896a2" providerId="ADAL" clId="{0587631C-E615-4358-AA79-1980FA25ACE0}" dt="2024-07-22T15:30:54.450" v="54" actId="6549"/>
-          <ac:spMkLst>
-            <pc:docMk/>
-            <pc:sldMk cId="1609695612" sldId="305"/>
-            <ac:spMk id="7" creationId="{ED61ED77-8162-28C5-EA68-6A5845CA0A41}"/>
-          </ac:spMkLst>
-        </pc:spChg>
-      </pc:sldChg>
-      <pc:sldChg chg="modSp add mod ord">
-        <pc:chgData name="Chris Moreh" userId="17b81281-9f29-44e0-9273-6dadbf6896a2" providerId="ADAL" clId="{0587631C-E615-4358-AA79-1980FA25ACE0}" dt="2024-07-22T15:30:49.174" v="53"/>
-        <pc:sldMkLst>
-          <pc:docMk/>
-          <pc:sldMk cId="472146206" sldId="306"/>
-        </pc:sldMkLst>
-        <pc:spChg chg="mod">
-          <ac:chgData name="Chris Moreh" userId="17b81281-9f29-44e0-9273-6dadbf6896a2" providerId="ADAL" clId="{0587631C-E615-4358-AA79-1980FA25ACE0}" dt="2024-07-22T15:30:41.757" v="51" actId="6549"/>
-          <ac:spMkLst>
-            <pc:docMk/>
-            <pc:sldMk cId="472146206" sldId="306"/>
-            <ac:spMk id="7" creationId="{ED61ED77-8162-28C5-EA68-6A5845CA0A41}"/>
-          </ac:spMkLst>
-        </pc:spChg>
-      </pc:sldChg>
-      <pc:sldChg chg="delSp add mod delAnim">
-        <pc:chgData name="Chris Moreh" userId="17b81281-9f29-44e0-9273-6dadbf6896a2" providerId="ADAL" clId="{0587631C-E615-4358-AA79-1980FA25ACE0}" dt="2024-07-22T15:36:47.885" v="58" actId="478"/>
-        <pc:sldMkLst>
-          <pc:docMk/>
-          <pc:sldMk cId="3921884830" sldId="307"/>
-        </pc:sldMkLst>
-        <pc:spChg chg="del">
-          <ac:chgData name="Chris Moreh" userId="17b81281-9f29-44e0-9273-6dadbf6896a2" providerId="ADAL" clId="{0587631C-E615-4358-AA79-1980FA25ACE0}" dt="2024-07-22T15:36:47.885" v="58" actId="478"/>
-          <ac:spMkLst>
-            <pc:docMk/>
-            <pc:sldMk cId="3921884830" sldId="307"/>
-            <ac:spMk id="17" creationId="{88455115-4E1D-0B1E-C083-1DA5C6D7503A}"/>
-          </ac:spMkLst>
-        </pc:spChg>
-      </pc:sldChg>
-      <pc:sldMasterChg chg="addSldLayout modSldLayout">
-        <pc:chgData name="Chris Moreh" userId="17b81281-9f29-44e0-9273-6dadbf6896a2" providerId="ADAL" clId="{0587631C-E615-4358-AA79-1980FA25ACE0}" dt="2024-07-22T15:21:30.631" v="13" actId="20577"/>
-        <pc:sldMasterMkLst>
-          <pc:docMk/>
-          <pc:sldMasterMk cId="3120243165" sldId="2147483660"/>
-        </pc:sldMasterMkLst>
-        <pc:sldLayoutChg chg="addSp delSp modSp new mod">
-          <pc:chgData name="Chris Moreh" userId="17b81281-9f29-44e0-9273-6dadbf6896a2" providerId="ADAL" clId="{0587631C-E615-4358-AA79-1980FA25ACE0}" dt="2024-07-22T15:21:30.631" v="13" actId="20577"/>
-          <pc:sldLayoutMkLst>
-            <pc:docMk/>
-            <pc:sldMasterMk cId="3120243165" sldId="2147483660"/>
-            <pc:sldLayoutMk cId="746363300" sldId="2147483677"/>
-          </pc:sldLayoutMkLst>
-          <pc:spChg chg="mod">
-            <ac:chgData name="Chris Moreh" userId="17b81281-9f29-44e0-9273-6dadbf6896a2" providerId="ADAL" clId="{0587631C-E615-4358-AA79-1980FA25ACE0}" dt="2024-07-22T15:21:30.631" v="13" actId="20577"/>
-            <ac:spMkLst>
-              <pc:docMk/>
-              <pc:sldMasterMk cId="3120243165" sldId="2147483660"/>
-              <pc:sldLayoutMk cId="746363300" sldId="2147483677"/>
-              <ac:spMk id="2" creationId="{1312ECC6-7BD6-D9D0-DD8F-30FCF10DE4E6}"/>
-            </ac:spMkLst>
-          </pc:spChg>
-          <pc:spChg chg="add del">
-            <ac:chgData name="Chris Moreh" userId="17b81281-9f29-44e0-9273-6dadbf6896a2" providerId="ADAL" clId="{0587631C-E615-4358-AA79-1980FA25ACE0}" dt="2024-07-22T15:21:21.804" v="3" actId="11529"/>
-            <ac:spMkLst>
-              <pc:docMk/>
-              <pc:sldMasterMk cId="3120243165" sldId="2147483660"/>
-              <pc:sldLayoutMk cId="746363300" sldId="2147483677"/>
-              <ac:spMk id="6" creationId="{D22F521B-7A6C-C288-0714-9564114C212C}"/>
-            </ac:spMkLst>
-          </pc:spChg>
-          <pc:spChg chg="add mod">
-            <ac:chgData name="Chris Moreh" userId="17b81281-9f29-44e0-9273-6dadbf6896a2" providerId="ADAL" clId="{0587631C-E615-4358-AA79-1980FA25ACE0}" dt="2024-07-22T15:21:21.804" v="3" actId="11529"/>
-            <ac:spMkLst>
-              <pc:docMk/>
-              <pc:sldMasterMk cId="3120243165" sldId="2147483660"/>
-              <pc:sldLayoutMk cId="746363300" sldId="2147483677"/>
-              <ac:spMk id="7" creationId="{C9FD4878-448B-C559-6183-304914140DFB}"/>
-            </ac:spMkLst>
-          </pc:spChg>
-        </pc:sldLayoutChg>
-      </pc:sldMasterChg>
     </pc:docChg>
   </pc:docChgLst>
 </pc:chgInfo>
@@ -6589,7 +277,7 @@
           <a:p>
             <a:fld id="{B03203E3-7C81-41A5-A697-954FF252F964}" type="datetimeFigureOut">
               <a:rPr lang="en-GB" smtClean="0"/>
-              <a:t>29/10/2024</a:t>
+              <a:t>05/12/2025</a:t>
             </a:fld>
             <a:endParaRPr lang="en-GB"/>
           </a:p>
@@ -6767,7 +455,7 @@
           <a:p>
             <a:fld id="{00E54BCB-1937-48CE-9F00-49B381FEB4E9}" type="datetimeFigureOut">
               <a:rPr lang="en-GB" smtClean="0"/>
-              <a:t>29/10/2024</a:t>
+              <a:t>05/12/2025</a:t>
             </a:fld>
             <a:endParaRPr lang="en-GB"/>
           </a:p>
@@ -7457,6 +1145,13 @@
             <a:schemeClr val="lt1"/>
           </a:fontRef>
         </p:style>
+        <p:txBody>
+          <a:bodyPr/>
+          <a:lstStyle/>
+          <a:p>
+            <a:endParaRPr lang="en-GB"/>
+          </a:p>
+        </p:txBody>
       </p:sp>
       <p:sp>
         <p:nvSpPr>
@@ -7497,6 +1192,13 @@
             <a:schemeClr val="lt1"/>
           </a:fontRef>
         </p:style>
+        <p:txBody>
+          <a:bodyPr/>
+          <a:lstStyle/>
+          <a:p>
+            <a:endParaRPr lang="en-GB"/>
+          </a:p>
+        </p:txBody>
       </p:sp>
       <p:sp>
         <p:nvSpPr>
@@ -16543,6 +10245,13 @@
             <a:schemeClr val="lt1"/>
           </a:fontRef>
         </p:style>
+        <p:txBody>
+          <a:bodyPr/>
+          <a:lstStyle/>
+          <a:p>
+            <a:endParaRPr lang="en-GB"/>
+          </a:p>
+        </p:txBody>
       </p:sp>
       <p:sp>
         <p:nvSpPr>
@@ -16581,6 +10290,13 @@
             <a:schemeClr val="lt1"/>
           </a:fontRef>
         </p:style>
+        <p:txBody>
+          <a:bodyPr/>
+          <a:lstStyle/>
+          <a:p>
+            <a:endParaRPr lang="en-GB"/>
+          </a:p>
+        </p:txBody>
       </p:sp>
       <p:sp>
         <p:nvSpPr>
@@ -17827,8 +11543,8 @@
           </a:p>
         </p:txBody>
       </p:sp>
-      <mc:AlternateContent xmlns:mc="http://schemas.openxmlformats.org/markup-compatibility/2006">
-        <mc:Choice xmlns:a14="http://schemas.microsoft.com/office/drawing/2010/main" Requires="a14">
+      <mc:AlternateContent xmlns:mc="http://schemas.openxmlformats.org/markup-compatibility/2006" xmlns:a14="http://schemas.microsoft.com/office/drawing/2010/main">
+        <mc:Choice Requires="a14">
           <p:sp>
             <p:nvSpPr>
               <p:cNvPr id="3" name="Content Placeholder 2"/>
@@ -17906,7 +11622,7 @@
             </p:txBody>
           </p:sp>
         </mc:Choice>
-        <mc:Fallback>
+        <mc:Fallback xmlns="">
           <p:sp>
             <p:nvSpPr>
               <p:cNvPr id="3" name="Content Placeholder 2"/>
@@ -18577,8 +12293,8 @@
           </a:ln>
         </p:spPr>
       </p:pic>
-      <mc:AlternateContent xmlns:mc="http://schemas.openxmlformats.org/markup-compatibility/2006">
-        <mc:Choice xmlns:a14="http://schemas.microsoft.com/office/drawing/2010/main" Requires="a14">
+      <mc:AlternateContent xmlns:mc="http://schemas.openxmlformats.org/markup-compatibility/2006" xmlns:a14="http://schemas.microsoft.com/office/drawing/2010/main">
+        <mc:Choice Requires="a14">
           <p:sp>
             <p:nvSpPr>
               <p:cNvPr id="7" name="Content Placeholder 3">
@@ -18967,7 +12683,7 @@
             </p:txBody>
           </p:sp>
         </mc:Choice>
-        <mc:Fallback>
+        <mc:Fallback xmlns="">
           <p:sp>
             <p:nvSpPr>
               <p:cNvPr id="7" name="Content Placeholder 3">
@@ -19461,8 +13177,8 @@
           </a:p>
         </p:txBody>
       </p:sp>
-      <mc:AlternateContent xmlns:mc="http://schemas.openxmlformats.org/markup-compatibility/2006">
-        <mc:Choice xmlns:a14="http://schemas.microsoft.com/office/drawing/2010/main" Requires="a14">
+      <mc:AlternateContent xmlns:mc="http://schemas.openxmlformats.org/markup-compatibility/2006" xmlns:a14="http://schemas.microsoft.com/office/drawing/2010/main">
+        <mc:Choice Requires="a14">
           <p:sp>
             <p:nvSpPr>
               <p:cNvPr id="3" name="Content Placeholder 2"/>
@@ -19586,13 +13302,7 @@
                       <a:rPr>
                         <a:latin typeface="Cambria Math" panose="02040503050406030204" pitchFamily="18" charset="0"/>
                       </a:rPr>
-                      <m:t>=</m:t>
-                    </m:r>
-                    <m:r>
-                      <a:rPr>
-                        <a:latin typeface="Cambria Math" panose="02040503050406030204" pitchFamily="18" charset="0"/>
-                      </a:rPr>
-                      <m:t>0</m:t>
+                      <m:t>=0</m:t>
                     </m:r>
                   </m:oMath>
                 </a14:m>
@@ -19686,13 +13396,7 @@
                       <a:rPr>
                         <a:latin typeface="Cambria Math" panose="02040503050406030204" pitchFamily="18" charset="0"/>
                       </a:rPr>
-                      <m:t>≠</m:t>
-                    </m:r>
-                    <m:r>
-                      <a:rPr>
-                        <a:latin typeface="Cambria Math" panose="02040503050406030204" pitchFamily="18" charset="0"/>
-                      </a:rPr>
-                      <m:t>0</m:t>
+                      <m:t>≠0</m:t>
                     </m:r>
                   </m:oMath>
                 </a14:m>
@@ -19718,7 +13422,7 @@
             </p:txBody>
           </p:sp>
         </mc:Choice>
-        <mc:Fallback>
+        <mc:Fallback xmlns="">
           <p:sp>
             <p:nvSpPr>
               <p:cNvPr id="3" name="Content Placeholder 2"/>
@@ -20044,8 +13748,8 @@
           </a:p>
         </p:txBody>
       </p:sp>
-      <mc:AlternateContent xmlns:mc="http://schemas.openxmlformats.org/markup-compatibility/2006">
-        <mc:Choice xmlns:a14="http://schemas.microsoft.com/office/drawing/2010/main" Requires="a14">
+      <mc:AlternateContent xmlns:mc="http://schemas.openxmlformats.org/markup-compatibility/2006" xmlns:a14="http://schemas.microsoft.com/office/drawing/2010/main">
+        <mc:Choice Requires="a14">
           <p:sp>
             <p:nvSpPr>
               <p:cNvPr id="3" name="Content Placeholder 2"/>
@@ -20164,7 +13868,7 @@
             </p:txBody>
           </p:sp>
         </mc:Choice>
-        <mc:Fallback>
+        <mc:Fallback xmlns="">
           <p:sp>
             <p:nvSpPr>
               <p:cNvPr id="3" name="Content Placeholder 2"/>
@@ -21110,10 +14814,28 @@
                 </a:solidFill>
                 <a:latin typeface="LatinModernMath-Regular-Identity-H"/>
               </a:rPr>
-              <a:t>𝘏𝟣 </a:t>
+              <a:t>𝘏</a:t>
+            </a:r>
+            <a:r>
+              <a:rPr lang="en-GB" sz="1600" b="0" i="1" u="none" strike="noStrike" baseline="-25000" dirty="0">
+                <a:solidFill>
+                  <a:srgbClr val="2C3E50"/>
+                </a:solidFill>
+                <a:latin typeface="LatinModernMath-Regular-Identity-H"/>
+              </a:rPr>
+              <a:t>𝟣</a:t>
             </a:r>
             <a:r>
               <a:rPr lang="en-GB" sz="1600" b="0" i="0" u="none" strike="noStrike" baseline="0" dirty="0">
+                <a:solidFill>
+                  <a:srgbClr val="2C3E50"/>
+                </a:solidFill>
+                <a:latin typeface="LatinModernMath-Regular-Identity-H"/>
+              </a:rPr>
+              <a:t> </a:t>
+            </a:r>
+            <a:r>
+              <a:rPr lang="en-GB" sz="1600" b="0" i="0" u="none" strike="noStrike" baseline="0">
                 <a:solidFill>
                   <a:srgbClr val="2C3E50"/>
                 </a:solidFill>
@@ -21122,14 +14844,29 @@
               <a:t>or </a:t>
             </a:r>
             <a:r>
-              <a:rPr lang="en-GB" sz="1600" b="0" i="0" u="none" strike="noStrike" baseline="0" dirty="0">
+              <a:rPr lang="en-GB" sz="1600" b="0" i="0" u="none" strike="noStrike" baseline="0">
                 <a:solidFill>
                   <a:srgbClr val="2C3E50"/>
                 </a:solidFill>
                 <a:latin typeface="LatinModernMath-Regular-Identity-H"/>
               </a:rPr>
-              <a:t>𝘏𝘢</a:t>
-            </a:r>
+              <a:t>𝘏</a:t>
+            </a:r>
+            <a:r>
+              <a:rPr lang="en-GB" sz="1600" b="0" i="0" u="none" strike="noStrike" baseline="-25000">
+                <a:solidFill>
+                  <a:srgbClr val="2C3E50"/>
+                </a:solidFill>
+                <a:latin typeface="LatinModernMath-Regular-Identity-H"/>
+              </a:rPr>
+              <a:t>𝘢</a:t>
+            </a:r>
+            <a:endParaRPr lang="en-GB" sz="1600" b="0" i="0" u="none" strike="noStrike" baseline="-25000" dirty="0">
+              <a:solidFill>
+                <a:srgbClr val="2C3E50"/>
+              </a:solidFill>
+              <a:latin typeface="LatinModernMath-Regular-Identity-H"/>
+            </a:endParaRPr>
           </a:p>
           <a:p>
             <a:pPr marL="201168" lvl="1" indent="0">
@@ -21241,13 +14978,13 @@
   <p:clrMapOvr>
     <a:masterClrMapping/>
   </p:clrMapOvr>
-  <mc:AlternateContent xmlns:mc="http://schemas.openxmlformats.org/markup-compatibility/2006">
-    <mc:Choice xmlns:p159="http://schemas.microsoft.com/office/powerpoint/2015/09/main" Requires="p159">
+  <mc:AlternateContent xmlns:mc="http://schemas.openxmlformats.org/markup-compatibility/2006" xmlns:p159="http://schemas.microsoft.com/office/powerpoint/2015/09/main">
+    <mc:Choice Requires="p159">
       <p:transition spd="slow">
         <p159:morph option="byObject"/>
       </p:transition>
     </mc:Choice>
-    <mc:Fallback>
+    <mc:Fallback xmlns="">
       <p:transition spd="slow">
         <p:fade/>
       </p:transition>
@@ -21404,34 +15141,34 @@
           <a:p>
             <a:pPr lvl="1"/>
             <a:r>
+              <a:rPr lang="en-GB" sz="2000" b="1" i="0" u="none" strike="noStrike" baseline="0" dirty="0">
+                <a:solidFill>
+                  <a:srgbClr val="2C3E50"/>
+                </a:solidFill>
+                <a:latin typeface="FiraSans-Book-Identity-H"/>
+              </a:rPr>
+              <a:t>Smaller</a:t>
+            </a:r>
+            <a:r>
               <a:rPr lang="en-GB" sz="2000" b="0" i="0" u="none" strike="noStrike" baseline="0" dirty="0">
                 <a:solidFill>
                   <a:srgbClr val="2C3E50"/>
                 </a:solidFill>
                 <a:latin typeface="FiraSans-Book-Identity-H"/>
               </a:rPr>
-              <a:t>Smaller </a:t>
-            </a:r>
-            <a:r>
-              <a:rPr lang="en-GB" sz="2000" b="0" i="0" u="none" strike="noStrike" baseline="0" dirty="0" err="1">
-                <a:solidFill>
-                  <a:srgbClr val="2C3E50"/>
-                </a:solidFill>
-                <a:latin typeface="FiraSans-Book-Identity-H"/>
-              </a:rPr>
-              <a:t>p-value</a:t>
-            </a:r>
-            <a:r>
-              <a:rPr lang="en-GB" sz="2000" b="0" i="0" u="none" strike="noStrike" baseline="0" dirty="0" err="1">
+              <a:t> p-value </a:t>
+            </a:r>
+            <a:r>
+              <a:rPr lang="en-GB" sz="2000" b="0" i="0" u="none" strike="noStrike" baseline="0" dirty="0">
                 <a:solidFill>
                   <a:srgbClr val="2C3E50"/>
                 </a:solidFill>
                 <a:latin typeface="MSAM10"/>
               </a:rPr>
-              <a:t>⇝</a:t>
-            </a:r>
-            <a:r>
-              <a:rPr lang="en-GB" sz="2000" b="0" i="0" u="none" strike="noStrike" baseline="0" dirty="0" err="1">
+              <a:t>⇝ </a:t>
+            </a:r>
+            <a:r>
+              <a:rPr lang="en-GB" sz="2000" b="1" i="0" u="none" strike="noStrike" baseline="0" dirty="0">
                 <a:solidFill>
                   <a:srgbClr val="2C3E50"/>
                 </a:solidFill>
@@ -21583,13 +15320,13 @@
   <p:clrMapOvr>
     <a:masterClrMapping/>
   </p:clrMapOvr>
-  <mc:AlternateContent xmlns:mc="http://schemas.openxmlformats.org/markup-compatibility/2006">
-    <mc:Choice xmlns:p159="http://schemas.microsoft.com/office/powerpoint/2015/09/main" Requires="p159">
+  <mc:AlternateContent xmlns:mc="http://schemas.openxmlformats.org/markup-compatibility/2006" xmlns:p159="http://schemas.microsoft.com/office/powerpoint/2015/09/main">
+    <mc:Choice Requires="p159">
       <p:transition spd="slow">
         <p159:morph option="byObject"/>
       </p:transition>
     </mc:Choice>
-    <mc:Fallback>
+    <mc:Fallback xmlns="">
       <p:transition spd="slow">
         <p:fade/>
       </p:transition>
@@ -23843,8 +17580,8 @@
           </a:p>
         </p:txBody>
       </p:sp>
-      <mc:AlternateContent xmlns:mc="http://schemas.openxmlformats.org/markup-compatibility/2006">
-        <mc:Choice xmlns:a14="http://schemas.microsoft.com/office/drawing/2010/main" Requires="a14">
+      <mc:AlternateContent xmlns:mc="http://schemas.openxmlformats.org/markup-compatibility/2006" xmlns:a14="http://schemas.microsoft.com/office/drawing/2010/main">
+        <mc:Choice Requires="a14">
           <p:sp>
             <p:nvSpPr>
               <p:cNvPr id="3" name="Content Placeholder 2"/>
@@ -23959,7 +17696,7 @@
             </p:txBody>
           </p:sp>
         </mc:Choice>
-        <mc:Fallback>
+        <mc:Fallback xmlns="">
           <p:sp>
             <p:nvSpPr>
               <p:cNvPr id="3" name="Content Placeholder 2"/>

--- a/Materials/Slides/draft_slides_w5.pptx
+++ b/Materials/Slides/draft_slides_w5.pptx
@@ -139,15 +139,38 @@
 </p:presentation>
 </file>
 
+<file path=ppt/revisionInfo.xml><?xml version="1.0" encoding="utf-8"?>
+<p1510:revInfo xmlns:a="http://schemas.openxmlformats.org/drawingml/2006/main" xmlns:r="http://schemas.openxmlformats.org/officeDocument/2006/relationships" xmlns:p1510="http://schemas.microsoft.com/office/powerpoint/2015/10/main">
+  <p1510:revLst>
+    <p1510:client id="{616F84F0-3EB6-43D9-BDF6-E8FDA7C59EF3}" v="3" dt="2025-12-08T10:22:54.342"/>
+  </p1510:revLst>
+</p1510:revInfo>
+</file>
+
 <file path=ppt/changesInfos/changesInfo1.xml><?xml version="1.0" encoding="utf-8"?>
 <pc:chgInfo xmlns:a="http://schemas.openxmlformats.org/drawingml/2006/main" xmlns:r="http://schemas.openxmlformats.org/officeDocument/2006/relationships" xmlns:ac="http://schemas.microsoft.com/office/drawing/2013/main/command" xmlns:pc="http://schemas.microsoft.com/office/powerpoint/2013/main/command">
   <pc:docChgLst>
     <pc:chgData name="Chris Moreh" userId="17b81281-9f29-44e0-9273-6dadbf6896a2" providerId="ADAL" clId="{BCF66164-2C9C-4B48-AFF3-6B0B0038345A}"/>
     <pc:docChg chg="modSld">
-      <pc:chgData name="Chris Moreh" userId="17b81281-9f29-44e0-9273-6dadbf6896a2" providerId="ADAL" clId="{BCF66164-2C9C-4B48-AFF3-6B0B0038345A}" dt="2025-12-05T14:58:21.277" v="8" actId="6549"/>
+      <pc:chgData name="Chris Moreh" userId="17b81281-9f29-44e0-9273-6dadbf6896a2" providerId="ADAL" clId="{BCF66164-2C9C-4B48-AFF3-6B0B0038345A}" dt="2025-12-08T10:20:54.004" v="11" actId="20577"/>
       <pc:docMkLst>
         <pc:docMk/>
       </pc:docMkLst>
+      <pc:sldChg chg="modSp mod">
+        <pc:chgData name="Chris Moreh" userId="17b81281-9f29-44e0-9273-6dadbf6896a2" providerId="ADAL" clId="{BCF66164-2C9C-4B48-AFF3-6B0B0038345A}" dt="2025-12-08T10:20:54.004" v="11" actId="20577"/>
+        <pc:sldMkLst>
+          <pc:docMk/>
+          <pc:sldMk cId="3814459198" sldId="307"/>
+        </pc:sldMkLst>
+        <pc:spChg chg="mod">
+          <ac:chgData name="Chris Moreh" userId="17b81281-9f29-44e0-9273-6dadbf6896a2" providerId="ADAL" clId="{BCF66164-2C9C-4B48-AFF3-6B0B0038345A}" dt="2025-12-08T10:20:54.004" v="11" actId="20577"/>
+          <ac:spMkLst>
+            <pc:docMk/>
+            <pc:sldMk cId="3814459198" sldId="307"/>
+            <ac:spMk id="6" creationId="{24060982-6EE3-A8F1-75FE-C4BDB2FF3CBE}"/>
+          </ac:spMkLst>
+        </pc:spChg>
+      </pc:sldChg>
       <pc:sldChg chg="modSp mod">
         <pc:chgData name="Chris Moreh" userId="17b81281-9f29-44e0-9273-6dadbf6896a2" providerId="ADAL" clId="{BCF66164-2C9C-4B48-AFF3-6B0B0038345A}" dt="2025-12-05T14:58:21.277" v="8" actId="6549"/>
         <pc:sldMkLst>
@@ -277,7 +300,7 @@
           <a:p>
             <a:fld id="{B03203E3-7C81-41A5-A697-954FF252F964}" type="datetimeFigureOut">
               <a:rPr lang="en-GB" smtClean="0"/>
-              <a:t>05/12/2025</a:t>
+              <a:t>08/12/2025</a:t>
             </a:fld>
             <a:endParaRPr lang="en-GB"/>
           </a:p>
@@ -455,7 +478,7 @@
           <a:p>
             <a:fld id="{00E54BCB-1937-48CE-9F00-49B381FEB4E9}" type="datetimeFigureOut">
               <a:rPr lang="en-GB" smtClean="0"/>
-              <a:t>05/12/2025</a:t>
+              <a:t>08/12/2025</a:t>
             </a:fld>
             <a:endParaRPr lang="en-GB"/>
           </a:p>
@@ -1215,10 +1238,10 @@
           <a:bodyPr/>
           <a:lstStyle/>
           <a:p>
-            <a:r>
-              <a:rPr lang="en-US"/>
-              <a:t>22 October 2024</a:t>
-            </a:r>
+            <a:fld id="{BBC2D0E9-173E-41C0-9D0C-BFCCF1B26BF3}" type="datetime3">
+              <a:rPr lang="en-US" smtClean="0"/>
+              <a:t>8 December 2025</a:t>
+            </a:fld>
             <a:endParaRPr lang="en-GB"/>
           </a:p>
         </p:txBody>
@@ -1930,10 +1953,10 @@
           <a:bodyPr/>
           <a:lstStyle/>
           <a:p>
-            <a:r>
-              <a:rPr lang="en-US"/>
-              <a:t>22 October 2024</a:t>
-            </a:r>
+            <a:fld id="{8B046112-DBC4-4041-9B16-62EEC6F9EBFD}" type="datetime3">
+              <a:rPr lang="en-US" smtClean="0"/>
+              <a:t>8 December 2025</a:t>
+            </a:fld>
             <a:endParaRPr lang="en-GB"/>
           </a:p>
         </p:txBody>
@@ -2054,10 +2077,10 @@
           <a:bodyPr/>
           <a:lstStyle/>
           <a:p>
-            <a:r>
-              <a:rPr lang="en-US"/>
-              <a:t>22 October 2024</a:t>
-            </a:r>
+            <a:fld id="{6C4BB777-8368-44A8-8361-DAFD39A82D81}" type="datetime3">
+              <a:rPr lang="en-US" smtClean="0"/>
+              <a:t>8 December 2025</a:t>
+            </a:fld>
             <a:endParaRPr lang="en-GB" dirty="0"/>
           </a:p>
         </p:txBody>
@@ -2986,10 +3009,10 @@
           <a:bodyPr/>
           <a:lstStyle/>
           <a:p>
-            <a:r>
-              <a:rPr lang="en-US"/>
-              <a:t>22 October 2024</a:t>
-            </a:r>
+            <a:fld id="{DC257CA2-243F-4A3D-83CC-ACEBD9D33988}" type="datetime3">
+              <a:rPr lang="en-US" smtClean="0"/>
+              <a:t>8 December 2025</a:t>
+            </a:fld>
             <a:endParaRPr lang="en-GB" dirty="0"/>
           </a:p>
         </p:txBody>
@@ -4087,10 +4110,10 @@
           <a:bodyPr/>
           <a:lstStyle/>
           <a:p>
-            <a:r>
-              <a:rPr lang="en-US"/>
-              <a:t>22 October 2024</a:t>
-            </a:r>
+            <a:fld id="{7C4A695E-9617-46A3-B2A4-B1515159ECCB}" type="datetime3">
+              <a:rPr lang="en-US" smtClean="0"/>
+              <a:t>8 December 2025</a:t>
+            </a:fld>
             <a:endParaRPr lang="en-GB" dirty="0"/>
           </a:p>
         </p:txBody>
@@ -6475,10 +6498,10 @@
           <a:bodyPr/>
           <a:lstStyle/>
           <a:p>
-            <a:r>
-              <a:rPr lang="en-US"/>
-              <a:t>22 October 2024</a:t>
-            </a:r>
+            <a:fld id="{3FFB5C1E-58EC-4573-8DC8-5E090CCA932A}" type="datetime3">
+              <a:rPr lang="en-US" smtClean="0"/>
+              <a:t>8 December 2025</a:t>
+            </a:fld>
             <a:endParaRPr lang="en-GB"/>
           </a:p>
         </p:txBody>
@@ -6746,10 +6769,10 @@
           <a:bodyPr/>
           <a:lstStyle/>
           <a:p>
-            <a:r>
-              <a:rPr lang="en-US"/>
-              <a:t>22 October 2024</a:t>
-            </a:r>
+            <a:fld id="{9E6D92C9-5601-4E6C-A948-1EA561CFD697}" type="datetime3">
+              <a:rPr lang="en-US" smtClean="0"/>
+              <a:t>8 December 2025</a:t>
+            </a:fld>
             <a:endParaRPr lang="en-GB"/>
           </a:p>
         </p:txBody>
@@ -6910,10 +6933,10 @@
           <a:bodyPr/>
           <a:lstStyle/>
           <a:p>
-            <a:r>
-              <a:rPr lang="en-US"/>
-              <a:t>22 October 2024</a:t>
-            </a:r>
+            <a:fld id="{2AF84E39-C5F7-4614-B180-A2BACFF3BA24}" type="datetime3">
+              <a:rPr lang="en-US" smtClean="0"/>
+              <a:t>8 December 2025</a:t>
+            </a:fld>
             <a:endParaRPr lang="en-GB"/>
           </a:p>
         </p:txBody>
@@ -7583,10 +7606,10 @@
           <a:bodyPr/>
           <a:lstStyle/>
           <a:p>
-            <a:r>
-              <a:rPr lang="en-US"/>
-              <a:t>22 October 2024</a:t>
-            </a:r>
+            <a:fld id="{6154250B-448A-4AED-B8B3-4BDFCDEB8EA3}" type="datetime3">
+              <a:rPr lang="en-US" smtClean="0"/>
+              <a:t>8 December 2025</a:t>
+            </a:fld>
             <a:endParaRPr lang="en-GB" dirty="0"/>
           </a:p>
         </p:txBody>
@@ -7990,10 +8013,10 @@
           <a:bodyPr/>
           <a:lstStyle/>
           <a:p>
-            <a:r>
-              <a:rPr lang="en-US"/>
-              <a:t>22 October 2024</a:t>
-            </a:r>
+            <a:fld id="{37C32826-B67C-4F7A-B125-1998A9078BC3}" type="datetime3">
+              <a:rPr lang="en-US" smtClean="0"/>
+              <a:t>8 December 2025</a:t>
+            </a:fld>
             <a:endParaRPr lang="en-GB"/>
           </a:p>
         </p:txBody>
@@ -8228,10 +8251,10 @@
             </a:lvl1pPr>
           </a:lstStyle>
           <a:p>
-            <a:r>
-              <a:rPr lang="en-US"/>
-              <a:t>22 October 2024</a:t>
-            </a:r>
+            <a:fld id="{C5B692E6-9897-4277-9118-4222602D0EFA}" type="datetime3">
+              <a:rPr lang="en-US" smtClean="0"/>
+              <a:t>8 December 2025</a:t>
+            </a:fld>
             <a:endParaRPr lang="en-GB"/>
           </a:p>
         </p:txBody>
@@ -8620,10 +8643,10 @@
           <a:bodyPr/>
           <a:lstStyle/>
           <a:p>
-            <a:r>
-              <a:rPr lang="en-US"/>
-              <a:t>22 October 2024</a:t>
-            </a:r>
+            <a:fld id="{675D6E00-E271-4660-86A8-FFAB6AA0B697}" type="datetime3">
+              <a:rPr lang="en-US" smtClean="0"/>
+              <a:t>8 December 2025</a:t>
+            </a:fld>
             <a:endParaRPr lang="en-GB"/>
           </a:p>
         </p:txBody>
@@ -9019,10 +9042,10 @@
             </a:lvl1pPr>
           </a:lstStyle>
           <a:p>
-            <a:r>
-              <a:rPr lang="en-US"/>
-              <a:t>22 October 2024</a:t>
-            </a:r>
+            <a:fld id="{4240283F-FE4B-4C6C-94F0-A8E75166B284}" type="datetime3">
+              <a:rPr lang="en-US" smtClean="0"/>
+              <a:t>8 December 2025</a:t>
+            </a:fld>
             <a:endParaRPr lang="en-GB"/>
           </a:p>
         </p:txBody>
@@ -9317,10 +9340,10 @@
           <a:bodyPr/>
           <a:lstStyle/>
           <a:p>
-            <a:r>
-              <a:rPr lang="en-US"/>
-              <a:t>22 October 2024</a:t>
-            </a:r>
+            <a:fld id="{265070D0-C279-483A-BEA1-B506F338A3A6}" type="datetime3">
+              <a:rPr lang="en-US" smtClean="0"/>
+              <a:t>8 December 2025</a:t>
+            </a:fld>
             <a:endParaRPr lang="en-GB"/>
           </a:p>
         </p:txBody>
@@ -9573,10 +9596,10 @@
           <a:bodyPr/>
           <a:lstStyle/>
           <a:p>
-            <a:r>
-              <a:rPr lang="en-US"/>
-              <a:t>22 October 2024</a:t>
-            </a:r>
+            <a:fld id="{A7A3A096-76A2-437B-8225-A90CE2FC85D9}" type="datetime3">
+              <a:rPr lang="en-US" smtClean="0"/>
+              <a:t>8 December 2025</a:t>
+            </a:fld>
             <a:endParaRPr lang="en-GB"/>
           </a:p>
         </p:txBody>
@@ -9971,10 +9994,10 @@
           <a:bodyPr/>
           <a:lstStyle/>
           <a:p>
-            <a:r>
-              <a:rPr lang="en-US"/>
-              <a:t>22 October 2024</a:t>
-            </a:r>
+            <a:fld id="{2636A4D5-9EA8-41C0-B518-42B9F35892D8}" type="datetime3">
+              <a:rPr lang="en-US" smtClean="0"/>
+              <a:t>8 December 2025</a:t>
+            </a:fld>
             <a:endParaRPr lang="en-GB"/>
           </a:p>
         </p:txBody>
@@ -10108,10 +10131,10 @@
           <a:bodyPr/>
           <a:lstStyle/>
           <a:p>
-            <a:r>
-              <a:rPr lang="en-US"/>
-              <a:t>22 October 2024</a:t>
-            </a:r>
+            <a:fld id="{A47891EF-8FAA-41A7-94E7-A8C0B31E1AB1}" type="datetime3">
+              <a:rPr lang="en-US" smtClean="0"/>
+              <a:t>8 December 2025</a:t>
+            </a:fld>
             <a:endParaRPr lang="en-GB"/>
           </a:p>
         </p:txBody>
@@ -10416,10 +10439,10 @@
             </a:lvl1pPr>
           </a:lstStyle>
           <a:p>
-            <a:r>
-              <a:rPr lang="en-US"/>
-              <a:t>22 October 2024</a:t>
-            </a:r>
+            <a:fld id="{EDAA8515-A473-4602-A99A-4C7C8D13F189}" type="datetime3">
+              <a:rPr lang="en-US" smtClean="0"/>
+              <a:t>8 December 2025</a:t>
+            </a:fld>
             <a:endParaRPr lang="en-GB" dirty="0"/>
           </a:p>
         </p:txBody>
@@ -11029,36 +11052,8 @@
           <a:p>
             <a:r>
               <a:rPr lang="en-US"/>
-              <a:t>Comparisons and Associations</a:t>
-            </a:r>
-            <a:endParaRPr lang="en-US" dirty="0"/>
-          </a:p>
-        </p:txBody>
-      </p:sp>
-      <p:sp>
-        <p:nvSpPr>
-          <p:cNvPr id="6" name="Slide Number Placeholder 5"/>
-          <p:cNvSpPr>
-            <a:spLocks noGrp="1"/>
-          </p:cNvSpPr>
-          <p:nvPr>
-            <p:ph type="sldNum" sz="quarter" idx="12"/>
-          </p:nvPr>
-        </p:nvSpPr>
-        <p:spPr/>
-        <p:txBody>
-          <a:bodyPr/>
-          <a:lstStyle/>
-          <a:p>
-            <a:r>
-              <a:rPr lang="en-US" dirty="0"/>
-              <a:t>Slide </a:t>
-            </a:r>
-            <a:fld id="{C5EF2332-01BF-834F-8236-50238282D533}" type="slidenum">
-              <a:rPr lang="en-US" smtClean="0"/>
-              <a:pPr/>
-              <a:t>10</a:t>
-            </a:fld>
+              <a:t>Logistic regression</a:t>
+            </a:r>
             <a:endParaRPr lang="en-US" dirty="0"/>
           </a:p>
         </p:txBody>
@@ -11084,10 +11079,10 @@
           <a:bodyPr/>
           <a:lstStyle/>
           <a:p>
-            <a:r>
-              <a:rPr lang="en-US"/>
-              <a:t>8 October 2024</a:t>
-            </a:r>
+            <a:fld id="{E24B89F0-2C4C-4252-933A-421ED36F5A95}" type="datetime3">
+              <a:rPr lang="en-US" smtClean="0"/>
+              <a:t>8 December 2025</a:t>
+            </a:fld>
             <a:endParaRPr lang="en-GB"/>
           </a:p>
         </p:txBody>
@@ -11671,18 +11666,28 @@
           <a:bodyPr/>
           <a:lstStyle/>
           <a:p>
+            <a:r>
+              <a:rPr lang="en-US"/>
+              <a:t>Logistic regression</a:t>
+            </a:r>
             <a:endParaRPr lang="en-US" dirty="0"/>
           </a:p>
         </p:txBody>
       </p:sp>
       <p:sp>
         <p:nvSpPr>
-          <p:cNvPr id="6" name="Slide Number Placeholder 5"/>
+          <p:cNvPr id="4" name="Date Placeholder 3">
+            <a:extLst>
+              <a:ext uri="{FF2B5EF4-FFF2-40B4-BE49-F238E27FC236}">
+                <a16:creationId xmlns:a16="http://schemas.microsoft.com/office/drawing/2014/main" id="{3A19ABFB-00D4-8573-2D2A-DD68C85114B0}"/>
+              </a:ext>
+            </a:extLst>
+          </p:cNvPr>
           <p:cNvSpPr>
             <a:spLocks noGrp="1"/>
           </p:cNvSpPr>
           <p:nvPr>
-            <p:ph type="sldNum" sz="quarter" idx="12"/>
+            <p:ph type="dt" sz="half" idx="10"/>
           </p:nvPr>
         </p:nvSpPr>
         <p:spPr/>
@@ -11690,16 +11695,11 @@
           <a:bodyPr/>
           <a:lstStyle/>
           <a:p>
-            <a:r>
-              <a:rPr lang="en-US" dirty="0"/>
-              <a:t>Slide </a:t>
-            </a:r>
-            <a:fld id="{C5EF2332-01BF-834F-8236-50238282D533}" type="slidenum">
+            <a:fld id="{03BD19CF-A3E7-4D2F-BC14-9D0D65BFB4AC}" type="datetime3">
               <a:rPr lang="en-US" smtClean="0"/>
-              <a:pPr/>
-              <a:t>11</a:t>
+              <a:t>8 December 2025</a:t>
             </a:fld>
-            <a:endParaRPr lang="en-US" dirty="0"/>
+            <a:endParaRPr lang="en-GB"/>
           </a:p>
         </p:txBody>
       </p:sp>
@@ -12225,34 +12225,10 @@
           <a:bodyPr/>
           <a:lstStyle/>
           <a:p>
-            <a:endParaRPr lang="en-US" dirty="0"/>
-          </a:p>
-        </p:txBody>
-      </p:sp>
-      <p:sp>
-        <p:nvSpPr>
-          <p:cNvPr id="6" name="Slide Number Placeholder 5"/>
-          <p:cNvSpPr>
-            <a:spLocks noGrp="1"/>
-          </p:cNvSpPr>
-          <p:nvPr>
-            <p:ph type="sldNum" sz="quarter" idx="12"/>
-          </p:nvPr>
-        </p:nvSpPr>
-        <p:spPr/>
-        <p:txBody>
-          <a:bodyPr/>
-          <a:lstStyle/>
-          <a:p>
-            <a:r>
-              <a:rPr lang="en-US" dirty="0"/>
-              <a:t>Slide </a:t>
-            </a:r>
-            <a:fld id="{C5EF2332-01BF-834F-8236-50238282D533}" type="slidenum">
-              <a:rPr lang="en-US" smtClean="0"/>
-              <a:pPr/>
-              <a:t>12</a:t>
-            </a:fld>
+            <a:r>
+              <a:rPr lang="en-US"/>
+              <a:t>Logistic regression</a:t>
+            </a:r>
             <a:endParaRPr lang="en-US" dirty="0"/>
           </a:p>
         </p:txBody>
@@ -12728,6 +12704,35 @@
           </p:sp>
         </mc:Fallback>
       </mc:AlternateContent>
+      <p:sp>
+        <p:nvSpPr>
+          <p:cNvPr id="8" name="Date Placeholder 7">
+            <a:extLst>
+              <a:ext uri="{FF2B5EF4-FFF2-40B4-BE49-F238E27FC236}">
+                <a16:creationId xmlns:a16="http://schemas.microsoft.com/office/drawing/2014/main" id="{5109E7E3-17ED-C8A8-DD00-A7F97430CA32}"/>
+              </a:ext>
+            </a:extLst>
+          </p:cNvPr>
+          <p:cNvSpPr>
+            <a:spLocks noGrp="1"/>
+          </p:cNvSpPr>
+          <p:nvPr>
+            <p:ph type="dt" sz="half" idx="10"/>
+          </p:nvPr>
+        </p:nvSpPr>
+        <p:spPr/>
+        <p:txBody>
+          <a:bodyPr/>
+          <a:lstStyle/>
+          <a:p>
+            <a:fld id="{F0C27B17-8055-4347-AD8E-108A9E8532BC}" type="datetime3">
+              <a:rPr lang="en-US" smtClean="0"/>
+              <a:t>8 December 2025</a:t>
+            </a:fld>
+            <a:endParaRPr lang="en-GB"/>
+          </a:p>
+        </p:txBody>
+      </p:sp>
     </p:spTree>
   </p:cSld>
   <p:clrMapOvr>
@@ -13047,34 +13052,10 @@
           <a:bodyPr/>
           <a:lstStyle/>
           <a:p>
-            <a:endParaRPr lang="en-US" dirty="0"/>
-          </a:p>
-        </p:txBody>
-      </p:sp>
-      <p:sp>
-        <p:nvSpPr>
-          <p:cNvPr id="6" name="Slide Number Placeholder 5"/>
-          <p:cNvSpPr>
-            <a:spLocks noGrp="1"/>
-          </p:cNvSpPr>
-          <p:nvPr>
-            <p:ph type="sldNum" sz="quarter" idx="12"/>
-          </p:nvPr>
-        </p:nvSpPr>
-        <p:spPr/>
-        <p:txBody>
-          <a:bodyPr/>
-          <a:lstStyle/>
-          <a:p>
-            <a:r>
-              <a:rPr lang="en-US" dirty="0"/>
-              <a:t>Slide </a:t>
-            </a:r>
-            <a:fld id="{C5EF2332-01BF-834F-8236-50238282D533}" type="slidenum">
-              <a:rPr lang="en-US" smtClean="0"/>
-              <a:pPr/>
-              <a:t>13</a:t>
-            </a:fld>
+            <a:r>
+              <a:rPr lang="en-US"/>
+              <a:t>Logistic regression</a:t>
+            </a:r>
             <a:endParaRPr lang="en-US" dirty="0"/>
           </a:p>
         </p:txBody>
@@ -13109,6 +13090,35 @@
           </a:prstGeom>
         </p:spPr>
       </p:pic>
+      <p:sp>
+        <p:nvSpPr>
+          <p:cNvPr id="4" name="Date Placeholder 3">
+            <a:extLst>
+              <a:ext uri="{FF2B5EF4-FFF2-40B4-BE49-F238E27FC236}">
+                <a16:creationId xmlns:a16="http://schemas.microsoft.com/office/drawing/2014/main" id="{A32882D9-E013-B278-D31D-9B279A2C7292}"/>
+              </a:ext>
+            </a:extLst>
+          </p:cNvPr>
+          <p:cNvSpPr>
+            <a:spLocks noGrp="1"/>
+          </p:cNvSpPr>
+          <p:nvPr>
+            <p:ph type="dt" sz="half" idx="10"/>
+          </p:nvPr>
+        </p:nvSpPr>
+        <p:spPr/>
+        <p:txBody>
+          <a:bodyPr/>
+          <a:lstStyle/>
+          <a:p>
+            <a:fld id="{8570510E-A576-4B79-B251-33C1EDABF978}" type="datetime3">
+              <a:rPr lang="en-US" smtClean="0"/>
+              <a:t>8 December 2025</a:t>
+            </a:fld>
+            <a:endParaRPr lang="en-GB"/>
+          </a:p>
+        </p:txBody>
+      </p:sp>
     </p:spTree>
   </p:cSld>
   <p:clrMapOvr>
@@ -13302,7 +13312,13 @@
                       <a:rPr>
                         <a:latin typeface="Cambria Math" panose="02040503050406030204" pitchFamily="18" charset="0"/>
                       </a:rPr>
-                      <m:t>=0</m:t>
+                      <m:t>=</m:t>
+                    </m:r>
+                    <m:r>
+                      <a:rPr>
+                        <a:latin typeface="Cambria Math" panose="02040503050406030204" pitchFamily="18" charset="0"/>
+                      </a:rPr>
+                      <m:t>0</m:t>
                     </m:r>
                   </m:oMath>
                 </a14:m>
@@ -13396,7 +13412,13 @@
                       <a:rPr>
                         <a:latin typeface="Cambria Math" panose="02040503050406030204" pitchFamily="18" charset="0"/>
                       </a:rPr>
-                      <m:t>≠0</m:t>
+                      <m:t>≠</m:t>
+                    </m:r>
+                    <m:r>
+                      <a:rPr>
+                        <a:latin typeface="Cambria Math" panose="02040503050406030204" pitchFamily="18" charset="0"/>
+                      </a:rPr>
+                      <m:t>0</m:t>
                     </m:r>
                   </m:oMath>
                 </a14:m>
@@ -13471,18 +13493,28 @@
           <a:bodyPr/>
           <a:lstStyle/>
           <a:p>
+            <a:r>
+              <a:rPr lang="en-US"/>
+              <a:t>Logistic regression</a:t>
+            </a:r>
             <a:endParaRPr lang="en-US" dirty="0"/>
           </a:p>
         </p:txBody>
       </p:sp>
       <p:sp>
         <p:nvSpPr>
-          <p:cNvPr id="6" name="Slide Number Placeholder 5"/>
+          <p:cNvPr id="4" name="Date Placeholder 3">
+            <a:extLst>
+              <a:ext uri="{FF2B5EF4-FFF2-40B4-BE49-F238E27FC236}">
+                <a16:creationId xmlns:a16="http://schemas.microsoft.com/office/drawing/2014/main" id="{BBD5DE1F-86D8-D8E5-4DE8-B767915E7DF5}"/>
+              </a:ext>
+            </a:extLst>
+          </p:cNvPr>
           <p:cNvSpPr>
             <a:spLocks noGrp="1"/>
           </p:cNvSpPr>
           <p:nvPr>
-            <p:ph type="sldNum" sz="quarter" idx="12"/>
+            <p:ph type="dt" sz="half" idx="10"/>
           </p:nvPr>
         </p:nvSpPr>
         <p:spPr/>
@@ -13490,16 +13522,11 @@
           <a:bodyPr/>
           <a:lstStyle/>
           <a:p>
-            <a:r>
-              <a:rPr lang="en-US" dirty="0"/>
-              <a:t>Slide </a:t>
-            </a:r>
-            <a:fld id="{C5EF2332-01BF-834F-8236-50238282D533}" type="slidenum">
+            <a:fld id="{DDF74ED7-A261-4225-AAA6-DDD94AF14607}" type="datetime3">
               <a:rPr lang="en-US" smtClean="0"/>
-              <a:pPr/>
-              <a:t>14</a:t>
+              <a:t>8 December 2025</a:t>
             </a:fld>
-            <a:endParaRPr lang="en-US" dirty="0"/>
+            <a:endParaRPr lang="en-GB"/>
           </a:p>
         </p:txBody>
       </p:sp>
@@ -13917,18 +13944,28 @@
           <a:bodyPr/>
           <a:lstStyle/>
           <a:p>
+            <a:r>
+              <a:rPr lang="en-US"/>
+              <a:t>Logistic regression</a:t>
+            </a:r>
             <a:endParaRPr lang="en-US" dirty="0"/>
           </a:p>
         </p:txBody>
       </p:sp>
       <p:sp>
         <p:nvSpPr>
-          <p:cNvPr id="6" name="Slide Number Placeholder 5"/>
+          <p:cNvPr id="4" name="Date Placeholder 3">
+            <a:extLst>
+              <a:ext uri="{FF2B5EF4-FFF2-40B4-BE49-F238E27FC236}">
+                <a16:creationId xmlns:a16="http://schemas.microsoft.com/office/drawing/2014/main" id="{1D79B49F-A0A0-C054-8EB5-0A18CF273140}"/>
+              </a:ext>
+            </a:extLst>
+          </p:cNvPr>
           <p:cNvSpPr>
             <a:spLocks noGrp="1"/>
           </p:cNvSpPr>
           <p:nvPr>
-            <p:ph type="sldNum" sz="quarter" idx="12"/>
+            <p:ph type="dt" sz="half" idx="10"/>
           </p:nvPr>
         </p:nvSpPr>
         <p:spPr/>
@@ -13936,16 +13973,11 @@
           <a:bodyPr/>
           <a:lstStyle/>
           <a:p>
-            <a:r>
-              <a:rPr lang="en-US" dirty="0"/>
-              <a:t>Slide </a:t>
-            </a:r>
-            <a:fld id="{C5EF2332-01BF-834F-8236-50238282D533}" type="slidenum">
+            <a:fld id="{1CFF103C-3C79-4625-A9BF-A11EB2FDA96A}" type="datetime3">
               <a:rPr lang="en-US" smtClean="0"/>
-              <a:pPr/>
-              <a:t>15</a:t>
+              <a:t>8 December 2025</a:t>
             </a:fld>
-            <a:endParaRPr lang="en-US" dirty="0"/>
+            <a:endParaRPr lang="en-GB"/>
           </a:p>
         </p:txBody>
       </p:sp>
@@ -14468,10 +14500,10 @@
           <a:bodyPr/>
           <a:lstStyle/>
           <a:p>
-            <a:r>
-              <a:rPr lang="en-US"/>
-              <a:t>22 October 2024</a:t>
-            </a:r>
+            <a:fld id="{5D8C7395-24BC-4F02-8824-B71AD77D0871}" type="datetime3">
+              <a:rPr lang="en-US" smtClean="0"/>
+              <a:t>8 December 2025</a:t>
+            </a:fld>
             <a:endParaRPr lang="en-GB"/>
           </a:p>
         </p:txBody>
@@ -14931,10 +14963,10 @@
           <a:bodyPr/>
           <a:lstStyle/>
           <a:p>
-            <a:r>
-              <a:rPr lang="en-US"/>
-              <a:t>22 October 2024</a:t>
-            </a:r>
+            <a:fld id="{B07F7D13-F784-46E4-9D82-CE1E601FB7DA}" type="datetime3">
+              <a:rPr lang="en-US" smtClean="0"/>
+              <a:t>8 December 2025</a:t>
+            </a:fld>
             <a:endParaRPr lang="en-GB"/>
           </a:p>
         </p:txBody>
@@ -15273,10 +15305,10 @@
           <a:bodyPr/>
           <a:lstStyle/>
           <a:p>
-            <a:r>
-              <a:rPr lang="en-US"/>
-              <a:t>22 October 2024</a:t>
-            </a:r>
+            <a:fld id="{0C470E00-5448-4EDF-A1D1-0EB766E7A4CF}" type="datetime3">
+              <a:rPr lang="en-US" smtClean="0"/>
+              <a:t>8 December 2025</a:t>
+            </a:fld>
             <a:endParaRPr lang="en-GB"/>
           </a:p>
         </p:txBody>
@@ -15373,10 +15405,10 @@
           <a:bodyPr/>
           <a:lstStyle/>
           <a:p>
-            <a:r>
-              <a:rPr lang="en-US"/>
-              <a:t>22 October 2024</a:t>
-            </a:r>
+            <a:fld id="{608A77B8-5DDF-478C-AC0A-E0DD8B50B745}" type="datetime3">
+              <a:rPr lang="en-US" smtClean="0"/>
+              <a:t>8 December 2025</a:t>
+            </a:fld>
             <a:endParaRPr lang="en-GB"/>
           </a:p>
         </p:txBody>
@@ -15474,7 +15506,7 @@
           <a:p>
             <a:r>
               <a:rPr lang="en-GB" sz="6000" b="1" dirty="0"/>
-              <a:t>Week 6</a:t>
+              <a:t>Week 11</a:t>
             </a:r>
           </a:p>
         </p:txBody>
@@ -15535,11 +15567,11 @@
           <a:bodyPr/>
           <a:lstStyle/>
           <a:p>
-            <a:r>
-              <a:rPr lang="en-US"/>
-              <a:t>22 October 2024</a:t>
-            </a:r>
-            <a:endParaRPr lang="en-GB"/>
+            <a:fld id="{249EE084-490D-4CAB-BF9E-8B5A5A160BC0}" type="datetime3">
+              <a:rPr lang="en-US" smtClean="0"/>
+              <a:t>8 December 2025</a:t>
+            </a:fld>
+            <a:endParaRPr lang="en-GB" dirty="0"/>
           </a:p>
         </p:txBody>
       </p:sp>
@@ -15565,7 +15597,7 @@
           <a:lstStyle/>
           <a:p>
             <a:r>
-              <a:rPr lang="en-GB"/>
+              <a:rPr lang="en-GB" dirty="0"/>
               <a:t>Logistic regression</a:t>
             </a:r>
           </a:p>
@@ -15808,18 +15840,28 @@
           <a:bodyPr/>
           <a:lstStyle/>
           <a:p>
+            <a:r>
+              <a:rPr lang="en-US"/>
+              <a:t>Logistic regression</a:t>
+            </a:r>
             <a:endParaRPr lang="en-US" dirty="0"/>
           </a:p>
         </p:txBody>
       </p:sp>
       <p:sp>
         <p:nvSpPr>
-          <p:cNvPr id="6" name="Slide Number Placeholder 5"/>
+          <p:cNvPr id="4" name="Date Placeholder 3">
+            <a:extLst>
+              <a:ext uri="{FF2B5EF4-FFF2-40B4-BE49-F238E27FC236}">
+                <a16:creationId xmlns:a16="http://schemas.microsoft.com/office/drawing/2014/main" id="{5FCCC446-DA37-0BE6-3A13-40E9B1708F7A}"/>
+              </a:ext>
+            </a:extLst>
+          </p:cNvPr>
           <p:cNvSpPr>
             <a:spLocks noGrp="1"/>
           </p:cNvSpPr>
           <p:nvPr>
-            <p:ph type="sldNum" sz="quarter" idx="12"/>
+            <p:ph type="dt" sz="half" idx="10"/>
           </p:nvPr>
         </p:nvSpPr>
         <p:spPr/>
@@ -15827,16 +15869,11 @@
           <a:bodyPr/>
           <a:lstStyle/>
           <a:p>
-            <a:r>
-              <a:rPr lang="en-US" dirty="0"/>
-              <a:t>Slide </a:t>
-            </a:r>
-            <a:fld id="{C5EF2332-01BF-834F-8236-50238282D533}" type="slidenum">
+            <a:fld id="{332C94FE-5F72-4ACE-BC7F-0C539930116A}" type="datetime3">
               <a:rPr lang="en-US" smtClean="0"/>
-              <a:pPr/>
-              <a:t>3</a:t>
+              <a:t>8 December 2025</a:t>
             </a:fld>
-            <a:endParaRPr lang="en-US" dirty="0"/>
+            <a:endParaRPr lang="en-GB"/>
           </a:p>
         </p:txBody>
       </p:sp>
@@ -16352,41 +16389,10 @@
           <a:bodyPr/>
           <a:lstStyle/>
           <a:p>
-            <a:endParaRPr lang="en-GB"/>
-          </a:p>
-        </p:txBody>
-      </p:sp>
-      <p:sp>
-        <p:nvSpPr>
-          <p:cNvPr id="5" name="Slide Number Placeholder 8">
-            <a:extLst>
-              <a:ext uri="{FF2B5EF4-FFF2-40B4-BE49-F238E27FC236}">
-                <a16:creationId xmlns:a16="http://schemas.microsoft.com/office/drawing/2014/main" id="{CC8FF6EA-8682-2BC8-E9B8-C6157593BBD6}"/>
-              </a:ext>
-            </a:extLst>
-          </p:cNvPr>
-          <p:cNvSpPr>
-            <a:spLocks noGrp="1"/>
-          </p:cNvSpPr>
-          <p:nvPr>
-            <p:ph type="sldNum" sz="quarter" idx="12"/>
-          </p:nvPr>
-        </p:nvSpPr>
-        <p:spPr/>
-        <p:txBody>
-          <a:bodyPr/>
-          <a:lstStyle/>
-          <a:p>
-            <a:r>
-              <a:rPr lang="en-US" dirty="0"/>
-              <a:t>Slide </a:t>
-            </a:r>
-            <a:fld id="{C5EF2332-01BF-834F-8236-50238282D533}" type="slidenum">
-              <a:rPr lang="en-US" smtClean="0"/>
-              <a:pPr/>
-              <a:t>4</a:t>
-            </a:fld>
-            <a:endParaRPr lang="en-US" dirty="0"/>
+            <a:r>
+              <a:rPr lang="en-GB"/>
+              <a:t>Logistic regression</a:t>
+            </a:r>
           </a:p>
         </p:txBody>
       </p:sp>
@@ -16420,6 +16426,35 @@
           </a:ln>
         </p:spPr>
       </p:pic>
+      <p:sp>
+        <p:nvSpPr>
+          <p:cNvPr id="7" name="Date Placeholder 6">
+            <a:extLst>
+              <a:ext uri="{FF2B5EF4-FFF2-40B4-BE49-F238E27FC236}">
+                <a16:creationId xmlns:a16="http://schemas.microsoft.com/office/drawing/2014/main" id="{C43EB8DB-C8B6-ED22-46AA-25E1A221BE6E}"/>
+              </a:ext>
+            </a:extLst>
+          </p:cNvPr>
+          <p:cNvSpPr>
+            <a:spLocks noGrp="1"/>
+          </p:cNvSpPr>
+          <p:nvPr>
+            <p:ph type="dt" sz="half" idx="10"/>
+          </p:nvPr>
+        </p:nvSpPr>
+        <p:spPr/>
+        <p:txBody>
+          <a:bodyPr/>
+          <a:lstStyle/>
+          <a:p>
+            <a:fld id="{1AFEB96C-3C18-47AF-AD00-269380805C02}" type="datetime3">
+              <a:rPr lang="en-US" smtClean="0"/>
+              <a:t>8 December 2025</a:t>
+            </a:fld>
+            <a:endParaRPr lang="en-GB"/>
+          </a:p>
+        </p:txBody>
+      </p:sp>
     </p:spTree>
   </p:cSld>
   <p:clrMapOvr>
@@ -16642,41 +16677,10 @@
           <a:bodyPr/>
           <a:lstStyle/>
           <a:p>
-            <a:endParaRPr lang="en-GB"/>
-          </a:p>
-        </p:txBody>
-      </p:sp>
-      <p:sp>
-        <p:nvSpPr>
-          <p:cNvPr id="5" name="Slide Number Placeholder 8">
-            <a:extLst>
-              <a:ext uri="{FF2B5EF4-FFF2-40B4-BE49-F238E27FC236}">
-                <a16:creationId xmlns:a16="http://schemas.microsoft.com/office/drawing/2014/main" id="{CC8FF6EA-8682-2BC8-E9B8-C6157593BBD6}"/>
-              </a:ext>
-            </a:extLst>
-          </p:cNvPr>
-          <p:cNvSpPr>
-            <a:spLocks noGrp="1"/>
-          </p:cNvSpPr>
-          <p:nvPr>
-            <p:ph type="sldNum" sz="quarter" idx="12"/>
-          </p:nvPr>
-        </p:nvSpPr>
-        <p:spPr/>
-        <p:txBody>
-          <a:bodyPr/>
-          <a:lstStyle/>
-          <a:p>
-            <a:r>
-              <a:rPr lang="en-US" dirty="0"/>
-              <a:t>Slide </a:t>
-            </a:r>
-            <a:fld id="{C5EF2332-01BF-834F-8236-50238282D533}" type="slidenum">
-              <a:rPr lang="en-US" smtClean="0"/>
-              <a:pPr/>
-              <a:t>5</a:t>
-            </a:fld>
-            <a:endParaRPr lang="en-US" dirty="0"/>
+            <a:r>
+              <a:rPr lang="en-GB"/>
+              <a:t>Logistic regression</a:t>
+            </a:r>
           </a:p>
         </p:txBody>
       </p:sp>
@@ -16710,6 +16714,35 @@
           </a:ln>
         </p:spPr>
       </p:pic>
+      <p:sp>
+        <p:nvSpPr>
+          <p:cNvPr id="7" name="Date Placeholder 6">
+            <a:extLst>
+              <a:ext uri="{FF2B5EF4-FFF2-40B4-BE49-F238E27FC236}">
+                <a16:creationId xmlns:a16="http://schemas.microsoft.com/office/drawing/2014/main" id="{652123C4-4965-FB20-3053-A41247C6D5D1}"/>
+              </a:ext>
+            </a:extLst>
+          </p:cNvPr>
+          <p:cNvSpPr>
+            <a:spLocks noGrp="1"/>
+          </p:cNvSpPr>
+          <p:nvPr>
+            <p:ph type="dt" sz="half" idx="10"/>
+          </p:nvPr>
+        </p:nvSpPr>
+        <p:spPr/>
+        <p:txBody>
+          <a:bodyPr/>
+          <a:lstStyle/>
+          <a:p>
+            <a:fld id="{5606760B-3EB7-49C9-B5A5-FF2D9F164106}" type="datetime3">
+              <a:rPr lang="en-US" smtClean="0"/>
+              <a:t>8 December 2025</a:t>
+            </a:fld>
+            <a:endParaRPr lang="en-GB"/>
+          </a:p>
+        </p:txBody>
+      </p:sp>
     </p:spTree>
   </p:cSld>
   <p:clrMapOvr>
@@ -16977,18 +17010,28 @@
           <a:bodyPr/>
           <a:lstStyle/>
           <a:p>
+            <a:r>
+              <a:rPr lang="en-US"/>
+              <a:t>Logistic regression</a:t>
+            </a:r>
             <a:endParaRPr lang="en-US" dirty="0"/>
           </a:p>
         </p:txBody>
       </p:sp>
       <p:sp>
         <p:nvSpPr>
-          <p:cNvPr id="6" name="Slide Number Placeholder 5"/>
+          <p:cNvPr id="4" name="Date Placeholder 3">
+            <a:extLst>
+              <a:ext uri="{FF2B5EF4-FFF2-40B4-BE49-F238E27FC236}">
+                <a16:creationId xmlns:a16="http://schemas.microsoft.com/office/drawing/2014/main" id="{842BBDD3-7C7C-8496-FC64-4DC890AB54B5}"/>
+              </a:ext>
+            </a:extLst>
+          </p:cNvPr>
           <p:cNvSpPr>
             <a:spLocks noGrp="1"/>
           </p:cNvSpPr>
           <p:nvPr>
-            <p:ph type="sldNum" sz="quarter" idx="12"/>
+            <p:ph type="dt" sz="half" idx="10"/>
           </p:nvPr>
         </p:nvSpPr>
         <p:spPr/>
@@ -16996,16 +17039,11 @@
           <a:bodyPr/>
           <a:lstStyle/>
           <a:p>
-            <a:r>
-              <a:rPr lang="en-US" dirty="0"/>
-              <a:t>Slide </a:t>
-            </a:r>
-            <a:fld id="{C5EF2332-01BF-834F-8236-50238282D533}" type="slidenum">
+            <a:fld id="{0C1EE021-C11B-490B-8907-90EC6FDEA306}" type="datetime3">
               <a:rPr lang="en-US" smtClean="0"/>
-              <a:pPr/>
-              <a:t>6</a:t>
+              <a:t>8 December 2025</a:t>
             </a:fld>
-            <a:endParaRPr lang="en-US" dirty="0"/>
+            <a:endParaRPr lang="en-GB"/>
           </a:p>
         </p:txBody>
       </p:sp>
@@ -17349,18 +17387,28 @@
           <a:bodyPr/>
           <a:lstStyle/>
           <a:p>
+            <a:r>
+              <a:rPr lang="en-US"/>
+              <a:t>Logistic regression</a:t>
+            </a:r>
             <a:endParaRPr lang="en-US" dirty="0"/>
           </a:p>
         </p:txBody>
       </p:sp>
       <p:sp>
         <p:nvSpPr>
-          <p:cNvPr id="6" name="Slide Number Placeholder 5"/>
+          <p:cNvPr id="4" name="Date Placeholder 3">
+            <a:extLst>
+              <a:ext uri="{FF2B5EF4-FFF2-40B4-BE49-F238E27FC236}">
+                <a16:creationId xmlns:a16="http://schemas.microsoft.com/office/drawing/2014/main" id="{848C1A6C-A5BB-2A5D-56CB-74E6A50262D9}"/>
+              </a:ext>
+            </a:extLst>
+          </p:cNvPr>
           <p:cNvSpPr>
             <a:spLocks noGrp="1"/>
           </p:cNvSpPr>
           <p:nvPr>
-            <p:ph type="sldNum" sz="quarter" idx="12"/>
+            <p:ph type="dt" sz="half" idx="10"/>
           </p:nvPr>
         </p:nvSpPr>
         <p:spPr/>
@@ -17368,16 +17416,11 @@
           <a:bodyPr/>
           <a:lstStyle/>
           <a:p>
-            <a:r>
-              <a:rPr lang="en-US" dirty="0"/>
-              <a:t>Slide </a:t>
-            </a:r>
-            <a:fld id="{C5EF2332-01BF-834F-8236-50238282D533}" type="slidenum">
+            <a:fld id="{0B977BBE-3CEF-4E54-A451-F8B015291E68}" type="datetime3">
               <a:rPr lang="en-US" smtClean="0"/>
-              <a:pPr/>
-              <a:t>7</a:t>
+              <a:t>8 December 2025</a:t>
             </a:fld>
-            <a:endParaRPr lang="en-US" dirty="0"/>
+            <a:endParaRPr lang="en-GB"/>
           </a:p>
         </p:txBody>
       </p:sp>
@@ -17749,18 +17792,28 @@
           <a:bodyPr/>
           <a:lstStyle/>
           <a:p>
+            <a:r>
+              <a:rPr lang="en-US"/>
+              <a:t>Logistic regression</a:t>
+            </a:r>
             <a:endParaRPr lang="en-US" dirty="0"/>
           </a:p>
         </p:txBody>
       </p:sp>
       <p:sp>
         <p:nvSpPr>
-          <p:cNvPr id="6" name="Slide Number Placeholder 5"/>
+          <p:cNvPr id="4" name="Date Placeholder 3">
+            <a:extLst>
+              <a:ext uri="{FF2B5EF4-FFF2-40B4-BE49-F238E27FC236}">
+                <a16:creationId xmlns:a16="http://schemas.microsoft.com/office/drawing/2014/main" id="{A12E9E6D-F66B-5A6D-6273-ADFFE8BD4C12}"/>
+              </a:ext>
+            </a:extLst>
+          </p:cNvPr>
           <p:cNvSpPr>
             <a:spLocks noGrp="1"/>
           </p:cNvSpPr>
           <p:nvPr>
-            <p:ph type="sldNum" sz="quarter" idx="12"/>
+            <p:ph type="dt" sz="half" idx="10"/>
           </p:nvPr>
         </p:nvSpPr>
         <p:spPr/>
@@ -17768,16 +17821,11 @@
           <a:bodyPr/>
           <a:lstStyle/>
           <a:p>
-            <a:r>
-              <a:rPr lang="en-US" dirty="0"/>
-              <a:t>Slide </a:t>
-            </a:r>
-            <a:fld id="{C5EF2332-01BF-834F-8236-50238282D533}" type="slidenum">
+            <a:fld id="{B82B83E6-81A2-4940-A71A-F37972B7C3A7}" type="datetime3">
               <a:rPr lang="en-US" smtClean="0"/>
-              <a:pPr/>
-              <a:t>8</a:t>
+              <a:t>8 December 2025</a:t>
             </a:fld>
-            <a:endParaRPr lang="en-US" dirty="0"/>
+            <a:endParaRPr lang="en-GB"/>
           </a:p>
         </p:txBody>
       </p:sp>
@@ -18011,36 +18059,8 @@
           <a:p>
             <a:r>
               <a:rPr lang="en-US"/>
-              <a:t>Comparisons and Associations</a:t>
-            </a:r>
-            <a:endParaRPr lang="en-US" dirty="0"/>
-          </a:p>
-        </p:txBody>
-      </p:sp>
-      <p:sp>
-        <p:nvSpPr>
-          <p:cNvPr id="6" name="Slide Number Placeholder 5"/>
-          <p:cNvSpPr>
-            <a:spLocks noGrp="1"/>
-          </p:cNvSpPr>
-          <p:nvPr>
-            <p:ph type="sldNum" sz="quarter" idx="12"/>
-          </p:nvPr>
-        </p:nvSpPr>
-        <p:spPr/>
-        <p:txBody>
-          <a:bodyPr/>
-          <a:lstStyle/>
-          <a:p>
-            <a:r>
-              <a:rPr lang="en-US" dirty="0"/>
-              <a:t>Slide </a:t>
-            </a:r>
-            <a:fld id="{C5EF2332-01BF-834F-8236-50238282D533}" type="slidenum">
-              <a:rPr lang="en-US" smtClean="0"/>
-              <a:pPr/>
-              <a:t>9</a:t>
-            </a:fld>
+              <a:t>Logistic regression</a:t>
+            </a:r>
             <a:endParaRPr lang="en-US" dirty="0"/>
           </a:p>
         </p:txBody>
@@ -18066,10 +18086,10 @@
           <a:bodyPr/>
           <a:lstStyle/>
           <a:p>
-            <a:r>
-              <a:rPr lang="en-US"/>
-              <a:t>8 October 2024</a:t>
-            </a:r>
+            <a:fld id="{DD79C005-4ACE-4016-AEB2-2CEE1BA467DA}" type="datetime3">
+              <a:rPr lang="en-US" smtClean="0"/>
+              <a:t>8 December 2025</a:t>
+            </a:fld>
             <a:endParaRPr lang="en-GB"/>
           </a:p>
         </p:txBody>
